--- a/public/documents/countries/usa.pptx
+++ b/public/documents/countries/usa.pptx
@@ -117,7 +117,7 @@
 </p:presentation>
 </file>
 
-<file path=ppt/charts/chart28.xml><?xml version="1.0" encoding="utf-8"?>
+<file path=ppt/charts/chart7.xml><?xml version="1.0" encoding="utf-8"?>
 <c:chartSpace xmlns:c="http://schemas.openxmlformats.org/drawingml/2006/chart" xmlns:a="http://schemas.openxmlformats.org/drawingml/2006/main" xmlns:r="http://schemas.openxmlformats.org/officeDocument/2006/relationships">
   <c:date1904 val="0"/>
   <c:roundedCorners val="1"/>
@@ -362,7 +362,7 @@
 </c:chartSpace>
 </file>
 
-<file path=ppt/charts/chart29.xml><?xml version="1.0" encoding="utf-8"?>
+<file path=ppt/charts/chart8.xml><?xml version="1.0" encoding="utf-8"?>
 <c:chartSpace xmlns:c="http://schemas.openxmlformats.org/drawingml/2006/chart" xmlns:a="http://schemas.openxmlformats.org/drawingml/2006/main" xmlns:r="http://schemas.openxmlformats.org/officeDocument/2006/relationships">
   <c:date1904 val="0"/>
   <c:roundedCorners val="1"/>
@@ -670,7 +670,7 @@
 </c:chartSpace>
 </file>
 
-<file path=ppt/charts/chart30.xml><?xml version="1.0" encoding="utf-8"?>
+<file path=ppt/charts/chart9.xml><?xml version="1.0" encoding="utf-8"?>
 <c:chartSpace xmlns:c="http://schemas.openxmlformats.org/drawingml/2006/chart" xmlns:a="http://schemas.openxmlformats.org/drawingml/2006/main" xmlns:r="http://schemas.openxmlformats.org/officeDocument/2006/relationships">
   <c:date1904 val="0"/>
   <c:roundedCorners val="1"/>
@@ -3360,7 +3360,7 @@
                 <a:ea typeface="Calibri" pitchFamily="34" charset="-122"/>
                 <a:cs typeface="Calibri" pitchFamily="34" charset="-120"/>
               </a:rPr>
-              <a:t>Acrylamide analysis (Polymex laboratory, ISO 9001) and REACH / SVHC screening (SGS) are available on request, along with the current SOHISCERT certificate.</a:t>
+              <a:t>Acrylamide analysis (Polymex laboratory, ISO 9001, content below 3.0 µg/g), REACH / SVHC screening (SGS) and the SOHISCERT certificate valid to 4 September 2027 are all available on request.</a:t>
             </a:r>
             <a:endParaRPr lang="en-US" sz="1100" dirty="0"/>
           </a:p>

--- a/public/documents/countries/usa.pptx
+++ b/public/documents/countries/usa.pptx
@@ -117,7 +117,7 @@
 </p:presentation>
 </file>
 
-<file path=ppt/charts/chart7.xml><?xml version="1.0" encoding="utf-8"?>
+<file path=ppt/charts/chart31.xml><?xml version="1.0" encoding="utf-8"?>
 <c:chartSpace xmlns:c="http://schemas.openxmlformats.org/drawingml/2006/chart" xmlns:a="http://schemas.openxmlformats.org/drawingml/2006/main" xmlns:r="http://schemas.openxmlformats.org/officeDocument/2006/relationships">
   <c:date1904 val="0"/>
   <c:roundedCorners val="1"/>
@@ -362,7 +362,7 @@
 </c:chartSpace>
 </file>
 
-<file path=ppt/charts/chart8.xml><?xml version="1.0" encoding="utf-8"?>
+<file path=ppt/charts/chart32.xml><?xml version="1.0" encoding="utf-8"?>
 <c:chartSpace xmlns:c="http://schemas.openxmlformats.org/drawingml/2006/chart" xmlns:a="http://schemas.openxmlformats.org/drawingml/2006/main" xmlns:r="http://schemas.openxmlformats.org/officeDocument/2006/relationships">
   <c:date1904 val="0"/>
   <c:roundedCorners val="1"/>
@@ -670,7 +670,7 @@
 </c:chartSpace>
 </file>
 
-<file path=ppt/charts/chart9.xml><?xml version="1.0" encoding="utf-8"?>
+<file path=ppt/charts/chart33.xml><?xml version="1.0" encoding="utf-8"?>
 <c:chartSpace xmlns:c="http://schemas.openxmlformats.org/drawingml/2006/chart" xmlns:a="http://schemas.openxmlformats.org/drawingml/2006/main" xmlns:r="http://schemas.openxmlformats.org/officeDocument/2006/relationships">
   <c:date1904 val="0"/>
   <c:roundedCorners val="1"/>
@@ -2650,6 +2650,13 @@
 <file path=ppt/slides/slide1.xml><?xml version="1.0" encoding="utf-8"?>
 <p:sld xmlns:a="http://schemas.openxmlformats.org/drawingml/2006/main" xmlns:r="http://schemas.openxmlformats.org/officeDocument/2006/relationships" xmlns:p="http://schemas.openxmlformats.org/presentationml/2006/main">
   <p:cSld name="Slide 1">
+    <p:bg>
+      <p:bgPr>
+        <a:solidFill>
+          <a:srgbClr val="0D0D0D"/>
+        </a:solidFill>
+      </p:bgPr>
+    </p:bg>
     <p:spTree>
       <p:nvGrpSpPr>
         <p:cNvPr id="1" name=""/>
@@ -2680,79 +2687,172 @@
         </p:blipFill>
         <p:spPr>
           <a:xfrm>
+            <a:off x="6272784" y="0"/>
+            <a:ext cx="5918911" cy="6858000"/>
+          </a:xfrm>
+          <a:prstGeom prst="rect">
+            <a:avLst/>
+          </a:prstGeom>
+        </p:spPr>
+      </p:pic>
+      <p:sp>
+        <p:nvSpPr>
+          <p:cNvPr id="3" name="Shape 0"/>
+          <p:cNvSpPr/>
+          <p:nvPr/>
+        </p:nvSpPr>
+        <p:spPr>
+          <a:xfrm>
             <a:off x="0" y="0"/>
-            <a:ext cx="12191695" cy="6858000"/>
+            <a:ext cx="6272784" cy="6858000"/>
+          </a:xfrm>
+          <a:prstGeom prst="rect">
+            <a:avLst/>
+          </a:prstGeom>
+          <a:solidFill>
+            <a:srgbClr val="0D0D0D"/>
+          </a:solidFill>
+          <a:ln/>
+        </p:spPr>
+      </p:sp>
+      <p:sp>
+        <p:nvSpPr>
+          <p:cNvPr id="4" name="Text 1"/>
+          <p:cNvSpPr txBox="1"/>
+          <p:nvPr/>
+        </p:nvSpPr>
+        <p:spPr>
+          <a:xfrm>
+            <a:off x="658368" y="566928"/>
+            <a:ext cx="4041648" cy="292608"/>
+          </a:xfrm>
+          <a:prstGeom prst="rect">
+            <a:avLst/>
+          </a:prstGeom>
+          <a:noFill/>
+          <a:ln/>
+        </p:spPr>
+        <p:txBody>
+          <a:bodyPr wrap="square" lIns="0" tIns="0" rIns="0" bIns="0" rtlCol="0" anchor="ctr"/>
+          <a:lstStyle/>
+          <a:p>
+            <a:pPr algn="l" indent="0" marL="0">
+              <a:buNone/>
+            </a:pPr>
+            <a:r>
+              <a:rPr lang="en-US" sz="1100" b="1" spc="80" kern="0" dirty="0">
+                <a:solidFill>
+                  <a:srgbClr val="8BC34A"/>
+                </a:solidFill>
+                <a:latin typeface="Calibri" pitchFamily="34" charset="0"/>
+                <a:ea typeface="Calibri" pitchFamily="34" charset="-122"/>
+                <a:cs typeface="Calibri" pitchFamily="34" charset="-120"/>
+              </a:rPr>
+              <a:t>GREEN SOLUTIONS GROUP</a:t>
+            </a:r>
+            <a:endParaRPr lang="en-US" sz="1100" dirty="0"/>
+          </a:p>
+        </p:txBody>
+      </p:sp>
+      <p:pic>
+        <p:nvPicPr>
+          <p:cNvPr id="5" name="Image 1" descr="C:\Users\Utilisateur\dev\green-solutions-web\public\images\logo-icon.png">    </p:cNvPr>
+          <p:cNvPicPr>
+            <a:picLocks noChangeAspect="1"/>
+          </p:cNvPicPr>
+          <p:nvPr/>
+        </p:nvPicPr>
+        <p:blipFill>
+          <a:blip r:embed="rId2"/>
+          <a:stretch>
+            <a:fillRect/>
+          </a:stretch>
+        </p:blipFill>
+        <p:spPr>
+          <a:xfrm>
+            <a:off x="5010912" y="457200"/>
+            <a:ext cx="603504" cy="603504"/>
           </a:xfrm>
           <a:prstGeom prst="rect">
             <a:avLst/>
           </a:prstGeom>
         </p:spPr>
       </p:pic>
-      <p:sp>
-        <p:nvSpPr>
-          <p:cNvPr id="3" name="Text 0"/>
-          <p:cNvSpPr txBox="1"/>
-          <p:nvPr/>
-        </p:nvSpPr>
-        <p:spPr>
-          <a:xfrm>
-            <a:off x="777240" y="1965960"/>
-            <a:ext cx="10058400" cy="320040"/>
-          </a:xfrm>
-          <a:prstGeom prst="rect">
-            <a:avLst/>
-          </a:prstGeom>
-          <a:noFill/>
-          <a:ln/>
-        </p:spPr>
-        <p:txBody>
-          <a:bodyPr wrap="square" lIns="0" tIns="0" rIns="0" bIns="0" rtlCol="0" anchor="ctr"/>
+      <p:pic>
+        <p:nvPicPr>
+          <p:cNvPr id="6" name="Image 2" descr="C:\Users\Utilisateur\dev\green-solutions-web\scripts\dossiers\drapeaux\usa.png">    </p:cNvPr>
+          <p:cNvPicPr>
+            <a:picLocks noChangeAspect="1"/>
+          </p:cNvPicPr>
+          <p:nvPr/>
+        </p:nvPicPr>
+        <p:blipFill>
+          <a:blip r:embed="rId3"/>
+          <a:stretch>
+            <a:fillRect/>
+          </a:stretch>
+        </p:blipFill>
+        <p:spPr>
+          <a:xfrm>
+            <a:off x="3648456" y="1389888"/>
+            <a:ext cx="1965960" cy="1310640"/>
+          </a:xfrm>
+          <a:prstGeom prst="rect">
+            <a:avLst/>
+          </a:prstGeom>
+        </p:spPr>
+      </p:pic>
+      <p:sp>
+        <p:nvSpPr>
+          <p:cNvPr id="7" name="Shape 2"/>
+          <p:cNvSpPr/>
+          <p:nvPr/>
+        </p:nvSpPr>
+        <p:spPr>
+          <a:xfrm>
+            <a:off x="3648456" y="1389888"/>
+            <a:ext cx="1965960" cy="1310640"/>
+          </a:xfrm>
+          <a:prstGeom prst="rect">
+            <a:avLst/>
+          </a:prstGeom>
+          <a:ln w="9525">
+            <a:solidFill>
+              <a:srgbClr val="3A3A3A"/>
+            </a:solidFill>
+            <a:prstDash val="solid"/>
+          </a:ln>
+        </p:spPr>
+      </p:sp>
+      <p:sp>
+        <p:nvSpPr>
+          <p:cNvPr id="8" name="Text 3"/>
+          <p:cNvSpPr txBox="1"/>
+          <p:nvPr/>
+        </p:nvSpPr>
+        <p:spPr>
+          <a:xfrm>
+            <a:off x="658368" y="1298448"/>
+            <a:ext cx="2761488" cy="1234440"/>
+          </a:xfrm>
+          <a:prstGeom prst="rect">
+            <a:avLst/>
+          </a:prstGeom>
+          <a:noFill/>
+          <a:ln/>
+        </p:spPr>
+        <p:txBody>
+          <a:bodyPr wrap="square" lIns="0" tIns="0" rIns="0" bIns="0" rtlCol="0" anchor="t"/>
           <a:lstStyle/>
           <a:p>
             <a:pPr algn="l" indent="0" marL="0">
-              <a:buNone/>
-            </a:pPr>
-            <a:r>
-              <a:rPr lang="en-US" sz="1300" b="1" spc="250" kern="0" dirty="0">
-                <a:solidFill>
-                  <a:srgbClr val="D98C2B"/>
-                </a:solidFill>
-                <a:latin typeface="Calibri" pitchFamily="34" charset="0"/>
-                <a:ea typeface="Calibri" pitchFamily="34" charset="-122"/>
-                <a:cs typeface="Calibri" pitchFamily="34" charset="-120"/>
-              </a:rPr>
-              <a:t>MARKET DOSSIER</a:t>
-            </a:r>
-            <a:endParaRPr lang="en-US" sz="1300" dirty="0"/>
-          </a:p>
-        </p:txBody>
-      </p:sp>
-      <p:sp>
-        <p:nvSpPr>
-          <p:cNvPr id="4" name="Text 1"/>
-          <p:cNvSpPr txBox="1"/>
-          <p:nvPr/>
-        </p:nvSpPr>
-        <p:spPr>
-          <a:xfrm>
-            <a:off x="777240" y="2377440"/>
-            <a:ext cx="10241280" cy="1371600"/>
-          </a:xfrm>
-          <a:prstGeom prst="rect">
-            <a:avLst/>
-          </a:prstGeom>
-          <a:noFill/>
-          <a:ln/>
-        </p:spPr>
-        <p:txBody>
-          <a:bodyPr wrap="square" lIns="0" tIns="0" rIns="0" bIns="0" rtlCol="0" anchor="ctr"/>
-          <a:lstStyle/>
-          <a:p>
-            <a:pPr algn="l" indent="0" marL="0">
-              <a:buNone/>
-            </a:pPr>
-            <a:r>
-              <a:rPr lang="en-US" sz="4200" b="1" dirty="0">
+              <a:lnSpc>
+                <a:spcPct val="110000"/>
+              </a:lnSpc>
+              <a:buNone/>
+            </a:pPr>
+            <a:r>
+              <a:rPr lang="en-US" sz="2400" b="1" dirty="0">
                 <a:solidFill>
                   <a:srgbClr val="FFFFFF"/>
                 </a:solidFill>
@@ -2760,22 +2860,42 @@
                 <a:ea typeface="Cambria" pitchFamily="34" charset="-122"/>
                 <a:cs typeface="Cambria" pitchFamily="34" charset="-120"/>
               </a:rPr>
-              <a:t>United States</a:t>
-            </a:r>
-            <a:endParaRPr lang="en-US" sz="4200" dirty="0"/>
-          </a:p>
-        </p:txBody>
-      </p:sp>
-      <p:sp>
-        <p:nvSpPr>
-          <p:cNvPr id="5" name="Text 2"/>
-          <p:cNvSpPr txBox="1"/>
-          <p:nvPr/>
-        </p:nvSpPr>
-        <p:spPr>
-          <a:xfrm>
-            <a:off x="777240" y="3840480"/>
-            <a:ext cx="8686800" cy="822960"/>
+              <a:t>UNITED STATES OF AMERICA</a:t>
+            </a:r>
+            <a:endParaRPr lang="en-US" sz="2400" dirty="0"/>
+          </a:p>
+        </p:txBody>
+      </p:sp>
+      <p:sp>
+        <p:nvSpPr>
+          <p:cNvPr id="9" name="Shape 4"/>
+          <p:cNvSpPr/>
+          <p:nvPr/>
+        </p:nvSpPr>
+        <p:spPr>
+          <a:xfrm>
+            <a:off x="658368" y="2889504"/>
+            <a:ext cx="2788920" cy="45720"/>
+          </a:xfrm>
+          <a:prstGeom prst="rect">
+            <a:avLst/>
+          </a:prstGeom>
+          <a:solidFill>
+            <a:srgbClr val="D98C2B"/>
+          </a:solidFill>
+          <a:ln/>
+        </p:spPr>
+      </p:sp>
+      <p:sp>
+        <p:nvSpPr>
+          <p:cNvPr id="10" name="Text 5"/>
+          <p:cNvSpPr txBox="1"/>
+          <p:nvPr/>
+        </p:nvSpPr>
+        <p:spPr>
+          <a:xfrm>
+            <a:off x="658368" y="3163824"/>
+            <a:ext cx="4956048" cy="384048"/>
           </a:xfrm>
           <a:prstGeom prst="rect">
             <a:avLst/>
@@ -2785,20 +2905,57 @@
         </p:spPr>
         <p:txBody>
           <a:bodyPr wrap="square" lIns="0" tIns="0" rIns="0" bIns="0" rtlCol="0" anchor="ctr"/>
+          <a:lstStyle/>
+          <a:p>
+            <a:pPr algn="l" indent="0" marL="0">
+              <a:buNone/>
+            </a:pPr>
+            <a:r>
+              <a:rPr lang="en-US" sz="1600" b="1" dirty="0">
+                <a:solidFill>
+                  <a:srgbClr val="D98C2B"/>
+                </a:solidFill>
+                <a:latin typeface="Cambria" pitchFamily="34" charset="0"/>
+                <a:ea typeface="Cambria" pitchFamily="34" charset="-122"/>
+                <a:cs typeface="Cambria" pitchFamily="34" charset="-120"/>
+              </a:rPr>
+              <a:t>Washington · 2026</a:t>
+            </a:r>
+            <a:endParaRPr lang="en-US" sz="1600" dirty="0"/>
+          </a:p>
+        </p:txBody>
+      </p:sp>
+      <p:sp>
+        <p:nvSpPr>
+          <p:cNvPr id="11" name="Text 6"/>
+          <p:cNvSpPr txBox="1"/>
+          <p:nvPr/>
+        </p:nvSpPr>
+        <p:spPr>
+          <a:xfrm>
+            <a:off x="658368" y="3767328"/>
+            <a:ext cx="4956048" cy="914400"/>
+          </a:xfrm>
+          <a:prstGeom prst="rect">
+            <a:avLst/>
+          </a:prstGeom>
+          <a:noFill/>
+          <a:ln/>
+        </p:spPr>
+        <p:txBody>
+          <a:bodyPr wrap="square" lIns="0" tIns="0" rIns="0" bIns="0" rtlCol="0" anchor="t"/>
           <a:lstStyle/>
           <a:p>
             <a:pPr algn="l" indent="0" marL="0">
               <a:lnSpc>
-                <a:spcPct val="125000"/>
+                <a:spcPct val="128000"/>
               </a:lnSpc>
               <a:buNone/>
             </a:pPr>
             <a:r>
-              <a:rPr lang="en-US" sz="1600" dirty="0">
-                <a:solidFill>
-                  <a:srgbClr val="FFFFFF">
-                    <a:alpha val="88000"/>
-                  </a:srgbClr>
+              <a:rPr lang="en-US" sz="1450" dirty="0">
+                <a:solidFill>
+                  <a:srgbClr val="FFFFFF"/>
                 </a:solidFill>
                 <a:latin typeface="Calibri" pitchFamily="34" charset="0"/>
                 <a:ea typeface="Calibri" pitchFamily="34" charset="-122"/>
@@ -2806,21 +2963,19 @@
               </a:rPr>
               <a:t>Row crops, permanent plantings and specialty produce on a shrinking water budget.</a:t>
             </a:r>
-            <a:endParaRPr lang="en-US" sz="1600" dirty="0"/>
+            <a:endParaRPr lang="en-US" sz="1450" dirty="0"/>
           </a:p>
           <a:p>
             <a:pPr algn="l" indent="0" marL="0">
               <a:lnSpc>
-                <a:spcPct val="125000"/>
+                <a:spcPct val="128000"/>
               </a:lnSpc>
               <a:buNone/>
             </a:pPr>
             <a:r>
-              <a:rPr lang="en-US" sz="1600" dirty="0">
-                <a:solidFill>
-                  <a:srgbClr val="FFFFFF">
-                    <a:alpha val="88000"/>
-                  </a:srgbClr>
+              <a:rPr lang="en-US" sz="1450" dirty="0">
+                <a:solidFill>
+                  <a:srgbClr val="FFFFFF"/>
                 </a:solidFill>
                 <a:latin typeface="Calibri" pitchFamily="34" charset="0"/>
                 <a:ea typeface="Calibri" pitchFamily="34" charset="-122"/>
@@ -2828,20 +2983,20 @@
               </a:rPr>
               <a:t>What hydro-retention changes for irrigated acres.</a:t>
             </a:r>
-            <a:endParaRPr lang="en-US" sz="1600" dirty="0"/>
-          </a:p>
-        </p:txBody>
-      </p:sp>
-      <p:sp>
-        <p:nvSpPr>
-          <p:cNvPr id="6" name="Text 3"/>
-          <p:cNvSpPr txBox="1"/>
-          <p:nvPr/>
-        </p:nvSpPr>
-        <p:spPr>
-          <a:xfrm>
-            <a:off x="777240" y="5989320"/>
-            <a:ext cx="10058400" cy="320040"/>
+            <a:endParaRPr lang="en-US" sz="1450" dirty="0"/>
+          </a:p>
+        </p:txBody>
+      </p:sp>
+      <p:sp>
+        <p:nvSpPr>
+          <p:cNvPr id="12" name="Text 7"/>
+          <p:cNvSpPr txBox="1"/>
+          <p:nvPr/>
+        </p:nvSpPr>
+        <p:spPr>
+          <a:xfrm>
+            <a:off x="658368" y="4892040"/>
+            <a:ext cx="4956048" cy="347472"/>
           </a:xfrm>
           <a:prstGeom prst="rect">
             <a:avLst/>
@@ -2857,19 +3012,56 @@
               <a:buNone/>
             </a:pPr>
             <a:r>
-              <a:rPr lang="en-US" sz="1100" dirty="0">
-                <a:solidFill>
-                  <a:srgbClr val="FFFFFF">
-                    <a:alpha val="65000"/>
-                  </a:srgbClr>
-                </a:solidFill>
-                <a:latin typeface="Calibri" pitchFamily="34" charset="0"/>
-                <a:ea typeface="Calibri" pitchFamily="34" charset="-122"/>
-                <a:cs typeface="Calibri" pitchFamily="34" charset="-120"/>
-              </a:rPr>
-              <a:t>Green Solutions · contact@evergreen-ecosorb.com</a:t>
+              <a:rPr lang="en-US" sz="1100" b="1" dirty="0">
+                <a:solidFill>
+                  <a:srgbClr val="8BC34A"/>
+                </a:solidFill>
+                <a:latin typeface="Calibri" pitchFamily="34" charset="0"/>
+                <a:ea typeface="Calibri" pitchFamily="34" charset="-122"/>
+                <a:cs typeface="Calibri" pitchFamily="34" charset="-120"/>
+              </a:rPr>
+              <a:t>ECOSORB® · ECOFERT® · NAPEMA® · PAULOWNIA</a:t>
             </a:r>
             <a:endParaRPr lang="en-US" sz="1100" dirty="0"/>
+          </a:p>
+        </p:txBody>
+      </p:sp>
+      <p:sp>
+        <p:nvSpPr>
+          <p:cNvPr id="13" name="Text 8"/>
+          <p:cNvSpPr txBox="1"/>
+          <p:nvPr/>
+        </p:nvSpPr>
+        <p:spPr>
+          <a:xfrm>
+            <a:off x="658368" y="6053328"/>
+            <a:ext cx="4956048" cy="310896"/>
+          </a:xfrm>
+          <a:prstGeom prst="rect">
+            <a:avLst/>
+          </a:prstGeom>
+          <a:noFill/>
+          <a:ln/>
+        </p:spPr>
+        <p:txBody>
+          <a:bodyPr wrap="square" lIns="0" tIns="0" rIns="0" bIns="0" rtlCol="0" anchor="ctr"/>
+          <a:lstStyle/>
+          <a:p>
+            <a:pPr algn="l" indent="0" marL="0">
+              <a:buNone/>
+            </a:pPr>
+            <a:r>
+              <a:rPr lang="en-US" sz="850" dirty="0">
+                <a:solidFill>
+                  <a:srgbClr val="9A9A9A"/>
+                </a:solidFill>
+                <a:latin typeface="Calibri" pitchFamily="34" charset="0"/>
+                <a:ea typeface="Calibri" pitchFamily="34" charset="-122"/>
+                <a:cs typeface="Calibri" pitchFamily="34" charset="-120"/>
+              </a:rPr>
+              <a:t>September 2026 · Confidential · For the sole use of the recipient</a:t>
+            </a:r>
+            <a:endParaRPr lang="en-US" sz="850" dirty="0"/>
           </a:p>
         </p:txBody>
       </p:sp>

--- a/public/documents/countries/usa.pptx
+++ b/public/documents/countries/usa.pptx
@@ -117,7 +117,7 @@
 </p:presentation>
 </file>
 
-<file path=ppt/charts/chart31.xml><?xml version="1.0" encoding="utf-8"?>
+<file path=ppt/charts/chart37.xml><?xml version="1.0" encoding="utf-8"?>
 <c:chartSpace xmlns:c="http://schemas.openxmlformats.org/drawingml/2006/chart" xmlns:a="http://schemas.openxmlformats.org/drawingml/2006/main" xmlns:r="http://schemas.openxmlformats.org/officeDocument/2006/relationships">
   <c:date1904 val="0"/>
   <c:roundedCorners val="1"/>
@@ -362,7 +362,7 @@
 </c:chartSpace>
 </file>
 
-<file path=ppt/charts/chart32.xml><?xml version="1.0" encoding="utf-8"?>
+<file path=ppt/charts/chart38.xml><?xml version="1.0" encoding="utf-8"?>
 <c:chartSpace xmlns:c="http://schemas.openxmlformats.org/drawingml/2006/chart" xmlns:a="http://schemas.openxmlformats.org/drawingml/2006/main" xmlns:r="http://schemas.openxmlformats.org/officeDocument/2006/relationships">
   <c:date1904 val="0"/>
   <c:roundedCorners val="1"/>
@@ -670,7 +670,7 @@
 </c:chartSpace>
 </file>
 
-<file path=ppt/charts/chart33.xml><?xml version="1.0" encoding="utf-8"?>
+<file path=ppt/charts/chart39.xml><?xml version="1.0" encoding="utf-8"?>
 <c:chartSpace xmlns:c="http://schemas.openxmlformats.org/drawingml/2006/chart" xmlns:a="http://schemas.openxmlformats.org/drawingml/2006/main" xmlns:r="http://schemas.openxmlformats.org/officeDocument/2006/relationships">
   <c:date1904 val="0"/>
   <c:roundedCorners val="1"/>
@@ -3842,9 +3842,35 @@
           </a:p>
         </p:txBody>
       </p:sp>
-      <p:sp>
-        <p:nvSpPr>
-          <p:cNvPr id="6" name="Text 3"/>
+      <p:pic>
+        <p:nvPicPr>
+          <p:cNvPr id="6" name="Image 1" descr="C:\Users\Utilisateur\dev\green-solutions-web\scripts\dossiers\sceau-aim-clair.png">    </p:cNvPr>
+          <p:cNvPicPr>
+            <a:picLocks noChangeAspect="1"/>
+          </p:cNvPicPr>
+          <p:nvPr/>
+        </p:nvPicPr>
+        <p:blipFill>
+          <a:blip r:embed="rId2">
+            <a:alphaModFix amt="85000"/>
+          </a:blip>
+          <a:stretch>
+            <a:fillRect/>
+          </a:stretch>
+        </p:blipFill>
+        <p:spPr>
+          <a:xfrm>
+            <a:off x="10637215" y="5193792"/>
+            <a:ext cx="1051560" cy="1051560"/>
+          </a:xfrm>
+          <a:prstGeom prst="rect">
+            <a:avLst/>
+          </a:prstGeom>
+        </p:spPr>
+      </p:pic>
+      <p:sp>
+        <p:nvSpPr>
+          <p:cNvPr id="7" name="Text 3"/>
           <p:cNvSpPr txBox="1"/>
           <p:nvPr/>
         </p:nvSpPr>
@@ -3885,7 +3911,7 @@
       </p:sp>
       <p:sp>
         <p:nvSpPr>
-          <p:cNvPr id="7" name="Text 4"/>
+          <p:cNvPr id="8" name="Text 4"/>
           <p:cNvSpPr txBox="1"/>
           <p:nvPr/>
         </p:nvSpPr>

--- a/public/documents/countries/usa.pptx
+++ b/public/documents/countries/usa.pptx
@@ -16,9 +16,16 @@
     <p:sldId id="264" r:id="rId10"/>
     <p:sldId id="265" r:id="rId11"/>
     <p:sldId id="266" r:id="rId12"/>
+    <p:sldId id="267" r:id="rId13"/>
+    <p:sldId id="268" r:id="rId14"/>
+    <p:sldId id="269" r:id="rId15"/>
+    <p:sldId id="270" r:id="rId16"/>
+    <p:sldId id="271" r:id="rId17"/>
+    <p:sldId id="272" r:id="rId18"/>
+    <p:sldId id="273" r:id="rId19"/>
   </p:sldIdLst>
   <p:notesMasterIdLst>
-    <p:notesMasterId r:id="rId13"/>
+    <p:notesMasterId r:id="rId20"/>
   </p:notesMasterIdLst>
   <p:sldSz cx="12192000" cy="6858000"/>
   <p:notesSz cx="6858000" cy="12192000"/>
@@ -117,7 +124,7 @@
 </p:presentation>
 </file>
 
-<file path=ppt/charts/chart37.xml><?xml version="1.0" encoding="utf-8"?>
+<file path=ppt/charts/chart49.xml><?xml version="1.0" encoding="utf-8"?>
 <c:chartSpace xmlns:c="http://schemas.openxmlformats.org/drawingml/2006/chart" xmlns:a="http://schemas.openxmlformats.org/drawingml/2006/main" xmlns:r="http://schemas.openxmlformats.org/officeDocument/2006/relationships">
   <c:date1904 val="0"/>
   <c:roundedCorners val="1"/>
@@ -362,7 +369,7 @@
 </c:chartSpace>
 </file>
 
-<file path=ppt/charts/chart38.xml><?xml version="1.0" encoding="utf-8"?>
+<file path=ppt/charts/chart50.xml><?xml version="1.0" encoding="utf-8"?>
 <c:chartSpace xmlns:c="http://schemas.openxmlformats.org/drawingml/2006/chart" xmlns:a="http://schemas.openxmlformats.org/drawingml/2006/main" xmlns:r="http://schemas.openxmlformats.org/officeDocument/2006/relationships">
   <c:date1904 val="0"/>
   <c:roundedCorners val="1"/>
@@ -670,7 +677,372 @@
 </c:chartSpace>
 </file>
 
-<file path=ppt/charts/chart39.xml><?xml version="1.0" encoding="utf-8"?>
+<file path=ppt/charts/chart51.xml><?xml version="1.0" encoding="utf-8"?>
+<c:chartSpace xmlns:c="http://schemas.openxmlformats.org/drawingml/2006/chart" xmlns:a="http://schemas.openxmlformats.org/drawingml/2006/main" xmlns:r="http://schemas.openxmlformats.org/officeDocument/2006/relationships">
+  <c:date1904 val="0"/>
+  <c:roundedCorners val="1"/>
+  <c:chart>
+    <c:autoTitleDeleted val="1"/>
+    <c:plotArea>
+      <c:layout/>
+      <c:barChart>
+        <c:barDir val="col"/>
+        <c:grouping val="clustered"/>
+        <c:varyColors val="0"/>
+        <c:ser>
+          <c:idx val="0"/>
+          <c:order val="0"/>
+          <c:tx>
+            <c:strRef>
+              <c:f>Sheet1!$B$1</c:f>
+              <c:strCache>
+                <c:ptCount val="1"/>
+                <c:pt idx="0">
+                  <c:v>Low end (%)</c:v>
+                </c:pt>
+              </c:strCache>
+            </c:strRef>
+          </c:tx>
+          <c:spPr>
+            <a:solidFill>
+              <a:srgbClr val="1D4E6B"/>
+            </a:solidFill>
+            <a:effectLst/>
+          </c:spPr>
+          <c:invertIfNegative val="0"/>
+          <c:dLbls>
+            <c:numFmt formatCode="[$-409]0&quot;%&quot;" sourceLinked="0"/>
+            <c:txPr>
+              <a:bodyPr/>
+              <a:lstStyle/>
+              <a:p>
+                <a:pPr>
+                  <a:defRPr b="0" i="0" strike="noStrike" sz="1100" u="none">
+                    <a:solidFill>
+                      <a:srgbClr val="0F2E40"/>
+                    </a:solidFill>
+                    <a:latin typeface="Calibri"/>
+                  </a:defRPr>
+                </a:pPr>
+              </a:p>
+            </c:txPr>
+            <c:showLegendKey val="0"/>
+            <c:showVal val="1"/>
+            <c:showCatName val="0"/>
+            <c:showSerName val="0"/>
+            <c:showPercent val="0"/>
+            <c:showBubbleSize val="0"/>
+            <c:showLeaderLines val="0"/>
+          </c:dLbls>
+          <c:cat>
+            <c:multiLvlStrRef>
+              <c:f>Sheet1!$A$2:$A$6</c:f>
+              <c:multiLvlStrCache>
+                <c:ptCount val="5"/>
+                <c:lvl>
+                  <c:pt idx="0">
+                    <c:v>Tomatoes</c:v>
+                  </c:pt>
+                  <c:pt idx="1">
+                    <c:v>Avocados</c:v>
+                  </c:pt>
+                  <c:pt idx="2">
+                    <c:v>Strawberries</c:v>
+                  </c:pt>
+                  <c:pt idx="3">
+                    <c:v>Almonds</c:v>
+                  </c:pt>
+                  <c:pt idx="4">
+                    <c:v>Grapes</c:v>
+                  </c:pt>
+                </c:lvl>
+              </c:multiLvlStrCache>
+            </c:multiLvlStrRef>
+          </c:cat>
+          <c:val>
+            <c:numRef>
+              <c:f>Sheet1!$B$2:$B$6</c:f>
+              <c:numCache>
+                <c:formatCode>General</c:formatCode>
+                <c:ptCount val="5"/>
+                <c:pt idx="0">
+                  <c:v>30</c:v>
+                </c:pt>
+                <c:pt idx="1">
+                  <c:v>15</c:v>
+                </c:pt>
+                <c:pt idx="2">
+                  <c:v>20</c:v>
+                </c:pt>
+                <c:pt idx="3">
+                  <c:v>20</c:v>
+                </c:pt>
+                <c:pt idx="4">
+                  <c:v>20</c:v>
+                </c:pt>
+              </c:numCache>
+            </c:numRef>
+          </c:val>
+        </c:ser>
+        <c:ser>
+          <c:idx val="1"/>
+          <c:order val="1"/>
+          <c:tx>
+            <c:strRef>
+              <c:f>Sheet1!$C$1</c:f>
+              <c:strCache>
+                <c:ptCount val="1"/>
+                <c:pt idx="0">
+                  <c:v>High end (%)</c:v>
+                </c:pt>
+              </c:strCache>
+            </c:strRef>
+          </c:tx>
+          <c:spPr>
+            <a:solidFill>
+              <a:srgbClr val="D98C2B"/>
+            </a:solidFill>
+            <a:effectLst/>
+          </c:spPr>
+          <c:invertIfNegative val="0"/>
+          <c:dLbls>
+            <c:numFmt formatCode="[$-409]0&quot;%&quot;" sourceLinked="0"/>
+            <c:txPr>
+              <a:bodyPr/>
+              <a:lstStyle/>
+              <a:p>
+                <a:pPr>
+                  <a:defRPr b="0" i="0" strike="noStrike" sz="1100" u="none">
+                    <a:solidFill>
+                      <a:srgbClr val="0F2E40"/>
+                    </a:solidFill>
+                    <a:latin typeface="Calibri"/>
+                  </a:defRPr>
+                </a:pPr>
+              </a:p>
+            </c:txPr>
+            <c:showLegendKey val="0"/>
+            <c:showVal val="1"/>
+            <c:showCatName val="0"/>
+            <c:showSerName val="0"/>
+            <c:showPercent val="0"/>
+            <c:showBubbleSize val="0"/>
+            <c:showLeaderLines val="0"/>
+          </c:dLbls>
+          <c:cat>
+            <c:multiLvlStrRef>
+              <c:f>Sheet1!$A$2:$A$6</c:f>
+              <c:multiLvlStrCache>
+                <c:ptCount val="5"/>
+                <c:lvl>
+                  <c:pt idx="0">
+                    <c:v>Tomatoes</c:v>
+                  </c:pt>
+                  <c:pt idx="1">
+                    <c:v>Avocados</c:v>
+                  </c:pt>
+                  <c:pt idx="2">
+                    <c:v>Strawberries</c:v>
+                  </c:pt>
+                  <c:pt idx="3">
+                    <c:v>Almonds</c:v>
+                  </c:pt>
+                  <c:pt idx="4">
+                    <c:v>Grapes</c:v>
+                  </c:pt>
+                </c:lvl>
+              </c:multiLvlStrCache>
+            </c:multiLvlStrRef>
+          </c:cat>
+          <c:val>
+            <c:numRef>
+              <c:f>Sheet1!$C$2:$C$6</c:f>
+              <c:numCache>
+                <c:formatCode>General</c:formatCode>
+                <c:ptCount val="5"/>
+                <c:pt idx="0">
+                  <c:v>50</c:v>
+                </c:pt>
+                <c:pt idx="1">
+                  <c:v>25</c:v>
+                </c:pt>
+                <c:pt idx="2">
+                  <c:v>40</c:v>
+                </c:pt>
+                <c:pt idx="3">
+                  <c:v>40</c:v>
+                </c:pt>
+                <c:pt idx="4">
+                  <c:v>40</c:v>
+                </c:pt>
+              </c:numCache>
+            </c:numRef>
+          </c:val>
+        </c:ser>
+        <c:dLbls>
+          <c:numFmt formatCode="[$-409]0&quot;%&quot;" sourceLinked="0"/>
+          <c:txPr>
+            <a:bodyPr/>
+            <a:lstStyle/>
+            <a:p>
+              <a:pPr>
+                <a:defRPr b="0" i="0" strike="noStrike" sz="1100" u="none">
+                  <a:solidFill>
+                    <a:srgbClr val="0F2E40"/>
+                  </a:solidFill>
+                  <a:latin typeface="Calibri"/>
+                </a:defRPr>
+              </a:pPr>
+            </a:p>
+          </c:txPr>
+          <c:showLegendKey val="0"/>
+          <c:showVal val="1"/>
+          <c:showCatName val="0"/>
+          <c:showSerName val="0"/>
+          <c:showPercent val="0"/>
+          <c:showBubbleSize val="0"/>
+          <c:showLeaderLines val="0"/>
+        </c:dLbls>
+        <c:gapWidth val="150"/>
+        <c:overlap val="0"/>
+        <c:axId val="2094734554"/>
+        <c:axId val="2094734552"/>
+        <c:axId val="2094734556"/>
+      </c:barChart>
+      <c:catAx>
+        <c:axId val="2094734554"/>
+        <c:scaling>
+          <c:orientation val="minMax"/>
+        </c:scaling>
+        <c:delete val="0"/>
+        <c:axPos val="b"/>
+        <c:numFmt formatCode="General" sourceLinked="1"/>
+        <c:majorTickMark val="out"/>
+        <c:minorTickMark val="none"/>
+        <c:tickLblPos val="low"/>
+        <c:spPr>
+          <a:ln w="12700" cap="flat">
+            <a:solidFill>
+              <a:srgbClr val="888888"/>
+            </a:solidFill>
+            <a:prstDash val="solid"/>
+            <a:round/>
+          </a:ln>
+        </c:spPr>
+        <c:txPr>
+          <a:bodyPr/>
+          <a:lstStyle/>
+          <a:p>
+            <a:pPr>
+              <a:defRPr sz="1100" b="0" i="0" u="none" strike="noStrike">
+                <a:solidFill>
+                  <a:srgbClr val="6B7D87"/>
+                </a:solidFill>
+                <a:latin typeface="Calibri"/>
+              </a:defRPr>
+            </a:pPr>
+            <a:endParaRPr lang="en-US"/>
+          </a:p>
+        </c:txPr>
+        <c:crossAx val="2094734552"/>
+        <c:crosses val="autoZero"/>
+        <c:auto val="1"/>
+        <c:lblAlgn val="ctr"/>
+        <c:noMultiLvlLbl val="1"/>
+      </c:catAx>
+      <c:valAx>
+        <c:axId val="2094734552"/>
+        <c:scaling>
+          <c:orientation val="minMax"/>
+          <c:min val="0"/>
+        </c:scaling>
+        <c:delete val="0"/>
+        <c:axPos val="l"/>
+        <c:majorGridlines>
+          <c:spPr>
+            <a:ln w="9525" cap="flat">
+              <a:solidFill>
+                <a:srgbClr val="D8E1E7"/>
+              </a:solidFill>
+              <a:prstDash val="solid"/>
+              <a:round/>
+            </a:ln>
+          </c:spPr>
+        </c:majorGridlines>
+        <c:numFmt formatCode="General" sourceLinked="0"/>
+        <c:majorTickMark val="out"/>
+        <c:minorTickMark val="none"/>
+        <c:tickLblPos val="nextTo"/>
+        <c:spPr>
+          <a:ln w="12700" cap="flat">
+            <a:solidFill>
+              <a:srgbClr val="888888"/>
+            </a:solidFill>
+            <a:prstDash val="solid"/>
+            <a:round/>
+          </a:ln>
+        </c:spPr>
+        <c:txPr>
+          <a:bodyPr/>
+          <a:lstStyle/>
+          <a:p>
+            <a:pPr>
+              <a:defRPr sz="1100" b="0" i="0" u="none" strike="noStrike">
+                <a:solidFill>
+                  <a:srgbClr val="6B7D87"/>
+                </a:solidFill>
+                <a:latin typeface="Calibri"/>
+              </a:defRPr>
+            </a:pPr>
+            <a:endParaRPr lang="en-US"/>
+          </a:p>
+        </c:txPr>
+        <c:crossAx val="2094734554"/>
+        <c:crosses val="autoZero"/>
+        <c:crossBetween val="between"/>
+      </c:valAx>
+      <c:spPr>
+        <a:noFill/>
+        <a:ln>
+          <a:noFill/>
+        </a:ln>
+        <a:effectLst/>
+      </c:spPr>
+    </c:plotArea>
+    <c:legend>
+      <c:legendPos val="b"/>
+      <c:overlay val="0"/>
+      <c:txPr>
+        <a:bodyPr/>
+        <a:lstStyle/>
+        <a:p>
+          <a:pPr>
+            <a:defRPr sz="1100">
+              <a:latin typeface="Calibri"/>
+              <a:cs typeface="Calibri"/>
+            </a:defRPr>
+          </a:pPr>
+          <a:endParaRPr lang="en-US"/>
+        </a:p>
+      </c:txPr>
+    </c:legend>
+    <c:plotVisOnly val="1"/>
+    <c:dispBlanksAs val="span"/>
+  </c:chart>
+  <c:spPr>
+    <a:noFill/>
+    <a:ln>
+      <a:noFill/>
+    </a:ln>
+    <a:effectLst/>
+  </c:spPr>
+  <c:externalData r:id="rId1">
+    <c:autoUpdate val="0"/>
+  </c:externalData>
+</c:chartSpace>
+</file>
+
+<file path=ppt/charts/chart52.xml><?xml version="1.0" encoding="utf-8"?>
 <c:chartSpace xmlns:c="http://schemas.openxmlformats.org/drawingml/2006/chart" xmlns:a="http://schemas.openxmlformats.org/drawingml/2006/main" xmlns:r="http://schemas.openxmlformats.org/officeDocument/2006/relationships">
   <c:date1904 val="0"/>
   <c:roundedCorners val="1"/>
@@ -1618,6 +1990,622 @@
             <a:fld id="{F7021451-1387-4CA6-816F-3879F97B5CBC}" type="slidenum">
               <a:rPr lang="en-US"/>
               <a:t>11</a:t>
+            </a:fld>
+            <a:endParaRPr lang="en-US"/>
+          </a:p>
+        </p:txBody>
+      </p:sp>
+    </p:spTree>
+    <p:extLst>
+      <p:ext uri="{BB962C8B-B14F-4D97-AF65-F5344CB8AC3E}">
+        <p14:creationId xmlns:p14="http://schemas.microsoft.com/office/powerpoint/2010/main" val="1024086991"/>
+      </p:ext>
+    </p:extLst>
+  </p:cSld>
+  <p:clrMapOvr>
+    <a:masterClrMapping/>
+  </p:clrMapOvr>
+</p:notes>
+</file>
+
+<file path=ppt/notesSlides/notesSlide12.xml><?xml version="1.0" encoding="utf-8"?>
+<p:notes xmlns:a="http://schemas.openxmlformats.org/drawingml/2006/main" xmlns:r="http://schemas.openxmlformats.org/officeDocument/2006/relationships" xmlns:p="http://schemas.openxmlformats.org/presentationml/2006/main">
+  <p:cSld>
+    <p:spTree>
+      <p:nvGrpSpPr>
+        <p:cNvPr id="1" name=""/>
+        <p:cNvGrpSpPr/>
+        <p:nvPr/>
+      </p:nvGrpSpPr>
+      <p:grpSpPr>
+        <a:xfrm>
+          <a:off x="0" y="0"/>
+          <a:ext cx="0" cy="0"/>
+          <a:chOff x="0" y="0"/>
+          <a:chExt cx="0" cy="0"/>
+        </a:xfrm>
+      </p:grpSpPr>
+      <p:sp>
+        <p:nvSpPr>
+          <p:cNvPr id="2" name="Slide Image Placeholder 1"/>
+          <p:cNvSpPr>
+            <a:spLocks noGrp="1" noRot="1" noChangeAspect="1"/>
+          </p:cNvSpPr>
+          <p:nvPr>
+            <p:ph type="sldImg"/>
+          </p:nvPr>
+        </p:nvSpPr>
+        <p:spPr/>
+      </p:sp>
+      <p:sp>
+        <p:nvSpPr>
+          <p:cNvPr id="3" name="Notes Placeholder 2"/>
+          <p:cNvSpPr>
+            <a:spLocks noGrp="1"/>
+          </p:cNvSpPr>
+          <p:nvPr>
+            <p:ph type="body" idx="1"/>
+          </p:nvPr>
+        </p:nvSpPr>
+        <p:spPr/>
+        <p:txBody>
+          <a:bodyPr/>
+          <a:lstStyle/>
+          <a:p>
+            <a:r>
+              <a:rPr lang="en-US" dirty="0"/>
+              <a:t/>
+            </a:r>
+            <a:endParaRPr lang="en-US" dirty="0"/>
+          </a:p>
+        </p:txBody>
+      </p:sp>
+      <p:sp>
+        <p:nvSpPr>
+          <p:cNvPr id="4" name="Slide Number Placeholder 3"/>
+          <p:cNvSpPr>
+            <a:spLocks noGrp="1"/>
+          </p:cNvSpPr>
+          <p:nvPr>
+            <p:ph type="sldNum" sz="quarter" idx="10"/>
+          </p:nvPr>
+        </p:nvSpPr>
+        <p:spPr/>
+        <p:txBody>
+          <a:bodyPr/>
+          <a:lstStyle/>
+          <a:p>
+            <a:fld id="{F7021451-1387-4CA6-816F-3879F97B5CBC}" type="slidenum">
+              <a:rPr lang="en-US"/>
+              <a:t>12</a:t>
+            </a:fld>
+            <a:endParaRPr lang="en-US"/>
+          </a:p>
+        </p:txBody>
+      </p:sp>
+    </p:spTree>
+    <p:extLst>
+      <p:ext uri="{BB962C8B-B14F-4D97-AF65-F5344CB8AC3E}">
+        <p14:creationId xmlns:p14="http://schemas.microsoft.com/office/powerpoint/2010/main" val="1024086991"/>
+      </p:ext>
+    </p:extLst>
+  </p:cSld>
+  <p:clrMapOvr>
+    <a:masterClrMapping/>
+  </p:clrMapOvr>
+</p:notes>
+</file>
+
+<file path=ppt/notesSlides/notesSlide13.xml><?xml version="1.0" encoding="utf-8"?>
+<p:notes xmlns:a="http://schemas.openxmlformats.org/drawingml/2006/main" xmlns:r="http://schemas.openxmlformats.org/officeDocument/2006/relationships" xmlns:p="http://schemas.openxmlformats.org/presentationml/2006/main">
+  <p:cSld>
+    <p:spTree>
+      <p:nvGrpSpPr>
+        <p:cNvPr id="1" name=""/>
+        <p:cNvGrpSpPr/>
+        <p:nvPr/>
+      </p:nvGrpSpPr>
+      <p:grpSpPr>
+        <a:xfrm>
+          <a:off x="0" y="0"/>
+          <a:ext cx="0" cy="0"/>
+          <a:chOff x="0" y="0"/>
+          <a:chExt cx="0" cy="0"/>
+        </a:xfrm>
+      </p:grpSpPr>
+      <p:sp>
+        <p:nvSpPr>
+          <p:cNvPr id="2" name="Slide Image Placeholder 1"/>
+          <p:cNvSpPr>
+            <a:spLocks noGrp="1" noRot="1" noChangeAspect="1"/>
+          </p:cNvSpPr>
+          <p:nvPr>
+            <p:ph type="sldImg"/>
+          </p:nvPr>
+        </p:nvSpPr>
+        <p:spPr/>
+      </p:sp>
+      <p:sp>
+        <p:nvSpPr>
+          <p:cNvPr id="3" name="Notes Placeholder 2"/>
+          <p:cNvSpPr>
+            <a:spLocks noGrp="1"/>
+          </p:cNvSpPr>
+          <p:nvPr>
+            <p:ph type="body" idx="1"/>
+          </p:nvPr>
+        </p:nvSpPr>
+        <p:spPr/>
+        <p:txBody>
+          <a:bodyPr/>
+          <a:lstStyle/>
+          <a:p>
+            <a:r>
+              <a:rPr lang="en-US" dirty="0"/>
+              <a:t/>
+            </a:r>
+            <a:endParaRPr lang="en-US" dirty="0"/>
+          </a:p>
+        </p:txBody>
+      </p:sp>
+      <p:sp>
+        <p:nvSpPr>
+          <p:cNvPr id="4" name="Slide Number Placeholder 3"/>
+          <p:cNvSpPr>
+            <a:spLocks noGrp="1"/>
+          </p:cNvSpPr>
+          <p:nvPr>
+            <p:ph type="sldNum" sz="quarter" idx="10"/>
+          </p:nvPr>
+        </p:nvSpPr>
+        <p:spPr/>
+        <p:txBody>
+          <a:bodyPr/>
+          <a:lstStyle/>
+          <a:p>
+            <a:fld id="{F7021451-1387-4CA6-816F-3879F97B5CBC}" type="slidenum">
+              <a:rPr lang="en-US"/>
+              <a:t>13</a:t>
+            </a:fld>
+            <a:endParaRPr lang="en-US"/>
+          </a:p>
+        </p:txBody>
+      </p:sp>
+    </p:spTree>
+    <p:extLst>
+      <p:ext uri="{BB962C8B-B14F-4D97-AF65-F5344CB8AC3E}">
+        <p14:creationId xmlns:p14="http://schemas.microsoft.com/office/powerpoint/2010/main" val="1024086991"/>
+      </p:ext>
+    </p:extLst>
+  </p:cSld>
+  <p:clrMapOvr>
+    <a:masterClrMapping/>
+  </p:clrMapOvr>
+</p:notes>
+</file>
+
+<file path=ppt/notesSlides/notesSlide14.xml><?xml version="1.0" encoding="utf-8"?>
+<p:notes xmlns:a="http://schemas.openxmlformats.org/drawingml/2006/main" xmlns:r="http://schemas.openxmlformats.org/officeDocument/2006/relationships" xmlns:p="http://schemas.openxmlformats.org/presentationml/2006/main">
+  <p:cSld>
+    <p:spTree>
+      <p:nvGrpSpPr>
+        <p:cNvPr id="1" name=""/>
+        <p:cNvGrpSpPr/>
+        <p:nvPr/>
+      </p:nvGrpSpPr>
+      <p:grpSpPr>
+        <a:xfrm>
+          <a:off x="0" y="0"/>
+          <a:ext cx="0" cy="0"/>
+          <a:chOff x="0" y="0"/>
+          <a:chExt cx="0" cy="0"/>
+        </a:xfrm>
+      </p:grpSpPr>
+      <p:sp>
+        <p:nvSpPr>
+          <p:cNvPr id="2" name="Slide Image Placeholder 1"/>
+          <p:cNvSpPr>
+            <a:spLocks noGrp="1" noRot="1" noChangeAspect="1"/>
+          </p:cNvSpPr>
+          <p:nvPr>
+            <p:ph type="sldImg"/>
+          </p:nvPr>
+        </p:nvSpPr>
+        <p:spPr/>
+      </p:sp>
+      <p:sp>
+        <p:nvSpPr>
+          <p:cNvPr id="3" name="Notes Placeholder 2"/>
+          <p:cNvSpPr>
+            <a:spLocks noGrp="1"/>
+          </p:cNvSpPr>
+          <p:nvPr>
+            <p:ph type="body" idx="1"/>
+          </p:nvPr>
+        </p:nvSpPr>
+        <p:spPr/>
+        <p:txBody>
+          <a:bodyPr/>
+          <a:lstStyle/>
+          <a:p>
+            <a:r>
+              <a:rPr lang="en-US" dirty="0"/>
+              <a:t/>
+            </a:r>
+            <a:endParaRPr lang="en-US" dirty="0"/>
+          </a:p>
+        </p:txBody>
+      </p:sp>
+      <p:sp>
+        <p:nvSpPr>
+          <p:cNvPr id="4" name="Slide Number Placeholder 3"/>
+          <p:cNvSpPr>
+            <a:spLocks noGrp="1"/>
+          </p:cNvSpPr>
+          <p:nvPr>
+            <p:ph type="sldNum" sz="quarter" idx="10"/>
+          </p:nvPr>
+        </p:nvSpPr>
+        <p:spPr/>
+        <p:txBody>
+          <a:bodyPr/>
+          <a:lstStyle/>
+          <a:p>
+            <a:fld id="{F7021451-1387-4CA6-816F-3879F97B5CBC}" type="slidenum">
+              <a:rPr lang="en-US"/>
+              <a:t>14</a:t>
+            </a:fld>
+            <a:endParaRPr lang="en-US"/>
+          </a:p>
+        </p:txBody>
+      </p:sp>
+    </p:spTree>
+    <p:extLst>
+      <p:ext uri="{BB962C8B-B14F-4D97-AF65-F5344CB8AC3E}">
+        <p14:creationId xmlns:p14="http://schemas.microsoft.com/office/powerpoint/2010/main" val="1024086991"/>
+      </p:ext>
+    </p:extLst>
+  </p:cSld>
+  <p:clrMapOvr>
+    <a:masterClrMapping/>
+  </p:clrMapOvr>
+</p:notes>
+</file>
+
+<file path=ppt/notesSlides/notesSlide15.xml><?xml version="1.0" encoding="utf-8"?>
+<p:notes xmlns:a="http://schemas.openxmlformats.org/drawingml/2006/main" xmlns:r="http://schemas.openxmlformats.org/officeDocument/2006/relationships" xmlns:p="http://schemas.openxmlformats.org/presentationml/2006/main">
+  <p:cSld>
+    <p:spTree>
+      <p:nvGrpSpPr>
+        <p:cNvPr id="1" name=""/>
+        <p:cNvGrpSpPr/>
+        <p:nvPr/>
+      </p:nvGrpSpPr>
+      <p:grpSpPr>
+        <a:xfrm>
+          <a:off x="0" y="0"/>
+          <a:ext cx="0" cy="0"/>
+          <a:chOff x="0" y="0"/>
+          <a:chExt cx="0" cy="0"/>
+        </a:xfrm>
+      </p:grpSpPr>
+      <p:sp>
+        <p:nvSpPr>
+          <p:cNvPr id="2" name="Slide Image Placeholder 1"/>
+          <p:cNvSpPr>
+            <a:spLocks noGrp="1" noRot="1" noChangeAspect="1"/>
+          </p:cNvSpPr>
+          <p:nvPr>
+            <p:ph type="sldImg"/>
+          </p:nvPr>
+        </p:nvSpPr>
+        <p:spPr/>
+      </p:sp>
+      <p:sp>
+        <p:nvSpPr>
+          <p:cNvPr id="3" name="Notes Placeholder 2"/>
+          <p:cNvSpPr>
+            <a:spLocks noGrp="1"/>
+          </p:cNvSpPr>
+          <p:nvPr>
+            <p:ph type="body" idx="1"/>
+          </p:nvPr>
+        </p:nvSpPr>
+        <p:spPr/>
+        <p:txBody>
+          <a:bodyPr/>
+          <a:lstStyle/>
+          <a:p>
+            <a:r>
+              <a:rPr lang="en-US" dirty="0"/>
+              <a:t/>
+            </a:r>
+            <a:endParaRPr lang="en-US" dirty="0"/>
+          </a:p>
+        </p:txBody>
+      </p:sp>
+      <p:sp>
+        <p:nvSpPr>
+          <p:cNvPr id="4" name="Slide Number Placeholder 3"/>
+          <p:cNvSpPr>
+            <a:spLocks noGrp="1"/>
+          </p:cNvSpPr>
+          <p:nvPr>
+            <p:ph type="sldNum" sz="quarter" idx="10"/>
+          </p:nvPr>
+        </p:nvSpPr>
+        <p:spPr/>
+        <p:txBody>
+          <a:bodyPr/>
+          <a:lstStyle/>
+          <a:p>
+            <a:fld id="{F7021451-1387-4CA6-816F-3879F97B5CBC}" type="slidenum">
+              <a:rPr lang="en-US"/>
+              <a:t>15</a:t>
+            </a:fld>
+            <a:endParaRPr lang="en-US"/>
+          </a:p>
+        </p:txBody>
+      </p:sp>
+    </p:spTree>
+    <p:extLst>
+      <p:ext uri="{BB962C8B-B14F-4D97-AF65-F5344CB8AC3E}">
+        <p14:creationId xmlns:p14="http://schemas.microsoft.com/office/powerpoint/2010/main" val="1024086991"/>
+      </p:ext>
+    </p:extLst>
+  </p:cSld>
+  <p:clrMapOvr>
+    <a:masterClrMapping/>
+  </p:clrMapOvr>
+</p:notes>
+</file>
+
+<file path=ppt/notesSlides/notesSlide16.xml><?xml version="1.0" encoding="utf-8"?>
+<p:notes xmlns:a="http://schemas.openxmlformats.org/drawingml/2006/main" xmlns:r="http://schemas.openxmlformats.org/officeDocument/2006/relationships" xmlns:p="http://schemas.openxmlformats.org/presentationml/2006/main">
+  <p:cSld>
+    <p:spTree>
+      <p:nvGrpSpPr>
+        <p:cNvPr id="1" name=""/>
+        <p:cNvGrpSpPr/>
+        <p:nvPr/>
+      </p:nvGrpSpPr>
+      <p:grpSpPr>
+        <a:xfrm>
+          <a:off x="0" y="0"/>
+          <a:ext cx="0" cy="0"/>
+          <a:chOff x="0" y="0"/>
+          <a:chExt cx="0" cy="0"/>
+        </a:xfrm>
+      </p:grpSpPr>
+      <p:sp>
+        <p:nvSpPr>
+          <p:cNvPr id="2" name="Slide Image Placeholder 1"/>
+          <p:cNvSpPr>
+            <a:spLocks noGrp="1" noRot="1" noChangeAspect="1"/>
+          </p:cNvSpPr>
+          <p:nvPr>
+            <p:ph type="sldImg"/>
+          </p:nvPr>
+        </p:nvSpPr>
+        <p:spPr/>
+      </p:sp>
+      <p:sp>
+        <p:nvSpPr>
+          <p:cNvPr id="3" name="Notes Placeholder 2"/>
+          <p:cNvSpPr>
+            <a:spLocks noGrp="1"/>
+          </p:cNvSpPr>
+          <p:nvPr>
+            <p:ph type="body" idx="1"/>
+          </p:nvPr>
+        </p:nvSpPr>
+        <p:spPr/>
+        <p:txBody>
+          <a:bodyPr/>
+          <a:lstStyle/>
+          <a:p>
+            <a:r>
+              <a:rPr lang="en-US" dirty="0"/>
+              <a:t/>
+            </a:r>
+            <a:endParaRPr lang="en-US" dirty="0"/>
+          </a:p>
+        </p:txBody>
+      </p:sp>
+      <p:sp>
+        <p:nvSpPr>
+          <p:cNvPr id="4" name="Slide Number Placeholder 3"/>
+          <p:cNvSpPr>
+            <a:spLocks noGrp="1"/>
+          </p:cNvSpPr>
+          <p:nvPr>
+            <p:ph type="sldNum" sz="quarter" idx="10"/>
+          </p:nvPr>
+        </p:nvSpPr>
+        <p:spPr/>
+        <p:txBody>
+          <a:bodyPr/>
+          <a:lstStyle/>
+          <a:p>
+            <a:fld id="{F7021451-1387-4CA6-816F-3879F97B5CBC}" type="slidenum">
+              <a:rPr lang="en-US"/>
+              <a:t>16</a:t>
+            </a:fld>
+            <a:endParaRPr lang="en-US"/>
+          </a:p>
+        </p:txBody>
+      </p:sp>
+    </p:spTree>
+    <p:extLst>
+      <p:ext uri="{BB962C8B-B14F-4D97-AF65-F5344CB8AC3E}">
+        <p14:creationId xmlns:p14="http://schemas.microsoft.com/office/powerpoint/2010/main" val="1024086991"/>
+      </p:ext>
+    </p:extLst>
+  </p:cSld>
+  <p:clrMapOvr>
+    <a:masterClrMapping/>
+  </p:clrMapOvr>
+</p:notes>
+</file>
+
+<file path=ppt/notesSlides/notesSlide17.xml><?xml version="1.0" encoding="utf-8"?>
+<p:notes xmlns:a="http://schemas.openxmlformats.org/drawingml/2006/main" xmlns:r="http://schemas.openxmlformats.org/officeDocument/2006/relationships" xmlns:p="http://schemas.openxmlformats.org/presentationml/2006/main">
+  <p:cSld>
+    <p:spTree>
+      <p:nvGrpSpPr>
+        <p:cNvPr id="1" name=""/>
+        <p:cNvGrpSpPr/>
+        <p:nvPr/>
+      </p:nvGrpSpPr>
+      <p:grpSpPr>
+        <a:xfrm>
+          <a:off x="0" y="0"/>
+          <a:ext cx="0" cy="0"/>
+          <a:chOff x="0" y="0"/>
+          <a:chExt cx="0" cy="0"/>
+        </a:xfrm>
+      </p:grpSpPr>
+      <p:sp>
+        <p:nvSpPr>
+          <p:cNvPr id="2" name="Slide Image Placeholder 1"/>
+          <p:cNvSpPr>
+            <a:spLocks noGrp="1" noRot="1" noChangeAspect="1"/>
+          </p:cNvSpPr>
+          <p:nvPr>
+            <p:ph type="sldImg"/>
+          </p:nvPr>
+        </p:nvSpPr>
+        <p:spPr/>
+      </p:sp>
+      <p:sp>
+        <p:nvSpPr>
+          <p:cNvPr id="3" name="Notes Placeholder 2"/>
+          <p:cNvSpPr>
+            <a:spLocks noGrp="1"/>
+          </p:cNvSpPr>
+          <p:nvPr>
+            <p:ph type="body" idx="1"/>
+          </p:nvPr>
+        </p:nvSpPr>
+        <p:spPr/>
+        <p:txBody>
+          <a:bodyPr/>
+          <a:lstStyle/>
+          <a:p>
+            <a:r>
+              <a:rPr lang="en-US" dirty="0"/>
+              <a:t/>
+            </a:r>
+            <a:endParaRPr lang="en-US" dirty="0"/>
+          </a:p>
+        </p:txBody>
+      </p:sp>
+      <p:sp>
+        <p:nvSpPr>
+          <p:cNvPr id="4" name="Slide Number Placeholder 3"/>
+          <p:cNvSpPr>
+            <a:spLocks noGrp="1"/>
+          </p:cNvSpPr>
+          <p:nvPr>
+            <p:ph type="sldNum" sz="quarter" idx="10"/>
+          </p:nvPr>
+        </p:nvSpPr>
+        <p:spPr/>
+        <p:txBody>
+          <a:bodyPr/>
+          <a:lstStyle/>
+          <a:p>
+            <a:fld id="{F7021451-1387-4CA6-816F-3879F97B5CBC}" type="slidenum">
+              <a:rPr lang="en-US"/>
+              <a:t>17</a:t>
+            </a:fld>
+            <a:endParaRPr lang="en-US"/>
+          </a:p>
+        </p:txBody>
+      </p:sp>
+    </p:spTree>
+    <p:extLst>
+      <p:ext uri="{BB962C8B-B14F-4D97-AF65-F5344CB8AC3E}">
+        <p14:creationId xmlns:p14="http://schemas.microsoft.com/office/powerpoint/2010/main" val="1024086991"/>
+      </p:ext>
+    </p:extLst>
+  </p:cSld>
+  <p:clrMapOvr>
+    <a:masterClrMapping/>
+  </p:clrMapOvr>
+</p:notes>
+</file>
+
+<file path=ppt/notesSlides/notesSlide18.xml><?xml version="1.0" encoding="utf-8"?>
+<p:notes xmlns:a="http://schemas.openxmlformats.org/drawingml/2006/main" xmlns:r="http://schemas.openxmlformats.org/officeDocument/2006/relationships" xmlns:p="http://schemas.openxmlformats.org/presentationml/2006/main">
+  <p:cSld>
+    <p:spTree>
+      <p:nvGrpSpPr>
+        <p:cNvPr id="1" name=""/>
+        <p:cNvGrpSpPr/>
+        <p:nvPr/>
+      </p:nvGrpSpPr>
+      <p:grpSpPr>
+        <a:xfrm>
+          <a:off x="0" y="0"/>
+          <a:ext cx="0" cy="0"/>
+          <a:chOff x="0" y="0"/>
+          <a:chExt cx="0" cy="0"/>
+        </a:xfrm>
+      </p:grpSpPr>
+      <p:sp>
+        <p:nvSpPr>
+          <p:cNvPr id="2" name="Slide Image Placeholder 1"/>
+          <p:cNvSpPr>
+            <a:spLocks noGrp="1" noRot="1" noChangeAspect="1"/>
+          </p:cNvSpPr>
+          <p:nvPr>
+            <p:ph type="sldImg"/>
+          </p:nvPr>
+        </p:nvSpPr>
+        <p:spPr/>
+      </p:sp>
+      <p:sp>
+        <p:nvSpPr>
+          <p:cNvPr id="3" name="Notes Placeholder 2"/>
+          <p:cNvSpPr>
+            <a:spLocks noGrp="1"/>
+          </p:cNvSpPr>
+          <p:nvPr>
+            <p:ph type="body" idx="1"/>
+          </p:nvPr>
+        </p:nvSpPr>
+        <p:spPr/>
+        <p:txBody>
+          <a:bodyPr/>
+          <a:lstStyle/>
+          <a:p>
+            <a:r>
+              <a:rPr lang="en-US" dirty="0"/>
+              <a:t/>
+            </a:r>
+            <a:endParaRPr lang="en-US" dirty="0"/>
+          </a:p>
+        </p:txBody>
+      </p:sp>
+      <p:sp>
+        <p:nvSpPr>
+          <p:cNvPr id="4" name="Slide Number Placeholder 3"/>
+          <p:cNvSpPr>
+            <a:spLocks noGrp="1"/>
+          </p:cNvSpPr>
+          <p:nvPr>
+            <p:ph type="sldNum" sz="quarter" idx="10"/>
+          </p:nvPr>
+        </p:nvSpPr>
+        <p:spPr/>
+        <p:txBody>
+          <a:bodyPr/>
+          <a:lstStyle/>
+          <a:p>
+            <a:fld id="{F7021451-1387-4CA6-816F-3879F97B5CBC}" type="slidenum">
+              <a:rPr lang="en-US"/>
+              <a:t>18</a:t>
             </a:fld>
             <a:endParaRPr lang="en-US"/>
           </a:p>
@@ -3130,7 +4118,7 @@
                 <a:ea typeface="Calibri" pitchFamily="34" charset="-122"/>
                 <a:cs typeface="Calibri" pitchFamily="34" charset="-120"/>
               </a:rPr>
-              <a:t>WHAT TO ANTICIPATE</a:t>
+              <a:t>OUR ANSWER</a:t>
             </a:r>
             <a:endParaRPr lang="en-US" sz="1150" dirty="0"/>
           </a:p>
@@ -3169,7 +4157,7 @@
                 <a:ea typeface="Cambria" pitchFamily="34" charset="-122"/>
                 <a:cs typeface="Cambria" pitchFamily="34" charset="-120"/>
               </a:rPr>
-              <a:t>Identified risks and how we answer them</a:t>
+              <a:t>Two technologies for two different constraints</a:t>
             </a:r>
             <a:endParaRPr lang="en-US" sz="3000" dirty="0"/>
           </a:p>
@@ -3208,7 +4196,7 @@
                 <a:ea typeface="Cambria" pitchFamily="34" charset="-122"/>
                 <a:cs typeface="Cambria" pitchFamily="34" charset="-120"/>
               </a:rPr>
-              <a:t>Risks</a:t>
+              <a:t>EVERGREEN® — hold the water</a:t>
             </a:r>
             <a:endParaRPr lang="en-US" sz="1600" dirty="0"/>
           </a:p>
@@ -3254,7 +4242,7 @@
                 <a:ea typeface="Calibri" pitchFamily="34" charset="-122"/>
                 <a:cs typeface="Calibri" pitchFamily="34" charset="-120"/>
               </a:rPr>
-              <a:t>Year-to-year rainfall variability: a wet season masks the value of the product.</a:t>
+              <a:t>Potassium-based hydro-retainer, placed in the root zone at planting or at the first pass of the season.</a:t>
             </a:r>
             <a:endParaRPr lang="en-US" sz="1350" dirty="0"/>
           </a:p>
@@ -3278,7 +4266,7 @@
                 <a:ea typeface="Calibri" pitchFamily="34" charset="-122"/>
                 <a:cs typeface="Calibri" pitchFamily="34" charset="-120"/>
               </a:rPr>
-              <a:t>Long purchasing cycles and agronomist sign-off on large operations, plus dealer and co-op channels to qualify.</a:t>
+              <a:t>Captures rain and irrigation water, then releases it back to the plant as demand arises, removing water stress during the critical growth stages.</a:t>
             </a:r>
             <a:endParaRPr lang="en-US" sz="1350" dirty="0"/>
           </a:p>
@@ -3302,7 +4290,7 @@
                 <a:ea typeface="Calibri" pitchFamily="34" charset="-122"/>
                 <a:cs typeface="Calibri" pitchFamily="34" charset="-120"/>
               </a:rPr>
-              <a:t>Memory of low-grade sodium-based polymers, which left a poor reputation among growers.</a:t>
+              <a:t>Absorbs on the order of 300 times its own weight; useful life of 3 to 4 years in the soil.</a:t>
             </a:r>
             <a:endParaRPr lang="en-US" sz="1350" dirty="0"/>
           </a:p>
@@ -3326,7 +4314,7 @@
                 <a:ea typeface="Calibri" pitchFamily="34" charset="-122"/>
                 <a:cs typeface="Calibri" pitchFamily="34" charset="-120"/>
               </a:rPr>
-              <a:t>Tight margins on row crops when input costs rise faster than commodity prices.</a:t>
+              <a:t>Degrades by 20 to 25% per year, with no accumulation and no risk of overdose.</a:t>
             </a:r>
             <a:endParaRPr lang="en-US" sz="1350" dirty="0"/>
           </a:p>
@@ -3365,7 +4353,7 @@
                 <a:ea typeface="Cambria" pitchFamily="34" charset="-122"/>
                 <a:cs typeface="Cambria" pitchFamily="34" charset="-120"/>
               </a:rPr>
-              <a:t>Answers</a:t>
+              <a:t>ECOFERT® — feed without depleting</a:t>
             </a:r>
             <a:endParaRPr lang="en-US" sz="1600" dirty="0"/>
           </a:p>
@@ -3411,7 +4399,7 @@
                 <a:ea typeface="Calibri" pitchFamily="34" charset="-122"/>
                 <a:cs typeface="Calibri" pitchFamily="34" charset="-120"/>
               </a:rPr>
-              <a:t>Run the trial over a full cycle with a control block, so the gain is documented even in a favorable season.</a:t>
+              <a:t>Microdose fertilizer built on amino acids, nitrogen, phosphorus and potassium, sourced from renewable inputs.</a:t>
             </a:r>
             <a:endParaRPr lang="en-US" sz="1350" dirty="0"/>
           </a:p>
@@ -3435,7 +4423,7 @@
                 <a:ea typeface="Calibri" pitchFamily="34" charset="-122"/>
                 <a:cs typeface="Calibri" pitchFamily="34" charset="-120"/>
               </a:rPr>
-              <a:t>Work through dealers, co-ops and crop consultants rather than farm by farm, and supply the trial protocol in advance.</a:t>
+              <a:t>Non-chelating: it does not strip the clay-humus complex and does not raise soil salinity or nitrate load.</a:t>
             </a:r>
             <a:endParaRPr lang="en-US" sz="1350" dirty="0"/>
           </a:p>
@@ -3459,7 +4447,7 @@
                 <a:ea typeface="Calibri" pitchFamily="34" charset="-122"/>
                 <a:cs typeface="Calibri" pitchFamily="34" charset="-120"/>
               </a:rPr>
-              <a:t>Document the formulation: potassium, never sodium, compatible with food crops and with soil health.</a:t>
+              <a:t>SOHISCERT and EU Organic certified — the condition of entry to organic and export buyer programs.</a:t>
             </a:r>
             <a:endParaRPr lang="en-US" sz="1350" dirty="0"/>
           </a:p>
@@ -3483,7 +4471,7 @@
                 <a:ea typeface="Calibri" pitchFamily="34" charset="-122"/>
                 <a:cs typeface="Calibri" pitchFamily="34" charset="-120"/>
               </a:rPr>
-              <a:t>Spread the outlay: a 3 to 4 year useful life amortizes the cost across several seasons.</a:t>
+              <a:t>1 to 4 bottles of 140 ml per hectare, compatible with existing fertigation equipment.</a:t>
             </a:r>
             <a:endParaRPr lang="en-US" sz="1350" dirty="0"/>
           </a:p>
@@ -3552,7 +4540,7 @@
                 <a:ea typeface="Calibri" pitchFamily="34" charset="-122"/>
                 <a:cs typeface="Calibri" pitchFamily="34" charset="-120"/>
               </a:rPr>
-              <a:t>Acrylamide analysis (Polymex laboratory, ISO 9001, content below 3.0 µg/g), REACH / SVHC screening (SGS) and the SOHISCERT certificate valid to 4 September 2027 are all available on request.</a:t>
+              <a:t>The two products are sold separately but were designed to reinforce one another: the hydro-retainer extends how long water stays available, the fertilizer converts that available water into growth without degrading the soil.</a:t>
             </a:r>
             <a:endParaRPr lang="en-US" sz="1100" dirty="0"/>
           </a:p>
@@ -3651,6 +4639,4717 @@
 <file path=ppt/slides/slide11.xml><?xml version="1.0" encoding="utf-8"?>
 <p:sld xmlns:a="http://schemas.openxmlformats.org/drawingml/2006/main" xmlns:r="http://schemas.openxmlformats.org/officeDocument/2006/relationships" xmlns:p="http://schemas.openxmlformats.org/presentationml/2006/main">
   <p:cSld name="Slide 11">
+    <p:bg>
+      <p:bgPr>
+        <a:solidFill>
+          <a:srgbClr val="FAFBFC"/>
+        </a:solidFill>
+      </p:bgPr>
+    </p:bg>
+    <p:spTree>
+      <p:nvGrpSpPr>
+        <p:cNvPr id="1" name=""/>
+        <p:cNvGrpSpPr/>
+        <p:nvPr/>
+      </p:nvGrpSpPr>
+      <p:grpSpPr>
+        <a:xfrm>
+          <a:off x="0" y="0"/>
+          <a:ext cx="0" cy="0"/>
+          <a:chOff x="0" y="0"/>
+          <a:chExt cx="0" cy="0"/>
+        </a:xfrm>
+      </p:grpSpPr>
+      <p:sp>
+        <p:nvSpPr>
+          <p:cNvPr id="2" name="Text 0"/>
+          <p:cNvSpPr txBox="1"/>
+          <p:nvPr/>
+        </p:nvSpPr>
+        <p:spPr>
+          <a:xfrm>
+            <a:off x="594360" y="411480"/>
+            <a:ext cx="10515600" cy="274320"/>
+          </a:xfrm>
+          <a:prstGeom prst="rect">
+            <a:avLst/>
+          </a:prstGeom>
+          <a:noFill/>
+          <a:ln/>
+        </p:spPr>
+        <p:txBody>
+          <a:bodyPr wrap="square" lIns="0" tIns="0" rIns="0" bIns="0" rtlCol="0" anchor="ctr"/>
+          <a:lstStyle/>
+          <a:p>
+            <a:pPr algn="l" indent="0" marL="0">
+              <a:buNone/>
+            </a:pPr>
+            <a:r>
+              <a:rPr lang="en-US" sz="1150" b="1" spc="200" kern="0" dirty="0">
+                <a:solidFill>
+                  <a:srgbClr val="D98C2B"/>
+                </a:solidFill>
+                <a:latin typeface="Calibri" pitchFamily="34" charset="0"/>
+                <a:ea typeface="Calibri" pitchFamily="34" charset="-122"/>
+                <a:cs typeface="Calibri" pitchFamily="34" charset="-120"/>
+              </a:rPr>
+              <a:t>The rest of the range</a:t>
+            </a:r>
+            <a:endParaRPr lang="en-US" sz="1150" dirty="0"/>
+          </a:p>
+        </p:txBody>
+      </p:sp>
+      <p:sp>
+        <p:nvSpPr>
+          <p:cNvPr id="3" name="Text 1"/>
+          <p:cNvSpPr txBox="1"/>
+          <p:nvPr/>
+        </p:nvSpPr>
+        <p:spPr>
+          <a:xfrm>
+            <a:off x="594360" y="731520"/>
+            <a:ext cx="10881360" cy="731520"/>
+          </a:xfrm>
+          <a:prstGeom prst="rect">
+            <a:avLst/>
+          </a:prstGeom>
+          <a:noFill/>
+          <a:ln/>
+        </p:spPr>
+        <p:txBody>
+          <a:bodyPr wrap="square" lIns="0" tIns="0" rIns="0" bIns="0" rtlCol="0" anchor="ctr"/>
+          <a:lstStyle/>
+          <a:p>
+            <a:pPr algn="l" indent="0" marL="0">
+              <a:buNone/>
+            </a:pPr>
+            <a:r>
+              <a:rPr lang="en-US" sz="3000" b="1" dirty="0">
+                <a:solidFill>
+                  <a:srgbClr val="0F2E40"/>
+                </a:solidFill>
+                <a:latin typeface="Cambria" pitchFamily="34" charset="0"/>
+                <a:ea typeface="Cambria" pitchFamily="34" charset="-122"/>
+                <a:cs typeface="Cambria" pitchFamily="34" charset="-120"/>
+              </a:rPr>
+              <a:t>Protecting crops, holding soils</a:t>
+            </a:r>
+            <a:endParaRPr lang="en-US" sz="3000" dirty="0"/>
+          </a:p>
+        </p:txBody>
+      </p:sp>
+      <p:sp>
+        <p:nvSpPr>
+          <p:cNvPr id="4" name="Text 2"/>
+          <p:cNvSpPr txBox="1"/>
+          <p:nvPr/>
+        </p:nvSpPr>
+        <p:spPr>
+          <a:xfrm>
+            <a:off x="594360" y="1783080"/>
+            <a:ext cx="5227168" cy="411480"/>
+          </a:xfrm>
+          <a:prstGeom prst="rect">
+            <a:avLst/>
+          </a:prstGeom>
+          <a:noFill/>
+          <a:ln/>
+        </p:spPr>
+        <p:txBody>
+          <a:bodyPr wrap="square" lIns="0" tIns="0" rIns="0" bIns="0" rtlCol="0" anchor="ctr"/>
+          <a:lstStyle/>
+          <a:p>
+            <a:pPr algn="l" indent="0" marL="0">
+              <a:buNone/>
+            </a:pPr>
+            <a:r>
+              <a:rPr lang="en-US" sz="1600" b="1" dirty="0">
+                <a:solidFill>
+                  <a:srgbClr val="1D4E6B"/>
+                </a:solidFill>
+                <a:latin typeface="Cambria" pitchFamily="34" charset="0"/>
+                <a:ea typeface="Cambria" pitchFamily="34" charset="-122"/>
+                <a:cs typeface="Cambria" pitchFamily="34" charset="-120"/>
+              </a:rPr>
+              <a:t>NAPEMA® — protection without residue</a:t>
+            </a:r>
+            <a:endParaRPr lang="en-US" sz="1600" dirty="0"/>
+          </a:p>
+        </p:txBody>
+      </p:sp>
+      <p:sp>
+        <p:nvSpPr>
+          <p:cNvPr id="5" name="Text 3"/>
+          <p:cNvSpPr txBox="1"/>
+          <p:nvPr/>
+        </p:nvSpPr>
+        <p:spPr>
+          <a:xfrm>
+            <a:off x="594360" y="2286000"/>
+            <a:ext cx="5227168" cy="2468880"/>
+          </a:xfrm>
+          <a:prstGeom prst="rect">
+            <a:avLst/>
+          </a:prstGeom>
+          <a:noFill/>
+          <a:ln/>
+        </p:spPr>
+        <p:txBody>
+          <a:bodyPr wrap="square" lIns="0" tIns="0" rIns="0" bIns="0" rtlCol="0" anchor="t"/>
+          <a:lstStyle/>
+          <a:p>
+            <a:pPr algn="l" marL="342900" indent="-342900">
+              <a:lnSpc>
+                <a:spcPct val="122000"/>
+              </a:lnSpc>
+              <a:spcAft>
+                <a:spcPts val="1000"/>
+              </a:spcAft>
+              <a:buSzPct val="100000"/>
+              <a:buChar char="•"/>
+            </a:pPr>
+            <a:r>
+              <a:rPr lang="en-US" sz="1350" dirty="0">
+                <a:solidFill>
+                  <a:srgbClr val="2F3E47"/>
+                </a:solidFill>
+                <a:latin typeface="Calibri" pitchFamily="34" charset="0"/>
+                <a:ea typeface="Calibri" pitchFamily="34" charset="-122"/>
+                <a:cs typeface="Calibri" pitchFamily="34" charset="-120"/>
+              </a:rPr>
+              <a:t>Controls diseases, parasites, fungi and pests, with no synthetic molecule.</a:t>
+            </a:r>
+            <a:endParaRPr lang="en-US" sz="1350" dirty="0"/>
+          </a:p>
+          <a:p>
+            <a:pPr algn="l" marL="342900" indent="-342900">
+              <a:lnSpc>
+                <a:spcPct val="122000"/>
+              </a:lnSpc>
+              <a:spcAft>
+                <a:spcPts val="1000"/>
+              </a:spcAft>
+              <a:buSzPct val="100000"/>
+              <a:buChar char="•"/>
+            </a:pPr>
+            <a:r>
+              <a:rPr lang="en-US" sz="1350" dirty="0">
+                <a:solidFill>
+                  <a:srgbClr val="2F3E47"/>
+                </a:solidFill>
+                <a:latin typeface="Calibri" pitchFamily="34" charset="0"/>
+                <a:ea typeface="Calibri" pitchFamily="34" charset="-122"/>
+                <a:cs typeface="Calibri" pitchFamily="34" charset="-120"/>
+              </a:rPr>
+              <a:t>Foliar and root spraying, working both preventively and curatively.</a:t>
+            </a:r>
+            <a:endParaRPr lang="en-US" sz="1350" dirty="0"/>
+          </a:p>
+          <a:p>
+            <a:pPr algn="l" marL="342900" indent="-342900">
+              <a:lnSpc>
+                <a:spcPct val="122000"/>
+              </a:lnSpc>
+              <a:spcAft>
+                <a:spcPts val="1000"/>
+              </a:spcAft>
+              <a:buSzPct val="100000"/>
+              <a:buChar char="•"/>
+            </a:pPr>
+            <a:r>
+              <a:rPr lang="en-US" sz="1350" dirty="0">
+                <a:solidFill>
+                  <a:srgbClr val="2F3E47"/>
+                </a:solidFill>
+                <a:latin typeface="Calibri" pitchFamily="34" charset="0"/>
+                <a:ea typeface="Calibri" pitchFamily="34" charset="-122"/>
+                <a:cs typeface="Calibri" pitchFamily="34" charset="-120"/>
+              </a:rPr>
+              <a:t>No residue in soil, plant or air: pollinators and beneficial insects are spared.</a:t>
+            </a:r>
+            <a:endParaRPr lang="en-US" sz="1350" dirty="0"/>
+          </a:p>
+          <a:p>
+            <a:pPr algn="l" marL="342900" indent="-342900">
+              <a:lnSpc>
+                <a:spcPct val="122000"/>
+              </a:lnSpc>
+              <a:spcAft>
+                <a:spcPts val="1000"/>
+              </a:spcAft>
+              <a:buSzPct val="100000"/>
+              <a:buChar char="•"/>
+            </a:pPr>
+            <a:r>
+              <a:rPr lang="en-US" sz="1350" dirty="0">
+                <a:solidFill>
+                  <a:srgbClr val="2F3E47"/>
+                </a:solidFill>
+                <a:latin typeface="Calibri" pitchFamily="34" charset="0"/>
+                <a:ea typeface="Calibri" pitchFamily="34" charset="-122"/>
+                <a:cs typeface="Calibri" pitchFamily="34" charset="-120"/>
+              </a:rPr>
+              <a:t>Formulated for one precise problem: mealybug, citrus greening (HLB), nematodes.</a:t>
+            </a:r>
+            <a:endParaRPr lang="en-US" sz="1350" dirty="0"/>
+          </a:p>
+        </p:txBody>
+      </p:sp>
+      <p:sp>
+        <p:nvSpPr>
+          <p:cNvPr id="6" name="Text 4"/>
+          <p:cNvSpPr txBox="1"/>
+          <p:nvPr/>
+        </p:nvSpPr>
+        <p:spPr>
+          <a:xfrm>
+            <a:off x="6370168" y="1783080"/>
+            <a:ext cx="5227168" cy="411480"/>
+          </a:xfrm>
+          <a:prstGeom prst="rect">
+            <a:avLst/>
+          </a:prstGeom>
+          <a:noFill/>
+          <a:ln/>
+        </p:spPr>
+        <p:txBody>
+          <a:bodyPr wrap="square" lIns="0" tIns="0" rIns="0" bIns="0" rtlCol="0" anchor="ctr"/>
+          <a:lstStyle/>
+          <a:p>
+            <a:pPr algn="l" indent="0" marL="0">
+              <a:buNone/>
+            </a:pPr>
+            <a:r>
+              <a:rPr lang="en-US" sz="1600" b="1" dirty="0">
+                <a:solidFill>
+                  <a:srgbClr val="1D4E6B"/>
+                </a:solidFill>
+                <a:latin typeface="Cambria" pitchFamily="34" charset="0"/>
+                <a:ea typeface="Cambria" pitchFamily="34" charset="-122"/>
+                <a:cs typeface="Cambria" pitchFamily="34" charset="-120"/>
+              </a:rPr>
+              <a:t>Paulownia ALTIFOLIA® — the tree for hot regions</a:t>
+            </a:r>
+            <a:endParaRPr lang="en-US" sz="1600" dirty="0"/>
+          </a:p>
+        </p:txBody>
+      </p:sp>
+      <p:sp>
+        <p:nvSpPr>
+          <p:cNvPr id="7" name="Text 5"/>
+          <p:cNvSpPr txBox="1"/>
+          <p:nvPr/>
+        </p:nvSpPr>
+        <p:spPr>
+          <a:xfrm>
+            <a:off x="6370168" y="2286000"/>
+            <a:ext cx="5227168" cy="2468880"/>
+          </a:xfrm>
+          <a:prstGeom prst="rect">
+            <a:avLst/>
+          </a:prstGeom>
+          <a:noFill/>
+          <a:ln/>
+        </p:spPr>
+        <p:txBody>
+          <a:bodyPr wrap="square" lIns="0" tIns="0" rIns="0" bIns="0" rtlCol="0" anchor="t"/>
+          <a:lstStyle/>
+          <a:p>
+            <a:pPr algn="l" marL="342900" indent="-342900">
+              <a:lnSpc>
+                <a:spcPct val="122000"/>
+              </a:lnSpc>
+              <a:spcAft>
+                <a:spcPts val="1000"/>
+              </a:spcAft>
+              <a:buSzPct val="100000"/>
+              <a:buChar char="•"/>
+            </a:pPr>
+            <a:r>
+              <a:rPr lang="en-US" sz="1350" dirty="0">
+                <a:solidFill>
+                  <a:srgbClr val="2F3E47"/>
+                </a:solidFill>
+                <a:latin typeface="Calibri" pitchFamily="34" charset="0"/>
+                <a:ea typeface="Calibri" pitchFamily="34" charset="-122"/>
+                <a:cs typeface="Calibri" pitchFamily="34" charset="-120"/>
+              </a:rPr>
+              <a:t>13 to 15 m in six to eight years, with a wide trunk.</a:t>
+            </a:r>
+            <a:endParaRPr lang="en-US" sz="1350" dirty="0"/>
+          </a:p>
+          <a:p>
+            <a:pPr algn="l" marL="342900" indent="-342900">
+              <a:lnSpc>
+                <a:spcPct val="122000"/>
+              </a:lnSpc>
+              <a:spcAft>
+                <a:spcPts val="1000"/>
+              </a:spcAft>
+              <a:buSzPct val="100000"/>
+              <a:buChar char="•"/>
+            </a:pPr>
+            <a:r>
+              <a:rPr lang="en-US" sz="1350" dirty="0">
+                <a:solidFill>
+                  <a:srgbClr val="2F3E47"/>
+                </a:solidFill>
+                <a:latin typeface="Calibri" pitchFamily="34" charset="0"/>
+                <a:ea typeface="Calibri" pitchFamily="34" charset="-122"/>
+                <a:cs typeface="Calibri" pitchFamily="34" charset="-120"/>
+              </a:rPr>
+              <a:t>Combined with 100 g of EVERGREEN® per plant, irrigation needs drop by 50%.</a:t>
+            </a:r>
+            <a:endParaRPr lang="en-US" sz="1350" dirty="0"/>
+          </a:p>
+          <a:p>
+            <a:pPr algn="l" marL="342900" indent="-342900">
+              <a:lnSpc>
+                <a:spcPct val="122000"/>
+              </a:lnSpc>
+              <a:spcAft>
+                <a:spcPts val="1000"/>
+              </a:spcAft>
+              <a:buSzPct val="100000"/>
+              <a:buChar char="•"/>
+            </a:pPr>
+            <a:r>
+              <a:rPr lang="en-US" sz="1350" dirty="0">
+                <a:solidFill>
+                  <a:srgbClr val="2F3E47"/>
+                </a:solidFill>
+                <a:latin typeface="Calibri" pitchFamily="34" charset="0"/>
+                <a:ea typeface="Calibri" pitchFamily="34" charset="-122"/>
+                <a:cs typeface="Calibri" pitchFamily="34" charset="-120"/>
+              </a:rPr>
+              <a:t>Withstands −25 °C to +45 °C; the wood only ignites above 426 °C.</a:t>
+            </a:r>
+            <a:endParaRPr lang="en-US" sz="1350" dirty="0"/>
+          </a:p>
+          <a:p>
+            <a:pPr algn="l" marL="342900" indent="-342900">
+              <a:lnSpc>
+                <a:spcPct val="122000"/>
+              </a:lnSpc>
+              <a:spcAft>
+                <a:spcPts val="1000"/>
+              </a:spcAft>
+              <a:buSzPct val="100000"/>
+              <a:buChar char="•"/>
+            </a:pPr>
+            <a:r>
+              <a:rPr lang="en-US" sz="1350" dirty="0">
+                <a:solidFill>
+                  <a:srgbClr val="2F3E47"/>
+                </a:solidFill>
+                <a:latin typeface="Calibri" pitchFamily="34" charset="0"/>
+                <a:ea typeface="Calibri" pitchFamily="34" charset="-122"/>
+                <a:cs typeface="Calibri" pitchFamily="34" charset="-120"/>
+              </a:rPr>
+              <a:t>Windbreak, protection against soil erosion, 400 to 700 kg of honey per hectare.</a:t>
+            </a:r>
+            <a:endParaRPr lang="en-US" sz="1350" dirty="0"/>
+          </a:p>
+        </p:txBody>
+      </p:sp>
+      <p:sp>
+        <p:nvSpPr>
+          <p:cNvPr id="8" name="Shape 6"/>
+          <p:cNvSpPr/>
+          <p:nvPr/>
+        </p:nvSpPr>
+        <p:spPr>
+          <a:xfrm>
+            <a:off x="594360" y="4846320"/>
+            <a:ext cx="11002975" cy="960120"/>
+          </a:xfrm>
+          <a:prstGeom prst="roundRect">
+            <a:avLst>
+              <a:gd name="adj" fmla="val 7619"/>
+            </a:avLst>
+          </a:prstGeom>
+          <a:solidFill>
+            <a:srgbClr val="EEF2F5"/>
+          </a:solidFill>
+          <a:ln w="9525">
+            <a:solidFill>
+              <a:srgbClr val="D8E1E7"/>
+            </a:solidFill>
+            <a:prstDash val="solid"/>
+          </a:ln>
+        </p:spPr>
+      </p:sp>
+      <p:sp>
+        <p:nvSpPr>
+          <p:cNvPr id="9" name="Text 7"/>
+          <p:cNvSpPr txBox="1"/>
+          <p:nvPr/>
+        </p:nvSpPr>
+        <p:spPr>
+          <a:xfrm>
+            <a:off x="822960" y="4983480"/>
+            <a:ext cx="10545775" cy="713232"/>
+          </a:xfrm>
+          <a:prstGeom prst="rect">
+            <a:avLst/>
+          </a:prstGeom>
+          <a:noFill/>
+          <a:ln/>
+        </p:spPr>
+        <p:txBody>
+          <a:bodyPr wrap="square" lIns="0" tIns="0" rIns="0" bIns="0" rtlCol="0" anchor="t"/>
+          <a:lstStyle/>
+          <a:p>
+            <a:pPr algn="l" indent="0" marL="0">
+              <a:lnSpc>
+                <a:spcPct val="118000"/>
+              </a:lnSpc>
+              <a:buNone/>
+            </a:pPr>
+            <a:r>
+              <a:rPr lang="en-US" sz="1100" dirty="0">
+                <a:solidFill>
+                  <a:srgbClr val="6B7D87"/>
+                </a:solidFill>
+                <a:latin typeface="Calibri" pitchFamily="34" charset="0"/>
+                <a:ea typeface="Calibri" pitchFamily="34" charset="-122"/>
+                <a:cs typeface="Calibri" pitchFamily="34" charset="-120"/>
+              </a:rPr>
+              <a:t>Plants delivered potted (25 to 30 cm), certified disease-free and replaced under warranty in case of loss. First harvest at the end of year six, with wood valued at around €400 to €450 per m³.</a:t>
+            </a:r>
+            <a:endParaRPr lang="en-US" sz="1100" dirty="0"/>
+          </a:p>
+        </p:txBody>
+      </p:sp>
+      <p:sp>
+        <p:nvSpPr>
+          <p:cNvPr id="10" name="Text 8"/>
+          <p:cNvSpPr txBox="1"/>
+          <p:nvPr/>
+        </p:nvSpPr>
+        <p:spPr>
+          <a:xfrm>
+            <a:off x="502920" y="6382512"/>
+            <a:ext cx="8229600" cy="274320"/>
+          </a:xfrm>
+          <a:prstGeom prst="rect">
+            <a:avLst/>
+          </a:prstGeom>
+          <a:noFill/>
+          <a:ln/>
+        </p:spPr>
+        <p:txBody>
+          <a:bodyPr wrap="square" lIns="0" tIns="0" rIns="0" bIns="0" rtlCol="0" anchor="ctr"/>
+          <a:lstStyle/>
+          <a:p>
+            <a:pPr algn="l" indent="0" marL="0">
+              <a:buNone/>
+            </a:pPr>
+            <a:r>
+              <a:rPr lang="en-US" sz="950" dirty="0">
+                <a:solidFill>
+                  <a:srgbClr val="6B7D87">
+                    <a:alpha val="80000"/>
+                  </a:srgbClr>
+                </a:solidFill>
+                <a:latin typeface="Calibri" pitchFamily="34" charset="0"/>
+                <a:ea typeface="Calibri" pitchFamily="34" charset="-122"/>
+                <a:cs typeface="Calibri" pitchFamily="34" charset="-120"/>
+              </a:rPr>
+              <a:t>Green Solutions · United States Market Dossier</a:t>
+            </a:r>
+            <a:endParaRPr lang="en-US" sz="950" dirty="0"/>
+          </a:p>
+        </p:txBody>
+      </p:sp>
+      <p:sp>
+        <p:nvSpPr>
+          <p:cNvPr id="11" name="Text 9"/>
+          <p:cNvSpPr txBox="1"/>
+          <p:nvPr/>
+        </p:nvSpPr>
+        <p:spPr>
+          <a:xfrm>
+            <a:off x="11140135" y="6382512"/>
+            <a:ext cx="548640" cy="274320"/>
+          </a:xfrm>
+          <a:prstGeom prst="rect">
+            <a:avLst/>
+          </a:prstGeom>
+          <a:noFill/>
+          <a:ln/>
+        </p:spPr>
+        <p:txBody>
+          <a:bodyPr wrap="square" lIns="0" tIns="0" rIns="0" bIns="0" rtlCol="0" anchor="ctr"/>
+          <a:lstStyle/>
+          <a:p>
+            <a:pPr algn="r" indent="0" marL="0">
+              <a:buNone/>
+            </a:pPr>
+            <a:r>
+              <a:rPr lang="en-US" sz="950" dirty="0">
+                <a:solidFill>
+                  <a:srgbClr val="6B7D87">
+                    <a:alpha val="80000"/>
+                  </a:srgbClr>
+                </a:solidFill>
+                <a:latin typeface="Calibri" pitchFamily="34" charset="0"/>
+                <a:ea typeface="Calibri" pitchFamily="34" charset="-122"/>
+                <a:cs typeface="Calibri" pitchFamily="34" charset="-120"/>
+              </a:rPr>
+              <a:t>10</a:t>
+            </a:r>
+            <a:endParaRPr lang="en-US" sz="950" dirty="0"/>
+          </a:p>
+        </p:txBody>
+      </p:sp>
+    </p:spTree>
+  </p:cSld>
+  <p:clrMapOvr>
+    <a:masterClrMapping/>
+  </p:clrMapOvr>
+</p:sld>
+</file>
+
+<file path=ppt/slides/slide12.xml><?xml version="1.0" encoding="utf-8"?>
+<p:sld xmlns:a="http://schemas.openxmlformats.org/drawingml/2006/main" xmlns:r="http://schemas.openxmlformats.org/officeDocument/2006/relationships" xmlns:p="http://schemas.openxmlformats.org/presentationml/2006/main">
+  <p:cSld name="Slide 12">
+    <p:bg>
+      <p:bgPr>
+        <a:solidFill>
+          <a:srgbClr val="FAFBFC"/>
+        </a:solidFill>
+      </p:bgPr>
+    </p:bg>
+    <p:spTree>
+      <p:nvGrpSpPr>
+        <p:cNvPr id="1" name=""/>
+        <p:cNvGrpSpPr/>
+        <p:nvPr/>
+      </p:nvGrpSpPr>
+      <p:grpSpPr>
+        <a:xfrm>
+          <a:off x="0" y="0"/>
+          <a:ext cx="0" cy="0"/>
+          <a:chOff x="0" y="0"/>
+          <a:chExt cx="0" cy="0"/>
+        </a:xfrm>
+      </p:grpSpPr>
+      <p:sp>
+        <p:nvSpPr>
+          <p:cNvPr id="2" name="Text 0"/>
+          <p:cNvSpPr txBox="1"/>
+          <p:nvPr/>
+        </p:nvSpPr>
+        <p:spPr>
+          <a:xfrm>
+            <a:off x="594360" y="411480"/>
+            <a:ext cx="10515600" cy="274320"/>
+          </a:xfrm>
+          <a:prstGeom prst="rect">
+            <a:avLst/>
+          </a:prstGeom>
+          <a:noFill/>
+          <a:ln/>
+        </p:spPr>
+        <p:txBody>
+          <a:bodyPr wrap="square" lIns="0" tIns="0" rIns="0" bIns="0" rtlCol="0" anchor="ctr"/>
+          <a:lstStyle/>
+          <a:p>
+            <a:pPr algn="l" indent="0" marL="0">
+              <a:buNone/>
+            </a:pPr>
+            <a:r>
+              <a:rPr lang="en-US" sz="1150" b="1" spc="200" kern="0" dirty="0">
+                <a:solidFill>
+                  <a:srgbClr val="D98C2B"/>
+                </a:solidFill>
+                <a:latin typeface="Calibri" pitchFamily="34" charset="0"/>
+                <a:ea typeface="Calibri" pitchFamily="34" charset="-122"/>
+                <a:cs typeface="Calibri" pitchFamily="34" charset="-120"/>
+              </a:rPr>
+              <a:t>ORDERS OF MAGNITUDE</a:t>
+            </a:r>
+            <a:endParaRPr lang="en-US" sz="1150" dirty="0"/>
+          </a:p>
+        </p:txBody>
+      </p:sp>
+      <p:sp>
+        <p:nvSpPr>
+          <p:cNvPr id="3" name="Text 1"/>
+          <p:cNvSpPr txBox="1"/>
+          <p:nvPr/>
+        </p:nvSpPr>
+        <p:spPr>
+          <a:xfrm>
+            <a:off x="594360" y="731520"/>
+            <a:ext cx="10881360" cy="731520"/>
+          </a:xfrm>
+          <a:prstGeom prst="rect">
+            <a:avLst/>
+          </a:prstGeom>
+          <a:noFill/>
+          <a:ln/>
+        </p:spPr>
+        <p:txBody>
+          <a:bodyPr wrap="square" lIns="0" tIns="0" rIns="0" bIns="0" rtlCol="0" anchor="ctr"/>
+          <a:lstStyle/>
+          <a:p>
+            <a:pPr algn="l" indent="0" marL="0">
+              <a:buNone/>
+            </a:pPr>
+            <a:r>
+              <a:rPr lang="en-US" sz="3000" b="1" dirty="0">
+                <a:solidFill>
+                  <a:srgbClr val="0F2E40"/>
+                </a:solidFill>
+                <a:latin typeface="Cambria" pitchFamily="34" charset="0"/>
+                <a:ea typeface="Cambria" pitchFamily="34" charset="-122"/>
+                <a:cs typeface="Cambria" pitchFamily="34" charset="-120"/>
+              </a:rPr>
+              <a:t>Expected water savings by irrigation method</a:t>
+            </a:r>
+            <a:endParaRPr lang="en-US" sz="3000" dirty="0"/>
+          </a:p>
+        </p:txBody>
+      </p:sp>
+      <p:graphicFrame>
+        <p:nvGraphicFramePr>
+          <p:cNvPr id="4" name="Chart 0" descr=""/>
+          <p:cNvGraphicFramePr/>
+          <p:nvPr/>
+        </p:nvGraphicFramePr>
+        <p:xfrm>
+          <a:off x="594360" y="1783080"/>
+          <a:ext cx="7360920" cy="3977640"/>
+        </p:xfrm>
+        <a:graphic xmlns:a="http://schemas.openxmlformats.org/drawingml/2006/main">
+          <a:graphicData uri="http://schemas.openxmlformats.org/drawingml/2006/chart">
+            <c:chart xmlns:c="http://schemas.openxmlformats.org/drawingml/2006/chart" r:id="rId1"/>
+          </a:graphicData>
+        </a:graphic>
+      </p:graphicFrame>
+      <p:sp>
+        <p:nvSpPr>
+          <p:cNvPr id="5" name="Shape 2"/>
+          <p:cNvSpPr/>
+          <p:nvPr/>
+        </p:nvSpPr>
+        <p:spPr>
+          <a:xfrm>
+            <a:off x="8275320" y="1783080"/>
+            <a:ext cx="3291840" cy="3977640"/>
+          </a:xfrm>
+          <a:prstGeom prst="roundRect">
+            <a:avLst>
+              <a:gd name="adj" fmla="val 2778"/>
+            </a:avLst>
+          </a:prstGeom>
+          <a:solidFill>
+            <a:srgbClr val="EEF2F5"/>
+          </a:solidFill>
+          <a:ln w="9525">
+            <a:solidFill>
+              <a:srgbClr val="D8E1E7"/>
+            </a:solidFill>
+            <a:prstDash val="solid"/>
+          </a:ln>
+        </p:spPr>
+      </p:sp>
+      <p:sp>
+        <p:nvSpPr>
+          <p:cNvPr id="6" name="Text 3"/>
+          <p:cNvSpPr txBox="1"/>
+          <p:nvPr/>
+        </p:nvSpPr>
+        <p:spPr>
+          <a:xfrm>
+            <a:off x="8503920" y="2011680"/>
+            <a:ext cx="2834640" cy="457200"/>
+          </a:xfrm>
+          <a:prstGeom prst="rect">
+            <a:avLst/>
+          </a:prstGeom>
+          <a:noFill/>
+          <a:ln/>
+        </p:spPr>
+        <p:txBody>
+          <a:bodyPr wrap="square" lIns="0" tIns="0" rIns="0" bIns="0" rtlCol="0" anchor="ctr"/>
+          <a:lstStyle/>
+          <a:p>
+            <a:pPr algn="l" indent="0" marL="0">
+              <a:buNone/>
+            </a:pPr>
+            <a:r>
+              <a:rPr lang="en-US" sz="1300" b="1" dirty="0">
+                <a:solidFill>
+                  <a:srgbClr val="1D4E6B"/>
+                </a:solidFill>
+                <a:latin typeface="Cambria" pitchFamily="34" charset="0"/>
+                <a:ea typeface="Cambria" pitchFamily="34" charset="-122"/>
+                <a:cs typeface="Cambria" pitchFamily="34" charset="-120"/>
+              </a:rPr>
+              <a:t>Read with care</a:t>
+            </a:r>
+            <a:endParaRPr lang="en-US" sz="1300" dirty="0"/>
+          </a:p>
+        </p:txBody>
+      </p:sp>
+      <p:sp>
+        <p:nvSpPr>
+          <p:cNvPr id="7" name="Text 4"/>
+          <p:cNvSpPr txBox="1"/>
+          <p:nvPr/>
+        </p:nvSpPr>
+        <p:spPr>
+          <a:xfrm>
+            <a:off x="8503920" y="2560320"/>
+            <a:ext cx="2834640" cy="3017520"/>
+          </a:xfrm>
+          <a:prstGeom prst="rect">
+            <a:avLst/>
+          </a:prstGeom>
+          <a:noFill/>
+          <a:ln/>
+        </p:spPr>
+        <p:txBody>
+          <a:bodyPr wrap="square" lIns="0" tIns="0" rIns="0" bIns="0" rtlCol="0" anchor="t"/>
+          <a:lstStyle/>
+          <a:p>
+            <a:pPr algn="l" indent="0" marL="0">
+              <a:lnSpc>
+                <a:spcPct val="125000"/>
+              </a:lnSpc>
+              <a:buNone/>
+            </a:pPr>
+            <a:r>
+              <a:rPr lang="en-US" sz="1200" dirty="0">
+                <a:solidFill>
+                  <a:srgbClr val="2F3E47"/>
+                </a:solidFill>
+                <a:latin typeface="Calibri" pitchFamily="34" charset="0"/>
+                <a:ea typeface="Calibri" pitchFamily="34" charset="-122"/>
+                <a:cs typeface="Calibri" pitchFamily="34" charset="-120"/>
+              </a:rPr>
+              <a:t>These ranges are indicative and rest on documented gains from our hydro-retainers.</a:t>
+            </a:r>
+            <a:endParaRPr lang="en-US" sz="1200" dirty="0"/>
+          </a:p>
+          <a:p>
+            <a:pPr algn="l" indent="0" marL="0">
+              <a:lnSpc>
+                <a:spcPct val="125000"/>
+              </a:lnSpc>
+              <a:buNone/>
+            </a:pPr>
+            <a:endParaRPr lang="en-US" sz="1200" dirty="0"/>
+          </a:p>
+          <a:p>
+            <a:pPr algn="l" indent="0" marL="0">
+              <a:lnSpc>
+                <a:spcPct val="125000"/>
+              </a:lnSpc>
+              <a:buNone/>
+            </a:pPr>
+            <a:r>
+              <a:rPr lang="en-US" sz="1200" dirty="0">
+                <a:solidFill>
+                  <a:srgbClr val="2F3E47"/>
+                </a:solidFill>
+                <a:latin typeface="Calibri" pitchFamily="34" charset="0"/>
+                <a:ea typeface="Calibri" pitchFamily="34" charset="-122"/>
+                <a:cs typeface="Calibri" pitchFamily="34" charset="-120"/>
+              </a:rPr>
+              <a:t>Actual results depend on the soil, the climate and the crop. The figures give an order of magnitude only: they are in no case a guaranteed, contractual or absolute value.</a:t>
+            </a:r>
+            <a:endParaRPr lang="en-US" sz="1200" dirty="0"/>
+          </a:p>
+        </p:txBody>
+      </p:sp>
+      <p:sp>
+        <p:nvSpPr>
+          <p:cNvPr id="8" name="Text 5"/>
+          <p:cNvSpPr txBox="1"/>
+          <p:nvPr/>
+        </p:nvSpPr>
+        <p:spPr>
+          <a:xfrm>
+            <a:off x="502920" y="6382512"/>
+            <a:ext cx="8229600" cy="274320"/>
+          </a:xfrm>
+          <a:prstGeom prst="rect">
+            <a:avLst/>
+          </a:prstGeom>
+          <a:noFill/>
+          <a:ln/>
+        </p:spPr>
+        <p:txBody>
+          <a:bodyPr wrap="square" lIns="0" tIns="0" rIns="0" bIns="0" rtlCol="0" anchor="ctr"/>
+          <a:lstStyle/>
+          <a:p>
+            <a:pPr algn="l" indent="0" marL="0">
+              <a:buNone/>
+            </a:pPr>
+            <a:r>
+              <a:rPr lang="en-US" sz="950" dirty="0">
+                <a:solidFill>
+                  <a:srgbClr val="6B7D87">
+                    <a:alpha val="80000"/>
+                  </a:srgbClr>
+                </a:solidFill>
+                <a:latin typeface="Calibri" pitchFamily="34" charset="0"/>
+                <a:ea typeface="Calibri" pitchFamily="34" charset="-122"/>
+                <a:cs typeface="Calibri" pitchFamily="34" charset="-120"/>
+              </a:rPr>
+              <a:t>Green Solutions · United States Market Dossier</a:t>
+            </a:r>
+            <a:endParaRPr lang="en-US" sz="950" dirty="0"/>
+          </a:p>
+        </p:txBody>
+      </p:sp>
+      <p:sp>
+        <p:nvSpPr>
+          <p:cNvPr id="9" name="Text 6"/>
+          <p:cNvSpPr txBox="1"/>
+          <p:nvPr/>
+        </p:nvSpPr>
+        <p:spPr>
+          <a:xfrm>
+            <a:off x="11140135" y="6382512"/>
+            <a:ext cx="548640" cy="274320"/>
+          </a:xfrm>
+          <a:prstGeom prst="rect">
+            <a:avLst/>
+          </a:prstGeom>
+          <a:noFill/>
+          <a:ln/>
+        </p:spPr>
+        <p:txBody>
+          <a:bodyPr wrap="square" lIns="0" tIns="0" rIns="0" bIns="0" rtlCol="0" anchor="ctr"/>
+          <a:lstStyle/>
+          <a:p>
+            <a:pPr algn="r" indent="0" marL="0">
+              <a:buNone/>
+            </a:pPr>
+            <a:r>
+              <a:rPr lang="en-US" sz="950" dirty="0">
+                <a:solidFill>
+                  <a:srgbClr val="6B7D87">
+                    <a:alpha val="80000"/>
+                  </a:srgbClr>
+                </a:solidFill>
+                <a:latin typeface="Calibri" pitchFamily="34" charset="0"/>
+                <a:ea typeface="Calibri" pitchFamily="34" charset="-122"/>
+                <a:cs typeface="Calibri" pitchFamily="34" charset="-120"/>
+              </a:rPr>
+              <a:t>11</a:t>
+            </a:r>
+            <a:endParaRPr lang="en-US" sz="950" dirty="0"/>
+          </a:p>
+        </p:txBody>
+      </p:sp>
+    </p:spTree>
+  </p:cSld>
+  <p:clrMapOvr>
+    <a:masterClrMapping/>
+  </p:clrMapOvr>
+</p:sld>
+</file>
+
+<file path=ppt/slides/slide13.xml><?xml version="1.0" encoding="utf-8"?>
+<p:sld xmlns:a="http://schemas.openxmlformats.org/drawingml/2006/main" xmlns:r="http://schemas.openxmlformats.org/officeDocument/2006/relationships" xmlns:p="http://schemas.openxmlformats.org/presentationml/2006/main">
+  <p:cSld name="Slide 13">
+    <p:bg>
+      <p:bgPr>
+        <a:solidFill>
+          <a:srgbClr val="FAFBFC"/>
+        </a:solidFill>
+      </p:bgPr>
+    </p:bg>
+    <p:spTree>
+      <p:nvGrpSpPr>
+        <p:cNvPr id="1" name=""/>
+        <p:cNvGrpSpPr/>
+        <p:nvPr/>
+      </p:nvGrpSpPr>
+      <p:grpSpPr>
+        <a:xfrm>
+          <a:off x="0" y="0"/>
+          <a:ext cx="0" cy="0"/>
+          <a:chOff x="0" y="0"/>
+          <a:chExt cx="0" cy="0"/>
+        </a:xfrm>
+      </p:grpSpPr>
+      <p:sp>
+        <p:nvSpPr>
+          <p:cNvPr id="2" name="Text 0"/>
+          <p:cNvSpPr txBox="1"/>
+          <p:nvPr/>
+        </p:nvSpPr>
+        <p:spPr>
+          <a:xfrm>
+            <a:off x="594360" y="411480"/>
+            <a:ext cx="10515600" cy="274320"/>
+          </a:xfrm>
+          <a:prstGeom prst="rect">
+            <a:avLst/>
+          </a:prstGeom>
+          <a:noFill/>
+          <a:ln/>
+        </p:spPr>
+        <p:txBody>
+          <a:bodyPr wrap="square" lIns="0" tIns="0" rIns="0" bIns="0" rtlCol="0" anchor="ctr"/>
+          <a:lstStyle/>
+          <a:p>
+            <a:pPr algn="l" indent="0" marL="0">
+              <a:buNone/>
+            </a:pPr>
+            <a:r>
+              <a:rPr lang="en-US" sz="1150" b="1" spc="200" kern="0" dirty="0">
+                <a:solidFill>
+                  <a:srgbClr val="D98C2B"/>
+                </a:solidFill>
+                <a:latin typeface="Calibri" pitchFamily="34" charset="0"/>
+                <a:ea typeface="Calibri" pitchFamily="34" charset="-122"/>
+                <a:cs typeface="Calibri" pitchFamily="34" charset="-120"/>
+              </a:rPr>
+              <a:t>THREE PRIORITY AREAS</a:t>
+            </a:r>
+            <a:endParaRPr lang="en-US" sz="1150" dirty="0"/>
+          </a:p>
+        </p:txBody>
+      </p:sp>
+      <p:sp>
+        <p:nvSpPr>
+          <p:cNvPr id="3" name="Text 1"/>
+          <p:cNvSpPr txBox="1"/>
+          <p:nvPr/>
+        </p:nvSpPr>
+        <p:spPr>
+          <a:xfrm>
+            <a:off x="594360" y="731520"/>
+            <a:ext cx="10881360" cy="731520"/>
+          </a:xfrm>
+          <a:prstGeom prst="rect">
+            <a:avLst/>
+          </a:prstGeom>
+          <a:noFill/>
+          <a:ln/>
+        </p:spPr>
+        <p:txBody>
+          <a:bodyPr wrap="square" lIns="0" tIns="0" rIns="0" bIns="0" rtlCol="0" anchor="ctr"/>
+          <a:lstStyle/>
+          <a:p>
+            <a:pPr algn="l" indent="0" marL="0">
+              <a:buNone/>
+            </a:pPr>
+            <a:r>
+              <a:rPr lang="en-US" sz="3000" b="1" dirty="0">
+                <a:solidFill>
+                  <a:srgbClr val="0F2E40"/>
+                </a:solidFill>
+                <a:latin typeface="Cambria" pitchFamily="34" charset="0"/>
+                <a:ea typeface="Cambria" pitchFamily="34" charset="-122"/>
+                <a:cs typeface="Cambria" pitchFamily="34" charset="-120"/>
+              </a:rPr>
+              <a:t>Where to run the first trials</a:t>
+            </a:r>
+            <a:endParaRPr lang="en-US" sz="3000" dirty="0"/>
+          </a:p>
+        </p:txBody>
+      </p:sp>
+      <p:sp>
+        <p:nvSpPr>
+          <p:cNvPr id="4" name="Shape 2"/>
+          <p:cNvSpPr/>
+          <p:nvPr/>
+        </p:nvSpPr>
+        <p:spPr>
+          <a:xfrm>
+            <a:off x="594360" y="1783080"/>
+            <a:ext cx="3472586" cy="4069080"/>
+          </a:xfrm>
+          <a:prstGeom prst="roundRect">
+            <a:avLst>
+              <a:gd name="adj" fmla="val 2633"/>
+            </a:avLst>
+          </a:prstGeom>
+          <a:solidFill>
+            <a:srgbClr val="EEF2F5"/>
+          </a:solidFill>
+          <a:ln w="9525">
+            <a:solidFill>
+              <a:srgbClr val="D8E1E7"/>
+            </a:solidFill>
+            <a:prstDash val="solid"/>
+          </a:ln>
+        </p:spPr>
+      </p:sp>
+      <p:pic>
+        <p:nvPicPr>
+          <p:cNvPr id="5" name="Image 0" descr="preencoded.png">    </p:cNvPr>
+          <p:cNvPicPr>
+            <a:picLocks noChangeAspect="1"/>
+          </p:cNvPicPr>
+          <p:nvPr/>
+        </p:nvPicPr>
+        <p:blipFill>
+          <a:blip r:embed="rId1"/>
+          <a:stretch>
+            <a:fillRect/>
+          </a:stretch>
+        </p:blipFill>
+        <p:spPr>
+          <a:xfrm>
+            <a:off x="594360" y="1783080"/>
+            <a:ext cx="3472586" cy="1691640"/>
+          </a:xfrm>
+          <a:prstGeom prst="rect">
+            <a:avLst/>
+          </a:prstGeom>
+        </p:spPr>
+      </p:pic>
+      <p:sp>
+        <p:nvSpPr>
+          <p:cNvPr id="6" name="Text 3"/>
+          <p:cNvSpPr txBox="1"/>
+          <p:nvPr/>
+        </p:nvSpPr>
+        <p:spPr>
+          <a:xfrm>
+            <a:off x="795528" y="3639312"/>
+            <a:ext cx="3070250" cy="384048"/>
+          </a:xfrm>
+          <a:prstGeom prst="rect">
+            <a:avLst/>
+          </a:prstGeom>
+          <a:noFill/>
+          <a:ln/>
+        </p:spPr>
+        <p:txBody>
+          <a:bodyPr wrap="square" lIns="0" tIns="0" rIns="0" bIns="0" rtlCol="0" anchor="ctr"/>
+          <a:lstStyle/>
+          <a:p>
+            <a:pPr algn="l" indent="0" marL="0">
+              <a:buNone/>
+            </a:pPr>
+            <a:r>
+              <a:rPr lang="en-US" sz="1500" b="1" dirty="0">
+                <a:solidFill>
+                  <a:srgbClr val="1D4E6B"/>
+                </a:solidFill>
+                <a:latin typeface="Cambria" pitchFamily="34" charset="0"/>
+                <a:ea typeface="Cambria" pitchFamily="34" charset="-122"/>
+                <a:cs typeface="Cambria" pitchFamily="34" charset="-120"/>
+              </a:rPr>
+              <a:t>Central Valley, CA</a:t>
+            </a:r>
+            <a:endParaRPr lang="en-US" sz="1500" dirty="0"/>
+          </a:p>
+        </p:txBody>
+      </p:sp>
+      <p:sp>
+        <p:nvSpPr>
+          <p:cNvPr id="7" name="Text 4"/>
+          <p:cNvSpPr txBox="1"/>
+          <p:nvPr/>
+        </p:nvSpPr>
+        <p:spPr>
+          <a:xfrm>
+            <a:off x="795528" y="4041648"/>
+            <a:ext cx="3070250" cy="329184"/>
+          </a:xfrm>
+          <a:prstGeom prst="rect">
+            <a:avLst/>
+          </a:prstGeom>
+          <a:noFill/>
+          <a:ln/>
+        </p:spPr>
+        <p:txBody>
+          <a:bodyPr wrap="square" lIns="0" tIns="0" rIns="0" bIns="0" rtlCol="0" anchor="ctr"/>
+          <a:lstStyle/>
+          <a:p>
+            <a:pPr algn="l" indent="0" marL="0">
+              <a:buNone/>
+            </a:pPr>
+            <a:r>
+              <a:rPr lang="en-US" sz="1250" b="1" dirty="0">
+                <a:solidFill>
+                  <a:srgbClr val="9A5F12"/>
+                </a:solidFill>
+                <a:latin typeface="Calibri" pitchFamily="34" charset="0"/>
+                <a:ea typeface="Calibri" pitchFamily="34" charset="-122"/>
+                <a:cs typeface="Calibri" pitchFamily="34" charset="-120"/>
+              </a:rPr>
+              <a:t>≈ 5M irrigated acres</a:t>
+            </a:r>
+            <a:endParaRPr lang="en-US" sz="1250" dirty="0"/>
+          </a:p>
+        </p:txBody>
+      </p:sp>
+      <p:sp>
+        <p:nvSpPr>
+          <p:cNvPr id="8" name="Text 5"/>
+          <p:cNvSpPr txBox="1"/>
+          <p:nvPr/>
+        </p:nvSpPr>
+        <p:spPr>
+          <a:xfrm>
+            <a:off x="795528" y="4407408"/>
+            <a:ext cx="3070250" cy="1280160"/>
+          </a:xfrm>
+          <a:prstGeom prst="rect">
+            <a:avLst/>
+          </a:prstGeom>
+          <a:noFill/>
+          <a:ln/>
+        </p:spPr>
+        <p:txBody>
+          <a:bodyPr wrap="square" lIns="0" tIns="0" rIns="0" bIns="0" rtlCol="0" anchor="t"/>
+          <a:lstStyle/>
+          <a:p>
+            <a:pPr algn="l" marL="342900" indent="-342900">
+              <a:lnSpc>
+                <a:spcPct val="116000"/>
+              </a:lnSpc>
+              <a:spcAft>
+                <a:spcPts val="700"/>
+              </a:spcAft>
+              <a:buSzPct val="100000"/>
+              <a:buChar char="•"/>
+            </a:pPr>
+            <a:r>
+              <a:rPr lang="en-US" sz="1150" dirty="0">
+                <a:solidFill>
+                  <a:srgbClr val="2F3E47"/>
+                </a:solidFill>
+                <a:latin typeface="Calibri" pitchFamily="34" charset="0"/>
+                <a:ea typeface="Calibri" pitchFamily="34" charset="-122"/>
+                <a:cs typeface="Calibri" pitchFamily="34" charset="-120"/>
+              </a:rPr>
+              <a:t>More than 250 crops on one valley floor — almonds, pistachios, grapes, processing tomatoes. Permanent plantings cannot simply be fallowed in a dry year.</a:t>
+            </a:r>
+            <a:endParaRPr lang="en-US" sz="1150" dirty="0"/>
+          </a:p>
+          <a:p>
+            <a:pPr algn="l" marL="342900" indent="-342900">
+              <a:lnSpc>
+                <a:spcPct val="116000"/>
+              </a:lnSpc>
+              <a:spcAft>
+                <a:spcPts val="700"/>
+              </a:spcAft>
+              <a:buSzPct val="100000"/>
+              <a:buChar char="•"/>
+            </a:pPr>
+            <a:r>
+              <a:rPr lang="en-US" sz="1150" dirty="0">
+                <a:solidFill>
+                  <a:srgbClr val="2F3E47"/>
+                </a:solidFill>
+                <a:latin typeface="Calibri" pitchFamily="34" charset="0"/>
+                <a:ea typeface="Calibri" pitchFamily="34" charset="-122"/>
+                <a:cs typeface="Calibri" pitchFamily="34" charset="-120"/>
+              </a:rPr>
+              <a:t>State groundwater plans tighten pumping allowances through 2040: growers need savings per acre, not new supply.</a:t>
+            </a:r>
+            <a:endParaRPr lang="en-US" sz="1150" dirty="0"/>
+          </a:p>
+          <a:p>
+            <a:pPr algn="l" marL="342900" indent="-342900">
+              <a:lnSpc>
+                <a:spcPct val="116000"/>
+              </a:lnSpc>
+              <a:spcAft>
+                <a:spcPts val="700"/>
+              </a:spcAft>
+              <a:buSzPct val="100000"/>
+              <a:buChar char="•"/>
+            </a:pPr>
+            <a:r>
+              <a:rPr lang="en-US" sz="1150" dirty="0">
+                <a:solidFill>
+                  <a:srgbClr val="2F3E47"/>
+                </a:solidFill>
+                <a:latin typeface="Calibri" pitchFamily="34" charset="0"/>
+                <a:ea typeface="Calibri" pitchFamily="34" charset="-122"/>
+                <a:cs typeface="Calibri" pitchFamily="34" charset="-120"/>
+              </a:rPr>
+              <a:t>Drip and micro-sprinkler are already standard, so the remaining gain has to come from the soil itself.</a:t>
+            </a:r>
+            <a:endParaRPr lang="en-US" sz="1150" dirty="0"/>
+          </a:p>
+        </p:txBody>
+      </p:sp>
+      <p:sp>
+        <p:nvSpPr>
+          <p:cNvPr id="9" name="Shape 6"/>
+          <p:cNvSpPr/>
+          <p:nvPr/>
+        </p:nvSpPr>
+        <p:spPr>
+          <a:xfrm>
+            <a:off x="4359554" y="1783080"/>
+            <a:ext cx="3472586" cy="4069080"/>
+          </a:xfrm>
+          <a:prstGeom prst="roundRect">
+            <a:avLst>
+              <a:gd name="adj" fmla="val 2633"/>
+            </a:avLst>
+          </a:prstGeom>
+          <a:solidFill>
+            <a:srgbClr val="EEF2F5"/>
+          </a:solidFill>
+          <a:ln w="9525">
+            <a:solidFill>
+              <a:srgbClr val="D8E1E7"/>
+            </a:solidFill>
+            <a:prstDash val="solid"/>
+          </a:ln>
+        </p:spPr>
+      </p:sp>
+      <p:pic>
+        <p:nvPicPr>
+          <p:cNvPr id="10" name="Image 1" descr="preencoded.png">    </p:cNvPr>
+          <p:cNvPicPr>
+            <a:picLocks noChangeAspect="1"/>
+          </p:cNvPicPr>
+          <p:nvPr/>
+        </p:nvPicPr>
+        <p:blipFill>
+          <a:blip r:embed="rId2"/>
+          <a:stretch>
+            <a:fillRect/>
+          </a:stretch>
+        </p:blipFill>
+        <p:spPr>
+          <a:xfrm>
+            <a:off x="4359554" y="1783080"/>
+            <a:ext cx="3472586" cy="1691640"/>
+          </a:xfrm>
+          <a:prstGeom prst="rect">
+            <a:avLst/>
+          </a:prstGeom>
+        </p:spPr>
+      </p:pic>
+      <p:sp>
+        <p:nvSpPr>
+          <p:cNvPr id="11" name="Text 7"/>
+          <p:cNvSpPr txBox="1"/>
+          <p:nvPr/>
+        </p:nvSpPr>
+        <p:spPr>
+          <a:xfrm>
+            <a:off x="4560722" y="3639312"/>
+            <a:ext cx="3070250" cy="384048"/>
+          </a:xfrm>
+          <a:prstGeom prst="rect">
+            <a:avLst/>
+          </a:prstGeom>
+          <a:noFill/>
+          <a:ln/>
+        </p:spPr>
+        <p:txBody>
+          <a:bodyPr wrap="square" lIns="0" tIns="0" rIns="0" bIns="0" rtlCol="0" anchor="ctr"/>
+          <a:lstStyle/>
+          <a:p>
+            <a:pPr algn="l" indent="0" marL="0">
+              <a:buNone/>
+            </a:pPr>
+            <a:r>
+              <a:rPr lang="en-US" sz="1500" b="1" dirty="0">
+                <a:solidFill>
+                  <a:srgbClr val="1D4E6B"/>
+                </a:solidFill>
+                <a:latin typeface="Cambria" pitchFamily="34" charset="0"/>
+                <a:ea typeface="Cambria" pitchFamily="34" charset="-122"/>
+                <a:cs typeface="Cambria" pitchFamily="34" charset="-120"/>
+              </a:rPr>
+              <a:t>High Plains</a:t>
+            </a:r>
+            <a:endParaRPr lang="en-US" sz="1500" dirty="0"/>
+          </a:p>
+        </p:txBody>
+      </p:sp>
+      <p:sp>
+        <p:nvSpPr>
+          <p:cNvPr id="12" name="Text 8"/>
+          <p:cNvSpPr txBox="1"/>
+          <p:nvPr/>
+        </p:nvSpPr>
+        <p:spPr>
+          <a:xfrm>
+            <a:off x="4560722" y="4041648"/>
+            <a:ext cx="3070250" cy="329184"/>
+          </a:xfrm>
+          <a:prstGeom prst="rect">
+            <a:avLst/>
+          </a:prstGeom>
+          <a:noFill/>
+          <a:ln/>
+        </p:spPr>
+        <p:txBody>
+          <a:bodyPr wrap="square" lIns="0" tIns="0" rIns="0" bIns="0" rtlCol="0" anchor="ctr"/>
+          <a:lstStyle/>
+          <a:p>
+            <a:pPr algn="l" indent="0" marL="0">
+              <a:buNone/>
+            </a:pPr>
+            <a:r>
+              <a:rPr lang="en-US" sz="1250" b="1" dirty="0">
+                <a:solidFill>
+                  <a:srgbClr val="9A5F12"/>
+                </a:solidFill>
+                <a:latin typeface="Calibri" pitchFamily="34" charset="0"/>
+                <a:ea typeface="Calibri" pitchFamily="34" charset="-122"/>
+                <a:cs typeface="Calibri" pitchFamily="34" charset="-120"/>
+              </a:rPr>
+              <a:t>≈ 12M irrigated acres</a:t>
+            </a:r>
+            <a:endParaRPr lang="en-US" sz="1250" dirty="0"/>
+          </a:p>
+        </p:txBody>
+      </p:sp>
+      <p:sp>
+        <p:nvSpPr>
+          <p:cNvPr id="13" name="Text 9"/>
+          <p:cNvSpPr txBox="1"/>
+          <p:nvPr/>
+        </p:nvSpPr>
+        <p:spPr>
+          <a:xfrm>
+            <a:off x="4560722" y="4407408"/>
+            <a:ext cx="3070250" cy="1280160"/>
+          </a:xfrm>
+          <a:prstGeom prst="rect">
+            <a:avLst/>
+          </a:prstGeom>
+          <a:noFill/>
+          <a:ln/>
+        </p:spPr>
+        <p:txBody>
+          <a:bodyPr wrap="square" lIns="0" tIns="0" rIns="0" bIns="0" rtlCol="0" anchor="t"/>
+          <a:lstStyle/>
+          <a:p>
+            <a:pPr algn="l" marL="342900" indent="-342900">
+              <a:lnSpc>
+                <a:spcPct val="116000"/>
+              </a:lnSpc>
+              <a:spcAft>
+                <a:spcPts val="700"/>
+              </a:spcAft>
+              <a:buSzPct val="100000"/>
+              <a:buChar char="•"/>
+            </a:pPr>
+            <a:r>
+              <a:rPr lang="en-US" sz="1150" dirty="0">
+                <a:solidFill>
+                  <a:srgbClr val="2F3E47"/>
+                </a:solidFill>
+                <a:latin typeface="Calibri" pitchFamily="34" charset="0"/>
+                <a:ea typeface="Calibri" pitchFamily="34" charset="-122"/>
+                <a:cs typeface="Calibri" pitchFamily="34" charset="-120"/>
+              </a:rPr>
+              <a:t>Corn, sorghum, cotton and alfalfa across Nebraska, Kansas, Colorado and the Texas Panhandle, almost entirely on center pivot.</a:t>
+            </a:r>
+            <a:endParaRPr lang="en-US" sz="1150" dirty="0"/>
+          </a:p>
+          <a:p>
+            <a:pPr algn="l" marL="342900" indent="-342900">
+              <a:lnSpc>
+                <a:spcPct val="116000"/>
+              </a:lnSpc>
+              <a:spcAft>
+                <a:spcPts val="700"/>
+              </a:spcAft>
+              <a:buSzPct val="100000"/>
+              <a:buChar char="•"/>
+            </a:pPr>
+            <a:r>
+              <a:rPr lang="en-US" sz="1150" dirty="0">
+                <a:solidFill>
+                  <a:srgbClr val="2F3E47"/>
+                </a:solidFill>
+                <a:latin typeface="Calibri" pitchFamily="34" charset="0"/>
+                <a:ea typeface="Calibri" pitchFamily="34" charset="-122"/>
+                <a:cs typeface="Calibri" pitchFamily="34" charset="-120"/>
+              </a:rPr>
+              <a:t>Aquifer levels have declined for decades; well yields fall and pumping lift rises, pushing up energy cost per acre-inch applied.</a:t>
+            </a:r>
+            <a:endParaRPr lang="en-US" sz="1150" dirty="0"/>
+          </a:p>
+          <a:p>
+            <a:pPr algn="l" marL="342900" indent="-342900">
+              <a:lnSpc>
+                <a:spcPct val="116000"/>
+              </a:lnSpc>
+              <a:spcAft>
+                <a:spcPts val="700"/>
+              </a:spcAft>
+              <a:buSzPct val="100000"/>
+              <a:buChar char="•"/>
+            </a:pPr>
+            <a:r>
+              <a:rPr lang="en-US" sz="1150" dirty="0">
+                <a:solidFill>
+                  <a:srgbClr val="2F3E47"/>
+                </a:solidFill>
+                <a:latin typeface="Calibri" pitchFamily="34" charset="0"/>
+                <a:ea typeface="Calibri" pitchFamily="34" charset="-122"/>
+                <a:cs typeface="Calibri" pitchFamily="34" charset="-120"/>
+              </a:rPr>
+              <a:t>Sandy and sandy-loam soils hold little water — retention in the root zone has a direct, measurable effect.</a:t>
+            </a:r>
+            <a:endParaRPr lang="en-US" sz="1150" dirty="0"/>
+          </a:p>
+        </p:txBody>
+      </p:sp>
+      <p:sp>
+        <p:nvSpPr>
+          <p:cNvPr id="14" name="Shape 10"/>
+          <p:cNvSpPr/>
+          <p:nvPr/>
+        </p:nvSpPr>
+        <p:spPr>
+          <a:xfrm>
+            <a:off x="8124749" y="1783080"/>
+            <a:ext cx="3472586" cy="4069080"/>
+          </a:xfrm>
+          <a:prstGeom prst="roundRect">
+            <a:avLst>
+              <a:gd name="adj" fmla="val 2633"/>
+            </a:avLst>
+          </a:prstGeom>
+          <a:solidFill>
+            <a:srgbClr val="EEF2F5"/>
+          </a:solidFill>
+          <a:ln w="9525">
+            <a:solidFill>
+              <a:srgbClr val="D8E1E7"/>
+            </a:solidFill>
+            <a:prstDash val="solid"/>
+          </a:ln>
+        </p:spPr>
+      </p:sp>
+      <p:pic>
+        <p:nvPicPr>
+          <p:cNvPr id="15" name="Image 2" descr="preencoded.png">    </p:cNvPr>
+          <p:cNvPicPr>
+            <a:picLocks noChangeAspect="1"/>
+          </p:cNvPicPr>
+          <p:nvPr/>
+        </p:nvPicPr>
+        <p:blipFill>
+          <a:blip r:embed="rId3"/>
+          <a:stretch>
+            <a:fillRect/>
+          </a:stretch>
+        </p:blipFill>
+        <p:spPr>
+          <a:xfrm>
+            <a:off x="8124749" y="1783080"/>
+            <a:ext cx="3472586" cy="1691640"/>
+          </a:xfrm>
+          <a:prstGeom prst="rect">
+            <a:avLst/>
+          </a:prstGeom>
+        </p:spPr>
+      </p:pic>
+      <p:sp>
+        <p:nvSpPr>
+          <p:cNvPr id="16" name="Text 11"/>
+          <p:cNvSpPr txBox="1"/>
+          <p:nvPr/>
+        </p:nvSpPr>
+        <p:spPr>
+          <a:xfrm>
+            <a:off x="8325917" y="3639312"/>
+            <a:ext cx="3070250" cy="384048"/>
+          </a:xfrm>
+          <a:prstGeom prst="rect">
+            <a:avLst/>
+          </a:prstGeom>
+          <a:noFill/>
+          <a:ln/>
+        </p:spPr>
+        <p:txBody>
+          <a:bodyPr wrap="square" lIns="0" tIns="0" rIns="0" bIns="0" rtlCol="0" anchor="ctr"/>
+          <a:lstStyle/>
+          <a:p>
+            <a:pPr algn="l" indent="0" marL="0">
+              <a:buNone/>
+            </a:pPr>
+            <a:r>
+              <a:rPr lang="en-US" sz="1500" b="1" dirty="0">
+                <a:solidFill>
+                  <a:srgbClr val="1D4E6B"/>
+                </a:solidFill>
+                <a:latin typeface="Cambria" pitchFamily="34" charset="0"/>
+                <a:ea typeface="Cambria" pitchFamily="34" charset="-122"/>
+                <a:cs typeface="Cambria" pitchFamily="34" charset="-120"/>
+              </a:rPr>
+              <a:t>Columbia Basin</a:t>
+            </a:r>
+            <a:endParaRPr lang="en-US" sz="1500" dirty="0"/>
+          </a:p>
+        </p:txBody>
+      </p:sp>
+      <p:sp>
+        <p:nvSpPr>
+          <p:cNvPr id="17" name="Text 12"/>
+          <p:cNvSpPr txBox="1"/>
+          <p:nvPr/>
+        </p:nvSpPr>
+        <p:spPr>
+          <a:xfrm>
+            <a:off x="8325917" y="4041648"/>
+            <a:ext cx="3070250" cy="329184"/>
+          </a:xfrm>
+          <a:prstGeom prst="rect">
+            <a:avLst/>
+          </a:prstGeom>
+          <a:noFill/>
+          <a:ln/>
+        </p:spPr>
+        <p:txBody>
+          <a:bodyPr wrap="square" lIns="0" tIns="0" rIns="0" bIns="0" rtlCol="0" anchor="ctr"/>
+          <a:lstStyle/>
+          <a:p>
+            <a:pPr algn="l" indent="0" marL="0">
+              <a:buNone/>
+            </a:pPr>
+            <a:r>
+              <a:rPr lang="en-US" sz="1250" b="1" dirty="0">
+                <a:solidFill>
+                  <a:srgbClr val="9A5F12"/>
+                </a:solidFill>
+                <a:latin typeface="Calibri" pitchFamily="34" charset="0"/>
+                <a:ea typeface="Calibri" pitchFamily="34" charset="-122"/>
+                <a:cs typeface="Calibri" pitchFamily="34" charset="-120"/>
+              </a:rPr>
+              <a:t>≈ 700k irrigated acres</a:t>
+            </a:r>
+            <a:endParaRPr lang="en-US" sz="1250" dirty="0"/>
+          </a:p>
+        </p:txBody>
+      </p:sp>
+      <p:sp>
+        <p:nvSpPr>
+          <p:cNvPr id="18" name="Text 13"/>
+          <p:cNvSpPr txBox="1"/>
+          <p:nvPr/>
+        </p:nvSpPr>
+        <p:spPr>
+          <a:xfrm>
+            <a:off x="8325917" y="4407408"/>
+            <a:ext cx="3070250" cy="1280160"/>
+          </a:xfrm>
+          <a:prstGeom prst="rect">
+            <a:avLst/>
+          </a:prstGeom>
+          <a:noFill/>
+          <a:ln/>
+        </p:spPr>
+        <p:txBody>
+          <a:bodyPr wrap="square" lIns="0" tIns="0" rIns="0" bIns="0" rtlCol="0" anchor="t"/>
+          <a:lstStyle/>
+          <a:p>
+            <a:pPr algn="l" marL="342900" indent="-342900">
+              <a:lnSpc>
+                <a:spcPct val="116000"/>
+              </a:lnSpc>
+              <a:spcAft>
+                <a:spcPts val="700"/>
+              </a:spcAft>
+              <a:buSzPct val="100000"/>
+              <a:buChar char="•"/>
+            </a:pPr>
+            <a:r>
+              <a:rPr lang="en-US" sz="1150" dirty="0">
+                <a:solidFill>
+                  <a:srgbClr val="2F3E47"/>
+                </a:solidFill>
+                <a:latin typeface="Calibri" pitchFamily="34" charset="0"/>
+                <a:ea typeface="Calibri" pitchFamily="34" charset="-122"/>
+                <a:cs typeface="Calibri" pitchFamily="34" charset="-120"/>
+              </a:rPr>
+              <a:t>Potatoes, apples, hops, onions and wine grapes on sandy volcanic soils with very low water-holding capacity.</a:t>
+            </a:r>
+            <a:endParaRPr lang="en-US" sz="1150" dirty="0"/>
+          </a:p>
+          <a:p>
+            <a:pPr algn="l" marL="342900" indent="-342900">
+              <a:lnSpc>
+                <a:spcPct val="116000"/>
+              </a:lnSpc>
+              <a:spcAft>
+                <a:spcPts val="700"/>
+              </a:spcAft>
+              <a:buSzPct val="100000"/>
+              <a:buChar char="•"/>
+            </a:pPr>
+            <a:r>
+              <a:rPr lang="en-US" sz="1150" dirty="0">
+                <a:solidFill>
+                  <a:srgbClr val="2F3E47"/>
+                </a:solidFill>
+                <a:latin typeface="Calibri" pitchFamily="34" charset="0"/>
+                <a:ea typeface="Calibri" pitchFamily="34" charset="-122"/>
+                <a:cs typeface="Calibri" pitchFamily="34" charset="-120"/>
+              </a:rPr>
+              <a:t>Under 10 inches of rain a year: every acre depends on delivered water from the Columbia River system.</a:t>
+            </a:r>
+            <a:endParaRPr lang="en-US" sz="1150" dirty="0"/>
+          </a:p>
+          <a:p>
+            <a:pPr algn="l" marL="342900" indent="-342900">
+              <a:lnSpc>
+                <a:spcPct val="116000"/>
+              </a:lnSpc>
+              <a:spcAft>
+                <a:spcPts val="700"/>
+              </a:spcAft>
+              <a:buSzPct val="100000"/>
+              <a:buChar char="•"/>
+            </a:pPr>
+            <a:r>
+              <a:rPr lang="en-US" sz="1150" dirty="0">
+                <a:solidFill>
+                  <a:srgbClr val="2F3E47"/>
+                </a:solidFill>
+                <a:latin typeface="Calibri" pitchFamily="34" charset="0"/>
+                <a:ea typeface="Calibri" pitchFamily="34" charset="-122"/>
+                <a:cs typeface="Calibri" pitchFamily="34" charset="-120"/>
+              </a:rPr>
+              <a:t>High value per acre and strict packer quality specifications justify spending on per-acre inputs.</a:t>
+            </a:r>
+            <a:endParaRPr lang="en-US" sz="1150" dirty="0"/>
+          </a:p>
+        </p:txBody>
+      </p:sp>
+      <p:sp>
+        <p:nvSpPr>
+          <p:cNvPr id="19" name="Text 14"/>
+          <p:cNvSpPr txBox="1"/>
+          <p:nvPr/>
+        </p:nvSpPr>
+        <p:spPr>
+          <a:xfrm>
+            <a:off x="502920" y="6382512"/>
+            <a:ext cx="8229600" cy="274320"/>
+          </a:xfrm>
+          <a:prstGeom prst="rect">
+            <a:avLst/>
+          </a:prstGeom>
+          <a:noFill/>
+          <a:ln/>
+        </p:spPr>
+        <p:txBody>
+          <a:bodyPr wrap="square" lIns="0" tIns="0" rIns="0" bIns="0" rtlCol="0" anchor="ctr"/>
+          <a:lstStyle/>
+          <a:p>
+            <a:pPr algn="l" indent="0" marL="0">
+              <a:buNone/>
+            </a:pPr>
+            <a:r>
+              <a:rPr lang="en-US" sz="950" dirty="0">
+                <a:solidFill>
+                  <a:srgbClr val="6B7D87">
+                    <a:alpha val="80000"/>
+                  </a:srgbClr>
+                </a:solidFill>
+                <a:latin typeface="Calibri" pitchFamily="34" charset="0"/>
+                <a:ea typeface="Calibri" pitchFamily="34" charset="-122"/>
+                <a:cs typeface="Calibri" pitchFamily="34" charset="-120"/>
+              </a:rPr>
+              <a:t>Green Solutions · United States Market Dossier</a:t>
+            </a:r>
+            <a:endParaRPr lang="en-US" sz="950" dirty="0"/>
+          </a:p>
+        </p:txBody>
+      </p:sp>
+      <p:sp>
+        <p:nvSpPr>
+          <p:cNvPr id="20" name="Text 15"/>
+          <p:cNvSpPr txBox="1"/>
+          <p:nvPr/>
+        </p:nvSpPr>
+        <p:spPr>
+          <a:xfrm>
+            <a:off x="11140135" y="6382512"/>
+            <a:ext cx="548640" cy="274320"/>
+          </a:xfrm>
+          <a:prstGeom prst="rect">
+            <a:avLst/>
+          </a:prstGeom>
+          <a:noFill/>
+          <a:ln/>
+        </p:spPr>
+        <p:txBody>
+          <a:bodyPr wrap="square" lIns="0" tIns="0" rIns="0" bIns="0" rtlCol="0" anchor="ctr"/>
+          <a:lstStyle/>
+          <a:p>
+            <a:pPr algn="r" indent="0" marL="0">
+              <a:buNone/>
+            </a:pPr>
+            <a:r>
+              <a:rPr lang="en-US" sz="950" dirty="0">
+                <a:solidFill>
+                  <a:srgbClr val="6B7D87">
+                    <a:alpha val="80000"/>
+                  </a:srgbClr>
+                </a:solidFill>
+                <a:latin typeface="Calibri" pitchFamily="34" charset="0"/>
+                <a:ea typeface="Calibri" pitchFamily="34" charset="-122"/>
+                <a:cs typeface="Calibri" pitchFamily="34" charset="-120"/>
+              </a:rPr>
+              <a:t>12</a:t>
+            </a:r>
+            <a:endParaRPr lang="en-US" sz="950" dirty="0"/>
+          </a:p>
+        </p:txBody>
+      </p:sp>
+    </p:spTree>
+  </p:cSld>
+  <p:clrMapOvr>
+    <a:masterClrMapping/>
+  </p:clrMapOvr>
+</p:sld>
+</file>
+
+<file path=ppt/slides/slide14.xml><?xml version="1.0" encoding="utf-8"?>
+<p:sld xmlns:a="http://schemas.openxmlformats.org/drawingml/2006/main" xmlns:r="http://schemas.openxmlformats.org/officeDocument/2006/relationships" xmlns:p="http://schemas.openxmlformats.org/presentationml/2006/main">
+  <p:cSld name="Slide 14">
+    <p:bg>
+      <p:bgPr>
+        <a:solidFill>
+          <a:srgbClr val="FAFBFC"/>
+        </a:solidFill>
+      </p:bgPr>
+    </p:bg>
+    <p:spTree>
+      <p:nvGrpSpPr>
+        <p:cNvPr id="1" name=""/>
+        <p:cNvGrpSpPr/>
+        <p:nvPr/>
+      </p:nvGrpSpPr>
+      <p:grpSpPr>
+        <a:xfrm>
+          <a:off x="0" y="0"/>
+          <a:ext cx="0" cy="0"/>
+          <a:chOff x="0" y="0"/>
+          <a:chExt cx="0" cy="0"/>
+        </a:xfrm>
+      </p:grpSpPr>
+      <p:sp>
+        <p:nvSpPr>
+          <p:cNvPr id="2" name="Text 0"/>
+          <p:cNvSpPr txBox="1"/>
+          <p:nvPr/>
+        </p:nvSpPr>
+        <p:spPr>
+          <a:xfrm>
+            <a:off x="594360" y="411480"/>
+            <a:ext cx="10515600" cy="274320"/>
+          </a:xfrm>
+          <a:prstGeom prst="rect">
+            <a:avLst/>
+          </a:prstGeom>
+          <a:noFill/>
+          <a:ln/>
+        </p:spPr>
+        <p:txBody>
+          <a:bodyPr wrap="square" lIns="0" tIns="0" rIns="0" bIns="0" rtlCol="0" anchor="ctr"/>
+          <a:lstStyle/>
+          <a:p>
+            <a:pPr algn="l" indent="0" marL="0">
+              <a:buNone/>
+            </a:pPr>
+            <a:r>
+              <a:rPr lang="en-US" sz="1150" b="1" spc="200" kern="0" dirty="0">
+                <a:solidFill>
+                  <a:srgbClr val="D98C2B"/>
+                </a:solidFill>
+                <a:latin typeface="Calibri" pitchFamily="34" charset="0"/>
+                <a:ea typeface="Calibri" pitchFamily="34" charset="-122"/>
+                <a:cs typeface="Calibri" pitchFamily="34" charset="-120"/>
+              </a:rPr>
+              <a:t>HOW WE PROCEED</a:t>
+            </a:r>
+            <a:endParaRPr lang="en-US" sz="1150" dirty="0"/>
+          </a:p>
+        </p:txBody>
+      </p:sp>
+      <p:sp>
+        <p:nvSpPr>
+          <p:cNvPr id="3" name="Text 1"/>
+          <p:cNvSpPr txBox="1"/>
+          <p:nvPr/>
+        </p:nvSpPr>
+        <p:spPr>
+          <a:xfrm>
+            <a:off x="594360" y="731520"/>
+            <a:ext cx="10881360" cy="731520"/>
+          </a:xfrm>
+          <a:prstGeom prst="rect">
+            <a:avLst/>
+          </a:prstGeom>
+          <a:noFill/>
+          <a:ln/>
+        </p:spPr>
+        <p:txBody>
+          <a:bodyPr wrap="square" lIns="0" tIns="0" rIns="0" bIns="0" rtlCol="0" anchor="ctr"/>
+          <a:lstStyle/>
+          <a:p>
+            <a:pPr algn="l" indent="0" marL="0">
+              <a:buNone/>
+            </a:pPr>
+            <a:r>
+              <a:rPr lang="en-US" sz="3000" b="1" dirty="0">
+                <a:solidFill>
+                  <a:srgbClr val="0F2E40"/>
+                </a:solidFill>
+                <a:latin typeface="Cambria" pitchFamily="34" charset="0"/>
+                <a:ea typeface="Cambria" pitchFamily="34" charset="-122"/>
+                <a:cs typeface="Cambria" pitchFamily="34" charset="-120"/>
+              </a:rPr>
+              <a:t>A staged rollout, measured at every step</a:t>
+            </a:r>
+            <a:endParaRPr lang="en-US" sz="3000" dirty="0"/>
+          </a:p>
+        </p:txBody>
+      </p:sp>
+      <p:sp>
+        <p:nvSpPr>
+          <p:cNvPr id="4" name="Shape 2"/>
+          <p:cNvSpPr/>
+          <p:nvPr/>
+        </p:nvSpPr>
+        <p:spPr>
+          <a:xfrm>
+            <a:off x="594360" y="1874520"/>
+            <a:ext cx="2545004" cy="2834640"/>
+          </a:xfrm>
+          <a:prstGeom prst="roundRect">
+            <a:avLst>
+              <a:gd name="adj" fmla="val 3593"/>
+            </a:avLst>
+          </a:prstGeom>
+          <a:solidFill>
+            <a:srgbClr val="EEF2F5"/>
+          </a:solidFill>
+          <a:ln w="9525">
+            <a:solidFill>
+              <a:srgbClr val="D8E1E7"/>
+            </a:solidFill>
+            <a:prstDash val="solid"/>
+          </a:ln>
+        </p:spPr>
+      </p:sp>
+      <p:sp>
+        <p:nvSpPr>
+          <p:cNvPr id="5" name="Shape 3"/>
+          <p:cNvSpPr/>
+          <p:nvPr/>
+        </p:nvSpPr>
+        <p:spPr>
+          <a:xfrm>
+            <a:off x="822960" y="2103120"/>
+            <a:ext cx="566928" cy="566928"/>
+          </a:xfrm>
+          <a:prstGeom prst="ellipse">
+            <a:avLst/>
+          </a:prstGeom>
+          <a:solidFill>
+            <a:srgbClr val="1D4E6B"/>
+          </a:solidFill>
+          <a:ln/>
+        </p:spPr>
+      </p:sp>
+      <p:sp>
+        <p:nvSpPr>
+          <p:cNvPr id="6" name="Text 4"/>
+          <p:cNvSpPr txBox="1"/>
+          <p:nvPr/>
+        </p:nvSpPr>
+        <p:spPr>
+          <a:xfrm>
+            <a:off x="822960" y="2103120"/>
+            <a:ext cx="566928" cy="566928"/>
+          </a:xfrm>
+          <a:prstGeom prst="rect">
+            <a:avLst/>
+          </a:prstGeom>
+          <a:noFill/>
+          <a:ln/>
+        </p:spPr>
+        <p:txBody>
+          <a:bodyPr wrap="square" lIns="0" tIns="0" rIns="0" bIns="0" rtlCol="0" anchor="ctr"/>
+          <a:lstStyle/>
+          <a:p>
+            <a:pPr algn="ctr" indent="0" marL="0">
+              <a:buNone/>
+            </a:pPr>
+            <a:r>
+              <a:rPr lang="en-US" sz="1600" b="1" dirty="0">
+                <a:solidFill>
+                  <a:srgbClr val="FFFFFF"/>
+                </a:solidFill>
+                <a:latin typeface="Cambria" pitchFamily="34" charset="0"/>
+                <a:ea typeface="Cambria" pitchFamily="34" charset="-122"/>
+                <a:cs typeface="Cambria" pitchFamily="34" charset="-120"/>
+              </a:rPr>
+              <a:t>1</a:t>
+            </a:r>
+            <a:endParaRPr lang="en-US" sz="1600" dirty="0"/>
+          </a:p>
+        </p:txBody>
+      </p:sp>
+      <p:sp>
+        <p:nvSpPr>
+          <p:cNvPr id="7" name="Text 5"/>
+          <p:cNvSpPr txBox="1"/>
+          <p:nvPr/>
+        </p:nvSpPr>
+        <p:spPr>
+          <a:xfrm>
+            <a:off x="822960" y="2788920"/>
+            <a:ext cx="2087804" cy="457200"/>
+          </a:xfrm>
+          <a:prstGeom prst="rect">
+            <a:avLst/>
+          </a:prstGeom>
+          <a:noFill/>
+          <a:ln/>
+        </p:spPr>
+        <p:txBody>
+          <a:bodyPr wrap="square" lIns="0" tIns="0" rIns="0" bIns="0" rtlCol="0" anchor="ctr"/>
+          <a:lstStyle/>
+          <a:p>
+            <a:pPr algn="l" indent="0" marL="0">
+              <a:buNone/>
+            </a:pPr>
+            <a:r>
+              <a:rPr lang="en-US" sz="1400" b="1" dirty="0">
+                <a:solidFill>
+                  <a:srgbClr val="1D4E6B"/>
+                </a:solidFill>
+                <a:latin typeface="Cambria" pitchFamily="34" charset="0"/>
+                <a:ea typeface="Cambria" pitchFamily="34" charset="-122"/>
+                <a:cs typeface="Cambria" pitchFamily="34" charset="-120"/>
+              </a:rPr>
+              <a:t>Assessment</a:t>
+            </a:r>
+            <a:endParaRPr lang="en-US" sz="1400" dirty="0"/>
+          </a:p>
+        </p:txBody>
+      </p:sp>
+      <p:sp>
+        <p:nvSpPr>
+          <p:cNvPr id="8" name="Text 6"/>
+          <p:cNvSpPr txBox="1"/>
+          <p:nvPr/>
+        </p:nvSpPr>
+        <p:spPr>
+          <a:xfrm>
+            <a:off x="822960" y="3291840"/>
+            <a:ext cx="2087804" cy="1234440"/>
+          </a:xfrm>
+          <a:prstGeom prst="rect">
+            <a:avLst/>
+          </a:prstGeom>
+          <a:noFill/>
+          <a:ln/>
+        </p:spPr>
+        <p:txBody>
+          <a:bodyPr wrap="square" lIns="0" tIns="0" rIns="0" bIns="0" rtlCol="0" anchor="t"/>
+          <a:lstStyle/>
+          <a:p>
+            <a:pPr algn="l" indent="0" marL="0">
+              <a:lnSpc>
+                <a:spcPct val="120000"/>
+              </a:lnSpc>
+              <a:buNone/>
+            </a:pPr>
+            <a:r>
+              <a:rPr lang="en-US" sz="1200" dirty="0">
+                <a:solidFill>
+                  <a:srgbClr val="2F3E47"/>
+                </a:solidFill>
+                <a:latin typeface="Calibri" pitchFamily="34" charset="0"/>
+                <a:ea typeface="Calibri" pitchFamily="34" charset="-122"/>
+                <a:cs typeface="Calibri" pitchFamily="34" charset="-120"/>
+              </a:rPr>
+              <a:t>Review of the soil, the irrigation method and the crop. No commitment at this stage.</a:t>
+            </a:r>
+            <a:endParaRPr lang="en-US" sz="1200" dirty="0"/>
+          </a:p>
+        </p:txBody>
+      </p:sp>
+      <p:sp>
+        <p:nvSpPr>
+          <p:cNvPr id="9" name="Shape 7"/>
+          <p:cNvSpPr/>
+          <p:nvPr/>
+        </p:nvSpPr>
+        <p:spPr>
+          <a:xfrm>
+            <a:off x="3413684" y="1874520"/>
+            <a:ext cx="2545004" cy="2834640"/>
+          </a:xfrm>
+          <a:prstGeom prst="roundRect">
+            <a:avLst>
+              <a:gd name="adj" fmla="val 3593"/>
+            </a:avLst>
+          </a:prstGeom>
+          <a:solidFill>
+            <a:srgbClr val="EEF2F5"/>
+          </a:solidFill>
+          <a:ln w="9525">
+            <a:solidFill>
+              <a:srgbClr val="D8E1E7"/>
+            </a:solidFill>
+            <a:prstDash val="solid"/>
+          </a:ln>
+        </p:spPr>
+      </p:sp>
+      <p:sp>
+        <p:nvSpPr>
+          <p:cNvPr id="10" name="Shape 8"/>
+          <p:cNvSpPr/>
+          <p:nvPr/>
+        </p:nvSpPr>
+        <p:spPr>
+          <a:xfrm>
+            <a:off x="3642284" y="2103120"/>
+            <a:ext cx="566928" cy="566928"/>
+          </a:xfrm>
+          <a:prstGeom prst="ellipse">
+            <a:avLst/>
+          </a:prstGeom>
+          <a:solidFill>
+            <a:srgbClr val="1D4E6B"/>
+          </a:solidFill>
+          <a:ln/>
+        </p:spPr>
+      </p:sp>
+      <p:sp>
+        <p:nvSpPr>
+          <p:cNvPr id="11" name="Text 9"/>
+          <p:cNvSpPr txBox="1"/>
+          <p:nvPr/>
+        </p:nvSpPr>
+        <p:spPr>
+          <a:xfrm>
+            <a:off x="3642284" y="2103120"/>
+            <a:ext cx="566928" cy="566928"/>
+          </a:xfrm>
+          <a:prstGeom prst="rect">
+            <a:avLst/>
+          </a:prstGeom>
+          <a:noFill/>
+          <a:ln/>
+        </p:spPr>
+        <p:txBody>
+          <a:bodyPr wrap="square" lIns="0" tIns="0" rIns="0" bIns="0" rtlCol="0" anchor="ctr"/>
+          <a:lstStyle/>
+          <a:p>
+            <a:pPr algn="ctr" indent="0" marL="0">
+              <a:buNone/>
+            </a:pPr>
+            <a:r>
+              <a:rPr lang="en-US" sz="1600" b="1" dirty="0">
+                <a:solidFill>
+                  <a:srgbClr val="FFFFFF"/>
+                </a:solidFill>
+                <a:latin typeface="Cambria" pitchFamily="34" charset="0"/>
+                <a:ea typeface="Cambria" pitchFamily="34" charset="-122"/>
+                <a:cs typeface="Cambria" pitchFamily="34" charset="-120"/>
+              </a:rPr>
+              <a:t>2</a:t>
+            </a:r>
+            <a:endParaRPr lang="en-US" sz="1600" dirty="0"/>
+          </a:p>
+        </p:txBody>
+      </p:sp>
+      <p:sp>
+        <p:nvSpPr>
+          <p:cNvPr id="12" name="Text 10"/>
+          <p:cNvSpPr txBox="1"/>
+          <p:nvPr/>
+        </p:nvSpPr>
+        <p:spPr>
+          <a:xfrm>
+            <a:off x="3642284" y="2788920"/>
+            <a:ext cx="2087804" cy="457200"/>
+          </a:xfrm>
+          <a:prstGeom prst="rect">
+            <a:avLst/>
+          </a:prstGeom>
+          <a:noFill/>
+          <a:ln/>
+        </p:spPr>
+        <p:txBody>
+          <a:bodyPr wrap="square" lIns="0" tIns="0" rIns="0" bIns="0" rtlCol="0" anchor="ctr"/>
+          <a:lstStyle/>
+          <a:p>
+            <a:pPr algn="l" indent="0" marL="0">
+              <a:buNone/>
+            </a:pPr>
+            <a:r>
+              <a:rPr lang="en-US" sz="1400" b="1" dirty="0">
+                <a:solidFill>
+                  <a:srgbClr val="1D4E6B"/>
+                </a:solidFill>
+                <a:latin typeface="Cambria" pitchFamily="34" charset="0"/>
+                <a:ea typeface="Cambria" pitchFamily="34" charset="-122"/>
+                <a:cs typeface="Cambria" pitchFamily="34" charset="-120"/>
+              </a:rPr>
+              <a:t>Trial block</a:t>
+            </a:r>
+            <a:endParaRPr lang="en-US" sz="1400" dirty="0"/>
+          </a:p>
+        </p:txBody>
+      </p:sp>
+      <p:sp>
+        <p:nvSpPr>
+          <p:cNvPr id="13" name="Text 11"/>
+          <p:cNvSpPr txBox="1"/>
+          <p:nvPr/>
+        </p:nvSpPr>
+        <p:spPr>
+          <a:xfrm>
+            <a:off x="3642284" y="3291840"/>
+            <a:ext cx="2087804" cy="1234440"/>
+          </a:xfrm>
+          <a:prstGeom prst="rect">
+            <a:avLst/>
+          </a:prstGeom>
+          <a:noFill/>
+          <a:ln/>
+        </p:spPr>
+        <p:txBody>
+          <a:bodyPr wrap="square" lIns="0" tIns="0" rIns="0" bIns="0" rtlCol="0" anchor="t"/>
+          <a:lstStyle/>
+          <a:p>
+            <a:pPr algn="l" indent="0" marL="0">
+              <a:lnSpc>
+                <a:spcPct val="120000"/>
+              </a:lnSpc>
+              <a:buNone/>
+            </a:pPr>
+            <a:r>
+              <a:rPr lang="en-US" sz="1200" dirty="0">
+                <a:solidFill>
+                  <a:srgbClr val="2F3E47"/>
+                </a:solidFill>
+                <a:latin typeface="Calibri" pitchFamily="34" charset="0"/>
+                <a:ea typeface="Calibri" pitchFamily="34" charset="-122"/>
+                <a:cs typeface="Calibri" pitchFamily="34" charset="-120"/>
+              </a:rPr>
+              <a:t>A comparative trial on one block, against a control block managed identically.</a:t>
+            </a:r>
+            <a:endParaRPr lang="en-US" sz="1200" dirty="0"/>
+          </a:p>
+        </p:txBody>
+      </p:sp>
+      <p:sp>
+        <p:nvSpPr>
+          <p:cNvPr id="14" name="Shape 12"/>
+          <p:cNvSpPr/>
+          <p:nvPr/>
+        </p:nvSpPr>
+        <p:spPr>
+          <a:xfrm>
+            <a:off x="6233008" y="1874520"/>
+            <a:ext cx="2545004" cy="2834640"/>
+          </a:xfrm>
+          <a:prstGeom prst="roundRect">
+            <a:avLst>
+              <a:gd name="adj" fmla="val 3593"/>
+            </a:avLst>
+          </a:prstGeom>
+          <a:solidFill>
+            <a:srgbClr val="EEF2F5"/>
+          </a:solidFill>
+          <a:ln w="9525">
+            <a:solidFill>
+              <a:srgbClr val="D8E1E7"/>
+            </a:solidFill>
+            <a:prstDash val="solid"/>
+          </a:ln>
+        </p:spPr>
+      </p:sp>
+      <p:sp>
+        <p:nvSpPr>
+          <p:cNvPr id="15" name="Shape 13"/>
+          <p:cNvSpPr/>
+          <p:nvPr/>
+        </p:nvSpPr>
+        <p:spPr>
+          <a:xfrm>
+            <a:off x="6461608" y="2103120"/>
+            <a:ext cx="566928" cy="566928"/>
+          </a:xfrm>
+          <a:prstGeom prst="ellipse">
+            <a:avLst/>
+          </a:prstGeom>
+          <a:solidFill>
+            <a:srgbClr val="1D4E6B"/>
+          </a:solidFill>
+          <a:ln/>
+        </p:spPr>
+      </p:sp>
+      <p:sp>
+        <p:nvSpPr>
+          <p:cNvPr id="16" name="Text 14"/>
+          <p:cNvSpPr txBox="1"/>
+          <p:nvPr/>
+        </p:nvSpPr>
+        <p:spPr>
+          <a:xfrm>
+            <a:off x="6461608" y="2103120"/>
+            <a:ext cx="566928" cy="566928"/>
+          </a:xfrm>
+          <a:prstGeom prst="rect">
+            <a:avLst/>
+          </a:prstGeom>
+          <a:noFill/>
+          <a:ln/>
+        </p:spPr>
+        <p:txBody>
+          <a:bodyPr wrap="square" lIns="0" tIns="0" rIns="0" bIns="0" rtlCol="0" anchor="ctr"/>
+          <a:lstStyle/>
+          <a:p>
+            <a:pPr algn="ctr" indent="0" marL="0">
+              <a:buNone/>
+            </a:pPr>
+            <a:r>
+              <a:rPr lang="en-US" sz="1600" b="1" dirty="0">
+                <a:solidFill>
+                  <a:srgbClr val="FFFFFF"/>
+                </a:solidFill>
+                <a:latin typeface="Cambria" pitchFamily="34" charset="0"/>
+                <a:ea typeface="Cambria" pitchFamily="34" charset="-122"/>
+                <a:cs typeface="Cambria" pitchFamily="34" charset="-120"/>
+              </a:rPr>
+              <a:t>3</a:t>
+            </a:r>
+            <a:endParaRPr lang="en-US" sz="1600" dirty="0"/>
+          </a:p>
+        </p:txBody>
+      </p:sp>
+      <p:sp>
+        <p:nvSpPr>
+          <p:cNvPr id="17" name="Text 15"/>
+          <p:cNvSpPr txBox="1"/>
+          <p:nvPr/>
+        </p:nvSpPr>
+        <p:spPr>
+          <a:xfrm>
+            <a:off x="6461608" y="2788920"/>
+            <a:ext cx="2087804" cy="457200"/>
+          </a:xfrm>
+          <a:prstGeom prst="rect">
+            <a:avLst/>
+          </a:prstGeom>
+          <a:noFill/>
+          <a:ln/>
+        </p:spPr>
+        <p:txBody>
+          <a:bodyPr wrap="square" lIns="0" tIns="0" rIns="0" bIns="0" rtlCol="0" anchor="ctr"/>
+          <a:lstStyle/>
+          <a:p>
+            <a:pPr algn="l" indent="0" marL="0">
+              <a:buNone/>
+            </a:pPr>
+            <a:r>
+              <a:rPr lang="en-US" sz="1400" b="1" dirty="0">
+                <a:solidFill>
+                  <a:srgbClr val="1D4E6B"/>
+                </a:solidFill>
+                <a:latin typeface="Cambria" pitchFamily="34" charset="0"/>
+                <a:ea typeface="Cambria" pitchFamily="34" charset="-122"/>
+                <a:cs typeface="Cambria" pitchFamily="34" charset="-120"/>
+              </a:rPr>
+              <a:t>Measurement</a:t>
+            </a:r>
+            <a:endParaRPr lang="en-US" sz="1400" dirty="0"/>
+          </a:p>
+        </p:txBody>
+      </p:sp>
+      <p:sp>
+        <p:nvSpPr>
+          <p:cNvPr id="18" name="Text 16"/>
+          <p:cNvSpPr txBox="1"/>
+          <p:nvPr/>
+        </p:nvSpPr>
+        <p:spPr>
+          <a:xfrm>
+            <a:off x="6461608" y="3291840"/>
+            <a:ext cx="2087804" cy="1234440"/>
+          </a:xfrm>
+          <a:prstGeom prst="rect">
+            <a:avLst/>
+          </a:prstGeom>
+          <a:noFill/>
+          <a:ln/>
+        </p:spPr>
+        <p:txBody>
+          <a:bodyPr wrap="square" lIns="0" tIns="0" rIns="0" bIns="0" rtlCol="0" anchor="t"/>
+          <a:lstStyle/>
+          <a:p>
+            <a:pPr algn="l" indent="0" marL="0">
+              <a:lnSpc>
+                <a:spcPct val="120000"/>
+              </a:lnSpc>
+              <a:buNone/>
+            </a:pPr>
+            <a:r>
+              <a:rPr lang="en-US" sz="1200" dirty="0">
+                <a:solidFill>
+                  <a:srgbClr val="2F3E47"/>
+                </a:solidFill>
+                <a:latin typeface="Calibri" pitchFamily="34" charset="0"/>
+                <a:ea typeface="Calibri" pitchFamily="34" charset="-122"/>
+                <a:cs typeface="Calibri" pitchFamily="34" charset="-120"/>
+              </a:rPr>
+              <a:t>Water use and yield recorded across a full production cycle.</a:t>
+            </a:r>
+            <a:endParaRPr lang="en-US" sz="1200" dirty="0"/>
+          </a:p>
+        </p:txBody>
+      </p:sp>
+      <p:sp>
+        <p:nvSpPr>
+          <p:cNvPr id="19" name="Shape 17"/>
+          <p:cNvSpPr/>
+          <p:nvPr/>
+        </p:nvSpPr>
+        <p:spPr>
+          <a:xfrm>
+            <a:off x="9052331" y="1874520"/>
+            <a:ext cx="2545004" cy="2834640"/>
+          </a:xfrm>
+          <a:prstGeom prst="roundRect">
+            <a:avLst>
+              <a:gd name="adj" fmla="val 3593"/>
+            </a:avLst>
+          </a:prstGeom>
+          <a:solidFill>
+            <a:srgbClr val="EEF2F5"/>
+          </a:solidFill>
+          <a:ln w="9525">
+            <a:solidFill>
+              <a:srgbClr val="D8E1E7"/>
+            </a:solidFill>
+            <a:prstDash val="solid"/>
+          </a:ln>
+        </p:spPr>
+      </p:sp>
+      <p:sp>
+        <p:nvSpPr>
+          <p:cNvPr id="20" name="Shape 18"/>
+          <p:cNvSpPr/>
+          <p:nvPr/>
+        </p:nvSpPr>
+        <p:spPr>
+          <a:xfrm>
+            <a:off x="9280931" y="2103120"/>
+            <a:ext cx="566928" cy="566928"/>
+          </a:xfrm>
+          <a:prstGeom prst="ellipse">
+            <a:avLst/>
+          </a:prstGeom>
+          <a:solidFill>
+            <a:srgbClr val="1D4E6B"/>
+          </a:solidFill>
+          <a:ln/>
+        </p:spPr>
+      </p:sp>
+      <p:sp>
+        <p:nvSpPr>
+          <p:cNvPr id="21" name="Text 19"/>
+          <p:cNvSpPr txBox="1"/>
+          <p:nvPr/>
+        </p:nvSpPr>
+        <p:spPr>
+          <a:xfrm>
+            <a:off x="9280931" y="2103120"/>
+            <a:ext cx="566928" cy="566928"/>
+          </a:xfrm>
+          <a:prstGeom prst="rect">
+            <a:avLst/>
+          </a:prstGeom>
+          <a:noFill/>
+          <a:ln/>
+        </p:spPr>
+        <p:txBody>
+          <a:bodyPr wrap="square" lIns="0" tIns="0" rIns="0" bIns="0" rtlCol="0" anchor="ctr"/>
+          <a:lstStyle/>
+          <a:p>
+            <a:pPr algn="ctr" indent="0" marL="0">
+              <a:buNone/>
+            </a:pPr>
+            <a:r>
+              <a:rPr lang="en-US" sz="1600" b="1" dirty="0">
+                <a:solidFill>
+                  <a:srgbClr val="FFFFFF"/>
+                </a:solidFill>
+                <a:latin typeface="Cambria" pitchFamily="34" charset="0"/>
+                <a:ea typeface="Cambria" pitchFamily="34" charset="-122"/>
+                <a:cs typeface="Cambria" pitchFamily="34" charset="-120"/>
+              </a:rPr>
+              <a:t>4</a:t>
+            </a:r>
+            <a:endParaRPr lang="en-US" sz="1600" dirty="0"/>
+          </a:p>
+        </p:txBody>
+      </p:sp>
+      <p:sp>
+        <p:nvSpPr>
+          <p:cNvPr id="22" name="Text 20"/>
+          <p:cNvSpPr txBox="1"/>
+          <p:nvPr/>
+        </p:nvSpPr>
+        <p:spPr>
+          <a:xfrm>
+            <a:off x="9280931" y="2788920"/>
+            <a:ext cx="2087804" cy="457200"/>
+          </a:xfrm>
+          <a:prstGeom prst="rect">
+            <a:avLst/>
+          </a:prstGeom>
+          <a:noFill/>
+          <a:ln/>
+        </p:spPr>
+        <p:txBody>
+          <a:bodyPr wrap="square" lIns="0" tIns="0" rIns="0" bIns="0" rtlCol="0" anchor="ctr"/>
+          <a:lstStyle/>
+          <a:p>
+            <a:pPr algn="l" indent="0" marL="0">
+              <a:buNone/>
+            </a:pPr>
+            <a:r>
+              <a:rPr lang="en-US" sz="1400" b="1" dirty="0">
+                <a:solidFill>
+                  <a:srgbClr val="1D4E6B"/>
+                </a:solidFill>
+                <a:latin typeface="Cambria" pitchFamily="34" charset="0"/>
+                <a:ea typeface="Cambria" pitchFamily="34" charset="-122"/>
+                <a:cs typeface="Cambria" pitchFamily="34" charset="-120"/>
+              </a:rPr>
+              <a:t>Rollout</a:t>
+            </a:r>
+            <a:endParaRPr lang="en-US" sz="1400" dirty="0"/>
+          </a:p>
+        </p:txBody>
+      </p:sp>
+      <p:sp>
+        <p:nvSpPr>
+          <p:cNvPr id="23" name="Text 21"/>
+          <p:cNvSpPr txBox="1"/>
+          <p:nvPr/>
+        </p:nvSpPr>
+        <p:spPr>
+          <a:xfrm>
+            <a:off x="9280931" y="3291840"/>
+            <a:ext cx="2087804" cy="1234440"/>
+          </a:xfrm>
+          <a:prstGeom prst="rect">
+            <a:avLst/>
+          </a:prstGeom>
+          <a:noFill/>
+          <a:ln/>
+        </p:spPr>
+        <p:txBody>
+          <a:bodyPr wrap="square" lIns="0" tIns="0" rIns="0" bIns="0" rtlCol="0" anchor="t"/>
+          <a:lstStyle/>
+          <a:p>
+            <a:pPr algn="l" indent="0" marL="0">
+              <a:lnSpc>
+                <a:spcPct val="120000"/>
+              </a:lnSpc>
+              <a:buNone/>
+            </a:pPr>
+            <a:r>
+              <a:rPr lang="en-US" sz="1200" dirty="0">
+                <a:solidFill>
+                  <a:srgbClr val="2F3E47"/>
+                </a:solidFill>
+                <a:latin typeface="Calibri" pitchFamily="34" charset="0"/>
+                <a:ea typeface="Calibri" pitchFamily="34" charset="-122"/>
+                <a:cs typeface="Calibri" pitchFamily="34" charset="-120"/>
+              </a:rPr>
+              <a:t>Gradual extension to the remaining acres on the basis of the results observed.</a:t>
+            </a:r>
+            <a:endParaRPr lang="en-US" sz="1200" dirty="0"/>
+          </a:p>
+        </p:txBody>
+      </p:sp>
+      <p:sp>
+        <p:nvSpPr>
+          <p:cNvPr id="24" name="Text 22"/>
+          <p:cNvSpPr txBox="1"/>
+          <p:nvPr/>
+        </p:nvSpPr>
+        <p:spPr>
+          <a:xfrm>
+            <a:off x="594360" y="4983480"/>
+            <a:ext cx="11002975" cy="822960"/>
+          </a:xfrm>
+          <a:prstGeom prst="rect">
+            <a:avLst/>
+          </a:prstGeom>
+          <a:noFill/>
+          <a:ln/>
+        </p:spPr>
+        <p:txBody>
+          <a:bodyPr wrap="square" lIns="0" tIns="0" rIns="0" bIns="0" rtlCol="0" anchor="t"/>
+          <a:lstStyle/>
+          <a:p>
+            <a:pPr algn="l" indent="0" marL="0">
+              <a:lnSpc>
+                <a:spcPct val="125000"/>
+              </a:lnSpc>
+              <a:buNone/>
+            </a:pPr>
+            <a:r>
+              <a:rPr lang="en-US" sz="1250" i="1" dirty="0">
+                <a:solidFill>
+                  <a:srgbClr val="6B7D87"/>
+                </a:solidFill>
+                <a:latin typeface="Calibri" pitchFamily="34" charset="0"/>
+                <a:ea typeface="Calibri" pitchFamily="34" charset="-122"/>
+                <a:cs typeface="Calibri" pitchFamily="34" charset="-120"/>
+              </a:rPr>
+              <a:t>The dosing rule is the same everywhere: 3 grams per liter of usable soil. What changes from one field to the next is the volume of soil the roots actually explore.</a:t>
+            </a:r>
+            <a:endParaRPr lang="en-US" sz="1250" dirty="0"/>
+          </a:p>
+        </p:txBody>
+      </p:sp>
+      <p:sp>
+        <p:nvSpPr>
+          <p:cNvPr id="25" name="Text 23"/>
+          <p:cNvSpPr txBox="1"/>
+          <p:nvPr/>
+        </p:nvSpPr>
+        <p:spPr>
+          <a:xfrm>
+            <a:off x="502920" y="6382512"/>
+            <a:ext cx="8229600" cy="274320"/>
+          </a:xfrm>
+          <a:prstGeom prst="rect">
+            <a:avLst/>
+          </a:prstGeom>
+          <a:noFill/>
+          <a:ln/>
+        </p:spPr>
+        <p:txBody>
+          <a:bodyPr wrap="square" lIns="0" tIns="0" rIns="0" bIns="0" rtlCol="0" anchor="ctr"/>
+          <a:lstStyle/>
+          <a:p>
+            <a:pPr algn="l" indent="0" marL="0">
+              <a:buNone/>
+            </a:pPr>
+            <a:r>
+              <a:rPr lang="en-US" sz="950" dirty="0">
+                <a:solidFill>
+                  <a:srgbClr val="6B7D87">
+                    <a:alpha val="80000"/>
+                  </a:srgbClr>
+                </a:solidFill>
+                <a:latin typeface="Calibri" pitchFamily="34" charset="0"/>
+                <a:ea typeface="Calibri" pitchFamily="34" charset="-122"/>
+                <a:cs typeface="Calibri" pitchFamily="34" charset="-120"/>
+              </a:rPr>
+              <a:t>Green Solutions · United States Market Dossier</a:t>
+            </a:r>
+            <a:endParaRPr lang="en-US" sz="950" dirty="0"/>
+          </a:p>
+        </p:txBody>
+      </p:sp>
+      <p:sp>
+        <p:nvSpPr>
+          <p:cNvPr id="26" name="Text 24"/>
+          <p:cNvSpPr txBox="1"/>
+          <p:nvPr/>
+        </p:nvSpPr>
+        <p:spPr>
+          <a:xfrm>
+            <a:off x="11140135" y="6382512"/>
+            <a:ext cx="548640" cy="274320"/>
+          </a:xfrm>
+          <a:prstGeom prst="rect">
+            <a:avLst/>
+          </a:prstGeom>
+          <a:noFill/>
+          <a:ln/>
+        </p:spPr>
+        <p:txBody>
+          <a:bodyPr wrap="square" lIns="0" tIns="0" rIns="0" bIns="0" rtlCol="0" anchor="ctr"/>
+          <a:lstStyle/>
+          <a:p>
+            <a:pPr algn="r" indent="0" marL="0">
+              <a:buNone/>
+            </a:pPr>
+            <a:r>
+              <a:rPr lang="en-US" sz="950" dirty="0">
+                <a:solidFill>
+                  <a:srgbClr val="6B7D87">
+                    <a:alpha val="80000"/>
+                  </a:srgbClr>
+                </a:solidFill>
+                <a:latin typeface="Calibri" pitchFamily="34" charset="0"/>
+                <a:ea typeface="Calibri" pitchFamily="34" charset="-122"/>
+                <a:cs typeface="Calibri" pitchFamily="34" charset="-120"/>
+              </a:rPr>
+              <a:t>13</a:t>
+            </a:r>
+            <a:endParaRPr lang="en-US" sz="950" dirty="0"/>
+          </a:p>
+        </p:txBody>
+      </p:sp>
+    </p:spTree>
+  </p:cSld>
+  <p:clrMapOvr>
+    <a:masterClrMapping/>
+  </p:clrMapOvr>
+</p:sld>
+</file>
+
+<file path=ppt/slides/slide15.xml><?xml version="1.0" encoding="utf-8"?>
+<p:sld xmlns:a="http://schemas.openxmlformats.org/drawingml/2006/main" xmlns:r="http://schemas.openxmlformats.org/officeDocument/2006/relationships" xmlns:p="http://schemas.openxmlformats.org/presentationml/2006/main">
+  <p:cSld name="Slide 15">
+    <p:bg>
+      <p:bgPr>
+        <a:solidFill>
+          <a:srgbClr val="FAFBFC"/>
+        </a:solidFill>
+      </p:bgPr>
+    </p:bg>
+    <p:spTree>
+      <p:nvGrpSpPr>
+        <p:cNvPr id="1" name=""/>
+        <p:cNvGrpSpPr/>
+        <p:nvPr/>
+      </p:nvGrpSpPr>
+      <p:grpSpPr>
+        <a:xfrm>
+          <a:off x="0" y="0"/>
+          <a:ext cx="0" cy="0"/>
+          <a:chOff x="0" y="0"/>
+          <a:chExt cx="0" cy="0"/>
+        </a:xfrm>
+      </p:grpSpPr>
+      <p:sp>
+        <p:nvSpPr>
+          <p:cNvPr id="2" name="Text 0"/>
+          <p:cNvSpPr txBox="1"/>
+          <p:nvPr/>
+        </p:nvSpPr>
+        <p:spPr>
+          <a:xfrm>
+            <a:off x="594360" y="411480"/>
+            <a:ext cx="10515600" cy="274320"/>
+          </a:xfrm>
+          <a:prstGeom prst="rect">
+            <a:avLst/>
+          </a:prstGeom>
+          <a:noFill/>
+          <a:ln/>
+        </p:spPr>
+        <p:txBody>
+          <a:bodyPr wrap="square" lIns="0" tIns="0" rIns="0" bIns="0" rtlCol="0" anchor="ctr"/>
+          <a:lstStyle/>
+          <a:p>
+            <a:pPr algn="l" indent="0" marL="0">
+              <a:buNone/>
+            </a:pPr>
+            <a:r>
+              <a:rPr lang="en-US" sz="1150" b="1" spc="200" kern="0" dirty="0">
+                <a:solidFill>
+                  <a:srgbClr val="D98C2B"/>
+                </a:solidFill>
+                <a:latin typeface="Calibri" pitchFamily="34" charset="0"/>
+                <a:ea typeface="Calibri" pitchFamily="34" charset="-122"/>
+                <a:cs typeface="Calibri" pitchFamily="34" charset="-120"/>
+              </a:rPr>
+              <a:t>Working together</a:t>
+            </a:r>
+            <a:endParaRPr lang="en-US" sz="1150" dirty="0"/>
+          </a:p>
+        </p:txBody>
+      </p:sp>
+      <p:sp>
+        <p:nvSpPr>
+          <p:cNvPr id="3" name="Text 1"/>
+          <p:cNvSpPr txBox="1"/>
+          <p:nvPr/>
+        </p:nvSpPr>
+        <p:spPr>
+          <a:xfrm>
+            <a:off x="594360" y="731520"/>
+            <a:ext cx="10881360" cy="731520"/>
+          </a:xfrm>
+          <a:prstGeom prst="rect">
+            <a:avLst/>
+          </a:prstGeom>
+          <a:noFill/>
+          <a:ln/>
+        </p:spPr>
+        <p:txBody>
+          <a:bodyPr wrap="square" lIns="0" tIns="0" rIns="0" bIns="0" rtlCol="0" anchor="ctr"/>
+          <a:lstStyle/>
+          <a:p>
+            <a:pPr algn="l" indent="0" marL="0">
+              <a:buNone/>
+            </a:pPr>
+            <a:r>
+              <a:rPr lang="en-US" sz="3000" b="1" dirty="0">
+                <a:solidFill>
+                  <a:srgbClr val="0F2E40"/>
+                </a:solidFill>
+                <a:latin typeface="Cambria" pitchFamily="34" charset="0"/>
+                <a:ea typeface="Cambria" pitchFamily="34" charset="-122"/>
+                <a:cs typeface="Cambria" pitchFamily="34" charset="-120"/>
+              </a:rPr>
+              <a:t>A local partner for the United States</a:t>
+            </a:r>
+            <a:endParaRPr lang="en-US" sz="3000" dirty="0"/>
+          </a:p>
+        </p:txBody>
+      </p:sp>
+      <p:sp>
+        <p:nvSpPr>
+          <p:cNvPr id="4" name="Shape 2"/>
+          <p:cNvSpPr/>
+          <p:nvPr/>
+        </p:nvSpPr>
+        <p:spPr>
+          <a:xfrm>
+            <a:off x="594360" y="1874520"/>
+            <a:ext cx="2545004" cy="2834640"/>
+          </a:xfrm>
+          <a:prstGeom prst="roundRect">
+            <a:avLst>
+              <a:gd name="adj" fmla="val 3593"/>
+            </a:avLst>
+          </a:prstGeom>
+          <a:solidFill>
+            <a:srgbClr val="EEF2F5"/>
+          </a:solidFill>
+          <a:ln w="9525">
+            <a:solidFill>
+              <a:srgbClr val="D8E1E7"/>
+            </a:solidFill>
+            <a:prstDash val="solid"/>
+          </a:ln>
+        </p:spPr>
+      </p:sp>
+      <p:sp>
+        <p:nvSpPr>
+          <p:cNvPr id="5" name="Shape 3"/>
+          <p:cNvSpPr/>
+          <p:nvPr/>
+        </p:nvSpPr>
+        <p:spPr>
+          <a:xfrm>
+            <a:off x="822960" y="2103120"/>
+            <a:ext cx="566928" cy="566928"/>
+          </a:xfrm>
+          <a:prstGeom prst="ellipse">
+            <a:avLst/>
+          </a:prstGeom>
+          <a:solidFill>
+            <a:srgbClr val="1D4E6B"/>
+          </a:solidFill>
+          <a:ln/>
+        </p:spPr>
+      </p:sp>
+      <p:sp>
+        <p:nvSpPr>
+          <p:cNvPr id="6" name="Text 4"/>
+          <p:cNvSpPr txBox="1"/>
+          <p:nvPr/>
+        </p:nvSpPr>
+        <p:spPr>
+          <a:xfrm>
+            <a:off x="822960" y="2103120"/>
+            <a:ext cx="566928" cy="566928"/>
+          </a:xfrm>
+          <a:prstGeom prst="rect">
+            <a:avLst/>
+          </a:prstGeom>
+          <a:noFill/>
+          <a:ln/>
+        </p:spPr>
+        <p:txBody>
+          <a:bodyPr wrap="square" lIns="0" tIns="0" rIns="0" bIns="0" rtlCol="0" anchor="ctr"/>
+          <a:lstStyle/>
+          <a:p>
+            <a:pPr algn="ctr" indent="0" marL="0">
+              <a:buNone/>
+            </a:pPr>
+            <a:r>
+              <a:rPr lang="en-US" sz="1600" b="1" dirty="0">
+                <a:solidFill>
+                  <a:srgbClr val="FFFFFF"/>
+                </a:solidFill>
+                <a:latin typeface="Cambria" pitchFamily="34" charset="0"/>
+                <a:ea typeface="Cambria" pitchFamily="34" charset="-122"/>
+                <a:cs typeface="Cambria" pitchFamily="34" charset="-120"/>
+              </a:rPr>
+              <a:t>1</a:t>
+            </a:r>
+            <a:endParaRPr lang="en-US" sz="1600" dirty="0"/>
+          </a:p>
+        </p:txBody>
+      </p:sp>
+      <p:sp>
+        <p:nvSpPr>
+          <p:cNvPr id="7" name="Text 5"/>
+          <p:cNvSpPr txBox="1"/>
+          <p:nvPr/>
+        </p:nvSpPr>
+        <p:spPr>
+          <a:xfrm>
+            <a:off x="822960" y="2788920"/>
+            <a:ext cx="2087804" cy="457200"/>
+          </a:xfrm>
+          <a:prstGeom prst="rect">
+            <a:avLst/>
+          </a:prstGeom>
+          <a:noFill/>
+          <a:ln/>
+        </p:spPr>
+        <p:txBody>
+          <a:bodyPr wrap="square" lIns="0" tIns="0" rIns="0" bIns="0" rtlCol="0" anchor="ctr"/>
+          <a:lstStyle/>
+          <a:p>
+            <a:pPr algn="l" indent="0" marL="0">
+              <a:buNone/>
+            </a:pPr>
+            <a:r>
+              <a:rPr lang="en-US" sz="1400" b="1" dirty="0">
+                <a:solidFill>
+                  <a:srgbClr val="1D4E6B"/>
+                </a:solidFill>
+                <a:latin typeface="Cambria" pitchFamily="34" charset="0"/>
+                <a:ea typeface="Cambria" pitchFamily="34" charset="-122"/>
+                <a:cs typeface="Cambria" pitchFamily="34" charset="-120"/>
+              </a:rPr>
+              <a:t>Distribution</a:t>
+            </a:r>
+            <a:endParaRPr lang="en-US" sz="1400" dirty="0"/>
+          </a:p>
+        </p:txBody>
+      </p:sp>
+      <p:sp>
+        <p:nvSpPr>
+          <p:cNvPr id="8" name="Text 6"/>
+          <p:cNvSpPr txBox="1"/>
+          <p:nvPr/>
+        </p:nvSpPr>
+        <p:spPr>
+          <a:xfrm>
+            <a:off x="822960" y="3291840"/>
+            <a:ext cx="2087804" cy="1234440"/>
+          </a:xfrm>
+          <a:prstGeom prst="rect">
+            <a:avLst/>
+          </a:prstGeom>
+          <a:noFill/>
+          <a:ln/>
+        </p:spPr>
+        <p:txBody>
+          <a:bodyPr wrap="square" lIns="0" tIns="0" rIns="0" bIns="0" rtlCol="0" anchor="t"/>
+          <a:lstStyle/>
+          <a:p>
+            <a:pPr algn="l" indent="0" marL="0">
+              <a:lnSpc>
+                <a:spcPct val="120000"/>
+              </a:lnSpc>
+              <a:buNone/>
+            </a:pPr>
+            <a:r>
+              <a:rPr lang="en-US" sz="1200" dirty="0">
+                <a:solidFill>
+                  <a:srgbClr val="2F3E47"/>
+                </a:solidFill>
+                <a:latin typeface="Calibri" pitchFamily="34" charset="0"/>
+                <a:ea typeface="Calibri" pitchFamily="34" charset="-122"/>
+                <a:cs typeface="Calibri" pitchFamily="34" charset="-120"/>
+              </a:rPr>
+              <a:t>Territorial exclusivity and launch stock for the first commercial season.</a:t>
+            </a:r>
+            <a:endParaRPr lang="en-US" sz="1200" dirty="0"/>
+          </a:p>
+        </p:txBody>
+      </p:sp>
+      <p:sp>
+        <p:nvSpPr>
+          <p:cNvPr id="9" name="Shape 7"/>
+          <p:cNvSpPr/>
+          <p:nvPr/>
+        </p:nvSpPr>
+        <p:spPr>
+          <a:xfrm>
+            <a:off x="3413684" y="1874520"/>
+            <a:ext cx="2545004" cy="2834640"/>
+          </a:xfrm>
+          <a:prstGeom prst="roundRect">
+            <a:avLst>
+              <a:gd name="adj" fmla="val 3593"/>
+            </a:avLst>
+          </a:prstGeom>
+          <a:solidFill>
+            <a:srgbClr val="EEF2F5"/>
+          </a:solidFill>
+          <a:ln w="9525">
+            <a:solidFill>
+              <a:srgbClr val="D8E1E7"/>
+            </a:solidFill>
+            <a:prstDash val="solid"/>
+          </a:ln>
+        </p:spPr>
+      </p:sp>
+      <p:sp>
+        <p:nvSpPr>
+          <p:cNvPr id="10" name="Shape 8"/>
+          <p:cNvSpPr/>
+          <p:nvPr/>
+        </p:nvSpPr>
+        <p:spPr>
+          <a:xfrm>
+            <a:off x="3642284" y="2103120"/>
+            <a:ext cx="566928" cy="566928"/>
+          </a:xfrm>
+          <a:prstGeom prst="ellipse">
+            <a:avLst/>
+          </a:prstGeom>
+          <a:solidFill>
+            <a:srgbClr val="1D4E6B"/>
+          </a:solidFill>
+          <a:ln/>
+        </p:spPr>
+      </p:sp>
+      <p:sp>
+        <p:nvSpPr>
+          <p:cNvPr id="11" name="Text 9"/>
+          <p:cNvSpPr txBox="1"/>
+          <p:nvPr/>
+        </p:nvSpPr>
+        <p:spPr>
+          <a:xfrm>
+            <a:off x="3642284" y="2103120"/>
+            <a:ext cx="566928" cy="566928"/>
+          </a:xfrm>
+          <a:prstGeom prst="rect">
+            <a:avLst/>
+          </a:prstGeom>
+          <a:noFill/>
+          <a:ln/>
+        </p:spPr>
+        <p:txBody>
+          <a:bodyPr wrap="square" lIns="0" tIns="0" rIns="0" bIns="0" rtlCol="0" anchor="ctr"/>
+          <a:lstStyle/>
+          <a:p>
+            <a:pPr algn="ctr" indent="0" marL="0">
+              <a:buNone/>
+            </a:pPr>
+            <a:r>
+              <a:rPr lang="en-US" sz="1600" b="1" dirty="0">
+                <a:solidFill>
+                  <a:srgbClr val="FFFFFF"/>
+                </a:solidFill>
+                <a:latin typeface="Cambria" pitchFamily="34" charset="0"/>
+                <a:ea typeface="Cambria" pitchFamily="34" charset="-122"/>
+                <a:cs typeface="Cambria" pitchFamily="34" charset="-120"/>
+              </a:rPr>
+              <a:t>2</a:t>
+            </a:r>
+            <a:endParaRPr lang="en-US" sz="1600" dirty="0"/>
+          </a:p>
+        </p:txBody>
+      </p:sp>
+      <p:sp>
+        <p:nvSpPr>
+          <p:cNvPr id="12" name="Text 10"/>
+          <p:cNvSpPr txBox="1"/>
+          <p:nvPr/>
+        </p:nvSpPr>
+        <p:spPr>
+          <a:xfrm>
+            <a:off x="3642284" y="2788920"/>
+            <a:ext cx="2087804" cy="457200"/>
+          </a:xfrm>
+          <a:prstGeom prst="rect">
+            <a:avLst/>
+          </a:prstGeom>
+          <a:noFill/>
+          <a:ln/>
+        </p:spPr>
+        <p:txBody>
+          <a:bodyPr wrap="square" lIns="0" tIns="0" rIns="0" bIns="0" rtlCol="0" anchor="ctr"/>
+          <a:lstStyle/>
+          <a:p>
+            <a:pPr algn="l" indent="0" marL="0">
+              <a:buNone/>
+            </a:pPr>
+            <a:r>
+              <a:rPr lang="en-US" sz="1400" b="1" dirty="0">
+                <a:solidFill>
+                  <a:srgbClr val="1D4E6B"/>
+                </a:solidFill>
+                <a:latin typeface="Cambria" pitchFamily="34" charset="0"/>
+                <a:ea typeface="Cambria" pitchFamily="34" charset="-122"/>
+                <a:cs typeface="Cambria" pitchFamily="34" charset="-120"/>
+              </a:rPr>
+              <a:t>Training</a:t>
+            </a:r>
+            <a:endParaRPr lang="en-US" sz="1400" dirty="0"/>
+          </a:p>
+        </p:txBody>
+      </p:sp>
+      <p:sp>
+        <p:nvSpPr>
+          <p:cNvPr id="13" name="Text 11"/>
+          <p:cNvSpPr txBox="1"/>
+          <p:nvPr/>
+        </p:nvSpPr>
+        <p:spPr>
+          <a:xfrm>
+            <a:off x="3642284" y="3291840"/>
+            <a:ext cx="2087804" cy="1234440"/>
+          </a:xfrm>
+          <a:prstGeom prst="rect">
+            <a:avLst/>
+          </a:prstGeom>
+          <a:noFill/>
+          <a:ln/>
+        </p:spPr>
+        <p:txBody>
+          <a:bodyPr wrap="square" lIns="0" tIns="0" rIns="0" bIns="0" rtlCol="0" anchor="t"/>
+          <a:lstStyle/>
+          <a:p>
+            <a:pPr algn="l" indent="0" marL="0">
+              <a:lnSpc>
+                <a:spcPct val="120000"/>
+              </a:lnSpc>
+              <a:buNone/>
+            </a:pPr>
+            <a:r>
+              <a:rPr lang="en-US" sz="1200" dirty="0">
+                <a:solidFill>
+                  <a:srgbClr val="2F3E47"/>
+                </a:solidFill>
+                <a:latin typeface="Calibri" pitchFamily="34" charset="0"/>
+                <a:ea typeface="Calibri" pitchFamily="34" charset="-122"/>
+                <a:cs typeface="Calibri" pitchFamily="34" charset="-120"/>
+              </a:rPr>
+              <a:t>Technical training for field teams, dosing protocols and seasonal updates.</a:t>
+            </a:r>
+            <a:endParaRPr lang="en-US" sz="1200" dirty="0"/>
+          </a:p>
+        </p:txBody>
+      </p:sp>
+      <p:sp>
+        <p:nvSpPr>
+          <p:cNvPr id="14" name="Shape 12"/>
+          <p:cNvSpPr/>
+          <p:nvPr/>
+        </p:nvSpPr>
+        <p:spPr>
+          <a:xfrm>
+            <a:off x="6233008" y="1874520"/>
+            <a:ext cx="2545004" cy="2834640"/>
+          </a:xfrm>
+          <a:prstGeom prst="roundRect">
+            <a:avLst>
+              <a:gd name="adj" fmla="val 3593"/>
+            </a:avLst>
+          </a:prstGeom>
+          <a:solidFill>
+            <a:srgbClr val="EEF2F5"/>
+          </a:solidFill>
+          <a:ln w="9525">
+            <a:solidFill>
+              <a:srgbClr val="D8E1E7"/>
+            </a:solidFill>
+            <a:prstDash val="solid"/>
+          </a:ln>
+        </p:spPr>
+      </p:sp>
+      <p:sp>
+        <p:nvSpPr>
+          <p:cNvPr id="15" name="Shape 13"/>
+          <p:cNvSpPr/>
+          <p:nvPr/>
+        </p:nvSpPr>
+        <p:spPr>
+          <a:xfrm>
+            <a:off x="6461608" y="2103120"/>
+            <a:ext cx="566928" cy="566928"/>
+          </a:xfrm>
+          <a:prstGeom prst="ellipse">
+            <a:avLst/>
+          </a:prstGeom>
+          <a:solidFill>
+            <a:srgbClr val="1D4E6B"/>
+          </a:solidFill>
+          <a:ln/>
+        </p:spPr>
+      </p:sp>
+      <p:sp>
+        <p:nvSpPr>
+          <p:cNvPr id="16" name="Text 14"/>
+          <p:cNvSpPr txBox="1"/>
+          <p:nvPr/>
+        </p:nvSpPr>
+        <p:spPr>
+          <a:xfrm>
+            <a:off x="6461608" y="2103120"/>
+            <a:ext cx="566928" cy="566928"/>
+          </a:xfrm>
+          <a:prstGeom prst="rect">
+            <a:avLst/>
+          </a:prstGeom>
+          <a:noFill/>
+          <a:ln/>
+        </p:spPr>
+        <p:txBody>
+          <a:bodyPr wrap="square" lIns="0" tIns="0" rIns="0" bIns="0" rtlCol="0" anchor="ctr"/>
+          <a:lstStyle/>
+          <a:p>
+            <a:pPr algn="ctr" indent="0" marL="0">
+              <a:buNone/>
+            </a:pPr>
+            <a:r>
+              <a:rPr lang="en-US" sz="1600" b="1" dirty="0">
+                <a:solidFill>
+                  <a:srgbClr val="FFFFFF"/>
+                </a:solidFill>
+                <a:latin typeface="Cambria" pitchFamily="34" charset="0"/>
+                <a:ea typeface="Cambria" pitchFamily="34" charset="-122"/>
+                <a:cs typeface="Cambria" pitchFamily="34" charset="-120"/>
+              </a:rPr>
+              <a:t>3</a:t>
+            </a:r>
+            <a:endParaRPr lang="en-US" sz="1600" dirty="0"/>
+          </a:p>
+        </p:txBody>
+      </p:sp>
+      <p:sp>
+        <p:nvSpPr>
+          <p:cNvPr id="17" name="Text 15"/>
+          <p:cNvSpPr txBox="1"/>
+          <p:nvPr/>
+        </p:nvSpPr>
+        <p:spPr>
+          <a:xfrm>
+            <a:off x="6461608" y="2788920"/>
+            <a:ext cx="2087804" cy="457200"/>
+          </a:xfrm>
+          <a:prstGeom prst="rect">
+            <a:avLst/>
+          </a:prstGeom>
+          <a:noFill/>
+          <a:ln/>
+        </p:spPr>
+        <p:txBody>
+          <a:bodyPr wrap="square" lIns="0" tIns="0" rIns="0" bIns="0" rtlCol="0" anchor="ctr"/>
+          <a:lstStyle/>
+          <a:p>
+            <a:pPr algn="l" indent="0" marL="0">
+              <a:buNone/>
+            </a:pPr>
+            <a:r>
+              <a:rPr lang="en-US" sz="1400" b="1" dirty="0">
+                <a:solidFill>
+                  <a:srgbClr val="1D4E6B"/>
+                </a:solidFill>
+                <a:latin typeface="Cambria" pitchFamily="34" charset="0"/>
+                <a:ea typeface="Cambria" pitchFamily="34" charset="-122"/>
+                <a:cs typeface="Cambria" pitchFamily="34" charset="-120"/>
+              </a:rPr>
+              <a:t>Joint trials</a:t>
+            </a:r>
+            <a:endParaRPr lang="en-US" sz="1400" dirty="0"/>
+          </a:p>
+        </p:txBody>
+      </p:sp>
+      <p:sp>
+        <p:nvSpPr>
+          <p:cNvPr id="18" name="Text 16"/>
+          <p:cNvSpPr txBox="1"/>
+          <p:nvPr/>
+        </p:nvSpPr>
+        <p:spPr>
+          <a:xfrm>
+            <a:off x="6461608" y="3291840"/>
+            <a:ext cx="2087804" cy="1234440"/>
+          </a:xfrm>
+          <a:prstGeom prst="rect">
+            <a:avLst/>
+          </a:prstGeom>
+          <a:noFill/>
+          <a:ln/>
+        </p:spPr>
+        <p:txBody>
+          <a:bodyPr wrap="square" lIns="0" tIns="0" rIns="0" bIns="0" rtlCol="0" anchor="t"/>
+          <a:lstStyle/>
+          <a:p>
+            <a:pPr algn="l" indent="0" marL="0">
+              <a:lnSpc>
+                <a:spcPct val="120000"/>
+              </a:lnSpc>
+              <a:buNone/>
+            </a:pPr>
+            <a:r>
+              <a:rPr lang="en-US" sz="1200" dirty="0">
+                <a:solidFill>
+                  <a:srgbClr val="2F3E47"/>
+                </a:solidFill>
+                <a:latin typeface="Calibri" pitchFamily="34" charset="0"/>
+                <a:ea typeface="Calibri" pitchFamily="34" charset="-122"/>
+                <a:cs typeface="Calibri" pitchFamily="34" charset="-120"/>
+              </a:rPr>
+              <a:t>Demonstration plots with a control, results shared with growers.</a:t>
+            </a:r>
+            <a:endParaRPr lang="en-US" sz="1200" dirty="0"/>
+          </a:p>
+        </p:txBody>
+      </p:sp>
+      <p:sp>
+        <p:nvSpPr>
+          <p:cNvPr id="19" name="Shape 17"/>
+          <p:cNvSpPr/>
+          <p:nvPr/>
+        </p:nvSpPr>
+        <p:spPr>
+          <a:xfrm>
+            <a:off x="9052331" y="1874520"/>
+            <a:ext cx="2545004" cy="2834640"/>
+          </a:xfrm>
+          <a:prstGeom prst="roundRect">
+            <a:avLst>
+              <a:gd name="adj" fmla="val 3593"/>
+            </a:avLst>
+          </a:prstGeom>
+          <a:solidFill>
+            <a:srgbClr val="EEF2F5"/>
+          </a:solidFill>
+          <a:ln w="9525">
+            <a:solidFill>
+              <a:srgbClr val="D8E1E7"/>
+            </a:solidFill>
+            <a:prstDash val="solid"/>
+          </a:ln>
+        </p:spPr>
+      </p:sp>
+      <p:sp>
+        <p:nvSpPr>
+          <p:cNvPr id="20" name="Shape 18"/>
+          <p:cNvSpPr/>
+          <p:nvPr/>
+        </p:nvSpPr>
+        <p:spPr>
+          <a:xfrm>
+            <a:off x="9280931" y="2103120"/>
+            <a:ext cx="566928" cy="566928"/>
+          </a:xfrm>
+          <a:prstGeom prst="ellipse">
+            <a:avLst/>
+          </a:prstGeom>
+          <a:solidFill>
+            <a:srgbClr val="1D4E6B"/>
+          </a:solidFill>
+          <a:ln/>
+        </p:spPr>
+      </p:sp>
+      <p:sp>
+        <p:nvSpPr>
+          <p:cNvPr id="21" name="Text 19"/>
+          <p:cNvSpPr txBox="1"/>
+          <p:nvPr/>
+        </p:nvSpPr>
+        <p:spPr>
+          <a:xfrm>
+            <a:off x="9280931" y="2103120"/>
+            <a:ext cx="566928" cy="566928"/>
+          </a:xfrm>
+          <a:prstGeom prst="rect">
+            <a:avLst/>
+          </a:prstGeom>
+          <a:noFill/>
+          <a:ln/>
+        </p:spPr>
+        <p:txBody>
+          <a:bodyPr wrap="square" lIns="0" tIns="0" rIns="0" bIns="0" rtlCol="0" anchor="ctr"/>
+          <a:lstStyle/>
+          <a:p>
+            <a:pPr algn="ctr" indent="0" marL="0">
+              <a:buNone/>
+            </a:pPr>
+            <a:r>
+              <a:rPr lang="en-US" sz="1600" b="1" dirty="0">
+                <a:solidFill>
+                  <a:srgbClr val="FFFFFF"/>
+                </a:solidFill>
+                <a:latin typeface="Cambria" pitchFamily="34" charset="0"/>
+                <a:ea typeface="Cambria" pitchFamily="34" charset="-122"/>
+                <a:cs typeface="Cambria" pitchFamily="34" charset="-120"/>
+              </a:rPr>
+              <a:t>4</a:t>
+            </a:r>
+            <a:endParaRPr lang="en-US" sz="1600" dirty="0"/>
+          </a:p>
+        </p:txBody>
+      </p:sp>
+      <p:sp>
+        <p:nvSpPr>
+          <p:cNvPr id="22" name="Text 20"/>
+          <p:cNvSpPr txBox="1"/>
+          <p:nvPr/>
+        </p:nvSpPr>
+        <p:spPr>
+          <a:xfrm>
+            <a:off x="9280931" y="2788920"/>
+            <a:ext cx="2087804" cy="457200"/>
+          </a:xfrm>
+          <a:prstGeom prst="rect">
+            <a:avLst/>
+          </a:prstGeom>
+          <a:noFill/>
+          <a:ln/>
+        </p:spPr>
+        <p:txBody>
+          <a:bodyPr wrap="square" lIns="0" tIns="0" rIns="0" bIns="0" rtlCol="0" anchor="ctr"/>
+          <a:lstStyle/>
+          <a:p>
+            <a:pPr algn="l" indent="0" marL="0">
+              <a:buNone/>
+            </a:pPr>
+            <a:r>
+              <a:rPr lang="en-US" sz="1400" b="1" dirty="0">
+                <a:solidFill>
+                  <a:srgbClr val="1D4E6B"/>
+                </a:solidFill>
+                <a:latin typeface="Cambria" pitchFamily="34" charset="0"/>
+                <a:ea typeface="Cambria" pitchFamily="34" charset="-122"/>
+                <a:cs typeface="Cambria" pitchFamily="34" charset="-120"/>
+              </a:rPr>
+              <a:t>Institutions</a:t>
+            </a:r>
+            <a:endParaRPr lang="en-US" sz="1400" dirty="0"/>
+          </a:p>
+        </p:txBody>
+      </p:sp>
+      <p:sp>
+        <p:nvSpPr>
+          <p:cNvPr id="23" name="Text 21"/>
+          <p:cNvSpPr txBox="1"/>
+          <p:nvPr/>
+        </p:nvSpPr>
+        <p:spPr>
+          <a:xfrm>
+            <a:off x="9280931" y="3291840"/>
+            <a:ext cx="2087804" cy="1234440"/>
+          </a:xfrm>
+          <a:prstGeom prst="rect">
+            <a:avLst/>
+          </a:prstGeom>
+          <a:noFill/>
+          <a:ln/>
+        </p:spPr>
+        <p:txBody>
+          <a:bodyPr wrap="square" lIns="0" tIns="0" rIns="0" bIns="0" rtlCol="0" anchor="t"/>
+          <a:lstStyle/>
+          <a:p>
+            <a:pPr algn="l" indent="0" marL="0">
+              <a:lnSpc>
+                <a:spcPct val="120000"/>
+              </a:lnSpc>
+              <a:buNone/>
+            </a:pPr>
+            <a:r>
+              <a:rPr lang="en-US" sz="1200" dirty="0">
+                <a:solidFill>
+                  <a:srgbClr val="2F3E47"/>
+                </a:solidFill>
+                <a:latin typeface="Calibri" pitchFamily="34" charset="0"/>
+                <a:ea typeface="Calibri" pitchFamily="34" charset="-122"/>
+                <a:cs typeface="Calibri" pitchFamily="34" charset="-120"/>
+              </a:rPr>
+              <a:t>Dialogue with the Ministry of Agriculture and food-security programmes.</a:t>
+            </a:r>
+            <a:endParaRPr lang="en-US" sz="1200" dirty="0"/>
+          </a:p>
+        </p:txBody>
+      </p:sp>
+      <p:sp>
+        <p:nvSpPr>
+          <p:cNvPr id="24" name="Text 22"/>
+          <p:cNvSpPr txBox="1"/>
+          <p:nvPr/>
+        </p:nvSpPr>
+        <p:spPr>
+          <a:xfrm>
+            <a:off x="594360" y="4983480"/>
+            <a:ext cx="11002975" cy="822960"/>
+          </a:xfrm>
+          <a:prstGeom prst="rect">
+            <a:avLst/>
+          </a:prstGeom>
+          <a:noFill/>
+          <a:ln/>
+        </p:spPr>
+        <p:txBody>
+          <a:bodyPr wrap="square" lIns="0" tIns="0" rIns="0" bIns="0" rtlCol="0" anchor="t"/>
+          <a:lstStyle/>
+          <a:p>
+            <a:pPr algn="l" indent="0" marL="0">
+              <a:lnSpc>
+                <a:spcPct val="125000"/>
+              </a:lnSpc>
+              <a:buNone/>
+            </a:pPr>
+            <a:r>
+              <a:rPr lang="en-US" sz="1250" i="1" dirty="0">
+                <a:solidFill>
+                  <a:srgbClr val="6B7D87"/>
+                </a:solidFill>
+                <a:latin typeface="Calibri" pitchFamily="34" charset="0"/>
+                <a:ea typeface="Calibri" pitchFamily="34" charset="-122"/>
+                <a:cs typeface="Calibri" pitchFamily="34" charset="-120"/>
+              </a:rPr>
+              <a:t>The framework adapts to the territory: an importer, an input distributor or a growers' group can lead the partnership.</a:t>
+            </a:r>
+            <a:endParaRPr lang="en-US" sz="1250" dirty="0"/>
+          </a:p>
+        </p:txBody>
+      </p:sp>
+      <p:sp>
+        <p:nvSpPr>
+          <p:cNvPr id="25" name="Text 23"/>
+          <p:cNvSpPr txBox="1"/>
+          <p:nvPr/>
+        </p:nvSpPr>
+        <p:spPr>
+          <a:xfrm>
+            <a:off x="502920" y="6382512"/>
+            <a:ext cx="8229600" cy="274320"/>
+          </a:xfrm>
+          <a:prstGeom prst="rect">
+            <a:avLst/>
+          </a:prstGeom>
+          <a:noFill/>
+          <a:ln/>
+        </p:spPr>
+        <p:txBody>
+          <a:bodyPr wrap="square" lIns="0" tIns="0" rIns="0" bIns="0" rtlCol="0" anchor="ctr"/>
+          <a:lstStyle/>
+          <a:p>
+            <a:pPr algn="l" indent="0" marL="0">
+              <a:buNone/>
+            </a:pPr>
+            <a:r>
+              <a:rPr lang="en-US" sz="950" dirty="0">
+                <a:solidFill>
+                  <a:srgbClr val="6B7D87">
+                    <a:alpha val="80000"/>
+                  </a:srgbClr>
+                </a:solidFill>
+                <a:latin typeface="Calibri" pitchFamily="34" charset="0"/>
+                <a:ea typeface="Calibri" pitchFamily="34" charset="-122"/>
+                <a:cs typeface="Calibri" pitchFamily="34" charset="-120"/>
+              </a:rPr>
+              <a:t>Green Solutions · United States Market Dossier</a:t>
+            </a:r>
+            <a:endParaRPr lang="en-US" sz="950" dirty="0"/>
+          </a:p>
+        </p:txBody>
+      </p:sp>
+      <p:sp>
+        <p:nvSpPr>
+          <p:cNvPr id="26" name="Text 24"/>
+          <p:cNvSpPr txBox="1"/>
+          <p:nvPr/>
+        </p:nvSpPr>
+        <p:spPr>
+          <a:xfrm>
+            <a:off x="11140135" y="6382512"/>
+            <a:ext cx="548640" cy="274320"/>
+          </a:xfrm>
+          <a:prstGeom prst="rect">
+            <a:avLst/>
+          </a:prstGeom>
+          <a:noFill/>
+          <a:ln/>
+        </p:spPr>
+        <p:txBody>
+          <a:bodyPr wrap="square" lIns="0" tIns="0" rIns="0" bIns="0" rtlCol="0" anchor="ctr"/>
+          <a:lstStyle/>
+          <a:p>
+            <a:pPr algn="r" indent="0" marL="0">
+              <a:buNone/>
+            </a:pPr>
+            <a:r>
+              <a:rPr lang="en-US" sz="950" dirty="0">
+                <a:solidFill>
+                  <a:srgbClr val="6B7D87">
+                    <a:alpha val="80000"/>
+                  </a:srgbClr>
+                </a:solidFill>
+                <a:latin typeface="Calibri" pitchFamily="34" charset="0"/>
+                <a:ea typeface="Calibri" pitchFamily="34" charset="-122"/>
+                <a:cs typeface="Calibri" pitchFamily="34" charset="-120"/>
+              </a:rPr>
+              <a:t>14</a:t>
+            </a:r>
+            <a:endParaRPr lang="en-US" sz="950" dirty="0"/>
+          </a:p>
+        </p:txBody>
+      </p:sp>
+    </p:spTree>
+  </p:cSld>
+  <p:clrMapOvr>
+    <a:masterClrMapping/>
+  </p:clrMapOvr>
+</p:sld>
+</file>
+
+<file path=ppt/slides/slide16.xml><?xml version="1.0" encoding="utf-8"?>
+<p:sld xmlns:a="http://schemas.openxmlformats.org/drawingml/2006/main" xmlns:r="http://schemas.openxmlformats.org/officeDocument/2006/relationships" xmlns:p="http://schemas.openxmlformats.org/presentationml/2006/main">
+  <p:cSld name="Slide 16">
+    <p:bg>
+      <p:bgPr>
+        <a:solidFill>
+          <a:srgbClr val="FAFBFC"/>
+        </a:solidFill>
+      </p:bgPr>
+    </p:bg>
+    <p:spTree>
+      <p:nvGrpSpPr>
+        <p:cNvPr id="1" name=""/>
+        <p:cNvGrpSpPr/>
+        <p:nvPr/>
+      </p:nvGrpSpPr>
+      <p:grpSpPr>
+        <a:xfrm>
+          <a:off x="0" y="0"/>
+          <a:ext cx="0" cy="0"/>
+          <a:chOff x="0" y="0"/>
+          <a:chExt cx="0" cy="0"/>
+        </a:xfrm>
+      </p:grpSpPr>
+      <p:sp>
+        <p:nvSpPr>
+          <p:cNvPr id="2" name="Text 0"/>
+          <p:cNvSpPr txBox="1"/>
+          <p:nvPr/>
+        </p:nvSpPr>
+        <p:spPr>
+          <a:xfrm>
+            <a:off x="594360" y="411480"/>
+            <a:ext cx="10515600" cy="274320"/>
+          </a:xfrm>
+          <a:prstGeom prst="rect">
+            <a:avLst/>
+          </a:prstGeom>
+          <a:noFill/>
+          <a:ln/>
+        </p:spPr>
+        <p:txBody>
+          <a:bodyPr wrap="square" lIns="0" tIns="0" rIns="0" bIns="0" rtlCol="0" anchor="ctr"/>
+          <a:lstStyle/>
+          <a:p>
+            <a:pPr algn="l" indent="0" marL="0">
+              <a:buNone/>
+            </a:pPr>
+            <a:r>
+              <a:rPr lang="en-US" sz="1150" b="1" spc="200" kern="0" dirty="0">
+                <a:solidFill>
+                  <a:srgbClr val="D98C2B"/>
+                </a:solidFill>
+                <a:latin typeface="Calibri" pitchFamily="34" charset="0"/>
+                <a:ea typeface="Calibri" pitchFamily="34" charset="-122"/>
+                <a:cs typeface="Calibri" pitchFamily="34" charset="-120"/>
+              </a:rPr>
+              <a:t>WHAT TO ANTICIPATE</a:t>
+            </a:r>
+            <a:endParaRPr lang="en-US" sz="1150" dirty="0"/>
+          </a:p>
+        </p:txBody>
+      </p:sp>
+      <p:sp>
+        <p:nvSpPr>
+          <p:cNvPr id="3" name="Text 1"/>
+          <p:cNvSpPr txBox="1"/>
+          <p:nvPr/>
+        </p:nvSpPr>
+        <p:spPr>
+          <a:xfrm>
+            <a:off x="594360" y="731520"/>
+            <a:ext cx="10881360" cy="731520"/>
+          </a:xfrm>
+          <a:prstGeom prst="rect">
+            <a:avLst/>
+          </a:prstGeom>
+          <a:noFill/>
+          <a:ln/>
+        </p:spPr>
+        <p:txBody>
+          <a:bodyPr wrap="square" lIns="0" tIns="0" rIns="0" bIns="0" rtlCol="0" anchor="ctr"/>
+          <a:lstStyle/>
+          <a:p>
+            <a:pPr algn="l" indent="0" marL="0">
+              <a:buNone/>
+            </a:pPr>
+            <a:r>
+              <a:rPr lang="en-US" sz="3000" b="1" dirty="0">
+                <a:solidFill>
+                  <a:srgbClr val="0F2E40"/>
+                </a:solidFill>
+                <a:latin typeface="Cambria" pitchFamily="34" charset="0"/>
+                <a:ea typeface="Cambria" pitchFamily="34" charset="-122"/>
+                <a:cs typeface="Cambria" pitchFamily="34" charset="-120"/>
+              </a:rPr>
+              <a:t>Identified risks and how we answer them</a:t>
+            </a:r>
+            <a:endParaRPr lang="en-US" sz="3000" dirty="0"/>
+          </a:p>
+        </p:txBody>
+      </p:sp>
+      <p:sp>
+        <p:nvSpPr>
+          <p:cNvPr id="4" name="Text 2"/>
+          <p:cNvSpPr txBox="1"/>
+          <p:nvPr/>
+        </p:nvSpPr>
+        <p:spPr>
+          <a:xfrm>
+            <a:off x="594360" y="1783080"/>
+            <a:ext cx="5227168" cy="411480"/>
+          </a:xfrm>
+          <a:prstGeom prst="rect">
+            <a:avLst/>
+          </a:prstGeom>
+          <a:noFill/>
+          <a:ln/>
+        </p:spPr>
+        <p:txBody>
+          <a:bodyPr wrap="square" lIns="0" tIns="0" rIns="0" bIns="0" rtlCol="0" anchor="ctr"/>
+          <a:lstStyle/>
+          <a:p>
+            <a:pPr algn="l" indent="0" marL="0">
+              <a:buNone/>
+            </a:pPr>
+            <a:r>
+              <a:rPr lang="en-US" sz="1600" b="1" dirty="0">
+                <a:solidFill>
+                  <a:srgbClr val="1D4E6B"/>
+                </a:solidFill>
+                <a:latin typeface="Cambria" pitchFamily="34" charset="0"/>
+                <a:ea typeface="Cambria" pitchFamily="34" charset="-122"/>
+                <a:cs typeface="Cambria" pitchFamily="34" charset="-120"/>
+              </a:rPr>
+              <a:t>Risks</a:t>
+            </a:r>
+            <a:endParaRPr lang="en-US" sz="1600" dirty="0"/>
+          </a:p>
+        </p:txBody>
+      </p:sp>
+      <p:sp>
+        <p:nvSpPr>
+          <p:cNvPr id="5" name="Text 3"/>
+          <p:cNvSpPr txBox="1"/>
+          <p:nvPr/>
+        </p:nvSpPr>
+        <p:spPr>
+          <a:xfrm>
+            <a:off x="594360" y="2286000"/>
+            <a:ext cx="5227168" cy="2468880"/>
+          </a:xfrm>
+          <a:prstGeom prst="rect">
+            <a:avLst/>
+          </a:prstGeom>
+          <a:noFill/>
+          <a:ln/>
+        </p:spPr>
+        <p:txBody>
+          <a:bodyPr wrap="square" lIns="0" tIns="0" rIns="0" bIns="0" rtlCol="0" anchor="t"/>
+          <a:lstStyle/>
+          <a:p>
+            <a:pPr algn="l" marL="342900" indent="-342900">
+              <a:lnSpc>
+                <a:spcPct val="122000"/>
+              </a:lnSpc>
+              <a:spcAft>
+                <a:spcPts val="1000"/>
+              </a:spcAft>
+              <a:buSzPct val="100000"/>
+              <a:buChar char="•"/>
+            </a:pPr>
+            <a:r>
+              <a:rPr lang="en-US" sz="1350" dirty="0">
+                <a:solidFill>
+                  <a:srgbClr val="2F3E47"/>
+                </a:solidFill>
+                <a:latin typeface="Calibri" pitchFamily="34" charset="0"/>
+                <a:ea typeface="Calibri" pitchFamily="34" charset="-122"/>
+                <a:cs typeface="Calibri" pitchFamily="34" charset="-120"/>
+              </a:rPr>
+              <a:t>Year-to-year rainfall variability: a wet season masks the value of the product.</a:t>
+            </a:r>
+            <a:endParaRPr lang="en-US" sz="1350" dirty="0"/>
+          </a:p>
+          <a:p>
+            <a:pPr algn="l" marL="342900" indent="-342900">
+              <a:lnSpc>
+                <a:spcPct val="122000"/>
+              </a:lnSpc>
+              <a:spcAft>
+                <a:spcPts val="1000"/>
+              </a:spcAft>
+              <a:buSzPct val="100000"/>
+              <a:buChar char="•"/>
+            </a:pPr>
+            <a:r>
+              <a:rPr lang="en-US" sz="1350" dirty="0">
+                <a:solidFill>
+                  <a:srgbClr val="2F3E47"/>
+                </a:solidFill>
+                <a:latin typeface="Calibri" pitchFamily="34" charset="0"/>
+                <a:ea typeface="Calibri" pitchFamily="34" charset="-122"/>
+                <a:cs typeface="Calibri" pitchFamily="34" charset="-120"/>
+              </a:rPr>
+              <a:t>Long purchasing cycles and agronomist sign-off on large operations, plus dealer and co-op channels to qualify.</a:t>
+            </a:r>
+            <a:endParaRPr lang="en-US" sz="1350" dirty="0"/>
+          </a:p>
+          <a:p>
+            <a:pPr algn="l" marL="342900" indent="-342900">
+              <a:lnSpc>
+                <a:spcPct val="122000"/>
+              </a:lnSpc>
+              <a:spcAft>
+                <a:spcPts val="1000"/>
+              </a:spcAft>
+              <a:buSzPct val="100000"/>
+              <a:buChar char="•"/>
+            </a:pPr>
+            <a:r>
+              <a:rPr lang="en-US" sz="1350" dirty="0">
+                <a:solidFill>
+                  <a:srgbClr val="2F3E47"/>
+                </a:solidFill>
+                <a:latin typeface="Calibri" pitchFamily="34" charset="0"/>
+                <a:ea typeface="Calibri" pitchFamily="34" charset="-122"/>
+                <a:cs typeface="Calibri" pitchFamily="34" charset="-120"/>
+              </a:rPr>
+              <a:t>Memory of low-grade sodium-based polymers, which left a poor reputation among growers.</a:t>
+            </a:r>
+            <a:endParaRPr lang="en-US" sz="1350" dirty="0"/>
+          </a:p>
+          <a:p>
+            <a:pPr algn="l" marL="342900" indent="-342900">
+              <a:lnSpc>
+                <a:spcPct val="122000"/>
+              </a:lnSpc>
+              <a:spcAft>
+                <a:spcPts val="1000"/>
+              </a:spcAft>
+              <a:buSzPct val="100000"/>
+              <a:buChar char="•"/>
+            </a:pPr>
+            <a:r>
+              <a:rPr lang="en-US" sz="1350" dirty="0">
+                <a:solidFill>
+                  <a:srgbClr val="2F3E47"/>
+                </a:solidFill>
+                <a:latin typeface="Calibri" pitchFamily="34" charset="0"/>
+                <a:ea typeface="Calibri" pitchFamily="34" charset="-122"/>
+                <a:cs typeface="Calibri" pitchFamily="34" charset="-120"/>
+              </a:rPr>
+              <a:t>Tight margins on row crops when input costs rise faster than commodity prices.</a:t>
+            </a:r>
+            <a:endParaRPr lang="en-US" sz="1350" dirty="0"/>
+          </a:p>
+        </p:txBody>
+      </p:sp>
+      <p:sp>
+        <p:nvSpPr>
+          <p:cNvPr id="6" name="Text 4"/>
+          <p:cNvSpPr txBox="1"/>
+          <p:nvPr/>
+        </p:nvSpPr>
+        <p:spPr>
+          <a:xfrm>
+            <a:off x="6370168" y="1783080"/>
+            <a:ext cx="5227168" cy="411480"/>
+          </a:xfrm>
+          <a:prstGeom prst="rect">
+            <a:avLst/>
+          </a:prstGeom>
+          <a:noFill/>
+          <a:ln/>
+        </p:spPr>
+        <p:txBody>
+          <a:bodyPr wrap="square" lIns="0" tIns="0" rIns="0" bIns="0" rtlCol="0" anchor="ctr"/>
+          <a:lstStyle/>
+          <a:p>
+            <a:pPr algn="l" indent="0" marL="0">
+              <a:buNone/>
+            </a:pPr>
+            <a:r>
+              <a:rPr lang="en-US" sz="1600" b="1" dirty="0">
+                <a:solidFill>
+                  <a:srgbClr val="1D4E6B"/>
+                </a:solidFill>
+                <a:latin typeface="Cambria" pitchFamily="34" charset="0"/>
+                <a:ea typeface="Cambria" pitchFamily="34" charset="-122"/>
+                <a:cs typeface="Cambria" pitchFamily="34" charset="-120"/>
+              </a:rPr>
+              <a:t>Answers</a:t>
+            </a:r>
+            <a:endParaRPr lang="en-US" sz="1600" dirty="0"/>
+          </a:p>
+        </p:txBody>
+      </p:sp>
+      <p:sp>
+        <p:nvSpPr>
+          <p:cNvPr id="7" name="Text 5"/>
+          <p:cNvSpPr txBox="1"/>
+          <p:nvPr/>
+        </p:nvSpPr>
+        <p:spPr>
+          <a:xfrm>
+            <a:off x="6370168" y="2286000"/>
+            <a:ext cx="5227168" cy="2468880"/>
+          </a:xfrm>
+          <a:prstGeom prst="rect">
+            <a:avLst/>
+          </a:prstGeom>
+          <a:noFill/>
+          <a:ln/>
+        </p:spPr>
+        <p:txBody>
+          <a:bodyPr wrap="square" lIns="0" tIns="0" rIns="0" bIns="0" rtlCol="0" anchor="t"/>
+          <a:lstStyle/>
+          <a:p>
+            <a:pPr algn="l" marL="342900" indent="-342900">
+              <a:lnSpc>
+                <a:spcPct val="122000"/>
+              </a:lnSpc>
+              <a:spcAft>
+                <a:spcPts val="1000"/>
+              </a:spcAft>
+              <a:buSzPct val="100000"/>
+              <a:buChar char="•"/>
+            </a:pPr>
+            <a:r>
+              <a:rPr lang="en-US" sz="1350" dirty="0">
+                <a:solidFill>
+                  <a:srgbClr val="2F3E47"/>
+                </a:solidFill>
+                <a:latin typeface="Calibri" pitchFamily="34" charset="0"/>
+                <a:ea typeface="Calibri" pitchFamily="34" charset="-122"/>
+                <a:cs typeface="Calibri" pitchFamily="34" charset="-120"/>
+              </a:rPr>
+              <a:t>Run the trial over a full cycle with a control block, so the gain is documented even in a favorable season.</a:t>
+            </a:r>
+            <a:endParaRPr lang="en-US" sz="1350" dirty="0"/>
+          </a:p>
+          <a:p>
+            <a:pPr algn="l" marL="342900" indent="-342900">
+              <a:lnSpc>
+                <a:spcPct val="122000"/>
+              </a:lnSpc>
+              <a:spcAft>
+                <a:spcPts val="1000"/>
+              </a:spcAft>
+              <a:buSzPct val="100000"/>
+              <a:buChar char="•"/>
+            </a:pPr>
+            <a:r>
+              <a:rPr lang="en-US" sz="1350" dirty="0">
+                <a:solidFill>
+                  <a:srgbClr val="2F3E47"/>
+                </a:solidFill>
+                <a:latin typeface="Calibri" pitchFamily="34" charset="0"/>
+                <a:ea typeface="Calibri" pitchFamily="34" charset="-122"/>
+                <a:cs typeface="Calibri" pitchFamily="34" charset="-120"/>
+              </a:rPr>
+              <a:t>Work through dealers, co-ops and crop consultants rather than farm by farm, and supply the trial protocol in advance.</a:t>
+            </a:r>
+            <a:endParaRPr lang="en-US" sz="1350" dirty="0"/>
+          </a:p>
+          <a:p>
+            <a:pPr algn="l" marL="342900" indent="-342900">
+              <a:lnSpc>
+                <a:spcPct val="122000"/>
+              </a:lnSpc>
+              <a:spcAft>
+                <a:spcPts val="1000"/>
+              </a:spcAft>
+              <a:buSzPct val="100000"/>
+              <a:buChar char="•"/>
+            </a:pPr>
+            <a:r>
+              <a:rPr lang="en-US" sz="1350" dirty="0">
+                <a:solidFill>
+                  <a:srgbClr val="2F3E47"/>
+                </a:solidFill>
+                <a:latin typeface="Calibri" pitchFamily="34" charset="0"/>
+                <a:ea typeface="Calibri" pitchFamily="34" charset="-122"/>
+                <a:cs typeface="Calibri" pitchFamily="34" charset="-120"/>
+              </a:rPr>
+              <a:t>Document the formulation: potassium, never sodium, compatible with food crops and with soil health.</a:t>
+            </a:r>
+            <a:endParaRPr lang="en-US" sz="1350" dirty="0"/>
+          </a:p>
+          <a:p>
+            <a:pPr algn="l" marL="342900" indent="-342900">
+              <a:lnSpc>
+                <a:spcPct val="122000"/>
+              </a:lnSpc>
+              <a:spcAft>
+                <a:spcPts val="1000"/>
+              </a:spcAft>
+              <a:buSzPct val="100000"/>
+              <a:buChar char="•"/>
+            </a:pPr>
+            <a:r>
+              <a:rPr lang="en-US" sz="1350" dirty="0">
+                <a:solidFill>
+                  <a:srgbClr val="2F3E47"/>
+                </a:solidFill>
+                <a:latin typeface="Calibri" pitchFamily="34" charset="0"/>
+                <a:ea typeface="Calibri" pitchFamily="34" charset="-122"/>
+                <a:cs typeface="Calibri" pitchFamily="34" charset="-120"/>
+              </a:rPr>
+              <a:t>Spread the outlay: a 3 to 4 year useful life amortizes the cost across several seasons.</a:t>
+            </a:r>
+            <a:endParaRPr lang="en-US" sz="1350" dirty="0"/>
+          </a:p>
+        </p:txBody>
+      </p:sp>
+      <p:sp>
+        <p:nvSpPr>
+          <p:cNvPr id="8" name="Shape 6"/>
+          <p:cNvSpPr/>
+          <p:nvPr/>
+        </p:nvSpPr>
+        <p:spPr>
+          <a:xfrm>
+            <a:off x="594360" y="4846320"/>
+            <a:ext cx="11002975" cy="960120"/>
+          </a:xfrm>
+          <a:prstGeom prst="roundRect">
+            <a:avLst>
+              <a:gd name="adj" fmla="val 7619"/>
+            </a:avLst>
+          </a:prstGeom>
+          <a:solidFill>
+            <a:srgbClr val="EEF2F5"/>
+          </a:solidFill>
+          <a:ln w="9525">
+            <a:solidFill>
+              <a:srgbClr val="D8E1E7"/>
+            </a:solidFill>
+            <a:prstDash val="solid"/>
+          </a:ln>
+        </p:spPr>
+      </p:sp>
+      <p:sp>
+        <p:nvSpPr>
+          <p:cNvPr id="9" name="Text 7"/>
+          <p:cNvSpPr txBox="1"/>
+          <p:nvPr/>
+        </p:nvSpPr>
+        <p:spPr>
+          <a:xfrm>
+            <a:off x="822960" y="4983480"/>
+            <a:ext cx="10545775" cy="713232"/>
+          </a:xfrm>
+          <a:prstGeom prst="rect">
+            <a:avLst/>
+          </a:prstGeom>
+          <a:noFill/>
+          <a:ln/>
+        </p:spPr>
+        <p:txBody>
+          <a:bodyPr wrap="square" lIns="0" tIns="0" rIns="0" bIns="0" rtlCol="0" anchor="t"/>
+          <a:lstStyle/>
+          <a:p>
+            <a:pPr algn="l" indent="0" marL="0">
+              <a:lnSpc>
+                <a:spcPct val="118000"/>
+              </a:lnSpc>
+              <a:buNone/>
+            </a:pPr>
+            <a:r>
+              <a:rPr lang="en-US" sz="1100" dirty="0">
+                <a:solidFill>
+                  <a:srgbClr val="6B7D87"/>
+                </a:solidFill>
+                <a:latin typeface="Calibri" pitchFamily="34" charset="0"/>
+                <a:ea typeface="Calibri" pitchFamily="34" charset="-122"/>
+                <a:cs typeface="Calibri" pitchFamily="34" charset="-120"/>
+              </a:rPr>
+              <a:t>Acrylamide analysis (Polymex laboratory, ISO 9001, content below 3.0 µg/g), REACH / SVHC screening (SGS) and the SOHISCERT certificate valid to 4 September 2027 are all available on request.</a:t>
+            </a:r>
+            <a:endParaRPr lang="en-US" sz="1100" dirty="0"/>
+          </a:p>
+        </p:txBody>
+      </p:sp>
+      <p:sp>
+        <p:nvSpPr>
+          <p:cNvPr id="10" name="Text 8"/>
+          <p:cNvSpPr txBox="1"/>
+          <p:nvPr/>
+        </p:nvSpPr>
+        <p:spPr>
+          <a:xfrm>
+            <a:off x="502920" y="6382512"/>
+            <a:ext cx="8229600" cy="274320"/>
+          </a:xfrm>
+          <a:prstGeom prst="rect">
+            <a:avLst/>
+          </a:prstGeom>
+          <a:noFill/>
+          <a:ln/>
+        </p:spPr>
+        <p:txBody>
+          <a:bodyPr wrap="square" lIns="0" tIns="0" rIns="0" bIns="0" rtlCol="0" anchor="ctr"/>
+          <a:lstStyle/>
+          <a:p>
+            <a:pPr algn="l" indent="0" marL="0">
+              <a:buNone/>
+            </a:pPr>
+            <a:r>
+              <a:rPr lang="en-US" sz="950" dirty="0">
+                <a:solidFill>
+                  <a:srgbClr val="6B7D87">
+                    <a:alpha val="80000"/>
+                  </a:srgbClr>
+                </a:solidFill>
+                <a:latin typeface="Calibri" pitchFamily="34" charset="0"/>
+                <a:ea typeface="Calibri" pitchFamily="34" charset="-122"/>
+                <a:cs typeface="Calibri" pitchFamily="34" charset="-120"/>
+              </a:rPr>
+              <a:t>Green Solutions · United States Market Dossier</a:t>
+            </a:r>
+            <a:endParaRPr lang="en-US" sz="950" dirty="0"/>
+          </a:p>
+        </p:txBody>
+      </p:sp>
+      <p:sp>
+        <p:nvSpPr>
+          <p:cNvPr id="11" name="Text 9"/>
+          <p:cNvSpPr txBox="1"/>
+          <p:nvPr/>
+        </p:nvSpPr>
+        <p:spPr>
+          <a:xfrm>
+            <a:off x="11140135" y="6382512"/>
+            <a:ext cx="548640" cy="274320"/>
+          </a:xfrm>
+          <a:prstGeom prst="rect">
+            <a:avLst/>
+          </a:prstGeom>
+          <a:noFill/>
+          <a:ln/>
+        </p:spPr>
+        <p:txBody>
+          <a:bodyPr wrap="square" lIns="0" tIns="0" rIns="0" bIns="0" rtlCol="0" anchor="ctr"/>
+          <a:lstStyle/>
+          <a:p>
+            <a:pPr algn="r" indent="0" marL="0">
+              <a:buNone/>
+            </a:pPr>
+            <a:r>
+              <a:rPr lang="en-US" sz="950" dirty="0">
+                <a:solidFill>
+                  <a:srgbClr val="6B7D87">
+                    <a:alpha val="80000"/>
+                  </a:srgbClr>
+                </a:solidFill>
+                <a:latin typeface="Calibri" pitchFamily="34" charset="0"/>
+                <a:ea typeface="Calibri" pitchFamily="34" charset="-122"/>
+                <a:cs typeface="Calibri" pitchFamily="34" charset="-120"/>
+              </a:rPr>
+              <a:t>15</a:t>
+            </a:r>
+            <a:endParaRPr lang="en-US" sz="950" dirty="0"/>
+          </a:p>
+        </p:txBody>
+      </p:sp>
+    </p:spTree>
+  </p:cSld>
+  <p:clrMapOvr>
+    <a:masterClrMapping/>
+  </p:clrMapOvr>
+</p:sld>
+</file>
+
+<file path=ppt/slides/slide17.xml><?xml version="1.0" encoding="utf-8"?>
+<p:sld xmlns:a="http://schemas.openxmlformats.org/drawingml/2006/main" xmlns:r="http://schemas.openxmlformats.org/officeDocument/2006/relationships" xmlns:p="http://schemas.openxmlformats.org/presentationml/2006/main">
+  <p:cSld name="Slide 17">
+    <p:bg>
+      <p:bgPr>
+        <a:solidFill>
+          <a:srgbClr val="FAFBFC"/>
+        </a:solidFill>
+      </p:bgPr>
+    </p:bg>
+    <p:spTree>
+      <p:nvGrpSpPr>
+        <p:cNvPr id="1" name=""/>
+        <p:cNvGrpSpPr/>
+        <p:nvPr/>
+      </p:nvGrpSpPr>
+      <p:grpSpPr>
+        <a:xfrm>
+          <a:off x="0" y="0"/>
+          <a:ext cx="0" cy="0"/>
+          <a:chOff x="0" y="0"/>
+          <a:chExt cx="0" cy="0"/>
+        </a:xfrm>
+      </p:grpSpPr>
+      <p:sp>
+        <p:nvSpPr>
+          <p:cNvPr id="2" name="Text 0"/>
+          <p:cNvSpPr txBox="1"/>
+          <p:nvPr/>
+        </p:nvSpPr>
+        <p:spPr>
+          <a:xfrm>
+            <a:off x="594360" y="411480"/>
+            <a:ext cx="10515600" cy="274320"/>
+          </a:xfrm>
+          <a:prstGeom prst="rect">
+            <a:avLst/>
+          </a:prstGeom>
+          <a:noFill/>
+          <a:ln/>
+        </p:spPr>
+        <p:txBody>
+          <a:bodyPr wrap="square" lIns="0" tIns="0" rIns="0" bIns="0" rtlCol="0" anchor="ctr"/>
+          <a:lstStyle/>
+          <a:p>
+            <a:pPr algn="l" indent="0" marL="0">
+              <a:buNone/>
+            </a:pPr>
+            <a:r>
+              <a:rPr lang="en-US" sz="1150" b="1" spc="200" kern="0" dirty="0">
+                <a:solidFill>
+                  <a:srgbClr val="D98C2B"/>
+                </a:solidFill>
+                <a:latin typeface="Calibri" pitchFamily="34" charset="0"/>
+                <a:ea typeface="Calibri" pitchFamily="34" charset="-122"/>
+                <a:cs typeface="Calibri" pitchFamily="34" charset="-120"/>
+              </a:rPr>
+              <a:t>Sources</a:t>
+            </a:r>
+            <a:endParaRPr lang="en-US" sz="1150" dirty="0"/>
+          </a:p>
+        </p:txBody>
+      </p:sp>
+      <p:sp>
+        <p:nvSpPr>
+          <p:cNvPr id="3" name="Text 1"/>
+          <p:cNvSpPr txBox="1"/>
+          <p:nvPr/>
+        </p:nvSpPr>
+        <p:spPr>
+          <a:xfrm>
+            <a:off x="594360" y="731520"/>
+            <a:ext cx="10881360" cy="731520"/>
+          </a:xfrm>
+          <a:prstGeom prst="rect">
+            <a:avLst/>
+          </a:prstGeom>
+          <a:noFill/>
+          <a:ln/>
+        </p:spPr>
+        <p:txBody>
+          <a:bodyPr wrap="square" lIns="0" tIns="0" rIns="0" bIns="0" rtlCol="0" anchor="ctr"/>
+          <a:lstStyle/>
+          <a:p>
+            <a:pPr algn="l" indent="0" marL="0">
+              <a:buNone/>
+            </a:pPr>
+            <a:r>
+              <a:rPr lang="en-US" sz="3000" b="1" dirty="0">
+                <a:solidFill>
+                  <a:srgbClr val="0F2E40"/>
+                </a:solidFill>
+                <a:latin typeface="Cambria" pitchFamily="34" charset="0"/>
+                <a:ea typeface="Cambria" pitchFamily="34" charset="-122"/>
+                <a:cs typeface="Cambria" pitchFamily="34" charset="-120"/>
+              </a:rPr>
+              <a:t>Sources and working assumptions</a:t>
+            </a:r>
+            <a:endParaRPr lang="en-US" sz="3000" dirty="0"/>
+          </a:p>
+        </p:txBody>
+      </p:sp>
+      <p:sp>
+        <p:nvSpPr>
+          <p:cNvPr id="4" name="Text 2"/>
+          <p:cNvSpPr txBox="1"/>
+          <p:nvPr/>
+        </p:nvSpPr>
+        <p:spPr>
+          <a:xfrm>
+            <a:off x="594360" y="1783080"/>
+            <a:ext cx="5227168" cy="411480"/>
+          </a:xfrm>
+          <a:prstGeom prst="rect">
+            <a:avLst/>
+          </a:prstGeom>
+          <a:noFill/>
+          <a:ln/>
+        </p:spPr>
+        <p:txBody>
+          <a:bodyPr wrap="square" lIns="0" tIns="0" rIns="0" bIns="0" rtlCol="0" anchor="ctr"/>
+          <a:lstStyle/>
+          <a:p>
+            <a:pPr algn="l" indent="0" marL="0">
+              <a:buNone/>
+            </a:pPr>
+            <a:r>
+              <a:rPr lang="en-US" sz="1600" b="1" dirty="0">
+                <a:solidFill>
+                  <a:srgbClr val="1D4E6B"/>
+                </a:solidFill>
+                <a:latin typeface="Cambria" pitchFamily="34" charset="0"/>
+                <a:ea typeface="Cambria" pitchFamily="34" charset="-122"/>
+                <a:cs typeface="Cambria" pitchFamily="34" charset="-120"/>
+              </a:rPr>
+              <a:t>Main sources</a:t>
+            </a:r>
+            <a:endParaRPr lang="en-US" sz="1600" dirty="0"/>
+          </a:p>
+        </p:txBody>
+      </p:sp>
+      <p:sp>
+        <p:nvSpPr>
+          <p:cNvPr id="5" name="Text 3"/>
+          <p:cNvSpPr txBox="1"/>
+          <p:nvPr/>
+        </p:nvSpPr>
+        <p:spPr>
+          <a:xfrm>
+            <a:off x="594360" y="2286000"/>
+            <a:ext cx="5227168" cy="2468880"/>
+          </a:xfrm>
+          <a:prstGeom prst="rect">
+            <a:avLst/>
+          </a:prstGeom>
+          <a:noFill/>
+          <a:ln/>
+        </p:spPr>
+        <p:txBody>
+          <a:bodyPr wrap="square" lIns="0" tIns="0" rIns="0" bIns="0" rtlCol="0" anchor="t"/>
+          <a:lstStyle/>
+          <a:p>
+            <a:pPr algn="l" marL="342900" indent="-342900">
+              <a:lnSpc>
+                <a:spcPct val="122000"/>
+              </a:lnSpc>
+              <a:spcAft>
+                <a:spcPts val="1000"/>
+              </a:spcAft>
+              <a:buSzPct val="100000"/>
+              <a:buChar char="•"/>
+            </a:pPr>
+            <a:r>
+              <a:rPr lang="en-US" sz="1350" dirty="0">
+                <a:solidFill>
+                  <a:srgbClr val="2F3E47"/>
+                </a:solidFill>
+                <a:latin typeface="Calibri" pitchFamily="34" charset="0"/>
+                <a:ea typeface="Calibri" pitchFamily="34" charset="-122"/>
+                <a:cs typeface="Calibri" pitchFamily="34" charset="-120"/>
+              </a:rPr>
+              <a:t>USDA NASS: 2022 Census of Agriculture, state farm cash receipts.</a:t>
+            </a:r>
+            <a:endParaRPr lang="en-US" sz="1350" dirty="0"/>
+          </a:p>
+          <a:p>
+            <a:pPr algn="l" marL="342900" indent="-342900">
+              <a:lnSpc>
+                <a:spcPct val="122000"/>
+              </a:lnSpc>
+              <a:spcAft>
+                <a:spcPts val="1000"/>
+              </a:spcAft>
+              <a:buSzPct val="100000"/>
+              <a:buChar char="•"/>
+            </a:pPr>
+            <a:r>
+              <a:rPr lang="en-US" sz="1350" dirty="0">
+                <a:solidFill>
+                  <a:srgbClr val="2F3E47"/>
+                </a:solidFill>
+                <a:latin typeface="Calibri" pitchFamily="34" charset="0"/>
+                <a:ea typeface="Calibri" pitchFamily="34" charset="-122"/>
+                <a:cs typeface="Calibri" pitchFamily="34" charset="-120"/>
+              </a:rPr>
+              <a:t>USDA ERS: agriculture and food sectors in the economy, farm exports.</a:t>
+            </a:r>
+            <a:endParaRPr lang="en-US" sz="1350" dirty="0"/>
+          </a:p>
+          <a:p>
+            <a:pPr algn="l" marL="342900" indent="-342900">
+              <a:lnSpc>
+                <a:spcPct val="122000"/>
+              </a:lnSpc>
+              <a:spcAft>
+                <a:spcPts val="1000"/>
+              </a:spcAft>
+              <a:buSzPct val="100000"/>
+              <a:buChar char="•"/>
+            </a:pPr>
+            <a:r>
+              <a:rPr lang="en-US" sz="1350" dirty="0">
+                <a:solidFill>
+                  <a:srgbClr val="2F3E47"/>
+                </a:solidFill>
+                <a:latin typeface="Calibri" pitchFamily="34" charset="0"/>
+                <a:ea typeface="Calibri" pitchFamily="34" charset="-122"/>
+                <a:cs typeface="Calibri" pitchFamily="34" charset="-120"/>
+              </a:rPr>
+              <a:t>USGS: estimated water use in the United States, High Plains aquifer monitoring.</a:t>
+            </a:r>
+            <a:endParaRPr lang="en-US" sz="1350" dirty="0"/>
+          </a:p>
+          <a:p>
+            <a:pPr algn="l" marL="342900" indent="-342900">
+              <a:lnSpc>
+                <a:spcPct val="122000"/>
+              </a:lnSpc>
+              <a:spcAft>
+                <a:spcPts val="1000"/>
+              </a:spcAft>
+              <a:buSzPct val="100000"/>
+              <a:buChar char="•"/>
+            </a:pPr>
+            <a:r>
+              <a:rPr lang="en-US" sz="1350" dirty="0">
+                <a:solidFill>
+                  <a:srgbClr val="2F3E47"/>
+                </a:solidFill>
+                <a:latin typeface="Calibri" pitchFamily="34" charset="0"/>
+                <a:ea typeface="Calibri" pitchFamily="34" charset="-122"/>
+                <a:cs typeface="Calibri" pitchFamily="34" charset="-120"/>
+              </a:rPr>
+              <a:t>California Department of Water Resources (SGMA); Almond Board of California.</a:t>
+            </a:r>
+            <a:endParaRPr lang="en-US" sz="1350" dirty="0"/>
+          </a:p>
+        </p:txBody>
+      </p:sp>
+      <p:sp>
+        <p:nvSpPr>
+          <p:cNvPr id="6" name="Text 4"/>
+          <p:cNvSpPr txBox="1"/>
+          <p:nvPr/>
+        </p:nvSpPr>
+        <p:spPr>
+          <a:xfrm>
+            <a:off x="6370168" y="1783080"/>
+            <a:ext cx="5227168" cy="411480"/>
+          </a:xfrm>
+          <a:prstGeom prst="rect">
+            <a:avLst/>
+          </a:prstGeom>
+          <a:noFill/>
+          <a:ln/>
+        </p:spPr>
+        <p:txBody>
+          <a:bodyPr wrap="square" lIns="0" tIns="0" rIns="0" bIns="0" rtlCol="0" anchor="ctr"/>
+          <a:lstStyle/>
+          <a:p>
+            <a:pPr algn="l" indent="0" marL="0">
+              <a:buNone/>
+            </a:pPr>
+            <a:r>
+              <a:rPr lang="en-US" sz="1600" b="1" dirty="0">
+                <a:solidFill>
+                  <a:srgbClr val="1D4E6B"/>
+                </a:solidFill>
+                <a:latin typeface="Cambria" pitchFamily="34" charset="0"/>
+                <a:ea typeface="Cambria" pitchFamily="34" charset="-122"/>
+                <a:cs typeface="Cambria" pitchFamily="34" charset="-120"/>
+              </a:rPr>
+              <a:t>Working assumptions</a:t>
+            </a:r>
+            <a:endParaRPr lang="en-US" sz="1600" dirty="0"/>
+          </a:p>
+        </p:txBody>
+      </p:sp>
+      <p:sp>
+        <p:nvSpPr>
+          <p:cNvPr id="7" name="Text 5"/>
+          <p:cNvSpPr txBox="1"/>
+          <p:nvPr/>
+        </p:nvSpPr>
+        <p:spPr>
+          <a:xfrm>
+            <a:off x="6370168" y="2286000"/>
+            <a:ext cx="5227168" cy="2468880"/>
+          </a:xfrm>
+          <a:prstGeom prst="rect">
+            <a:avLst/>
+          </a:prstGeom>
+          <a:noFill/>
+          <a:ln/>
+        </p:spPr>
+        <p:txBody>
+          <a:bodyPr wrap="square" lIns="0" tIns="0" rIns="0" bIns="0" rtlCol="0" anchor="t"/>
+          <a:lstStyle/>
+          <a:p>
+            <a:pPr algn="l" marL="342900" indent="-342900">
+              <a:lnSpc>
+                <a:spcPct val="122000"/>
+              </a:lnSpc>
+              <a:spcAft>
+                <a:spcPts val="1000"/>
+              </a:spcAft>
+              <a:buSzPct val="100000"/>
+              <a:buChar char="•"/>
+            </a:pPr>
+            <a:r>
+              <a:rPr lang="en-US" sz="1350" dirty="0">
+                <a:solidFill>
+                  <a:srgbClr val="2F3E47"/>
+                </a:solidFill>
+                <a:latin typeface="Calibri" pitchFamily="34" charset="0"/>
+                <a:ea typeface="Calibri" pitchFamily="34" charset="-122"/>
+                <a:cs typeface="Calibri" pitchFamily="34" charset="-120"/>
+              </a:rPr>
+              <a:t>Figures are rounded orders of magnitude, taken from the latest public data available.</a:t>
+            </a:r>
+            <a:endParaRPr lang="en-US" sz="1350" dirty="0"/>
+          </a:p>
+          <a:p>
+            <a:pPr algn="l" marL="342900" indent="-342900">
+              <a:lnSpc>
+                <a:spcPct val="122000"/>
+              </a:lnSpc>
+              <a:spcAft>
+                <a:spcPts val="1000"/>
+              </a:spcAft>
+              <a:buSzPct val="100000"/>
+              <a:buChar char="•"/>
+            </a:pPr>
+            <a:r>
+              <a:rPr lang="en-US" sz="1350" dirty="0">
+                <a:solidFill>
+                  <a:srgbClr val="2F3E47"/>
+                </a:solidFill>
+                <a:latin typeface="Calibri" pitchFamily="34" charset="0"/>
+                <a:ea typeface="Calibri" pitchFamily="34" charset="-122"/>
+                <a:cs typeface="Calibri" pitchFamily="34" charset="-120"/>
+              </a:rPr>
+              <a:t>Water and yield gains are indicative and vary with soil, climate and crop.</a:t>
+            </a:r>
+            <a:endParaRPr lang="en-US" sz="1350" dirty="0"/>
+          </a:p>
+          <a:p>
+            <a:pPr algn="l" marL="342900" indent="-342900">
+              <a:lnSpc>
+                <a:spcPct val="122000"/>
+              </a:lnSpc>
+              <a:spcAft>
+                <a:spcPts val="1000"/>
+              </a:spcAft>
+              <a:buSzPct val="100000"/>
+              <a:buChar char="•"/>
+            </a:pPr>
+            <a:r>
+              <a:rPr lang="en-US" sz="1350" dirty="0">
+                <a:solidFill>
+                  <a:srgbClr val="2F3E47"/>
+                </a:solidFill>
+                <a:latin typeface="Calibri" pitchFamily="34" charset="0"/>
+                <a:ea typeface="Calibri" pitchFamily="34" charset="-122"/>
+                <a:cs typeface="Calibri" pitchFamily="34" charset="-120"/>
+              </a:rPr>
+              <a:t>Commercial working document: figures to be refreshed before any official submission.</a:t>
+            </a:r>
+            <a:endParaRPr lang="en-US" sz="1350" dirty="0"/>
+          </a:p>
+        </p:txBody>
+      </p:sp>
+      <p:sp>
+        <p:nvSpPr>
+          <p:cNvPr id="8" name="Shape 6"/>
+          <p:cNvSpPr/>
+          <p:nvPr/>
+        </p:nvSpPr>
+        <p:spPr>
+          <a:xfrm>
+            <a:off x="594360" y="4846320"/>
+            <a:ext cx="11002975" cy="960120"/>
+          </a:xfrm>
+          <a:prstGeom prst="roundRect">
+            <a:avLst>
+              <a:gd name="adj" fmla="val 7619"/>
+            </a:avLst>
+          </a:prstGeom>
+          <a:solidFill>
+            <a:srgbClr val="EEF2F5"/>
+          </a:solidFill>
+          <a:ln w="9525">
+            <a:solidFill>
+              <a:srgbClr val="D8E1E7"/>
+            </a:solidFill>
+            <a:prstDash val="solid"/>
+          </a:ln>
+        </p:spPr>
+      </p:sp>
+      <p:sp>
+        <p:nvSpPr>
+          <p:cNvPr id="9" name="Text 7"/>
+          <p:cNvSpPr txBox="1"/>
+          <p:nvPr/>
+        </p:nvSpPr>
+        <p:spPr>
+          <a:xfrm>
+            <a:off x="822960" y="4983480"/>
+            <a:ext cx="10545775" cy="713232"/>
+          </a:xfrm>
+          <a:prstGeom prst="rect">
+            <a:avLst/>
+          </a:prstGeom>
+          <a:noFill/>
+          <a:ln/>
+        </p:spPr>
+        <p:txBody>
+          <a:bodyPr wrap="square" lIns="0" tIns="0" rIns="0" bIns="0" rtlCol="0" anchor="t"/>
+          <a:lstStyle/>
+          <a:p>
+            <a:pPr algn="l" indent="0" marL="0">
+              <a:lnSpc>
+                <a:spcPct val="118000"/>
+              </a:lnSpc>
+              <a:buNone/>
+            </a:pPr>
+            <a:r>
+              <a:rPr lang="en-US" sz="1100" dirty="0">
+                <a:solidFill>
+                  <a:srgbClr val="6B7D87"/>
+                </a:solidFill>
+                <a:latin typeface="Calibri" pitchFamily="34" charset="0"/>
+                <a:ea typeface="Calibri" pitchFamily="34" charset="-122"/>
+                <a:cs typeface="Calibri" pitchFamily="34" charset="-120"/>
+              </a:rPr>
+              <a:t>Trial reports, certificates (SOHISCERT, Polymex and SGS analyses) and technical sheets: available on request.</a:t>
+            </a:r>
+            <a:endParaRPr lang="en-US" sz="1100" dirty="0"/>
+          </a:p>
+        </p:txBody>
+      </p:sp>
+      <p:sp>
+        <p:nvSpPr>
+          <p:cNvPr id="10" name="Text 8"/>
+          <p:cNvSpPr txBox="1"/>
+          <p:nvPr/>
+        </p:nvSpPr>
+        <p:spPr>
+          <a:xfrm>
+            <a:off x="502920" y="6382512"/>
+            <a:ext cx="8229600" cy="274320"/>
+          </a:xfrm>
+          <a:prstGeom prst="rect">
+            <a:avLst/>
+          </a:prstGeom>
+          <a:noFill/>
+          <a:ln/>
+        </p:spPr>
+        <p:txBody>
+          <a:bodyPr wrap="square" lIns="0" tIns="0" rIns="0" bIns="0" rtlCol="0" anchor="ctr"/>
+          <a:lstStyle/>
+          <a:p>
+            <a:pPr algn="l" indent="0" marL="0">
+              <a:buNone/>
+            </a:pPr>
+            <a:r>
+              <a:rPr lang="en-US" sz="950" dirty="0">
+                <a:solidFill>
+                  <a:srgbClr val="6B7D87">
+                    <a:alpha val="80000"/>
+                  </a:srgbClr>
+                </a:solidFill>
+                <a:latin typeface="Calibri" pitchFamily="34" charset="0"/>
+                <a:ea typeface="Calibri" pitchFamily="34" charset="-122"/>
+                <a:cs typeface="Calibri" pitchFamily="34" charset="-120"/>
+              </a:rPr>
+              <a:t>Green Solutions · United States Market Dossier</a:t>
+            </a:r>
+            <a:endParaRPr lang="en-US" sz="950" dirty="0"/>
+          </a:p>
+        </p:txBody>
+      </p:sp>
+      <p:sp>
+        <p:nvSpPr>
+          <p:cNvPr id="11" name="Text 9"/>
+          <p:cNvSpPr txBox="1"/>
+          <p:nvPr/>
+        </p:nvSpPr>
+        <p:spPr>
+          <a:xfrm>
+            <a:off x="11140135" y="6382512"/>
+            <a:ext cx="548640" cy="274320"/>
+          </a:xfrm>
+          <a:prstGeom prst="rect">
+            <a:avLst/>
+          </a:prstGeom>
+          <a:noFill/>
+          <a:ln/>
+        </p:spPr>
+        <p:txBody>
+          <a:bodyPr wrap="square" lIns="0" tIns="0" rIns="0" bIns="0" rtlCol="0" anchor="ctr"/>
+          <a:lstStyle/>
+          <a:p>
+            <a:pPr algn="r" indent="0" marL="0">
+              <a:buNone/>
+            </a:pPr>
+            <a:r>
+              <a:rPr lang="en-US" sz="950" dirty="0">
+                <a:solidFill>
+                  <a:srgbClr val="6B7D87">
+                    <a:alpha val="80000"/>
+                  </a:srgbClr>
+                </a:solidFill>
+                <a:latin typeface="Calibri" pitchFamily="34" charset="0"/>
+                <a:ea typeface="Calibri" pitchFamily="34" charset="-122"/>
+                <a:cs typeface="Calibri" pitchFamily="34" charset="-120"/>
+              </a:rPr>
+              <a:t>16</a:t>
+            </a:r>
+            <a:endParaRPr lang="en-US" sz="950" dirty="0"/>
+          </a:p>
+        </p:txBody>
+      </p:sp>
+    </p:spTree>
+  </p:cSld>
+  <p:clrMapOvr>
+    <a:masterClrMapping/>
+  </p:clrMapOvr>
+</p:sld>
+</file>
+
+<file path=ppt/slides/slide18.xml><?xml version="1.0" encoding="utf-8"?>
+<p:sld xmlns:a="http://schemas.openxmlformats.org/drawingml/2006/main" xmlns:r="http://schemas.openxmlformats.org/officeDocument/2006/relationships" xmlns:p="http://schemas.openxmlformats.org/presentationml/2006/main">
+  <p:cSld name="Slide 18">
     <p:spTree>
       <p:nvGrpSpPr>
         <p:cNvPr id="1" name=""/>
@@ -3944,7 +9643,7 @@
                 <a:ea typeface="Calibri" pitchFamily="34" charset="-122"/>
                 <a:cs typeface="Calibri" pitchFamily="34" charset="-120"/>
               </a:rPr>
-              <a:t>10</a:t>
+              <a:t>17</a:t>
             </a:r>
             <a:endParaRPr lang="en-US" sz="950" dirty="0"/>
           </a:p>
@@ -5423,7 +11122,7 @@
                 <a:ea typeface="Calibri" pitchFamily="34" charset="-122"/>
                 <a:cs typeface="Calibri" pitchFamily="34" charset="-120"/>
               </a:rPr>
-              <a:t>THE MAJOR CROPS</a:t>
+              <a:t>ECONOMY AND FOOD SYSTEM</a:t>
             </a:r>
             <a:endParaRPr lang="en-US" sz="1150" dirty="0"/>
           </a:p>
@@ -5462,42 +11161,26 @@
                 <a:ea typeface="Cambria" pitchFamily="34" charset="-122"/>
                 <a:cs typeface="Cambria" pitchFamily="34" charset="-120"/>
               </a:rPr>
-              <a:t>Five outputs carry the bulk of farm volume</a:t>
+              <a:t>The largest farm exporter, on a tightening water ledger</a:t>
             </a:r>
             <a:endParaRPr lang="en-US" sz="3000" dirty="0"/>
           </a:p>
         </p:txBody>
       </p:sp>
-      <p:graphicFrame>
-        <p:nvGraphicFramePr>
-          <p:cNvPr id="4" name="Chart 0" descr=""/>
-          <p:cNvGraphicFramePr/>
-          <p:nvPr/>
-        </p:nvGraphicFramePr>
-        <p:xfrm>
-          <a:off x="594360" y="1783080"/>
-          <a:ext cx="7360920" cy="3977640"/>
-        </p:xfrm>
-        <a:graphic xmlns:a="http://schemas.openxmlformats.org/drawingml/2006/main">
-          <a:graphicData uri="http://schemas.openxmlformats.org/drawingml/2006/chart">
-            <c:chart xmlns:c="http://schemas.openxmlformats.org/drawingml/2006/chart" r:id="rId1"/>
-          </a:graphicData>
-        </a:graphic>
-      </p:graphicFrame>
-      <p:sp>
-        <p:nvSpPr>
-          <p:cNvPr id="5" name="Shape 2"/>
+      <p:sp>
+        <p:nvSpPr>
+          <p:cNvPr id="4" name="Shape 2"/>
           <p:cNvSpPr/>
           <p:nvPr/>
         </p:nvSpPr>
         <p:spPr>
           <a:xfrm>
-            <a:off x="8275320" y="1783080"/>
-            <a:ext cx="3291840" cy="3977640"/>
+            <a:off x="594360" y="1874520"/>
+            <a:ext cx="2545004" cy="2514600"/>
           </a:xfrm>
           <a:prstGeom prst="roundRect">
             <a:avLst>
-              <a:gd name="adj" fmla="val 2778"/>
+              <a:gd name="adj" fmla="val 3636"/>
             </a:avLst>
           </a:prstGeom>
           <a:solidFill>
@@ -5513,14 +11196,14 @@
       </p:sp>
       <p:sp>
         <p:nvSpPr>
-          <p:cNvPr id="6" name="Text 3"/>
-          <p:cNvSpPr txBox="1"/>
-          <p:nvPr/>
-        </p:nvSpPr>
-        <p:spPr>
-          <a:xfrm>
-            <a:off x="8503920" y="2011680"/>
-            <a:ext cx="2834640" cy="457200"/>
+          <p:cNvPr id="5" name="Text 3"/>
+          <p:cNvSpPr txBox="1"/>
+          <p:nvPr/>
+        </p:nvSpPr>
+        <p:spPr>
+          <a:xfrm>
+            <a:off x="777240" y="2148840"/>
+            <a:ext cx="2179244" cy="960120"/>
           </a:xfrm>
           <a:prstGeom prst="rect">
             <a:avLst/>
@@ -5532,11 +11215,11 @@
           <a:bodyPr wrap="square" lIns="0" tIns="0" rIns="0" bIns="0" rtlCol="0" anchor="ctr"/>
           <a:lstStyle/>
           <a:p>
-            <a:pPr algn="l" indent="0" marL="0">
-              <a:buNone/>
-            </a:pPr>
-            <a:r>
-              <a:rPr lang="en-US" sz="1300" b="1" dirty="0">
+            <a:pPr algn="ctr" indent="0" marL="0">
+              <a:buNone/>
+            </a:pPr>
+            <a:r>
+              <a:rPr lang="en-US" sz="3800" b="1" dirty="0">
                 <a:solidFill>
                   <a:srgbClr val="1D4E6B"/>
                 </a:solidFill>
@@ -5544,22 +11227,388 @@
                 <a:ea typeface="Cambria" pitchFamily="34" charset="-122"/>
                 <a:cs typeface="Cambria" pitchFamily="34" charset="-120"/>
               </a:rPr>
-              <a:t>Reading</a:t>
-            </a:r>
-            <a:endParaRPr lang="en-US" sz="1300" dirty="0"/>
-          </a:p>
-        </p:txBody>
-      </p:sp>
-      <p:sp>
-        <p:nvSpPr>
-          <p:cNvPr id="7" name="Text 4"/>
-          <p:cNvSpPr txBox="1"/>
-          <p:nvPr/>
-        </p:nvSpPr>
-        <p:spPr>
-          <a:xfrm>
-            <a:off x="8503920" y="2560320"/>
-            <a:ext cx="2834640" cy="3017520"/>
+              <a:t>≈ 1.9 M</a:t>
+            </a:r>
+            <a:endParaRPr lang="en-US" sz="3800" dirty="0"/>
+          </a:p>
+        </p:txBody>
+      </p:sp>
+      <p:sp>
+        <p:nvSpPr>
+          <p:cNvPr id="6" name="Text 4"/>
+          <p:cNvSpPr txBox="1"/>
+          <p:nvPr/>
+        </p:nvSpPr>
+        <p:spPr>
+          <a:xfrm>
+            <a:off x="795528" y="3154680"/>
+            <a:ext cx="2142668" cy="1051560"/>
+          </a:xfrm>
+          <a:prstGeom prst="rect">
+            <a:avLst/>
+          </a:prstGeom>
+          <a:noFill/>
+          <a:ln/>
+        </p:spPr>
+        <p:txBody>
+          <a:bodyPr wrap="square" lIns="0" tIns="0" rIns="0" bIns="0" rtlCol="0" anchor="t"/>
+          <a:lstStyle/>
+          <a:p>
+            <a:pPr algn="ctr" indent="0" marL="0">
+              <a:lnSpc>
+                <a:spcPct val="118000"/>
+              </a:lnSpc>
+              <a:buNone/>
+            </a:pPr>
+            <a:r>
+              <a:rPr lang="en-US" sz="1250" dirty="0">
+                <a:solidFill>
+                  <a:srgbClr val="2F3E47"/>
+                </a:solidFill>
+                <a:latin typeface="Calibri" pitchFamily="34" charset="0"/>
+                <a:ea typeface="Calibri" pitchFamily="34" charset="-122"/>
+                <a:cs typeface="Calibri" pitchFamily="34" charset="-120"/>
+              </a:rPr>
+              <a:t>farms, averaging about 460 acres each</a:t>
+            </a:r>
+            <a:endParaRPr lang="en-US" sz="1250" dirty="0"/>
+          </a:p>
+        </p:txBody>
+      </p:sp>
+      <p:sp>
+        <p:nvSpPr>
+          <p:cNvPr id="7" name="Shape 5"/>
+          <p:cNvSpPr/>
+          <p:nvPr/>
+        </p:nvSpPr>
+        <p:spPr>
+          <a:xfrm>
+            <a:off x="3413684" y="1874520"/>
+            <a:ext cx="2545004" cy="2514600"/>
+          </a:xfrm>
+          <a:prstGeom prst="roundRect">
+            <a:avLst>
+              <a:gd name="adj" fmla="val 3636"/>
+            </a:avLst>
+          </a:prstGeom>
+          <a:solidFill>
+            <a:srgbClr val="EEF2F5"/>
+          </a:solidFill>
+          <a:ln w="9525">
+            <a:solidFill>
+              <a:srgbClr val="D8E1E7"/>
+            </a:solidFill>
+            <a:prstDash val="solid"/>
+          </a:ln>
+        </p:spPr>
+      </p:sp>
+      <p:sp>
+        <p:nvSpPr>
+          <p:cNvPr id="8" name="Text 6"/>
+          <p:cNvSpPr txBox="1"/>
+          <p:nvPr/>
+        </p:nvSpPr>
+        <p:spPr>
+          <a:xfrm>
+            <a:off x="3596564" y="2148840"/>
+            <a:ext cx="2179244" cy="960120"/>
+          </a:xfrm>
+          <a:prstGeom prst="rect">
+            <a:avLst/>
+          </a:prstGeom>
+          <a:noFill/>
+          <a:ln/>
+        </p:spPr>
+        <p:txBody>
+          <a:bodyPr wrap="square" lIns="0" tIns="0" rIns="0" bIns="0" rtlCol="0" anchor="ctr"/>
+          <a:lstStyle/>
+          <a:p>
+            <a:pPr algn="ctr" indent="0" marL="0">
+              <a:buNone/>
+            </a:pPr>
+            <a:r>
+              <a:rPr lang="en-US" sz="3800" b="1" dirty="0">
+                <a:solidFill>
+                  <a:srgbClr val="1D4E6B"/>
+                </a:solidFill>
+                <a:latin typeface="Cambria" pitchFamily="34" charset="0"/>
+                <a:ea typeface="Cambria" pitchFamily="34" charset="-122"/>
+                <a:cs typeface="Cambria" pitchFamily="34" charset="-120"/>
+              </a:rPr>
+              <a:t>≈ 0.7 %</a:t>
+            </a:r>
+            <a:endParaRPr lang="en-US" sz="3800" dirty="0"/>
+          </a:p>
+        </p:txBody>
+      </p:sp>
+      <p:sp>
+        <p:nvSpPr>
+          <p:cNvPr id="9" name="Text 7"/>
+          <p:cNvSpPr txBox="1"/>
+          <p:nvPr/>
+        </p:nvSpPr>
+        <p:spPr>
+          <a:xfrm>
+            <a:off x="3614852" y="3154680"/>
+            <a:ext cx="2142668" cy="1051560"/>
+          </a:xfrm>
+          <a:prstGeom prst="rect">
+            <a:avLst/>
+          </a:prstGeom>
+          <a:noFill/>
+          <a:ln/>
+        </p:spPr>
+        <p:txBody>
+          <a:bodyPr wrap="square" lIns="0" tIns="0" rIns="0" bIns="0" rtlCol="0" anchor="t"/>
+          <a:lstStyle/>
+          <a:p>
+            <a:pPr algn="ctr" indent="0" marL="0">
+              <a:lnSpc>
+                <a:spcPct val="118000"/>
+              </a:lnSpc>
+              <a:buNone/>
+            </a:pPr>
+            <a:r>
+              <a:rPr lang="en-US" sz="1250" dirty="0">
+                <a:solidFill>
+                  <a:srgbClr val="2F3E47"/>
+                </a:solidFill>
+                <a:latin typeface="Calibri" pitchFamily="34" charset="0"/>
+                <a:ea typeface="Calibri" pitchFamily="34" charset="-122"/>
+                <a:cs typeface="Calibri" pitchFamily="34" charset="-120"/>
+              </a:rPr>
+              <a:t>of GDP from farms alone, over 5 % with food industries</a:t>
+            </a:r>
+            <a:endParaRPr lang="en-US" sz="1250" dirty="0"/>
+          </a:p>
+        </p:txBody>
+      </p:sp>
+      <p:sp>
+        <p:nvSpPr>
+          <p:cNvPr id="10" name="Shape 8"/>
+          <p:cNvSpPr/>
+          <p:nvPr/>
+        </p:nvSpPr>
+        <p:spPr>
+          <a:xfrm>
+            <a:off x="6233008" y="1874520"/>
+            <a:ext cx="2545004" cy="2514600"/>
+          </a:xfrm>
+          <a:prstGeom prst="roundRect">
+            <a:avLst>
+              <a:gd name="adj" fmla="val 3636"/>
+            </a:avLst>
+          </a:prstGeom>
+          <a:solidFill>
+            <a:srgbClr val="EEF2F5"/>
+          </a:solidFill>
+          <a:ln w="9525">
+            <a:solidFill>
+              <a:srgbClr val="D8E1E7"/>
+            </a:solidFill>
+            <a:prstDash val="solid"/>
+          </a:ln>
+        </p:spPr>
+      </p:sp>
+      <p:sp>
+        <p:nvSpPr>
+          <p:cNvPr id="11" name="Text 9"/>
+          <p:cNvSpPr txBox="1"/>
+          <p:nvPr/>
+        </p:nvSpPr>
+        <p:spPr>
+          <a:xfrm>
+            <a:off x="6415888" y="2148840"/>
+            <a:ext cx="2179244" cy="960120"/>
+          </a:xfrm>
+          <a:prstGeom prst="rect">
+            <a:avLst/>
+          </a:prstGeom>
+          <a:noFill/>
+          <a:ln/>
+        </p:spPr>
+        <p:txBody>
+          <a:bodyPr wrap="square" lIns="0" tIns="0" rIns="0" bIns="0" rtlCol="0" anchor="ctr"/>
+          <a:lstStyle/>
+          <a:p>
+            <a:pPr algn="ctr" indent="0" marL="0">
+              <a:buNone/>
+            </a:pPr>
+            <a:r>
+              <a:rPr lang="en-US" sz="3800" b="1" dirty="0">
+                <a:solidFill>
+                  <a:srgbClr val="1D4E6B"/>
+                </a:solidFill>
+                <a:latin typeface="Cambria" pitchFamily="34" charset="0"/>
+                <a:ea typeface="Cambria" pitchFamily="34" charset="-122"/>
+                <a:cs typeface="Cambria" pitchFamily="34" charset="-120"/>
+              </a:rPr>
+              <a:t>≈ $59 B</a:t>
+            </a:r>
+            <a:endParaRPr lang="en-US" sz="3800" dirty="0"/>
+          </a:p>
+        </p:txBody>
+      </p:sp>
+      <p:sp>
+        <p:nvSpPr>
+          <p:cNvPr id="12" name="Text 10"/>
+          <p:cNvSpPr txBox="1"/>
+          <p:nvPr/>
+        </p:nvSpPr>
+        <p:spPr>
+          <a:xfrm>
+            <a:off x="6434176" y="3154680"/>
+            <a:ext cx="2142668" cy="1051560"/>
+          </a:xfrm>
+          <a:prstGeom prst="rect">
+            <a:avLst/>
+          </a:prstGeom>
+          <a:noFill/>
+          <a:ln/>
+        </p:spPr>
+        <p:txBody>
+          <a:bodyPr wrap="square" lIns="0" tIns="0" rIns="0" bIns="0" rtlCol="0" anchor="t"/>
+          <a:lstStyle/>
+          <a:p>
+            <a:pPr algn="ctr" indent="0" marL="0">
+              <a:lnSpc>
+                <a:spcPct val="118000"/>
+              </a:lnSpc>
+              <a:buNone/>
+            </a:pPr>
+            <a:r>
+              <a:rPr lang="en-US" sz="1250" dirty="0">
+                <a:solidFill>
+                  <a:srgbClr val="2F3E47"/>
+                </a:solidFill>
+                <a:latin typeface="Calibri" pitchFamily="34" charset="0"/>
+                <a:ea typeface="Calibri" pitchFamily="34" charset="-122"/>
+                <a:cs typeface="Calibri" pitchFamily="34" charset="-120"/>
+              </a:rPr>
+              <a:t>in 2023 farm cash receipts for California, the top state</a:t>
+            </a:r>
+            <a:endParaRPr lang="en-US" sz="1250" dirty="0"/>
+          </a:p>
+        </p:txBody>
+      </p:sp>
+      <p:sp>
+        <p:nvSpPr>
+          <p:cNvPr id="13" name="Shape 11"/>
+          <p:cNvSpPr/>
+          <p:nvPr/>
+        </p:nvSpPr>
+        <p:spPr>
+          <a:xfrm>
+            <a:off x="9052331" y="1874520"/>
+            <a:ext cx="2545004" cy="2514600"/>
+          </a:xfrm>
+          <a:prstGeom prst="roundRect">
+            <a:avLst>
+              <a:gd name="adj" fmla="val 3636"/>
+            </a:avLst>
+          </a:prstGeom>
+          <a:solidFill>
+            <a:srgbClr val="EEF2F5"/>
+          </a:solidFill>
+          <a:ln w="9525">
+            <a:solidFill>
+              <a:srgbClr val="D8E1E7"/>
+            </a:solidFill>
+            <a:prstDash val="solid"/>
+          </a:ln>
+        </p:spPr>
+      </p:sp>
+      <p:sp>
+        <p:nvSpPr>
+          <p:cNvPr id="14" name="Text 12"/>
+          <p:cNvSpPr txBox="1"/>
+          <p:nvPr/>
+        </p:nvSpPr>
+        <p:spPr>
+          <a:xfrm>
+            <a:off x="9235211" y="2148840"/>
+            <a:ext cx="2179244" cy="960120"/>
+          </a:xfrm>
+          <a:prstGeom prst="rect">
+            <a:avLst/>
+          </a:prstGeom>
+          <a:noFill/>
+          <a:ln/>
+        </p:spPr>
+        <p:txBody>
+          <a:bodyPr wrap="square" lIns="0" tIns="0" rIns="0" bIns="0" rtlCol="0" anchor="ctr"/>
+          <a:lstStyle/>
+          <a:p>
+            <a:pPr algn="ctr" indent="0" marL="0">
+              <a:buNone/>
+            </a:pPr>
+            <a:r>
+              <a:rPr lang="en-US" sz="3800" b="1" dirty="0">
+                <a:solidFill>
+                  <a:srgbClr val="1D4E6B"/>
+                </a:solidFill>
+                <a:latin typeface="Cambria" pitchFamily="34" charset="0"/>
+                <a:ea typeface="Cambria" pitchFamily="34" charset="-122"/>
+                <a:cs typeface="Cambria" pitchFamily="34" charset="-120"/>
+              </a:rPr>
+              <a:t>≈ 80 %</a:t>
+            </a:r>
+            <a:endParaRPr lang="en-US" sz="3800" dirty="0"/>
+          </a:p>
+        </p:txBody>
+      </p:sp>
+      <p:sp>
+        <p:nvSpPr>
+          <p:cNvPr id="15" name="Text 13"/>
+          <p:cNvSpPr txBox="1"/>
+          <p:nvPr/>
+        </p:nvSpPr>
+        <p:spPr>
+          <a:xfrm>
+            <a:off x="9253499" y="3154680"/>
+            <a:ext cx="2142668" cy="1051560"/>
+          </a:xfrm>
+          <a:prstGeom prst="rect">
+            <a:avLst/>
+          </a:prstGeom>
+          <a:noFill/>
+          <a:ln/>
+        </p:spPr>
+        <p:txBody>
+          <a:bodyPr wrap="square" lIns="0" tIns="0" rIns="0" bIns="0" rtlCol="0" anchor="t"/>
+          <a:lstStyle/>
+          <a:p>
+            <a:pPr algn="ctr" indent="0" marL="0">
+              <a:lnSpc>
+                <a:spcPct val="118000"/>
+              </a:lnSpc>
+              <a:buNone/>
+            </a:pPr>
+            <a:r>
+              <a:rPr lang="en-US" sz="1250" dirty="0">
+                <a:solidFill>
+                  <a:srgbClr val="2F3E47"/>
+                </a:solidFill>
+                <a:latin typeface="Calibri" pitchFamily="34" charset="0"/>
+                <a:ea typeface="Calibri" pitchFamily="34" charset="-122"/>
+                <a:cs typeface="Calibri" pitchFamily="34" charset="-120"/>
+              </a:rPr>
+              <a:t>of the world's almonds grown in California</a:t>
+            </a:r>
+            <a:endParaRPr lang="en-US" sz="1250" dirty="0"/>
+          </a:p>
+        </p:txBody>
+      </p:sp>
+      <p:sp>
+        <p:nvSpPr>
+          <p:cNvPr id="16" name="Text 14"/>
+          <p:cNvSpPr txBox="1"/>
+          <p:nvPr/>
+        </p:nvSpPr>
+        <p:spPr>
+          <a:xfrm>
+            <a:off x="594360" y="4709160"/>
+            <a:ext cx="11002975" cy="1097280"/>
           </a:xfrm>
           <a:prstGeom prst="rect">
             <a:avLst/>
@@ -5573,12 +11622,12 @@
           <a:p>
             <a:pPr algn="l" indent="0" marL="0">
               <a:lnSpc>
-                <a:spcPct val="125000"/>
+                <a:spcPct val="130000"/>
               </a:lnSpc>
               <a:buNone/>
             </a:pPr>
             <a:r>
-              <a:rPr lang="en-US" sz="1200" dirty="0">
+              <a:rPr lang="en-US" sz="1350" dirty="0">
                 <a:solidFill>
                   <a:srgbClr val="2F3E47"/>
                 </a:solidFill>
@@ -5586,44 +11635,15 @@
                 <a:ea typeface="Calibri" pitchFamily="34" charset="-122"/>
                 <a:cs typeface="Calibri" pitchFamily="34" charset="-120"/>
               </a:rPr>
-              <a:t>Corn and soybeans carry the volume, largely rain-fed across the Midwest.</a:t>
-            </a:r>
-            <a:endParaRPr lang="en-US" sz="1200" dirty="0"/>
-          </a:p>
-          <a:p>
-            <a:pPr algn="l" indent="0" marL="0">
-              <a:lnSpc>
-                <a:spcPct val="125000"/>
-              </a:lnSpc>
-              <a:buNone/>
-            </a:pPr>
-            <a:endParaRPr lang="en-US" sz="1200" dirty="0"/>
-          </a:p>
-          <a:p>
-            <a:pPr algn="l" indent="0" marL="0">
-              <a:lnSpc>
-                <a:spcPct val="125000"/>
-              </a:lnSpc>
-              <a:buNone/>
-            </a:pPr>
-            <a:r>
-              <a:rPr lang="en-US" sz="1200" dirty="0">
-                <a:solidFill>
-                  <a:srgbClr val="2F3E47"/>
-                </a:solidFill>
-                <a:latin typeface="Calibri" pitchFamily="34" charset="0"/>
-                <a:ea typeface="Calibri" pitchFamily="34" charset="-122"/>
-                <a:cs typeface="Calibri" pitchFamily="34" charset="-120"/>
-              </a:rPr>
-              <a:t>Hay and forage are the single largest consumer of irrigation water in the West; alfalfa alone takes a significant share of Colorado River deliveries. Potatoes and specialty crops carry the highest value per acre.</a:t>
-            </a:r>
-            <a:endParaRPr lang="en-US" sz="1200" dirty="0"/>
-          </a:p>
-        </p:txBody>
-      </p:sp>
-      <p:sp>
-        <p:nvSpPr>
-          <p:cNvPr id="8" name="Text 5"/>
+              <a:t>Fruit, nuts and vegetables cover a small share of cropland but a large share of farm value, and most of them are irrigated in the West. California's Sustainable Groundwater Management Act and falling water tables on the High Plains now cap how much water those acres can draw.</a:t>
+            </a:r>
+            <a:endParaRPr lang="en-US" sz="1350" dirty="0"/>
+          </a:p>
+        </p:txBody>
+      </p:sp>
+      <p:sp>
+        <p:nvSpPr>
+          <p:cNvPr id="17" name="Text 15"/>
           <p:cNvSpPr txBox="1"/>
           <p:nvPr/>
         </p:nvSpPr>
@@ -5664,7 +11684,7 @@
       </p:sp>
       <p:sp>
         <p:nvSpPr>
-          <p:cNvPr id="9" name="Text 6"/>
+          <p:cNvPr id="18" name="Text 16"/>
           <p:cNvSpPr txBox="1"/>
           <p:nvPr/>
         </p:nvSpPr>
@@ -5768,7 +11788,7 @@
                 <a:ea typeface="Calibri" pitchFamily="34" charset="-122"/>
                 <a:cs typeface="Calibri" pitchFamily="34" charset="-120"/>
               </a:rPr>
-              <a:t>OUR ANSWER</a:t>
+              <a:t>THE MAJOR CROPS</a:t>
             </a:r>
             <a:endParaRPr lang="en-US" sz="1150" dirty="0"/>
           </a:p>
@@ -5807,340 +11827,42 @@
                 <a:ea typeface="Cambria" pitchFamily="34" charset="-122"/>
                 <a:cs typeface="Cambria" pitchFamily="34" charset="-120"/>
               </a:rPr>
-              <a:t>Two technologies for two different constraints</a:t>
+              <a:t>Five outputs carry the bulk of farm volume</a:t>
             </a:r>
             <a:endParaRPr lang="en-US" sz="3000" dirty="0"/>
           </a:p>
         </p:txBody>
       </p:sp>
-      <p:sp>
-        <p:nvSpPr>
-          <p:cNvPr id="4" name="Text 2"/>
-          <p:cNvSpPr txBox="1"/>
-          <p:nvPr/>
-        </p:nvSpPr>
-        <p:spPr>
-          <a:xfrm>
-            <a:off x="594360" y="1783080"/>
-            <a:ext cx="5227168" cy="411480"/>
-          </a:xfrm>
-          <a:prstGeom prst="rect">
-            <a:avLst/>
-          </a:prstGeom>
-          <a:noFill/>
-          <a:ln/>
-        </p:spPr>
-        <p:txBody>
-          <a:bodyPr wrap="square" lIns="0" tIns="0" rIns="0" bIns="0" rtlCol="0" anchor="ctr"/>
-          <a:lstStyle/>
-          <a:p>
-            <a:pPr algn="l" indent="0" marL="0">
-              <a:buNone/>
-            </a:pPr>
-            <a:r>
-              <a:rPr lang="en-US" sz="1600" b="1" dirty="0">
-                <a:solidFill>
-                  <a:srgbClr val="1D4E6B"/>
-                </a:solidFill>
-                <a:latin typeface="Cambria" pitchFamily="34" charset="0"/>
-                <a:ea typeface="Cambria" pitchFamily="34" charset="-122"/>
-                <a:cs typeface="Cambria" pitchFamily="34" charset="-120"/>
-              </a:rPr>
-              <a:t>EVERGREEN® — hold the water</a:t>
-            </a:r>
-            <a:endParaRPr lang="en-US" sz="1600" dirty="0"/>
-          </a:p>
-        </p:txBody>
-      </p:sp>
-      <p:sp>
-        <p:nvSpPr>
-          <p:cNvPr id="5" name="Text 3"/>
-          <p:cNvSpPr txBox="1"/>
-          <p:nvPr/>
-        </p:nvSpPr>
-        <p:spPr>
-          <a:xfrm>
-            <a:off x="594360" y="2286000"/>
-            <a:ext cx="5227168" cy="2468880"/>
-          </a:xfrm>
-          <a:prstGeom prst="rect">
-            <a:avLst/>
-          </a:prstGeom>
-          <a:noFill/>
-          <a:ln/>
-        </p:spPr>
-        <p:txBody>
-          <a:bodyPr wrap="square" lIns="0" tIns="0" rIns="0" bIns="0" rtlCol="0" anchor="t"/>
-          <a:lstStyle/>
-          <a:p>
-            <a:pPr algn="l" marL="342900" indent="-342900">
-              <a:lnSpc>
-                <a:spcPct val="122000"/>
-              </a:lnSpc>
-              <a:spcAft>
-                <a:spcPts val="1000"/>
-              </a:spcAft>
-              <a:buSzPct val="100000"/>
-              <a:buChar char="•"/>
-            </a:pPr>
-            <a:r>
-              <a:rPr lang="en-US" sz="1350" dirty="0">
-                <a:solidFill>
-                  <a:srgbClr val="2F3E47"/>
-                </a:solidFill>
-                <a:latin typeface="Calibri" pitchFamily="34" charset="0"/>
-                <a:ea typeface="Calibri" pitchFamily="34" charset="-122"/>
-                <a:cs typeface="Calibri" pitchFamily="34" charset="-120"/>
-              </a:rPr>
-              <a:t>Potassium-based hydro-retainer, placed in the root zone at planting or at the first pass of the season.</a:t>
-            </a:r>
-            <a:endParaRPr lang="en-US" sz="1350" dirty="0"/>
-          </a:p>
-          <a:p>
-            <a:pPr algn="l" marL="342900" indent="-342900">
-              <a:lnSpc>
-                <a:spcPct val="122000"/>
-              </a:lnSpc>
-              <a:spcAft>
-                <a:spcPts val="1000"/>
-              </a:spcAft>
-              <a:buSzPct val="100000"/>
-              <a:buChar char="•"/>
-            </a:pPr>
-            <a:r>
-              <a:rPr lang="en-US" sz="1350" dirty="0">
-                <a:solidFill>
-                  <a:srgbClr val="2F3E47"/>
-                </a:solidFill>
-                <a:latin typeface="Calibri" pitchFamily="34" charset="0"/>
-                <a:ea typeface="Calibri" pitchFamily="34" charset="-122"/>
-                <a:cs typeface="Calibri" pitchFamily="34" charset="-120"/>
-              </a:rPr>
-              <a:t>Captures rain and irrigation water, then releases it back to the plant as demand arises, removing water stress during the critical growth stages.</a:t>
-            </a:r>
-            <a:endParaRPr lang="en-US" sz="1350" dirty="0"/>
-          </a:p>
-          <a:p>
-            <a:pPr algn="l" marL="342900" indent="-342900">
-              <a:lnSpc>
-                <a:spcPct val="122000"/>
-              </a:lnSpc>
-              <a:spcAft>
-                <a:spcPts val="1000"/>
-              </a:spcAft>
-              <a:buSzPct val="100000"/>
-              <a:buChar char="•"/>
-            </a:pPr>
-            <a:r>
-              <a:rPr lang="en-US" sz="1350" dirty="0">
-                <a:solidFill>
-                  <a:srgbClr val="2F3E47"/>
-                </a:solidFill>
-                <a:latin typeface="Calibri" pitchFamily="34" charset="0"/>
-                <a:ea typeface="Calibri" pitchFamily="34" charset="-122"/>
-                <a:cs typeface="Calibri" pitchFamily="34" charset="-120"/>
-              </a:rPr>
-              <a:t>Absorbs on the order of 300 times its own weight; useful life of 3 to 4 years in the soil.</a:t>
-            </a:r>
-            <a:endParaRPr lang="en-US" sz="1350" dirty="0"/>
-          </a:p>
-          <a:p>
-            <a:pPr algn="l" marL="342900" indent="-342900">
-              <a:lnSpc>
-                <a:spcPct val="122000"/>
-              </a:lnSpc>
-              <a:spcAft>
-                <a:spcPts val="1000"/>
-              </a:spcAft>
-              <a:buSzPct val="100000"/>
-              <a:buChar char="•"/>
-            </a:pPr>
-            <a:r>
-              <a:rPr lang="en-US" sz="1350" dirty="0">
-                <a:solidFill>
-                  <a:srgbClr val="2F3E47"/>
-                </a:solidFill>
-                <a:latin typeface="Calibri" pitchFamily="34" charset="0"/>
-                <a:ea typeface="Calibri" pitchFamily="34" charset="-122"/>
-                <a:cs typeface="Calibri" pitchFamily="34" charset="-120"/>
-              </a:rPr>
-              <a:t>Degrades by 20 to 25% per year, with no accumulation and no risk of overdose.</a:t>
-            </a:r>
-            <a:endParaRPr lang="en-US" sz="1350" dirty="0"/>
-          </a:p>
-        </p:txBody>
-      </p:sp>
-      <p:sp>
-        <p:nvSpPr>
-          <p:cNvPr id="6" name="Text 4"/>
-          <p:cNvSpPr txBox="1"/>
-          <p:nvPr/>
-        </p:nvSpPr>
-        <p:spPr>
-          <a:xfrm>
-            <a:off x="6370168" y="1783080"/>
-            <a:ext cx="5227168" cy="411480"/>
-          </a:xfrm>
-          <a:prstGeom prst="rect">
-            <a:avLst/>
-          </a:prstGeom>
-          <a:noFill/>
-          <a:ln/>
-        </p:spPr>
-        <p:txBody>
-          <a:bodyPr wrap="square" lIns="0" tIns="0" rIns="0" bIns="0" rtlCol="0" anchor="ctr"/>
-          <a:lstStyle/>
-          <a:p>
-            <a:pPr algn="l" indent="0" marL="0">
-              <a:buNone/>
-            </a:pPr>
-            <a:r>
-              <a:rPr lang="en-US" sz="1600" b="1" dirty="0">
-                <a:solidFill>
-                  <a:srgbClr val="1D4E6B"/>
-                </a:solidFill>
-                <a:latin typeface="Cambria" pitchFamily="34" charset="0"/>
-                <a:ea typeface="Cambria" pitchFamily="34" charset="-122"/>
-                <a:cs typeface="Cambria" pitchFamily="34" charset="-120"/>
-              </a:rPr>
-              <a:t>ECOFERT® — feed without depleting</a:t>
-            </a:r>
-            <a:endParaRPr lang="en-US" sz="1600" dirty="0"/>
-          </a:p>
-        </p:txBody>
-      </p:sp>
-      <p:sp>
-        <p:nvSpPr>
-          <p:cNvPr id="7" name="Text 5"/>
-          <p:cNvSpPr txBox="1"/>
-          <p:nvPr/>
-        </p:nvSpPr>
-        <p:spPr>
-          <a:xfrm>
-            <a:off x="6370168" y="2286000"/>
-            <a:ext cx="5227168" cy="2468880"/>
-          </a:xfrm>
-          <a:prstGeom prst="rect">
-            <a:avLst/>
-          </a:prstGeom>
-          <a:noFill/>
-          <a:ln/>
-        </p:spPr>
-        <p:txBody>
-          <a:bodyPr wrap="square" lIns="0" tIns="0" rIns="0" bIns="0" rtlCol="0" anchor="t"/>
-          <a:lstStyle/>
-          <a:p>
-            <a:pPr algn="l" marL="342900" indent="-342900">
-              <a:lnSpc>
-                <a:spcPct val="122000"/>
-              </a:lnSpc>
-              <a:spcAft>
-                <a:spcPts val="1000"/>
-              </a:spcAft>
-              <a:buSzPct val="100000"/>
-              <a:buChar char="•"/>
-            </a:pPr>
-            <a:r>
-              <a:rPr lang="en-US" sz="1350" dirty="0">
-                <a:solidFill>
-                  <a:srgbClr val="2F3E47"/>
-                </a:solidFill>
-                <a:latin typeface="Calibri" pitchFamily="34" charset="0"/>
-                <a:ea typeface="Calibri" pitchFamily="34" charset="-122"/>
-                <a:cs typeface="Calibri" pitchFamily="34" charset="-120"/>
-              </a:rPr>
-              <a:t>Microdose fertilizer built on amino acids, nitrogen, phosphorus and potassium, sourced from renewable inputs.</a:t>
-            </a:r>
-            <a:endParaRPr lang="en-US" sz="1350" dirty="0"/>
-          </a:p>
-          <a:p>
-            <a:pPr algn="l" marL="342900" indent="-342900">
-              <a:lnSpc>
-                <a:spcPct val="122000"/>
-              </a:lnSpc>
-              <a:spcAft>
-                <a:spcPts val="1000"/>
-              </a:spcAft>
-              <a:buSzPct val="100000"/>
-              <a:buChar char="•"/>
-            </a:pPr>
-            <a:r>
-              <a:rPr lang="en-US" sz="1350" dirty="0">
-                <a:solidFill>
-                  <a:srgbClr val="2F3E47"/>
-                </a:solidFill>
-                <a:latin typeface="Calibri" pitchFamily="34" charset="0"/>
-                <a:ea typeface="Calibri" pitchFamily="34" charset="-122"/>
-                <a:cs typeface="Calibri" pitchFamily="34" charset="-120"/>
-              </a:rPr>
-              <a:t>Non-chelating: it does not strip the clay-humus complex and does not raise soil salinity or nitrate load.</a:t>
-            </a:r>
-            <a:endParaRPr lang="en-US" sz="1350" dirty="0"/>
-          </a:p>
-          <a:p>
-            <a:pPr algn="l" marL="342900" indent="-342900">
-              <a:lnSpc>
-                <a:spcPct val="122000"/>
-              </a:lnSpc>
-              <a:spcAft>
-                <a:spcPts val="1000"/>
-              </a:spcAft>
-              <a:buSzPct val="100000"/>
-              <a:buChar char="•"/>
-            </a:pPr>
-            <a:r>
-              <a:rPr lang="en-US" sz="1350" dirty="0">
-                <a:solidFill>
-                  <a:srgbClr val="2F3E47"/>
-                </a:solidFill>
-                <a:latin typeface="Calibri" pitchFamily="34" charset="0"/>
-                <a:ea typeface="Calibri" pitchFamily="34" charset="-122"/>
-                <a:cs typeface="Calibri" pitchFamily="34" charset="-120"/>
-              </a:rPr>
-              <a:t>SOHISCERT and EU Organic certified — the condition of entry to organic and export buyer programs.</a:t>
-            </a:r>
-            <a:endParaRPr lang="en-US" sz="1350" dirty="0"/>
-          </a:p>
-          <a:p>
-            <a:pPr algn="l" marL="342900" indent="-342900">
-              <a:lnSpc>
-                <a:spcPct val="122000"/>
-              </a:lnSpc>
-              <a:spcAft>
-                <a:spcPts val="1000"/>
-              </a:spcAft>
-              <a:buSzPct val="100000"/>
-              <a:buChar char="•"/>
-            </a:pPr>
-            <a:r>
-              <a:rPr lang="en-US" sz="1350" dirty="0">
-                <a:solidFill>
-                  <a:srgbClr val="2F3E47"/>
-                </a:solidFill>
-                <a:latin typeface="Calibri" pitchFamily="34" charset="0"/>
-                <a:ea typeface="Calibri" pitchFamily="34" charset="-122"/>
-                <a:cs typeface="Calibri" pitchFamily="34" charset="-120"/>
-              </a:rPr>
-              <a:t>1 to 4 bottles of 140 ml per hectare, compatible with existing fertigation equipment.</a:t>
-            </a:r>
-            <a:endParaRPr lang="en-US" sz="1350" dirty="0"/>
-          </a:p>
-        </p:txBody>
-      </p:sp>
-      <p:sp>
-        <p:nvSpPr>
-          <p:cNvPr id="8" name="Shape 6"/>
+      <p:graphicFrame>
+        <p:nvGraphicFramePr>
+          <p:cNvPr id="4" name="Chart 0" descr=""/>
+          <p:cNvGraphicFramePr/>
+          <p:nvPr/>
+        </p:nvGraphicFramePr>
+        <p:xfrm>
+          <a:off x="594360" y="1783080"/>
+          <a:ext cx="7360920" cy="3977640"/>
+        </p:xfrm>
+        <a:graphic xmlns:a="http://schemas.openxmlformats.org/drawingml/2006/main">
+          <a:graphicData uri="http://schemas.openxmlformats.org/drawingml/2006/chart">
+            <c:chart xmlns:c="http://schemas.openxmlformats.org/drawingml/2006/chart" r:id="rId1"/>
+          </a:graphicData>
+        </a:graphic>
+      </p:graphicFrame>
+      <p:sp>
+        <p:nvSpPr>
+          <p:cNvPr id="5" name="Shape 2"/>
           <p:cNvSpPr/>
           <p:nvPr/>
         </p:nvSpPr>
         <p:spPr>
           <a:xfrm>
-            <a:off x="594360" y="4846320"/>
-            <a:ext cx="11002975" cy="960120"/>
+            <a:off x="8275320" y="1783080"/>
+            <a:ext cx="3291840" cy="3977640"/>
           </a:xfrm>
           <a:prstGeom prst="roundRect">
             <a:avLst>
-              <a:gd name="adj" fmla="val 7619"/>
+              <a:gd name="adj" fmla="val 2778"/>
             </a:avLst>
           </a:prstGeom>
           <a:solidFill>
@@ -6156,14 +11878,53 @@
       </p:sp>
       <p:sp>
         <p:nvSpPr>
-          <p:cNvPr id="9" name="Text 7"/>
-          <p:cNvSpPr txBox="1"/>
-          <p:nvPr/>
-        </p:nvSpPr>
-        <p:spPr>
-          <a:xfrm>
-            <a:off x="822960" y="4983480"/>
-            <a:ext cx="10545775" cy="713232"/>
+          <p:cNvPr id="6" name="Text 3"/>
+          <p:cNvSpPr txBox="1"/>
+          <p:nvPr/>
+        </p:nvSpPr>
+        <p:spPr>
+          <a:xfrm>
+            <a:off x="8503920" y="2011680"/>
+            <a:ext cx="2834640" cy="457200"/>
+          </a:xfrm>
+          <a:prstGeom prst="rect">
+            <a:avLst/>
+          </a:prstGeom>
+          <a:noFill/>
+          <a:ln/>
+        </p:spPr>
+        <p:txBody>
+          <a:bodyPr wrap="square" lIns="0" tIns="0" rIns="0" bIns="0" rtlCol="0" anchor="ctr"/>
+          <a:lstStyle/>
+          <a:p>
+            <a:pPr algn="l" indent="0" marL="0">
+              <a:buNone/>
+            </a:pPr>
+            <a:r>
+              <a:rPr lang="en-US" sz="1300" b="1" dirty="0">
+                <a:solidFill>
+                  <a:srgbClr val="1D4E6B"/>
+                </a:solidFill>
+                <a:latin typeface="Cambria" pitchFamily="34" charset="0"/>
+                <a:ea typeface="Cambria" pitchFamily="34" charset="-122"/>
+                <a:cs typeface="Cambria" pitchFamily="34" charset="-120"/>
+              </a:rPr>
+              <a:t>Reading</a:t>
+            </a:r>
+            <a:endParaRPr lang="en-US" sz="1300" dirty="0"/>
+          </a:p>
+        </p:txBody>
+      </p:sp>
+      <p:sp>
+        <p:nvSpPr>
+          <p:cNvPr id="7" name="Text 4"/>
+          <p:cNvSpPr txBox="1"/>
+          <p:nvPr/>
+        </p:nvSpPr>
+        <p:spPr>
+          <a:xfrm>
+            <a:off x="8503920" y="2560320"/>
+            <a:ext cx="2834640" cy="3017520"/>
           </a:xfrm>
           <a:prstGeom prst="rect">
             <a:avLst/>
@@ -6177,28 +11938,57 @@
           <a:p>
             <a:pPr algn="l" indent="0" marL="0">
               <a:lnSpc>
-                <a:spcPct val="118000"/>
+                <a:spcPct val="125000"/>
               </a:lnSpc>
               <a:buNone/>
             </a:pPr>
             <a:r>
-              <a:rPr lang="en-US" sz="1100" dirty="0">
-                <a:solidFill>
-                  <a:srgbClr val="6B7D87"/>
-                </a:solidFill>
-                <a:latin typeface="Calibri" pitchFamily="34" charset="0"/>
-                <a:ea typeface="Calibri" pitchFamily="34" charset="-122"/>
-                <a:cs typeface="Calibri" pitchFamily="34" charset="-120"/>
-              </a:rPr>
-              <a:t>The two products are sold separately but were designed to reinforce one another: the hydro-retainer extends how long water stays available, the fertilizer converts that available water into growth without degrading the soil.</a:t>
-            </a:r>
-            <a:endParaRPr lang="en-US" sz="1100" dirty="0"/>
-          </a:p>
-        </p:txBody>
-      </p:sp>
-      <p:sp>
-        <p:nvSpPr>
-          <p:cNvPr id="10" name="Text 8"/>
+              <a:rPr lang="en-US" sz="1200" dirty="0">
+                <a:solidFill>
+                  <a:srgbClr val="2F3E47"/>
+                </a:solidFill>
+                <a:latin typeface="Calibri" pitchFamily="34" charset="0"/>
+                <a:ea typeface="Calibri" pitchFamily="34" charset="-122"/>
+                <a:cs typeface="Calibri" pitchFamily="34" charset="-120"/>
+              </a:rPr>
+              <a:t>Corn and soybeans carry the volume, largely rain-fed across the Midwest.</a:t>
+            </a:r>
+            <a:endParaRPr lang="en-US" sz="1200" dirty="0"/>
+          </a:p>
+          <a:p>
+            <a:pPr algn="l" indent="0" marL="0">
+              <a:lnSpc>
+                <a:spcPct val="125000"/>
+              </a:lnSpc>
+              <a:buNone/>
+            </a:pPr>
+            <a:endParaRPr lang="en-US" sz="1200" dirty="0"/>
+          </a:p>
+          <a:p>
+            <a:pPr algn="l" indent="0" marL="0">
+              <a:lnSpc>
+                <a:spcPct val="125000"/>
+              </a:lnSpc>
+              <a:buNone/>
+            </a:pPr>
+            <a:r>
+              <a:rPr lang="en-US" sz="1200" dirty="0">
+                <a:solidFill>
+                  <a:srgbClr val="2F3E47"/>
+                </a:solidFill>
+                <a:latin typeface="Calibri" pitchFamily="34" charset="0"/>
+                <a:ea typeface="Calibri" pitchFamily="34" charset="-122"/>
+                <a:cs typeface="Calibri" pitchFamily="34" charset="-120"/>
+              </a:rPr>
+              <a:t>Hay and forage are the single largest consumer of irrigation water in the West; alfalfa alone takes a significant share of Colorado River deliveries. Potatoes and specialty crops carry the highest value per acre.</a:t>
+            </a:r>
+            <a:endParaRPr lang="en-US" sz="1200" dirty="0"/>
+          </a:p>
+        </p:txBody>
+      </p:sp>
+      <p:sp>
+        <p:nvSpPr>
+          <p:cNvPr id="8" name="Text 5"/>
           <p:cNvSpPr txBox="1"/>
           <p:nvPr/>
         </p:nvSpPr>
@@ -6239,7 +12029,7 @@
       </p:sp>
       <p:sp>
         <p:nvSpPr>
-          <p:cNvPr id="11" name="Text 9"/>
+          <p:cNvPr id="9" name="Text 6"/>
           <p:cNvSpPr txBox="1"/>
           <p:nvPr/>
         </p:nvSpPr>
@@ -6343,7 +12133,7 @@
                 <a:ea typeface="Calibri" pitchFamily="34" charset="-122"/>
                 <a:cs typeface="Calibri" pitchFamily="34" charset="-120"/>
               </a:rPr>
-              <a:t>ORDERS OF MAGNITUDE</a:t>
+              <a:t>FIRST SECTOR</a:t>
             </a:r>
             <a:endParaRPr lang="en-US" sz="1150" dirty="0"/>
           </a:p>
@@ -6382,168 +12172,181 @@
                 <a:ea typeface="Cambria" pitchFamily="34" charset="-122"/>
                 <a:cs typeface="Cambria" pitchFamily="34" charset="-120"/>
               </a:rPr>
-              <a:t>Expected water savings by irrigation method</a:t>
+              <a:t>California specialty crops: every acre-foot is margin</a:t>
             </a:r>
             <a:endParaRPr lang="en-US" sz="3000" dirty="0"/>
           </a:p>
         </p:txBody>
       </p:sp>
-      <p:graphicFrame>
-        <p:nvGraphicFramePr>
-          <p:cNvPr id="4" name="Chart 0" descr=""/>
-          <p:cNvGraphicFramePr/>
-          <p:nvPr/>
-        </p:nvGraphicFramePr>
-        <p:xfrm>
-          <a:off x="594360" y="1783080"/>
-          <a:ext cx="7360920" cy="3977640"/>
-        </p:xfrm>
-        <a:graphic xmlns:a="http://schemas.openxmlformats.org/drawingml/2006/main">
-          <a:graphicData uri="http://schemas.openxmlformats.org/drawingml/2006/chart">
-            <c:chart xmlns:c="http://schemas.openxmlformats.org/drawingml/2006/chart" r:id="rId1"/>
-          </a:graphicData>
-        </a:graphic>
-      </p:graphicFrame>
-      <p:sp>
-        <p:nvSpPr>
-          <p:cNvPr id="5" name="Shape 2"/>
-          <p:cNvSpPr/>
-          <p:nvPr/>
-        </p:nvSpPr>
-        <p:spPr>
-          <a:xfrm>
-            <a:off x="8275320" y="1783080"/>
-            <a:ext cx="3291840" cy="3977640"/>
-          </a:xfrm>
-          <a:prstGeom prst="roundRect">
-            <a:avLst>
-              <a:gd name="adj" fmla="val 2778"/>
-            </a:avLst>
-          </a:prstGeom>
-          <a:solidFill>
-            <a:srgbClr val="EEF2F5"/>
-          </a:solidFill>
-          <a:ln w="9525">
-            <a:solidFill>
-              <a:srgbClr val="D8E1E7"/>
-            </a:solidFill>
-            <a:prstDash val="solid"/>
-          </a:ln>
-        </p:spPr>
+      <p:pic>
+        <p:nvPicPr>
+          <p:cNvPr id="4" name="Image 0" descr="preencoded.png">    </p:cNvPr>
+          <p:cNvPicPr>
+            <a:picLocks noChangeAspect="1"/>
+          </p:cNvPicPr>
+          <p:nvPr/>
+        </p:nvPicPr>
+        <p:blipFill>
+          <a:blip r:embed="rId1"/>
+          <a:stretch>
+            <a:fillRect/>
+          </a:stretch>
+        </p:blipFill>
+        <p:spPr>
+          <a:xfrm>
+            <a:off x="6522415" y="1783080"/>
+            <a:ext cx="5074920" cy="3794760"/>
+          </a:xfrm>
+          <a:prstGeom prst="rect">
+            <a:avLst/>
+          </a:prstGeom>
+        </p:spPr>
+      </p:pic>
+      <p:sp>
+        <p:nvSpPr>
+          <p:cNvPr id="5" name="Text 2"/>
+          <p:cNvSpPr txBox="1"/>
+          <p:nvPr/>
+        </p:nvSpPr>
+        <p:spPr>
+          <a:xfrm>
+            <a:off x="594360" y="1783080"/>
+            <a:ext cx="5379415" cy="4251960"/>
+          </a:xfrm>
+          <a:prstGeom prst="rect">
+            <a:avLst/>
+          </a:prstGeom>
+          <a:noFill/>
+          <a:ln/>
+        </p:spPr>
+        <p:txBody>
+          <a:bodyPr wrap="square" lIns="0" tIns="0" rIns="0" bIns="0" rtlCol="0" anchor="t"/>
+          <a:lstStyle/>
+          <a:p>
+            <a:pPr algn="l" marL="342900" indent="-342900">
+              <a:lnSpc>
+                <a:spcPct val="122000"/>
+              </a:lnSpc>
+              <a:spcAft>
+                <a:spcPts val="1100"/>
+              </a:spcAft>
+              <a:buSzPct val="100000"/>
+              <a:buChar char="•"/>
+            </a:pPr>
+            <a:r>
+              <a:rPr lang="en-US" sz="1400" dirty="0">
+                <a:solidFill>
+                  <a:srgbClr val="2F3E47"/>
+                </a:solidFill>
+                <a:latin typeface="Calibri" pitchFamily="34" charset="0"/>
+                <a:ea typeface="Calibri" pitchFamily="34" charset="-122"/>
+                <a:cs typeface="Calibri" pitchFamily="34" charset="-120"/>
+              </a:rPr>
+              <a:t>California grows most U.S. almonds, pistachios, table grapes, strawberries and processing tomatoes, all under irrigation.</a:t>
+            </a:r>
+            <a:endParaRPr lang="en-US" sz="1400" dirty="0"/>
+          </a:p>
+          <a:p>
+            <a:pPr algn="l" marL="342900" indent="-342900">
+              <a:lnSpc>
+                <a:spcPct val="122000"/>
+              </a:lnSpc>
+              <a:spcAft>
+                <a:spcPts val="1100"/>
+              </a:spcAft>
+              <a:buSzPct val="100000"/>
+              <a:buChar char="•"/>
+            </a:pPr>
+            <a:r>
+              <a:rPr lang="en-US" sz="1400" dirty="0">
+                <a:solidFill>
+                  <a:srgbClr val="2F3E47"/>
+                </a:solidFill>
+                <a:latin typeface="Calibri" pitchFamily="34" charset="0"/>
+                <a:ea typeface="Calibri" pitchFamily="34" charset="-122"/>
+                <a:cs typeface="Calibri" pitchFamily="34" charset="-120"/>
+              </a:rPr>
+              <a:t>In drought years surface-water allocations have fallen close to zero, pushing growers onto groundwater.</a:t>
+            </a:r>
+            <a:endParaRPr lang="en-US" sz="1400" dirty="0"/>
+          </a:p>
+          <a:p>
+            <a:pPr algn="l" marL="342900" indent="-342900">
+              <a:lnSpc>
+                <a:spcPct val="122000"/>
+              </a:lnSpc>
+              <a:spcAft>
+                <a:spcPts val="1100"/>
+              </a:spcAft>
+              <a:buSzPct val="100000"/>
+              <a:buChar char="•"/>
+            </a:pPr>
+            <a:r>
+              <a:rPr lang="en-US" sz="1400" dirty="0">
+                <a:solidFill>
+                  <a:srgbClr val="2F3E47"/>
+                </a:solidFill>
+                <a:latin typeface="Calibri" pitchFamily="34" charset="0"/>
+                <a:ea typeface="Calibri" pitchFamily="34" charset="-122"/>
+                <a:cs typeface="Calibri" pitchFamily="34" charset="-120"/>
+              </a:rPr>
+              <a:t>SGMA requires groundwater basins to reach sustainable pumping by the early 2040s: less water per acre, or fewer acres.</a:t>
+            </a:r>
+            <a:endParaRPr lang="en-US" sz="1400" dirty="0"/>
+          </a:p>
+          <a:p>
+            <a:pPr algn="l" marL="342900" indent="-342900">
+              <a:lnSpc>
+                <a:spcPct val="122000"/>
+              </a:lnSpc>
+              <a:spcAft>
+                <a:spcPts val="1100"/>
+              </a:spcAft>
+              <a:buSzPct val="100000"/>
+              <a:buChar char="•"/>
+            </a:pPr>
+            <a:r>
+              <a:rPr lang="en-US" sz="1400" dirty="0">
+                <a:solidFill>
+                  <a:srgbClr val="2F3E47"/>
+                </a:solidFill>
+                <a:latin typeface="Calibri" pitchFamily="34" charset="0"/>
+                <a:ea typeface="Calibri" pitchFamily="34" charset="-122"/>
+                <a:cs typeface="Calibri" pitchFamily="34" charset="-120"/>
+              </a:rPr>
+              <a:t>Orchards cannot be rotated out in a dry year; keeping the root zone moist protects a multi-decade investment.</a:t>
+            </a:r>
+            <a:endParaRPr lang="en-US" sz="1400" dirty="0"/>
+          </a:p>
+          <a:p>
+            <a:pPr algn="l" marL="342900" indent="-342900">
+              <a:lnSpc>
+                <a:spcPct val="122000"/>
+              </a:lnSpc>
+              <a:spcAft>
+                <a:spcPts val="1100"/>
+              </a:spcAft>
+              <a:buSzPct val="100000"/>
+              <a:buChar char="•"/>
+            </a:pPr>
+            <a:r>
+              <a:rPr lang="en-US" sz="1400" dirty="0">
+                <a:solidFill>
+                  <a:srgbClr val="2F3E47"/>
+                </a:solidFill>
+                <a:latin typeface="Calibri" pitchFamily="34" charset="0"/>
+                <a:ea typeface="Calibri" pitchFamily="34" charset="-122"/>
+                <a:cs typeface="Calibri" pitchFamily="34" charset="-120"/>
+              </a:rPr>
+              <a:t>A water retainer placed at planting, or when an orchard is renewed, lengthens the interval between irrigations.</a:t>
+            </a:r>
+            <a:endParaRPr lang="en-US" sz="1400" dirty="0"/>
+          </a:p>
+        </p:txBody>
       </p:sp>
       <p:sp>
         <p:nvSpPr>
           <p:cNvPr id="6" name="Text 3"/>
-          <p:cNvSpPr txBox="1"/>
-          <p:nvPr/>
-        </p:nvSpPr>
-        <p:spPr>
-          <a:xfrm>
-            <a:off x="8503920" y="2011680"/>
-            <a:ext cx="2834640" cy="457200"/>
-          </a:xfrm>
-          <a:prstGeom prst="rect">
-            <a:avLst/>
-          </a:prstGeom>
-          <a:noFill/>
-          <a:ln/>
-        </p:spPr>
-        <p:txBody>
-          <a:bodyPr wrap="square" lIns="0" tIns="0" rIns="0" bIns="0" rtlCol="0" anchor="ctr"/>
-          <a:lstStyle/>
-          <a:p>
-            <a:pPr algn="l" indent="0" marL="0">
-              <a:buNone/>
-            </a:pPr>
-            <a:r>
-              <a:rPr lang="en-US" sz="1300" b="1" dirty="0">
-                <a:solidFill>
-                  <a:srgbClr val="1D4E6B"/>
-                </a:solidFill>
-                <a:latin typeface="Cambria" pitchFamily="34" charset="0"/>
-                <a:ea typeface="Cambria" pitchFamily="34" charset="-122"/>
-                <a:cs typeface="Cambria" pitchFamily="34" charset="-120"/>
-              </a:rPr>
-              <a:t>Read with care</a:t>
-            </a:r>
-            <a:endParaRPr lang="en-US" sz="1300" dirty="0"/>
-          </a:p>
-        </p:txBody>
-      </p:sp>
-      <p:sp>
-        <p:nvSpPr>
-          <p:cNvPr id="7" name="Text 4"/>
-          <p:cNvSpPr txBox="1"/>
-          <p:nvPr/>
-        </p:nvSpPr>
-        <p:spPr>
-          <a:xfrm>
-            <a:off x="8503920" y="2560320"/>
-            <a:ext cx="2834640" cy="3017520"/>
-          </a:xfrm>
-          <a:prstGeom prst="rect">
-            <a:avLst/>
-          </a:prstGeom>
-          <a:noFill/>
-          <a:ln/>
-        </p:spPr>
-        <p:txBody>
-          <a:bodyPr wrap="square" lIns="0" tIns="0" rIns="0" bIns="0" rtlCol="0" anchor="t"/>
-          <a:lstStyle/>
-          <a:p>
-            <a:pPr algn="l" indent="0" marL="0">
-              <a:lnSpc>
-                <a:spcPct val="125000"/>
-              </a:lnSpc>
-              <a:buNone/>
-            </a:pPr>
-            <a:r>
-              <a:rPr lang="en-US" sz="1200" dirty="0">
-                <a:solidFill>
-                  <a:srgbClr val="2F3E47"/>
-                </a:solidFill>
-                <a:latin typeface="Calibri" pitchFamily="34" charset="0"/>
-                <a:ea typeface="Calibri" pitchFamily="34" charset="-122"/>
-                <a:cs typeface="Calibri" pitchFamily="34" charset="-120"/>
-              </a:rPr>
-              <a:t>These ranges are indicative and rest on documented gains from our hydro-retainers.</a:t>
-            </a:r>
-            <a:endParaRPr lang="en-US" sz="1200" dirty="0"/>
-          </a:p>
-          <a:p>
-            <a:pPr algn="l" indent="0" marL="0">
-              <a:lnSpc>
-                <a:spcPct val="125000"/>
-              </a:lnSpc>
-              <a:buNone/>
-            </a:pPr>
-            <a:endParaRPr lang="en-US" sz="1200" dirty="0"/>
-          </a:p>
-          <a:p>
-            <a:pPr algn="l" indent="0" marL="0">
-              <a:lnSpc>
-                <a:spcPct val="125000"/>
-              </a:lnSpc>
-              <a:buNone/>
-            </a:pPr>
-            <a:r>
-              <a:rPr lang="en-US" sz="1200" dirty="0">
-                <a:solidFill>
-                  <a:srgbClr val="2F3E47"/>
-                </a:solidFill>
-                <a:latin typeface="Calibri" pitchFamily="34" charset="0"/>
-                <a:ea typeface="Calibri" pitchFamily="34" charset="-122"/>
-                <a:cs typeface="Calibri" pitchFamily="34" charset="-120"/>
-              </a:rPr>
-              <a:t>Actual results depend on the soil, the climate and the crop. The figures give an order of magnitude only: they are in no case a guaranteed, contractual or absolute value.</a:t>
-            </a:r>
-            <a:endParaRPr lang="en-US" sz="1200" dirty="0"/>
-          </a:p>
-        </p:txBody>
-      </p:sp>
-      <p:sp>
-        <p:nvSpPr>
-          <p:cNvPr id="8" name="Text 5"/>
           <p:cNvSpPr txBox="1"/>
           <p:nvPr/>
         </p:nvSpPr>
@@ -6584,7 +12387,7 @@
       </p:sp>
       <p:sp>
         <p:nvSpPr>
-          <p:cNvPr id="9" name="Text 6"/>
+          <p:cNvPr id="7" name="Text 4"/>
           <p:cNvSpPr txBox="1"/>
           <p:nvPr/>
         </p:nvSpPr>
@@ -6688,7 +12491,7 @@
                 <a:ea typeface="Calibri" pitchFamily="34" charset="-122"/>
                 <a:cs typeface="Calibri" pitchFamily="34" charset="-120"/>
               </a:rPr>
-              <a:t>THREE PRIORITY AREAS</a:t>
+              <a:t>SECOND SECTOR</a:t>
             </a:r>
             <a:endParaRPr lang="en-US" sz="1150" dirty="0"/>
           </a:p>
@@ -6727,42 +12530,15 @@
                 <a:ea typeface="Cambria" pitchFamily="34" charset="-122"/>
                 <a:cs typeface="Cambria" pitchFamily="34" charset="-120"/>
               </a:rPr>
-              <a:t>Where to run the first trials</a:t>
+              <a:t>High Plains corn above a shrinking Ogallala</a:t>
             </a:r>
             <a:endParaRPr lang="en-US" sz="3000" dirty="0"/>
           </a:p>
         </p:txBody>
-      </p:sp>
-      <p:sp>
-        <p:nvSpPr>
-          <p:cNvPr id="4" name="Shape 2"/>
-          <p:cNvSpPr/>
-          <p:nvPr/>
-        </p:nvSpPr>
-        <p:spPr>
-          <a:xfrm>
-            <a:off x="594360" y="1783080"/>
-            <a:ext cx="3472586" cy="4069080"/>
-          </a:xfrm>
-          <a:prstGeom prst="roundRect">
-            <a:avLst>
-              <a:gd name="adj" fmla="val 2633"/>
-            </a:avLst>
-          </a:prstGeom>
-          <a:solidFill>
-            <a:srgbClr val="EEF2F5"/>
-          </a:solidFill>
-          <a:ln w="9525">
-            <a:solidFill>
-              <a:srgbClr val="D8E1E7"/>
-            </a:solidFill>
-            <a:prstDash val="solid"/>
-          </a:ln>
-        </p:spPr>
       </p:sp>
       <p:pic>
         <p:nvPicPr>
-          <p:cNvPr id="5" name="Image 0" descr="preencoded.png">    </p:cNvPr>
+          <p:cNvPr id="4" name="Image 0" descr="preencoded.png">    </p:cNvPr>
           <p:cNvPicPr>
             <a:picLocks noChangeAspect="1"/>
           </p:cNvPicPr>
@@ -6777,7 +12553,7 @@
         <p:spPr>
           <a:xfrm>
             <a:off x="594360" y="1783080"/>
-            <a:ext cx="3472586" cy="1691640"/>
+            <a:ext cx="5074920" cy="3794760"/>
           </a:xfrm>
           <a:prstGeom prst="rect">
             <a:avLst/>
@@ -6786,92 +12562,14 @@
       </p:pic>
       <p:sp>
         <p:nvSpPr>
-          <p:cNvPr id="6" name="Text 3"/>
-          <p:cNvSpPr txBox="1"/>
-          <p:nvPr/>
-        </p:nvSpPr>
-        <p:spPr>
-          <a:xfrm>
-            <a:off x="795528" y="3639312"/>
-            <a:ext cx="3070250" cy="384048"/>
-          </a:xfrm>
-          <a:prstGeom prst="rect">
-            <a:avLst/>
-          </a:prstGeom>
-          <a:noFill/>
-          <a:ln/>
-        </p:spPr>
-        <p:txBody>
-          <a:bodyPr wrap="square" lIns="0" tIns="0" rIns="0" bIns="0" rtlCol="0" anchor="ctr"/>
-          <a:lstStyle/>
-          <a:p>
-            <a:pPr algn="l" indent="0" marL="0">
-              <a:buNone/>
-            </a:pPr>
-            <a:r>
-              <a:rPr lang="en-US" sz="1500" b="1" dirty="0">
-                <a:solidFill>
-                  <a:srgbClr val="1D4E6B"/>
-                </a:solidFill>
-                <a:latin typeface="Cambria" pitchFamily="34" charset="0"/>
-                <a:ea typeface="Cambria" pitchFamily="34" charset="-122"/>
-                <a:cs typeface="Cambria" pitchFamily="34" charset="-120"/>
-              </a:rPr>
-              <a:t>Central Valley, CA</a:t>
-            </a:r>
-            <a:endParaRPr lang="en-US" sz="1500" dirty="0"/>
-          </a:p>
-        </p:txBody>
-      </p:sp>
-      <p:sp>
-        <p:nvSpPr>
-          <p:cNvPr id="7" name="Text 4"/>
-          <p:cNvSpPr txBox="1"/>
-          <p:nvPr/>
-        </p:nvSpPr>
-        <p:spPr>
-          <a:xfrm>
-            <a:off x="795528" y="4041648"/>
-            <a:ext cx="3070250" cy="329184"/>
-          </a:xfrm>
-          <a:prstGeom prst="rect">
-            <a:avLst/>
-          </a:prstGeom>
-          <a:noFill/>
-          <a:ln/>
-        </p:spPr>
-        <p:txBody>
-          <a:bodyPr wrap="square" lIns="0" tIns="0" rIns="0" bIns="0" rtlCol="0" anchor="ctr"/>
-          <a:lstStyle/>
-          <a:p>
-            <a:pPr algn="l" indent="0" marL="0">
-              <a:buNone/>
-            </a:pPr>
-            <a:r>
-              <a:rPr lang="en-US" sz="1250" b="1" dirty="0">
-                <a:solidFill>
-                  <a:srgbClr val="9A5F12"/>
-                </a:solidFill>
-                <a:latin typeface="Calibri" pitchFamily="34" charset="0"/>
-                <a:ea typeface="Calibri" pitchFamily="34" charset="-122"/>
-                <a:cs typeface="Calibri" pitchFamily="34" charset="-120"/>
-              </a:rPr>
-              <a:t>≈ 5M irrigated acres</a:t>
-            </a:r>
-            <a:endParaRPr lang="en-US" sz="1250" dirty="0"/>
-          </a:p>
-        </p:txBody>
-      </p:sp>
-      <p:sp>
-        <p:nvSpPr>
-          <p:cNvPr id="8" name="Text 5"/>
-          <p:cNvSpPr txBox="1"/>
-          <p:nvPr/>
-        </p:nvSpPr>
-        <p:spPr>
-          <a:xfrm>
-            <a:off x="795528" y="4407408"/>
-            <a:ext cx="3070250" cy="1280160"/>
+          <p:cNvPr id="5" name="Text 2"/>
+          <p:cNvSpPr txBox="1"/>
+          <p:nvPr/>
+        </p:nvSpPr>
+        <p:spPr>
+          <a:xfrm>
+            <a:off x="6217920" y="1783080"/>
+            <a:ext cx="5379415" cy="4251960"/>
           </a:xfrm>
           <a:prstGeom prst="rect">
             <a:avLst/>
@@ -6885,16 +12583,16 @@
           <a:p>
             <a:pPr algn="l" marL="342900" indent="-342900">
               <a:lnSpc>
-                <a:spcPct val="116000"/>
+                <a:spcPct val="122000"/>
               </a:lnSpc>
               <a:spcAft>
-                <a:spcPts val="700"/>
+                <a:spcPts val="1100"/>
               </a:spcAft>
               <a:buSzPct val="100000"/>
               <a:buChar char="•"/>
             </a:pPr>
             <a:r>
-              <a:rPr lang="en-US" sz="1150" dirty="0">
+              <a:rPr lang="en-US" sz="1400" dirty="0">
                 <a:solidFill>
                   <a:srgbClr val="2F3E47"/>
                 </a:solidFill>
@@ -6902,23 +12600,23 @@
                 <a:ea typeface="Calibri" pitchFamily="34" charset="-122"/>
                 <a:cs typeface="Calibri" pitchFamily="34" charset="-120"/>
               </a:rPr>
-              <a:t>More than 250 crops on one valley floor — almonds, pistachios, grapes, processing tomatoes. Permanent plantings cannot simply be fallowed in a dry year.</a:t>
-            </a:r>
-            <a:endParaRPr lang="en-US" sz="1150" dirty="0"/>
+              <a:t>The Ogallala aquifer underlies parts of eight states and carries much of the irrigated corn, sorghum and cotton of the High Plains.</a:t>
+            </a:r>
+            <a:endParaRPr lang="en-US" sz="1400" dirty="0"/>
           </a:p>
           <a:p>
             <a:pPr algn="l" marL="342900" indent="-342900">
               <a:lnSpc>
-                <a:spcPct val="116000"/>
+                <a:spcPct val="122000"/>
               </a:lnSpc>
               <a:spcAft>
-                <a:spcPts val="700"/>
+                <a:spcPts val="1100"/>
               </a:spcAft>
               <a:buSzPct val="100000"/>
               <a:buChar char="•"/>
             </a:pPr>
             <a:r>
-              <a:rPr lang="en-US" sz="1150" dirty="0">
+              <a:rPr lang="en-US" sz="1400" dirty="0">
                 <a:solidFill>
                   <a:srgbClr val="2F3E47"/>
                 </a:solidFill>
@@ -6926,23 +12624,23 @@
                 <a:ea typeface="Calibri" pitchFamily="34" charset="-122"/>
                 <a:cs typeface="Calibri" pitchFamily="34" charset="-120"/>
               </a:rPr>
-              <a:t>State groundwater plans tighten pumping allowances through 2040: growers need savings per acre, not new supply.</a:t>
-            </a:r>
-            <a:endParaRPr lang="en-US" sz="1150" dirty="0"/>
+              <a:t>In southwest Kansas and the Texas Panhandle, some wells no longer yield enough for full irrigation.</a:t>
+            </a:r>
+            <a:endParaRPr lang="en-US" sz="1400" dirty="0"/>
           </a:p>
           <a:p>
             <a:pPr algn="l" marL="342900" indent="-342900">
               <a:lnSpc>
-                <a:spcPct val="116000"/>
+                <a:spcPct val="122000"/>
               </a:lnSpc>
               <a:spcAft>
-                <a:spcPts val="700"/>
+                <a:spcPts val="1100"/>
               </a:spcAft>
               <a:buSzPct val="100000"/>
               <a:buChar char="•"/>
             </a:pPr>
             <a:r>
-              <a:rPr lang="en-US" sz="1150" dirty="0">
+              <a:rPr lang="en-US" sz="1400" dirty="0">
                 <a:solidFill>
                   <a:srgbClr val="2F3E47"/>
                 </a:solidFill>
@@ -6950,174 +12648,23 @@
                 <a:ea typeface="Calibri" pitchFamily="34" charset="-122"/>
                 <a:cs typeface="Calibri" pitchFamily="34" charset="-120"/>
               </a:rPr>
-              <a:t>Drip and micro-sprinkler are already standard, so the remaining gain has to come from the soil itself.</a:t>
-            </a:r>
-            <a:endParaRPr lang="en-US" sz="1150" dirty="0"/>
-          </a:p>
-        </p:txBody>
-      </p:sp>
-      <p:sp>
-        <p:nvSpPr>
-          <p:cNvPr id="9" name="Shape 6"/>
-          <p:cNvSpPr/>
-          <p:nvPr/>
-        </p:nvSpPr>
-        <p:spPr>
-          <a:xfrm>
-            <a:off x="4359554" y="1783080"/>
-            <a:ext cx="3472586" cy="4069080"/>
-          </a:xfrm>
-          <a:prstGeom prst="roundRect">
-            <a:avLst>
-              <a:gd name="adj" fmla="val 2633"/>
-            </a:avLst>
-          </a:prstGeom>
-          <a:solidFill>
-            <a:srgbClr val="EEF2F5"/>
-          </a:solidFill>
-          <a:ln w="9525">
-            <a:solidFill>
-              <a:srgbClr val="D8E1E7"/>
-            </a:solidFill>
-            <a:prstDash val="solid"/>
-          </a:ln>
-        </p:spPr>
-      </p:sp>
-      <p:pic>
-        <p:nvPicPr>
-          <p:cNvPr id="10" name="Image 1" descr="preencoded.png">    </p:cNvPr>
-          <p:cNvPicPr>
-            <a:picLocks noChangeAspect="1"/>
-          </p:cNvPicPr>
-          <p:nvPr/>
-        </p:nvPicPr>
-        <p:blipFill>
-          <a:blip r:embed="rId2"/>
-          <a:stretch>
-            <a:fillRect/>
-          </a:stretch>
-        </p:blipFill>
-        <p:spPr>
-          <a:xfrm>
-            <a:off x="4359554" y="1783080"/>
-            <a:ext cx="3472586" cy="1691640"/>
-          </a:xfrm>
-          <a:prstGeom prst="rect">
-            <a:avLst/>
-          </a:prstGeom>
-        </p:spPr>
-      </p:pic>
-      <p:sp>
-        <p:nvSpPr>
-          <p:cNvPr id="11" name="Text 7"/>
-          <p:cNvSpPr txBox="1"/>
-          <p:nvPr/>
-        </p:nvSpPr>
-        <p:spPr>
-          <a:xfrm>
-            <a:off x="4560722" y="3639312"/>
-            <a:ext cx="3070250" cy="384048"/>
-          </a:xfrm>
-          <a:prstGeom prst="rect">
-            <a:avLst/>
-          </a:prstGeom>
-          <a:noFill/>
-          <a:ln/>
-        </p:spPr>
-        <p:txBody>
-          <a:bodyPr wrap="square" lIns="0" tIns="0" rIns="0" bIns="0" rtlCol="0" anchor="ctr"/>
-          <a:lstStyle/>
-          <a:p>
-            <a:pPr algn="l" indent="0" marL="0">
-              <a:buNone/>
-            </a:pPr>
-            <a:r>
-              <a:rPr lang="en-US" sz="1500" b="1" dirty="0">
-                <a:solidFill>
-                  <a:srgbClr val="1D4E6B"/>
-                </a:solidFill>
-                <a:latin typeface="Cambria" pitchFamily="34" charset="0"/>
-                <a:ea typeface="Cambria" pitchFamily="34" charset="-122"/>
-                <a:cs typeface="Cambria" pitchFamily="34" charset="-120"/>
-              </a:rPr>
-              <a:t>High Plains</a:t>
-            </a:r>
-            <a:endParaRPr lang="en-US" sz="1500" dirty="0"/>
-          </a:p>
-        </p:txBody>
-      </p:sp>
-      <p:sp>
-        <p:nvSpPr>
-          <p:cNvPr id="12" name="Text 8"/>
-          <p:cNvSpPr txBox="1"/>
-          <p:nvPr/>
-        </p:nvSpPr>
-        <p:spPr>
-          <a:xfrm>
-            <a:off x="4560722" y="4041648"/>
-            <a:ext cx="3070250" cy="329184"/>
-          </a:xfrm>
-          <a:prstGeom prst="rect">
-            <a:avLst/>
-          </a:prstGeom>
-          <a:noFill/>
-          <a:ln/>
-        </p:spPr>
-        <p:txBody>
-          <a:bodyPr wrap="square" lIns="0" tIns="0" rIns="0" bIns="0" rtlCol="0" anchor="ctr"/>
-          <a:lstStyle/>
-          <a:p>
-            <a:pPr algn="l" indent="0" marL="0">
-              <a:buNone/>
-            </a:pPr>
-            <a:r>
-              <a:rPr lang="en-US" sz="1250" b="1" dirty="0">
-                <a:solidFill>
-                  <a:srgbClr val="9A5F12"/>
-                </a:solidFill>
-                <a:latin typeface="Calibri" pitchFamily="34" charset="0"/>
-                <a:ea typeface="Calibri" pitchFamily="34" charset="-122"/>
-                <a:cs typeface="Calibri" pitchFamily="34" charset="-120"/>
-              </a:rPr>
-              <a:t>≈ 12M irrigated acres</a:t>
-            </a:r>
-            <a:endParaRPr lang="en-US" sz="1250" dirty="0"/>
-          </a:p>
-        </p:txBody>
-      </p:sp>
-      <p:sp>
-        <p:nvSpPr>
-          <p:cNvPr id="13" name="Text 9"/>
-          <p:cNvSpPr txBox="1"/>
-          <p:nvPr/>
-        </p:nvSpPr>
-        <p:spPr>
-          <a:xfrm>
-            <a:off x="4560722" y="4407408"/>
-            <a:ext cx="3070250" cy="1280160"/>
-          </a:xfrm>
-          <a:prstGeom prst="rect">
-            <a:avLst/>
-          </a:prstGeom>
-          <a:noFill/>
-          <a:ln/>
-        </p:spPr>
-        <p:txBody>
-          <a:bodyPr wrap="square" lIns="0" tIns="0" rIns="0" bIns="0" rtlCol="0" anchor="t"/>
-          <a:lstStyle/>
+              <a:t>Local districts now set pumping limits, and growers are shifting to fewer pivot acres or limited irrigation.</a:t>
+            </a:r>
+            <a:endParaRPr lang="en-US" sz="1400" dirty="0"/>
+          </a:p>
           <a:p>
             <a:pPr algn="l" marL="342900" indent="-342900">
               <a:lnSpc>
-                <a:spcPct val="116000"/>
+                <a:spcPct val="122000"/>
               </a:lnSpc>
               <a:spcAft>
-                <a:spcPts val="700"/>
+                <a:spcPts val="1100"/>
               </a:spcAft>
               <a:buSzPct val="100000"/>
               <a:buChar char="•"/>
             </a:pPr>
             <a:r>
-              <a:rPr lang="en-US" sz="1150" dirty="0">
+              <a:rPr lang="en-US" sz="1400" dirty="0">
                 <a:solidFill>
                   <a:srgbClr val="2F3E47"/>
                 </a:solidFill>
@@ -7125,23 +12672,23 @@
                 <a:ea typeface="Calibri" pitchFamily="34" charset="-122"/>
                 <a:cs typeface="Calibri" pitchFamily="34" charset="-120"/>
               </a:rPr>
-              <a:t>Corn, sorghum, cotton and alfalfa across Nebraska, Kansas, Colorado and the Texas Panhandle, almost entirely on center pivot.</a:t>
-            </a:r>
-            <a:endParaRPr lang="en-US" sz="1150" dirty="0"/>
+              <a:t>For grain crops we claim no yield gain without a field trial: the case rests on the water saved per acre.</a:t>
+            </a:r>
+            <a:endParaRPr lang="en-US" sz="1400" dirty="0"/>
           </a:p>
           <a:p>
             <a:pPr algn="l" marL="342900" indent="-342900">
               <a:lnSpc>
-                <a:spcPct val="116000"/>
+                <a:spcPct val="122000"/>
               </a:lnSpc>
               <a:spcAft>
-                <a:spcPts val="700"/>
+                <a:spcPts val="1100"/>
               </a:spcAft>
               <a:buSzPct val="100000"/>
               <a:buChar char="•"/>
             </a:pPr>
             <a:r>
-              <a:rPr lang="en-US" sz="1150" dirty="0">
+              <a:rPr lang="en-US" sz="1400" dirty="0">
                 <a:solidFill>
                   <a:srgbClr val="2F3E47"/>
                 </a:solidFill>
@@ -7149,262 +12696,15 @@
                 <a:ea typeface="Calibri" pitchFamily="34" charset="-122"/>
                 <a:cs typeface="Calibri" pitchFamily="34" charset="-120"/>
               </a:rPr>
-              <a:t>Aquifer levels have declined for decades; well yields fall and pumping lift rises, pushing up energy cost per acre-inch applied.</a:t>
-            </a:r>
-            <a:endParaRPr lang="en-US" sz="1150" dirty="0"/>
-          </a:p>
-          <a:p>
-            <a:pPr algn="l" marL="342900" indent="-342900">
-              <a:lnSpc>
-                <a:spcPct val="116000"/>
-              </a:lnSpc>
-              <a:spcAft>
-                <a:spcPts val="700"/>
-              </a:spcAft>
-              <a:buSzPct val="100000"/>
-              <a:buChar char="•"/>
-            </a:pPr>
-            <a:r>
-              <a:rPr lang="en-US" sz="1150" dirty="0">
-                <a:solidFill>
-                  <a:srgbClr val="2F3E47"/>
-                </a:solidFill>
-                <a:latin typeface="Calibri" pitchFamily="34" charset="0"/>
-                <a:ea typeface="Calibri" pitchFamily="34" charset="-122"/>
-                <a:cs typeface="Calibri" pitchFamily="34" charset="-120"/>
-              </a:rPr>
-              <a:t>Sandy and sandy-loam soils hold little water — retention in the root zone has a direct, measurable effect.</a:t>
-            </a:r>
-            <a:endParaRPr lang="en-US" sz="1150" dirty="0"/>
-          </a:p>
-        </p:txBody>
-      </p:sp>
-      <p:sp>
-        <p:nvSpPr>
-          <p:cNvPr id="14" name="Shape 10"/>
-          <p:cNvSpPr/>
-          <p:nvPr/>
-        </p:nvSpPr>
-        <p:spPr>
-          <a:xfrm>
-            <a:off x="8124749" y="1783080"/>
-            <a:ext cx="3472586" cy="4069080"/>
-          </a:xfrm>
-          <a:prstGeom prst="roundRect">
-            <a:avLst>
-              <a:gd name="adj" fmla="val 2633"/>
-            </a:avLst>
-          </a:prstGeom>
-          <a:solidFill>
-            <a:srgbClr val="EEF2F5"/>
-          </a:solidFill>
-          <a:ln w="9525">
-            <a:solidFill>
-              <a:srgbClr val="D8E1E7"/>
-            </a:solidFill>
-            <a:prstDash val="solid"/>
-          </a:ln>
-        </p:spPr>
-      </p:sp>
-      <p:pic>
-        <p:nvPicPr>
-          <p:cNvPr id="15" name="Image 2" descr="preencoded.png">    </p:cNvPr>
-          <p:cNvPicPr>
-            <a:picLocks noChangeAspect="1"/>
-          </p:cNvPicPr>
-          <p:nvPr/>
-        </p:nvPicPr>
-        <p:blipFill>
-          <a:blip r:embed="rId3"/>
-          <a:stretch>
-            <a:fillRect/>
-          </a:stretch>
-        </p:blipFill>
-        <p:spPr>
-          <a:xfrm>
-            <a:off x="8124749" y="1783080"/>
-            <a:ext cx="3472586" cy="1691640"/>
-          </a:xfrm>
-          <a:prstGeom prst="rect">
-            <a:avLst/>
-          </a:prstGeom>
-        </p:spPr>
-      </p:pic>
-      <p:sp>
-        <p:nvSpPr>
-          <p:cNvPr id="16" name="Text 11"/>
-          <p:cNvSpPr txBox="1"/>
-          <p:nvPr/>
-        </p:nvSpPr>
-        <p:spPr>
-          <a:xfrm>
-            <a:off x="8325917" y="3639312"/>
-            <a:ext cx="3070250" cy="384048"/>
-          </a:xfrm>
-          <a:prstGeom prst="rect">
-            <a:avLst/>
-          </a:prstGeom>
-          <a:noFill/>
-          <a:ln/>
-        </p:spPr>
-        <p:txBody>
-          <a:bodyPr wrap="square" lIns="0" tIns="0" rIns="0" bIns="0" rtlCol="0" anchor="ctr"/>
-          <a:lstStyle/>
-          <a:p>
-            <a:pPr algn="l" indent="0" marL="0">
-              <a:buNone/>
-            </a:pPr>
-            <a:r>
-              <a:rPr lang="en-US" sz="1500" b="1" dirty="0">
-                <a:solidFill>
-                  <a:srgbClr val="1D4E6B"/>
-                </a:solidFill>
-                <a:latin typeface="Cambria" pitchFamily="34" charset="0"/>
-                <a:ea typeface="Cambria" pitchFamily="34" charset="-122"/>
-                <a:cs typeface="Cambria" pitchFamily="34" charset="-120"/>
-              </a:rPr>
-              <a:t>Columbia Basin</a:t>
-            </a:r>
-            <a:endParaRPr lang="en-US" sz="1500" dirty="0"/>
-          </a:p>
-        </p:txBody>
-      </p:sp>
-      <p:sp>
-        <p:nvSpPr>
-          <p:cNvPr id="17" name="Text 12"/>
-          <p:cNvSpPr txBox="1"/>
-          <p:nvPr/>
-        </p:nvSpPr>
-        <p:spPr>
-          <a:xfrm>
-            <a:off x="8325917" y="4041648"/>
-            <a:ext cx="3070250" cy="329184"/>
-          </a:xfrm>
-          <a:prstGeom prst="rect">
-            <a:avLst/>
-          </a:prstGeom>
-          <a:noFill/>
-          <a:ln/>
-        </p:spPr>
-        <p:txBody>
-          <a:bodyPr wrap="square" lIns="0" tIns="0" rIns="0" bIns="0" rtlCol="0" anchor="ctr"/>
-          <a:lstStyle/>
-          <a:p>
-            <a:pPr algn="l" indent="0" marL="0">
-              <a:buNone/>
-            </a:pPr>
-            <a:r>
-              <a:rPr lang="en-US" sz="1250" b="1" dirty="0">
-                <a:solidFill>
-                  <a:srgbClr val="9A5F12"/>
-                </a:solidFill>
-                <a:latin typeface="Calibri" pitchFamily="34" charset="0"/>
-                <a:ea typeface="Calibri" pitchFamily="34" charset="-122"/>
-                <a:cs typeface="Calibri" pitchFamily="34" charset="-120"/>
-              </a:rPr>
-              <a:t>≈ 700k irrigated acres</a:t>
-            </a:r>
-            <a:endParaRPr lang="en-US" sz="1250" dirty="0"/>
-          </a:p>
-        </p:txBody>
-      </p:sp>
-      <p:sp>
-        <p:nvSpPr>
-          <p:cNvPr id="18" name="Text 13"/>
-          <p:cNvSpPr txBox="1"/>
-          <p:nvPr/>
-        </p:nvSpPr>
-        <p:spPr>
-          <a:xfrm>
-            <a:off x="8325917" y="4407408"/>
-            <a:ext cx="3070250" cy="1280160"/>
-          </a:xfrm>
-          <a:prstGeom prst="rect">
-            <a:avLst/>
-          </a:prstGeom>
-          <a:noFill/>
-          <a:ln/>
-        </p:spPr>
-        <p:txBody>
-          <a:bodyPr wrap="square" lIns="0" tIns="0" rIns="0" bIns="0" rtlCol="0" anchor="t"/>
-          <a:lstStyle/>
-          <a:p>
-            <a:pPr algn="l" marL="342900" indent="-342900">
-              <a:lnSpc>
-                <a:spcPct val="116000"/>
-              </a:lnSpc>
-              <a:spcAft>
-                <a:spcPts val="700"/>
-              </a:spcAft>
-              <a:buSzPct val="100000"/>
-              <a:buChar char="•"/>
-            </a:pPr>
-            <a:r>
-              <a:rPr lang="en-US" sz="1150" dirty="0">
-                <a:solidFill>
-                  <a:srgbClr val="2F3E47"/>
-                </a:solidFill>
-                <a:latin typeface="Calibri" pitchFamily="34" charset="0"/>
-                <a:ea typeface="Calibri" pitchFamily="34" charset="-122"/>
-                <a:cs typeface="Calibri" pitchFamily="34" charset="-120"/>
-              </a:rPr>
-              <a:t>Potatoes, apples, hops, onions and wine grapes on sandy volcanic soils with very low water-holding capacity.</a:t>
-            </a:r>
-            <a:endParaRPr lang="en-US" sz="1150" dirty="0"/>
-          </a:p>
-          <a:p>
-            <a:pPr algn="l" marL="342900" indent="-342900">
-              <a:lnSpc>
-                <a:spcPct val="116000"/>
-              </a:lnSpc>
-              <a:spcAft>
-                <a:spcPts val="700"/>
-              </a:spcAft>
-              <a:buSzPct val="100000"/>
-              <a:buChar char="•"/>
-            </a:pPr>
-            <a:r>
-              <a:rPr lang="en-US" sz="1150" dirty="0">
-                <a:solidFill>
-                  <a:srgbClr val="2F3E47"/>
-                </a:solidFill>
-                <a:latin typeface="Calibri" pitchFamily="34" charset="0"/>
-                <a:ea typeface="Calibri" pitchFamily="34" charset="-122"/>
-                <a:cs typeface="Calibri" pitchFamily="34" charset="-120"/>
-              </a:rPr>
-              <a:t>Under 10 inches of rain a year: every acre depends on delivered water from the Columbia River system.</a:t>
-            </a:r>
-            <a:endParaRPr lang="en-US" sz="1150" dirty="0"/>
-          </a:p>
-          <a:p>
-            <a:pPr algn="l" marL="342900" indent="-342900">
-              <a:lnSpc>
-                <a:spcPct val="116000"/>
-              </a:lnSpc>
-              <a:spcAft>
-                <a:spcPts val="700"/>
-              </a:spcAft>
-              <a:buSzPct val="100000"/>
-              <a:buChar char="•"/>
-            </a:pPr>
-            <a:r>
-              <a:rPr lang="en-US" sz="1150" dirty="0">
-                <a:solidFill>
-                  <a:srgbClr val="2F3E47"/>
-                </a:solidFill>
-                <a:latin typeface="Calibri" pitchFamily="34" charset="0"/>
-                <a:ea typeface="Calibri" pitchFamily="34" charset="-122"/>
-                <a:cs typeface="Calibri" pitchFamily="34" charset="-120"/>
-              </a:rPr>
-              <a:t>High value per acre and strict packer quality specifications justify spending on per-acre inputs.</a:t>
-            </a:r>
-            <a:endParaRPr lang="en-US" sz="1150" dirty="0"/>
-          </a:p>
-        </p:txBody>
-      </p:sp>
-      <p:sp>
-        <p:nvSpPr>
-          <p:cNvPr id="19" name="Text 14"/>
+              <a:t>Trials pair a treated pivot sector with an untreated one, measured over a full season with soil-moisture probes.</a:t>
+            </a:r>
+            <a:endParaRPr lang="en-US" sz="1400" dirty="0"/>
+          </a:p>
+        </p:txBody>
+      </p:sp>
+      <p:sp>
+        <p:nvSpPr>
+          <p:cNvPr id="6" name="Text 3"/>
           <p:cNvSpPr txBox="1"/>
           <p:nvPr/>
         </p:nvSpPr>
@@ -7445,7 +12745,7 @@
       </p:sp>
       <p:sp>
         <p:nvSpPr>
-          <p:cNvPr id="20" name="Text 15"/>
+          <p:cNvPr id="7" name="Text 4"/>
           <p:cNvSpPr txBox="1"/>
           <p:nvPr/>
         </p:nvSpPr>
@@ -7549,7 +12849,7 @@
                 <a:ea typeface="Calibri" pitchFamily="34" charset="-122"/>
                 <a:cs typeface="Calibri" pitchFamily="34" charset="-120"/>
               </a:rPr>
-              <a:t>HOW WE PROCEED</a:t>
+              <a:t>Yield potential</a:t>
             </a:r>
             <a:endParaRPr lang="en-US" sz="1150" dirty="0"/>
           </a:p>
@@ -7588,26 +12888,42 @@
                 <a:ea typeface="Cambria" pitchFamily="34" charset="-122"/>
                 <a:cs typeface="Cambria" pitchFamily="34" charset="-120"/>
               </a:rPr>
-              <a:t>A staged rollout, measured at every step</a:t>
+              <a:t>Expected yield gain by crop</a:t>
             </a:r>
             <a:endParaRPr lang="en-US" sz="3000" dirty="0"/>
           </a:p>
         </p:txBody>
       </p:sp>
-      <p:sp>
-        <p:nvSpPr>
-          <p:cNvPr id="4" name="Shape 2"/>
+      <p:graphicFrame>
+        <p:nvGraphicFramePr>
+          <p:cNvPr id="4" name="Chart 0" descr=""/>
+          <p:cNvGraphicFramePr/>
+          <p:nvPr/>
+        </p:nvGraphicFramePr>
+        <p:xfrm>
+          <a:off x="594360" y="1783080"/>
+          <a:ext cx="7360920" cy="3977640"/>
+        </p:xfrm>
+        <a:graphic xmlns:a="http://schemas.openxmlformats.org/drawingml/2006/main">
+          <a:graphicData uri="http://schemas.openxmlformats.org/drawingml/2006/chart">
+            <c:chart xmlns:c="http://schemas.openxmlformats.org/drawingml/2006/chart" r:id="rId1"/>
+          </a:graphicData>
+        </a:graphic>
+      </p:graphicFrame>
+      <p:sp>
+        <p:nvSpPr>
+          <p:cNvPr id="5" name="Shape 2"/>
           <p:cNvSpPr/>
           <p:nvPr/>
         </p:nvSpPr>
         <p:spPr>
           <a:xfrm>
-            <a:off x="594360" y="1874520"/>
-            <a:ext cx="2545004" cy="2834640"/>
+            <a:off x="8275320" y="1783080"/>
+            <a:ext cx="3291840" cy="3977640"/>
           </a:xfrm>
           <a:prstGeom prst="roundRect">
             <a:avLst>
-              <a:gd name="adj" fmla="val 3593"/>
+              <a:gd name="adj" fmla="val 2778"/>
             </a:avLst>
           </a:prstGeom>
           <a:solidFill>
@@ -7623,34 +12939,14 @@
       </p:sp>
       <p:sp>
         <p:nvSpPr>
-          <p:cNvPr id="5" name="Shape 3"/>
-          <p:cNvSpPr/>
-          <p:nvPr/>
-        </p:nvSpPr>
-        <p:spPr>
-          <a:xfrm>
-            <a:off x="822960" y="2103120"/>
-            <a:ext cx="566928" cy="566928"/>
-          </a:xfrm>
-          <a:prstGeom prst="ellipse">
-            <a:avLst/>
-          </a:prstGeom>
-          <a:solidFill>
-            <a:srgbClr val="1D4E6B"/>
-          </a:solidFill>
-          <a:ln/>
-        </p:spPr>
-      </p:sp>
-      <p:sp>
-        <p:nvSpPr>
-          <p:cNvPr id="6" name="Text 4"/>
-          <p:cNvSpPr txBox="1"/>
-          <p:nvPr/>
-        </p:nvSpPr>
-        <p:spPr>
-          <a:xfrm>
-            <a:off x="822960" y="2103120"/>
-            <a:ext cx="566928" cy="566928"/>
+          <p:cNvPr id="6" name="Text 3"/>
+          <p:cNvSpPr txBox="1"/>
+          <p:nvPr/>
+        </p:nvSpPr>
+        <p:spPr>
+          <a:xfrm>
+            <a:off x="8503920" y="2011680"/>
+            <a:ext cx="2834640" cy="457200"/>
           </a:xfrm>
           <a:prstGeom prst="rect">
             <a:avLst/>
@@ -7662,616 +12958,34 @@
           <a:bodyPr wrap="square" lIns="0" tIns="0" rIns="0" bIns="0" rtlCol="0" anchor="ctr"/>
           <a:lstStyle/>
           <a:p>
-            <a:pPr algn="ctr" indent="0" marL="0">
-              <a:buNone/>
-            </a:pPr>
-            <a:r>
-              <a:rPr lang="en-US" sz="1600" b="1" dirty="0">
-                <a:solidFill>
-                  <a:srgbClr val="FFFFFF"/>
+            <a:pPr algn="l" indent="0" marL="0">
+              <a:buNone/>
+            </a:pPr>
+            <a:r>
+              <a:rPr lang="en-US" sz="1300" b="1" dirty="0">
+                <a:solidFill>
+                  <a:srgbClr val="1D4E6B"/>
                 </a:solidFill>
                 <a:latin typeface="Cambria" pitchFamily="34" charset="0"/>
                 <a:ea typeface="Cambria" pitchFamily="34" charset="-122"/>
                 <a:cs typeface="Cambria" pitchFamily="34" charset="-120"/>
               </a:rPr>
-              <a:t>1</a:t>
-            </a:r>
-            <a:endParaRPr lang="en-US" sz="1600" dirty="0"/>
-          </a:p>
-        </p:txBody>
-      </p:sp>
-      <p:sp>
-        <p:nvSpPr>
-          <p:cNvPr id="7" name="Text 5"/>
-          <p:cNvSpPr txBox="1"/>
-          <p:nvPr/>
-        </p:nvSpPr>
-        <p:spPr>
-          <a:xfrm>
-            <a:off x="822960" y="2788920"/>
-            <a:ext cx="2087804" cy="457200"/>
-          </a:xfrm>
-          <a:prstGeom prst="rect">
-            <a:avLst/>
-          </a:prstGeom>
-          <a:noFill/>
-          <a:ln/>
-        </p:spPr>
-        <p:txBody>
-          <a:bodyPr wrap="square" lIns="0" tIns="0" rIns="0" bIns="0" rtlCol="0" anchor="ctr"/>
-          <a:lstStyle/>
-          <a:p>
-            <a:pPr algn="l" indent="0" marL="0">
-              <a:buNone/>
-            </a:pPr>
-            <a:r>
-              <a:rPr lang="en-US" sz="1400" b="1" dirty="0">
-                <a:solidFill>
-                  <a:srgbClr val="1D4E6B"/>
-                </a:solidFill>
-                <a:latin typeface="Cambria" pitchFamily="34" charset="0"/>
-                <a:ea typeface="Cambria" pitchFamily="34" charset="-122"/>
-                <a:cs typeface="Cambria" pitchFamily="34" charset="-120"/>
-              </a:rPr>
-              <a:t>Assessment</a:t>
-            </a:r>
-            <a:endParaRPr lang="en-US" sz="1400" dirty="0"/>
-          </a:p>
-        </p:txBody>
-      </p:sp>
-      <p:sp>
-        <p:nvSpPr>
-          <p:cNvPr id="8" name="Text 6"/>
-          <p:cNvSpPr txBox="1"/>
-          <p:nvPr/>
-        </p:nvSpPr>
-        <p:spPr>
-          <a:xfrm>
-            <a:off x="822960" y="3291840"/>
-            <a:ext cx="2087804" cy="1234440"/>
-          </a:xfrm>
-          <a:prstGeom prst="rect">
-            <a:avLst/>
-          </a:prstGeom>
-          <a:noFill/>
-          <a:ln/>
-        </p:spPr>
-        <p:txBody>
-          <a:bodyPr wrap="square" lIns="0" tIns="0" rIns="0" bIns="0" rtlCol="0" anchor="t"/>
-          <a:lstStyle/>
-          <a:p>
-            <a:pPr algn="l" indent="0" marL="0">
-              <a:lnSpc>
-                <a:spcPct val="120000"/>
-              </a:lnSpc>
-              <a:buNone/>
-            </a:pPr>
-            <a:r>
-              <a:rPr lang="en-US" sz="1200" dirty="0">
-                <a:solidFill>
-                  <a:srgbClr val="2F3E47"/>
-                </a:solidFill>
-                <a:latin typeface="Calibri" pitchFamily="34" charset="0"/>
-                <a:ea typeface="Calibri" pitchFamily="34" charset="-122"/>
-                <a:cs typeface="Calibri" pitchFamily="34" charset="-120"/>
-              </a:rPr>
-              <a:t>Review of the soil, the irrigation method and the crop. No commitment at this stage.</a:t>
-            </a:r>
-            <a:endParaRPr lang="en-US" sz="1200" dirty="0"/>
-          </a:p>
-        </p:txBody>
-      </p:sp>
-      <p:sp>
-        <p:nvSpPr>
-          <p:cNvPr id="9" name="Shape 7"/>
-          <p:cNvSpPr/>
-          <p:nvPr/>
-        </p:nvSpPr>
-        <p:spPr>
-          <a:xfrm>
-            <a:off x="3413684" y="1874520"/>
-            <a:ext cx="2545004" cy="2834640"/>
-          </a:xfrm>
-          <a:prstGeom prst="roundRect">
-            <a:avLst>
-              <a:gd name="adj" fmla="val 3593"/>
-            </a:avLst>
-          </a:prstGeom>
-          <a:solidFill>
-            <a:srgbClr val="EEF2F5"/>
-          </a:solidFill>
-          <a:ln w="9525">
-            <a:solidFill>
-              <a:srgbClr val="D8E1E7"/>
-            </a:solidFill>
-            <a:prstDash val="solid"/>
-          </a:ln>
-        </p:spPr>
-      </p:sp>
-      <p:sp>
-        <p:nvSpPr>
-          <p:cNvPr id="10" name="Shape 8"/>
-          <p:cNvSpPr/>
-          <p:nvPr/>
-        </p:nvSpPr>
-        <p:spPr>
-          <a:xfrm>
-            <a:off x="3642284" y="2103120"/>
-            <a:ext cx="566928" cy="566928"/>
-          </a:xfrm>
-          <a:prstGeom prst="ellipse">
-            <a:avLst/>
-          </a:prstGeom>
-          <a:solidFill>
-            <a:srgbClr val="1D4E6B"/>
-          </a:solidFill>
-          <a:ln/>
-        </p:spPr>
-      </p:sp>
-      <p:sp>
-        <p:nvSpPr>
-          <p:cNvPr id="11" name="Text 9"/>
-          <p:cNvSpPr txBox="1"/>
-          <p:nvPr/>
-        </p:nvSpPr>
-        <p:spPr>
-          <a:xfrm>
-            <a:off x="3642284" y="2103120"/>
-            <a:ext cx="566928" cy="566928"/>
-          </a:xfrm>
-          <a:prstGeom prst="rect">
-            <a:avLst/>
-          </a:prstGeom>
-          <a:noFill/>
-          <a:ln/>
-        </p:spPr>
-        <p:txBody>
-          <a:bodyPr wrap="square" lIns="0" tIns="0" rIns="0" bIns="0" rtlCol="0" anchor="ctr"/>
-          <a:lstStyle/>
-          <a:p>
-            <a:pPr algn="ctr" indent="0" marL="0">
-              <a:buNone/>
-            </a:pPr>
-            <a:r>
-              <a:rPr lang="en-US" sz="1600" b="1" dirty="0">
-                <a:solidFill>
-                  <a:srgbClr val="FFFFFF"/>
-                </a:solidFill>
-                <a:latin typeface="Cambria" pitchFamily="34" charset="0"/>
-                <a:ea typeface="Cambria" pitchFamily="34" charset="-122"/>
-                <a:cs typeface="Cambria" pitchFamily="34" charset="-120"/>
-              </a:rPr>
-              <a:t>2</a:t>
-            </a:r>
-            <a:endParaRPr lang="en-US" sz="1600" dirty="0"/>
-          </a:p>
-        </p:txBody>
-      </p:sp>
-      <p:sp>
-        <p:nvSpPr>
-          <p:cNvPr id="12" name="Text 10"/>
-          <p:cNvSpPr txBox="1"/>
-          <p:nvPr/>
-        </p:nvSpPr>
-        <p:spPr>
-          <a:xfrm>
-            <a:off x="3642284" y="2788920"/>
-            <a:ext cx="2087804" cy="457200"/>
-          </a:xfrm>
-          <a:prstGeom prst="rect">
-            <a:avLst/>
-          </a:prstGeom>
-          <a:noFill/>
-          <a:ln/>
-        </p:spPr>
-        <p:txBody>
-          <a:bodyPr wrap="square" lIns="0" tIns="0" rIns="0" bIns="0" rtlCol="0" anchor="ctr"/>
-          <a:lstStyle/>
-          <a:p>
-            <a:pPr algn="l" indent="0" marL="0">
-              <a:buNone/>
-            </a:pPr>
-            <a:r>
-              <a:rPr lang="en-US" sz="1400" b="1" dirty="0">
-                <a:solidFill>
-                  <a:srgbClr val="1D4E6B"/>
-                </a:solidFill>
-                <a:latin typeface="Cambria" pitchFamily="34" charset="0"/>
-                <a:ea typeface="Cambria" pitchFamily="34" charset="-122"/>
-                <a:cs typeface="Cambria" pitchFamily="34" charset="-120"/>
-              </a:rPr>
-              <a:t>Trial block</a:t>
-            </a:r>
-            <a:endParaRPr lang="en-US" sz="1400" dirty="0"/>
-          </a:p>
-        </p:txBody>
-      </p:sp>
-      <p:sp>
-        <p:nvSpPr>
-          <p:cNvPr id="13" name="Text 11"/>
-          <p:cNvSpPr txBox="1"/>
-          <p:nvPr/>
-        </p:nvSpPr>
-        <p:spPr>
-          <a:xfrm>
-            <a:off x="3642284" y="3291840"/>
-            <a:ext cx="2087804" cy="1234440"/>
-          </a:xfrm>
-          <a:prstGeom prst="rect">
-            <a:avLst/>
-          </a:prstGeom>
-          <a:noFill/>
-          <a:ln/>
-        </p:spPr>
-        <p:txBody>
-          <a:bodyPr wrap="square" lIns="0" tIns="0" rIns="0" bIns="0" rtlCol="0" anchor="t"/>
-          <a:lstStyle/>
-          <a:p>
-            <a:pPr algn="l" indent="0" marL="0">
-              <a:lnSpc>
-                <a:spcPct val="120000"/>
-              </a:lnSpc>
-              <a:buNone/>
-            </a:pPr>
-            <a:r>
-              <a:rPr lang="en-US" sz="1200" dirty="0">
-                <a:solidFill>
-                  <a:srgbClr val="2F3E47"/>
-                </a:solidFill>
-                <a:latin typeface="Calibri" pitchFamily="34" charset="0"/>
-                <a:ea typeface="Calibri" pitchFamily="34" charset="-122"/>
-                <a:cs typeface="Calibri" pitchFamily="34" charset="-120"/>
-              </a:rPr>
-              <a:t>A comparative trial on one block, against a control block managed identically.</a:t>
-            </a:r>
-            <a:endParaRPr lang="en-US" sz="1200" dirty="0"/>
-          </a:p>
-        </p:txBody>
-      </p:sp>
-      <p:sp>
-        <p:nvSpPr>
-          <p:cNvPr id="14" name="Shape 12"/>
-          <p:cNvSpPr/>
-          <p:nvPr/>
-        </p:nvSpPr>
-        <p:spPr>
-          <a:xfrm>
-            <a:off x="6233008" y="1874520"/>
-            <a:ext cx="2545004" cy="2834640"/>
-          </a:xfrm>
-          <a:prstGeom prst="roundRect">
-            <a:avLst>
-              <a:gd name="adj" fmla="val 3593"/>
-            </a:avLst>
-          </a:prstGeom>
-          <a:solidFill>
-            <a:srgbClr val="EEF2F5"/>
-          </a:solidFill>
-          <a:ln w="9525">
-            <a:solidFill>
-              <a:srgbClr val="D8E1E7"/>
-            </a:solidFill>
-            <a:prstDash val="solid"/>
-          </a:ln>
-        </p:spPr>
-      </p:sp>
-      <p:sp>
-        <p:nvSpPr>
-          <p:cNvPr id="15" name="Shape 13"/>
-          <p:cNvSpPr/>
-          <p:nvPr/>
-        </p:nvSpPr>
-        <p:spPr>
-          <a:xfrm>
-            <a:off x="6461608" y="2103120"/>
-            <a:ext cx="566928" cy="566928"/>
-          </a:xfrm>
-          <a:prstGeom prst="ellipse">
-            <a:avLst/>
-          </a:prstGeom>
-          <a:solidFill>
-            <a:srgbClr val="1D4E6B"/>
-          </a:solidFill>
-          <a:ln/>
-        </p:spPr>
-      </p:sp>
-      <p:sp>
-        <p:nvSpPr>
-          <p:cNvPr id="16" name="Text 14"/>
-          <p:cNvSpPr txBox="1"/>
-          <p:nvPr/>
-        </p:nvSpPr>
-        <p:spPr>
-          <a:xfrm>
-            <a:off x="6461608" y="2103120"/>
-            <a:ext cx="566928" cy="566928"/>
-          </a:xfrm>
-          <a:prstGeom prst="rect">
-            <a:avLst/>
-          </a:prstGeom>
-          <a:noFill/>
-          <a:ln/>
-        </p:spPr>
-        <p:txBody>
-          <a:bodyPr wrap="square" lIns="0" tIns="0" rIns="0" bIns="0" rtlCol="0" anchor="ctr"/>
-          <a:lstStyle/>
-          <a:p>
-            <a:pPr algn="ctr" indent="0" marL="0">
-              <a:buNone/>
-            </a:pPr>
-            <a:r>
-              <a:rPr lang="en-US" sz="1600" b="1" dirty="0">
-                <a:solidFill>
-                  <a:srgbClr val="FFFFFF"/>
-                </a:solidFill>
-                <a:latin typeface="Cambria" pitchFamily="34" charset="0"/>
-                <a:ea typeface="Cambria" pitchFamily="34" charset="-122"/>
-                <a:cs typeface="Cambria" pitchFamily="34" charset="-120"/>
-              </a:rPr>
-              <a:t>3</a:t>
-            </a:r>
-            <a:endParaRPr lang="en-US" sz="1600" dirty="0"/>
-          </a:p>
-        </p:txBody>
-      </p:sp>
-      <p:sp>
-        <p:nvSpPr>
-          <p:cNvPr id="17" name="Text 15"/>
-          <p:cNvSpPr txBox="1"/>
-          <p:nvPr/>
-        </p:nvSpPr>
-        <p:spPr>
-          <a:xfrm>
-            <a:off x="6461608" y="2788920"/>
-            <a:ext cx="2087804" cy="457200"/>
-          </a:xfrm>
-          <a:prstGeom prst="rect">
-            <a:avLst/>
-          </a:prstGeom>
-          <a:noFill/>
-          <a:ln/>
-        </p:spPr>
-        <p:txBody>
-          <a:bodyPr wrap="square" lIns="0" tIns="0" rIns="0" bIns="0" rtlCol="0" anchor="ctr"/>
-          <a:lstStyle/>
-          <a:p>
-            <a:pPr algn="l" indent="0" marL="0">
-              <a:buNone/>
-            </a:pPr>
-            <a:r>
-              <a:rPr lang="en-US" sz="1400" b="1" dirty="0">
-                <a:solidFill>
-                  <a:srgbClr val="1D4E6B"/>
-                </a:solidFill>
-                <a:latin typeface="Cambria" pitchFamily="34" charset="0"/>
-                <a:ea typeface="Cambria" pitchFamily="34" charset="-122"/>
-                <a:cs typeface="Cambria" pitchFamily="34" charset="-120"/>
-              </a:rPr>
-              <a:t>Measurement</a:t>
-            </a:r>
-            <a:endParaRPr lang="en-US" sz="1400" dirty="0"/>
-          </a:p>
-        </p:txBody>
-      </p:sp>
-      <p:sp>
-        <p:nvSpPr>
-          <p:cNvPr id="18" name="Text 16"/>
-          <p:cNvSpPr txBox="1"/>
-          <p:nvPr/>
-        </p:nvSpPr>
-        <p:spPr>
-          <a:xfrm>
-            <a:off x="6461608" y="3291840"/>
-            <a:ext cx="2087804" cy="1234440"/>
-          </a:xfrm>
-          <a:prstGeom prst="rect">
-            <a:avLst/>
-          </a:prstGeom>
-          <a:noFill/>
-          <a:ln/>
-        </p:spPr>
-        <p:txBody>
-          <a:bodyPr wrap="square" lIns="0" tIns="0" rIns="0" bIns="0" rtlCol="0" anchor="t"/>
-          <a:lstStyle/>
-          <a:p>
-            <a:pPr algn="l" indent="0" marL="0">
-              <a:lnSpc>
-                <a:spcPct val="120000"/>
-              </a:lnSpc>
-              <a:buNone/>
-            </a:pPr>
-            <a:r>
-              <a:rPr lang="en-US" sz="1200" dirty="0">
-                <a:solidFill>
-                  <a:srgbClr val="2F3E47"/>
-                </a:solidFill>
-                <a:latin typeface="Calibri" pitchFamily="34" charset="0"/>
-                <a:ea typeface="Calibri" pitchFamily="34" charset="-122"/>
-                <a:cs typeface="Calibri" pitchFamily="34" charset="-120"/>
-              </a:rPr>
-              <a:t>Water use and yield recorded across a full production cycle.</a:t>
-            </a:r>
-            <a:endParaRPr lang="en-US" sz="1200" dirty="0"/>
-          </a:p>
-        </p:txBody>
-      </p:sp>
-      <p:sp>
-        <p:nvSpPr>
-          <p:cNvPr id="19" name="Shape 17"/>
-          <p:cNvSpPr/>
-          <p:nvPr/>
-        </p:nvSpPr>
-        <p:spPr>
-          <a:xfrm>
-            <a:off x="9052331" y="1874520"/>
-            <a:ext cx="2545004" cy="2834640"/>
-          </a:xfrm>
-          <a:prstGeom prst="roundRect">
-            <a:avLst>
-              <a:gd name="adj" fmla="val 3593"/>
-            </a:avLst>
-          </a:prstGeom>
-          <a:solidFill>
-            <a:srgbClr val="EEF2F5"/>
-          </a:solidFill>
-          <a:ln w="9525">
-            <a:solidFill>
-              <a:srgbClr val="D8E1E7"/>
-            </a:solidFill>
-            <a:prstDash val="solid"/>
-          </a:ln>
-        </p:spPr>
-      </p:sp>
-      <p:sp>
-        <p:nvSpPr>
-          <p:cNvPr id="20" name="Shape 18"/>
-          <p:cNvSpPr/>
-          <p:nvPr/>
-        </p:nvSpPr>
-        <p:spPr>
-          <a:xfrm>
-            <a:off x="9280931" y="2103120"/>
-            <a:ext cx="566928" cy="566928"/>
-          </a:xfrm>
-          <a:prstGeom prst="ellipse">
-            <a:avLst/>
-          </a:prstGeom>
-          <a:solidFill>
-            <a:srgbClr val="1D4E6B"/>
-          </a:solidFill>
-          <a:ln/>
-        </p:spPr>
-      </p:sp>
-      <p:sp>
-        <p:nvSpPr>
-          <p:cNvPr id="21" name="Text 19"/>
-          <p:cNvSpPr txBox="1"/>
-          <p:nvPr/>
-        </p:nvSpPr>
-        <p:spPr>
-          <a:xfrm>
-            <a:off x="9280931" y="2103120"/>
-            <a:ext cx="566928" cy="566928"/>
-          </a:xfrm>
-          <a:prstGeom prst="rect">
-            <a:avLst/>
-          </a:prstGeom>
-          <a:noFill/>
-          <a:ln/>
-        </p:spPr>
-        <p:txBody>
-          <a:bodyPr wrap="square" lIns="0" tIns="0" rIns="0" bIns="0" rtlCol="0" anchor="ctr"/>
-          <a:lstStyle/>
-          <a:p>
-            <a:pPr algn="ctr" indent="0" marL="0">
-              <a:buNone/>
-            </a:pPr>
-            <a:r>
-              <a:rPr lang="en-US" sz="1600" b="1" dirty="0">
-                <a:solidFill>
-                  <a:srgbClr val="FFFFFF"/>
-                </a:solidFill>
-                <a:latin typeface="Cambria" pitchFamily="34" charset="0"/>
-                <a:ea typeface="Cambria" pitchFamily="34" charset="-122"/>
-                <a:cs typeface="Cambria" pitchFamily="34" charset="-120"/>
-              </a:rPr>
-              <a:t>4</a:t>
-            </a:r>
-            <a:endParaRPr lang="en-US" sz="1600" dirty="0"/>
-          </a:p>
-        </p:txBody>
-      </p:sp>
-      <p:sp>
-        <p:nvSpPr>
-          <p:cNvPr id="22" name="Text 20"/>
-          <p:cNvSpPr txBox="1"/>
-          <p:nvPr/>
-        </p:nvSpPr>
-        <p:spPr>
-          <a:xfrm>
-            <a:off x="9280931" y="2788920"/>
-            <a:ext cx="2087804" cy="457200"/>
-          </a:xfrm>
-          <a:prstGeom prst="rect">
-            <a:avLst/>
-          </a:prstGeom>
-          <a:noFill/>
-          <a:ln/>
-        </p:spPr>
-        <p:txBody>
-          <a:bodyPr wrap="square" lIns="0" tIns="0" rIns="0" bIns="0" rtlCol="0" anchor="ctr"/>
-          <a:lstStyle/>
-          <a:p>
-            <a:pPr algn="l" indent="0" marL="0">
-              <a:buNone/>
-            </a:pPr>
-            <a:r>
-              <a:rPr lang="en-US" sz="1400" b="1" dirty="0">
-                <a:solidFill>
-                  <a:srgbClr val="1D4E6B"/>
-                </a:solidFill>
-                <a:latin typeface="Cambria" pitchFamily="34" charset="0"/>
-                <a:ea typeface="Cambria" pitchFamily="34" charset="-122"/>
-                <a:cs typeface="Cambria" pitchFamily="34" charset="-120"/>
-              </a:rPr>
-              <a:t>Rollout</a:t>
-            </a:r>
-            <a:endParaRPr lang="en-US" sz="1400" dirty="0"/>
-          </a:p>
-        </p:txBody>
-      </p:sp>
-      <p:sp>
-        <p:nvSpPr>
-          <p:cNvPr id="23" name="Text 21"/>
-          <p:cNvSpPr txBox="1"/>
-          <p:nvPr/>
-        </p:nvSpPr>
-        <p:spPr>
-          <a:xfrm>
-            <a:off x="9280931" y="3291840"/>
-            <a:ext cx="2087804" cy="1234440"/>
-          </a:xfrm>
-          <a:prstGeom prst="rect">
-            <a:avLst/>
-          </a:prstGeom>
-          <a:noFill/>
-          <a:ln/>
-        </p:spPr>
-        <p:txBody>
-          <a:bodyPr wrap="square" lIns="0" tIns="0" rIns="0" bIns="0" rtlCol="0" anchor="t"/>
-          <a:lstStyle/>
-          <a:p>
-            <a:pPr algn="l" indent="0" marL="0">
-              <a:lnSpc>
-                <a:spcPct val="120000"/>
-              </a:lnSpc>
-              <a:buNone/>
-            </a:pPr>
-            <a:r>
-              <a:rPr lang="en-US" sz="1200" dirty="0">
-                <a:solidFill>
-                  <a:srgbClr val="2F3E47"/>
-                </a:solidFill>
-                <a:latin typeface="Calibri" pitchFamily="34" charset="0"/>
-                <a:ea typeface="Calibri" pitchFamily="34" charset="-122"/>
-                <a:cs typeface="Calibri" pitchFamily="34" charset="-120"/>
-              </a:rPr>
-              <a:t>Gradual extension to the remaining acres on the basis of the results observed.</a:t>
-            </a:r>
-            <a:endParaRPr lang="en-US" sz="1200" dirty="0"/>
-          </a:p>
-        </p:txBody>
-      </p:sp>
-      <p:sp>
-        <p:nvSpPr>
-          <p:cNvPr id="24" name="Text 22"/>
-          <p:cNvSpPr txBox="1"/>
-          <p:nvPr/>
-        </p:nvSpPr>
-        <p:spPr>
-          <a:xfrm>
-            <a:off x="594360" y="4983480"/>
-            <a:ext cx="11002975" cy="822960"/>
+              <a:t>Read with care</a:t>
+            </a:r>
+            <a:endParaRPr lang="en-US" sz="1300" dirty="0"/>
+          </a:p>
+        </p:txBody>
+      </p:sp>
+      <p:sp>
+        <p:nvSpPr>
+          <p:cNvPr id="7" name="Text 4"/>
+          <p:cNvSpPr txBox="1"/>
+          <p:nvPr/>
+        </p:nvSpPr>
+        <p:spPr>
+          <a:xfrm>
+            <a:off x="8503920" y="2560320"/>
+            <a:ext cx="2834640" cy="3017520"/>
           </a:xfrm>
           <a:prstGeom prst="rect">
             <a:avLst/>
@@ -8290,23 +13004,52 @@
               <a:buNone/>
             </a:pPr>
             <a:r>
-              <a:rPr lang="en-US" sz="1250" i="1" dirty="0">
-                <a:solidFill>
-                  <a:srgbClr val="6B7D87"/>
-                </a:solidFill>
-                <a:latin typeface="Calibri" pitchFamily="34" charset="0"/>
-                <a:ea typeface="Calibri" pitchFamily="34" charset="-122"/>
-                <a:cs typeface="Calibri" pitchFamily="34" charset="-120"/>
-              </a:rPr>
-              <a:t>The dosing rule is the same everywhere: 3 grams per liter of usable soil. What changes from one field to the next is the volume of soil the roots actually explore.</a:t>
-            </a:r>
-            <a:endParaRPr lang="en-US" sz="1250" dirty="0"/>
-          </a:p>
-        </p:txBody>
-      </p:sp>
-      <p:sp>
-        <p:nvSpPr>
-          <p:cNvPr id="25" name="Text 23"/>
+              <a:rPr lang="en-US" sz="1200" dirty="0">
+                <a:solidFill>
+                  <a:srgbClr val="2F3E47"/>
+                </a:solidFill>
+                <a:latin typeface="Calibri" pitchFamily="34" charset="0"/>
+                <a:ea typeface="Calibri" pitchFamily="34" charset="-122"/>
+                <a:cs typeface="Calibri" pitchFamily="34" charset="-120"/>
+              </a:rPr>
+              <a:t>Ranges used by our dose calculator, for a normally managed crop with EVERGREEN® applied at planting.</a:t>
+            </a:r>
+            <a:endParaRPr lang="en-US" sz="1200" dirty="0"/>
+          </a:p>
+          <a:p>
+            <a:pPr algn="l" indent="0" marL="0">
+              <a:lnSpc>
+                <a:spcPct val="125000"/>
+              </a:lnSpc>
+              <a:buNone/>
+            </a:pPr>
+            <a:endParaRPr lang="en-US" sz="1200" dirty="0"/>
+          </a:p>
+          <a:p>
+            <a:pPr algn="l" indent="0" marL="0">
+              <a:lnSpc>
+                <a:spcPct val="125000"/>
+              </a:lnSpc>
+              <a:buNone/>
+            </a:pPr>
+            <a:r>
+              <a:rPr lang="en-US" sz="1200" dirty="0">
+                <a:solidFill>
+                  <a:srgbClr val="2F3E47"/>
+                </a:solidFill>
+                <a:latin typeface="Calibri" pitchFamily="34" charset="0"/>
+                <a:ea typeface="Calibri" pitchFamily="34" charset="-122"/>
+                <a:cs typeface="Calibri" pitchFamily="34" charset="-120"/>
+              </a:rPr>
+              <a:t>Actual results depend on soil, climate and management. For cereals, no gain is claimed without a field trial.</a:t>
+            </a:r>
+            <a:endParaRPr lang="en-US" sz="1200" dirty="0"/>
+          </a:p>
+        </p:txBody>
+      </p:sp>
+      <p:sp>
+        <p:nvSpPr>
+          <p:cNvPr id="8" name="Text 5"/>
           <p:cNvSpPr txBox="1"/>
           <p:nvPr/>
         </p:nvSpPr>
@@ -8347,7 +13090,7 @@
       </p:sp>
       <p:sp>
         <p:nvSpPr>
-          <p:cNvPr id="26" name="Text 24"/>
+          <p:cNvPr id="9" name="Text 6"/>
           <p:cNvSpPr txBox="1"/>
           <p:nvPr/>
         </p:nvSpPr>

--- a/public/documents/countries/usa.pptx
+++ b/public/documents/countries/usa.pptx
@@ -3744,7 +3744,7 @@
       </p:sp>
       <p:pic>
         <p:nvPicPr>
-          <p:cNvPr id="5" name="Image 1" descr="C:\Users\Utilisateur\dev\green-solutions-web\public\images\logo-icon.png">    </p:cNvPr>
+          <p:cNvPr id="5" name="Image 1" descr="C:\Users\Utilisateur\dev\gsw-dossiers\public\images\logo-icon.png">    </p:cNvPr>
           <p:cNvPicPr>
             <a:picLocks noChangeAspect="1"/>
           </p:cNvPicPr>
@@ -3768,7 +3768,7 @@
       </p:pic>
       <p:pic>
         <p:nvPicPr>
-          <p:cNvPr id="6" name="Image 2" descr="C:\Users\Utilisateur\dev\green-solutions-web\scripts\dossiers\drapeaux\usa.png">    </p:cNvPr>
+          <p:cNvPr id="6" name="Image 2" descr="C:\Users\Utilisateur\dev\gsw-dossiers\scripts\dossiers\drapeaux\usa.png">    </p:cNvPr>
           <p:cNvPicPr>
             <a:picLocks noChangeAspect="1"/>
           </p:cNvPicPr>
@@ -9535,7 +9535,7 @@
                 <a:ea typeface="Calibri" pitchFamily="34" charset="-122"/>
                 <a:cs typeface="Calibri" pitchFamily="34" charset="-120"/>
               </a:rPr>
-              <a:t>contact@evergreen-ecosorb.com · 821 Chemin des Clapiers, 83220 Le Pradet, France</a:t>
+              <a:t>contact@evergreen-ecosorb.com · Green Solutions Groupe AIM SA, 46, route de la Condémine, 1475 Forel, Switzerland</a:t>
             </a:r>
             <a:endParaRPr lang="en-US" sz="1400" dirty="0"/>
           </a:p>
@@ -9543,7 +9543,7 @@
       </p:sp>
       <p:pic>
         <p:nvPicPr>
-          <p:cNvPr id="6" name="Image 1" descr="C:\Users\Utilisateur\dev\green-solutions-web\scripts\dossiers\sceau-aim-clair.png">    </p:cNvPr>
+          <p:cNvPr id="6" name="Image 1" descr="C:\Users\Utilisateur\dev\gsw-dossiers\scripts\dossiers\sceau-aim-clair.png">    </p:cNvPr>
           <p:cNvPicPr>
             <a:picLocks noChangeAspect="1"/>
           </p:cNvPicPr>

--- a/public/documents/countries/usa.pptx
+++ b/public/documents/countries/usa.pptx
@@ -124,7 +124,7 @@
 </p:presentation>
 </file>
 
-<file path=ppt/charts/chart49.xml><?xml version="1.0" encoding="utf-8"?>
+<file path=ppt/charts/chart27.xml><?xml version="1.0" encoding="utf-8"?>
 <c:chartSpace xmlns:c="http://schemas.openxmlformats.org/drawingml/2006/chart" xmlns:a="http://schemas.openxmlformats.org/drawingml/2006/main" xmlns:r="http://schemas.openxmlformats.org/officeDocument/2006/relationships">
   <c:date1904 val="0"/>
   <c:roundedCorners val="1"/>
@@ -369,7 +369,7 @@
 </c:chartSpace>
 </file>
 
-<file path=ppt/charts/chart50.xml><?xml version="1.0" encoding="utf-8"?>
+<file path=ppt/charts/chart28.xml><?xml version="1.0" encoding="utf-8"?>
 <c:chartSpace xmlns:c="http://schemas.openxmlformats.org/drawingml/2006/chart" xmlns:a="http://schemas.openxmlformats.org/drawingml/2006/main" xmlns:r="http://schemas.openxmlformats.org/officeDocument/2006/relationships">
   <c:date1904 val="0"/>
   <c:roundedCorners val="1"/>
@@ -677,7 +677,7 @@
 </c:chartSpace>
 </file>
 
-<file path=ppt/charts/chart51.xml><?xml version="1.0" encoding="utf-8"?>
+<file path=ppt/charts/chart29.xml><?xml version="1.0" encoding="utf-8"?>
 <c:chartSpace xmlns:c="http://schemas.openxmlformats.org/drawingml/2006/chart" xmlns:a="http://schemas.openxmlformats.org/drawingml/2006/main" xmlns:r="http://schemas.openxmlformats.org/officeDocument/2006/relationships">
   <c:date1904 val="0"/>
   <c:roundedCorners val="1"/>
@@ -1042,7 +1042,7 @@
 </c:chartSpace>
 </file>
 
-<file path=ppt/charts/chart52.xml><?xml version="1.0" encoding="utf-8"?>
+<file path=ppt/charts/chart30.xml><?xml version="1.0" encoding="utf-8"?>
 <c:chartSpace xmlns:c="http://schemas.openxmlformats.org/drawingml/2006/chart" xmlns:a="http://schemas.openxmlformats.org/drawingml/2006/main" xmlns:r="http://schemas.openxmlformats.org/officeDocument/2006/relationships">
   <c:date1904 val="0"/>
   <c:roundedCorners val="1"/>
@@ -3782,8 +3782,8 @@
         </p:blipFill>
         <p:spPr>
           <a:xfrm>
-            <a:off x="3648456" y="1389888"/>
-            <a:ext cx="1965960" cy="1310640"/>
+            <a:off x="3648456" y="1527608"/>
+            <a:ext cx="1965960" cy="1035201"/>
           </a:xfrm>
           <a:prstGeom prst="rect">
             <a:avLst/>
@@ -3798,8 +3798,8 @@
         </p:nvSpPr>
         <p:spPr>
           <a:xfrm>
-            <a:off x="3648456" y="1389888"/>
-            <a:ext cx="1965960" cy="1310640"/>
+            <a:off x="3648456" y="1527608"/>
+            <a:ext cx="1965960" cy="1035201"/>
           </a:xfrm>
           <a:prstGeom prst="rect">
             <a:avLst/>

--- a/public/documents/countries/usa.pptx
+++ b/public/documents/countries/usa.pptx
@@ -124,7 +124,7 @@
 </p:presentation>
 </file>
 
-<file path=ppt/charts/chart27.xml><?xml version="1.0" encoding="utf-8"?>
+<file path=ppt/charts/chart45.xml><?xml version="1.0" encoding="utf-8"?>
 <c:chartSpace xmlns:c="http://schemas.openxmlformats.org/drawingml/2006/chart" xmlns:a="http://schemas.openxmlformats.org/drawingml/2006/main" xmlns:r="http://schemas.openxmlformats.org/officeDocument/2006/relationships">
   <c:date1904 val="0"/>
   <c:roundedCorners val="1"/>
@@ -369,7 +369,7 @@
 </c:chartSpace>
 </file>
 
-<file path=ppt/charts/chart28.xml><?xml version="1.0" encoding="utf-8"?>
+<file path=ppt/charts/chart46.xml><?xml version="1.0" encoding="utf-8"?>
 <c:chartSpace xmlns:c="http://schemas.openxmlformats.org/drawingml/2006/chart" xmlns:a="http://schemas.openxmlformats.org/drawingml/2006/main" xmlns:r="http://schemas.openxmlformats.org/officeDocument/2006/relationships">
   <c:date1904 val="0"/>
   <c:roundedCorners val="1"/>
@@ -677,7 +677,7 @@
 </c:chartSpace>
 </file>
 
-<file path=ppt/charts/chart29.xml><?xml version="1.0" encoding="utf-8"?>
+<file path=ppt/charts/chart47.xml><?xml version="1.0" encoding="utf-8"?>
 <c:chartSpace xmlns:c="http://schemas.openxmlformats.org/drawingml/2006/chart" xmlns:a="http://schemas.openxmlformats.org/drawingml/2006/main" xmlns:r="http://schemas.openxmlformats.org/officeDocument/2006/relationships">
   <c:date1904 val="0"/>
   <c:roundedCorners val="1"/>
@@ -1042,7 +1042,7 @@
 </c:chartSpace>
 </file>
 
-<file path=ppt/charts/chart30.xml><?xml version="1.0" encoding="utf-8"?>
+<file path=ppt/charts/chart48.xml><?xml version="1.0" encoding="utf-8"?>
 <c:chartSpace xmlns:c="http://schemas.openxmlformats.org/drawingml/2006/chart" xmlns:a="http://schemas.openxmlformats.org/drawingml/2006/main" xmlns:r="http://schemas.openxmlformats.org/officeDocument/2006/relationships">
   <c:date1904 val="0"/>
   <c:roundedCorners val="1"/>
@@ -3744,7 +3744,7 @@
       </p:sp>
       <p:pic>
         <p:nvPicPr>
-          <p:cNvPr id="5" name="Image 1" descr="C:\Users\Utilisateur\dev\gsw-dossiers\public\images\logo-icon.png">    </p:cNvPr>
+          <p:cNvPr id="5" name="Image 1" descr="C:\Users\Utilisateur\dev\green-solutions-web\public\images\logo-icon.png">    </p:cNvPr>
           <p:cNvPicPr>
             <a:picLocks noChangeAspect="1"/>
           </p:cNvPicPr>
@@ -3768,7 +3768,7 @@
       </p:pic>
       <p:pic>
         <p:nvPicPr>
-          <p:cNvPr id="6" name="Image 2" descr="C:\Users\Utilisateur\dev\gsw-dossiers\scripts\dossiers\drapeaux\usa.png">    </p:cNvPr>
+          <p:cNvPr id="6" name="Image 2" descr="C:\Users\Utilisateur\dev\green-solutions-web\scripts\dossiers\drapeaux\usa.png">    </p:cNvPr>
           <p:cNvPicPr>
             <a:picLocks noChangeAspect="1"/>
           </p:cNvPicPr>
@@ -9053,6 +9053,30 @@
             </a:r>
             <a:endParaRPr lang="en-US" sz="1350" dirty="0"/>
           </a:p>
+          <a:p>
+            <a:pPr algn="l" marL="342900" indent="-342900">
+              <a:lnSpc>
+                <a:spcPct val="122000"/>
+              </a:lnSpc>
+              <a:spcAft>
+                <a:spcPts val="1000"/>
+              </a:spcAft>
+              <a:buSzPct val="100000"/>
+              <a:buChar char="•"/>
+            </a:pPr>
+            <a:r>
+              <a:rPr lang="en-US" sz="1350" dirty="0">
+                <a:solidFill>
+                  <a:srgbClr val="2F3E47"/>
+                </a:solidFill>
+                <a:latin typeface="Calibri" pitchFamily="34" charset="0"/>
+                <a:ea typeface="Calibri" pitchFamily="34" charset="-122"/>
+                <a:cs typeface="Calibri" pitchFamily="34" charset="-120"/>
+              </a:rPr>
+              <a:t>Photographs: USDAgov (Public domain) — via Wikimedia Commons.</a:t>
+            </a:r>
+            <a:endParaRPr lang="en-US" sz="1350" dirty="0"/>
+          </a:p>
         </p:txBody>
       </p:sp>
       <p:sp>
@@ -9543,7 +9567,7 @@
       </p:sp>
       <p:pic>
         <p:nvPicPr>
-          <p:cNvPr id="6" name="Image 1" descr="C:\Users\Utilisateur\dev\gsw-dossiers\scripts\dossiers\sceau-aim-clair.png">    </p:cNvPr>
+          <p:cNvPr id="6" name="Image 1" descr="C:\Users\Utilisateur\dev\green-solutions-web\scripts\dossiers\sceau-aim-clair.png">    </p:cNvPr>
           <p:cNvPicPr>
             <a:picLocks noChangeAspect="1"/>
           </p:cNvPicPr>

--- a/public/documents/countries/usa.pptx
+++ b/public/documents/countries/usa.pptx
@@ -23,9 +23,10 @@
     <p:sldId id="271" r:id="rId17"/>
     <p:sldId id="272" r:id="rId18"/>
     <p:sldId id="273" r:id="rId19"/>
+    <p:sldId id="274" r:id="rId20"/>
   </p:sldIdLst>
   <p:notesMasterIdLst>
-    <p:notesMasterId r:id="rId20"/>
+    <p:notesMasterId r:id="rId21"/>
   </p:notesMasterIdLst>
   <p:sldSz cx="12192000" cy="6858000"/>
   <p:notesSz cx="6858000" cy="12192000"/>
@@ -124,7 +125,266 @@
 </p:presentation>
 </file>
 
-<file path=ppt/charts/chart45.xml><?xml version="1.0" encoding="utf-8"?>
+<file path=ppt/charts/chart88.xml><?xml version="1.0" encoding="utf-8"?>
+<c:chartSpace xmlns:c="http://schemas.openxmlformats.org/drawingml/2006/chart" xmlns:a="http://schemas.openxmlformats.org/drawingml/2006/main" xmlns:r="http://schemas.openxmlformats.org/officeDocument/2006/relationships">
+  <c:date1904 val="0"/>
+  <c:roundedCorners val="1"/>
+  <c:chart>
+    <c:autoTitleDeleted val="1"/>
+    <c:plotArea>
+      <c:layout/>
+      <c:barChart>
+        <c:barDir val="col"/>
+        <c:grouping val="clustered"/>
+        <c:varyColors val="0"/>
+        <c:ser>
+          <c:idx val="0"/>
+          <c:order val="0"/>
+          <c:tx>
+            <c:strRef>
+              <c:f>Sheet1!$B$1</c:f>
+              <c:strCache>
+                <c:ptCount val="1"/>
+                <c:pt idx="0">
+                  <c:v>Global index of drought number and duration</c:v>
+                </c:pt>
+              </c:strCache>
+            </c:strRef>
+          </c:tx>
+          <c:spPr>
+            <a:solidFill>
+              <a:srgbClr val="1D4E6B"/>
+            </a:solidFill>
+            <a:effectLst/>
+          </c:spPr>
+          <c:invertIfNegative val="0"/>
+          <c:dLbls>
+            <c:numFmt formatCode="[$-409]0" sourceLinked="0"/>
+            <c:txPr>
+              <a:bodyPr/>
+              <a:lstStyle/>
+              <a:p>
+                <a:pPr>
+                  <a:defRPr b="0" i="0" strike="noStrike" sz="1100" u="none">
+                    <a:solidFill>
+                      <a:srgbClr val="0F2E40"/>
+                    </a:solidFill>
+                    <a:latin typeface="Calibri"/>
+                  </a:defRPr>
+                </a:pPr>
+              </a:p>
+            </c:txPr>
+            <c:showLegendKey val="0"/>
+            <c:showVal val="1"/>
+            <c:showCatName val="0"/>
+            <c:showSerName val="0"/>
+            <c:showPercent val="0"/>
+            <c:showBubbleSize val="0"/>
+            <c:showLeaderLines val="0"/>
+          </c:dLbls>
+          <c:dPt>
+            <c:idx val="0"/>
+            <c:invertIfNegative val="0"/>
+            <c:bubble3D val="0"/>
+            <c:spPr>
+              <a:solidFill>
+                <a:srgbClr val="1D4E6B"/>
+              </a:solidFill>
+              <a:effectLst/>
+            </c:spPr>
+          </c:dPt>
+          <c:dPt>
+            <c:idx val="1"/>
+            <c:invertIfNegative val="0"/>
+            <c:bubble3D val="0"/>
+            <c:spPr>
+              <a:solidFill>
+                <a:srgbClr val="D98C2B"/>
+              </a:solidFill>
+              <a:effectLst/>
+            </c:spPr>
+          </c:dPt>
+          <c:cat>
+            <c:multiLvlStrRef>
+              <c:f>Sheet1!$A$2:$A$3</c:f>
+              <c:multiLvlStrCache>
+                <c:ptCount val="2"/>
+                <c:lvl>
+                  <c:pt idx="0">
+                    <c:v>1980–1999</c:v>
+                  </c:pt>
+                  <c:pt idx="1">
+                    <c:v>Since 2000</c:v>
+                  </c:pt>
+                </c:lvl>
+              </c:multiLvlStrCache>
+            </c:multiLvlStrRef>
+          </c:cat>
+          <c:val>
+            <c:numRef>
+              <c:f>Sheet1!$B$2:$B$3</c:f>
+              <c:numCache>
+                <c:formatCode>General</c:formatCode>
+                <c:ptCount val="2"/>
+                <c:pt idx="0">
+                  <c:v>100</c:v>
+                </c:pt>
+                <c:pt idx="1">
+                  <c:v>129</c:v>
+                </c:pt>
+              </c:numCache>
+            </c:numRef>
+          </c:val>
+        </c:ser>
+        <c:dLbls>
+          <c:numFmt formatCode="[$-409]0" sourceLinked="0"/>
+          <c:txPr>
+            <a:bodyPr/>
+            <a:lstStyle/>
+            <a:p>
+              <a:pPr>
+                <a:defRPr b="0" i="0" strike="noStrike" sz="1100" u="none">
+                  <a:solidFill>
+                    <a:srgbClr val="0F2E40"/>
+                  </a:solidFill>
+                  <a:latin typeface="Calibri"/>
+                </a:defRPr>
+              </a:pPr>
+            </a:p>
+          </c:txPr>
+          <c:showLegendKey val="0"/>
+          <c:showVal val="1"/>
+          <c:showCatName val="0"/>
+          <c:showSerName val="0"/>
+          <c:showPercent val="0"/>
+          <c:showBubbleSize val="0"/>
+          <c:showLeaderLines val="0"/>
+        </c:dLbls>
+        <c:gapWidth val="150"/>
+        <c:overlap val="0"/>
+        <c:axId val="2094734554"/>
+        <c:axId val="2094734552"/>
+        <c:axId val="2094734556"/>
+      </c:barChart>
+      <c:catAx>
+        <c:axId val="2094734554"/>
+        <c:scaling>
+          <c:orientation val="minMax"/>
+        </c:scaling>
+        <c:delete val="0"/>
+        <c:axPos val="b"/>
+        <c:numFmt formatCode="General" sourceLinked="1"/>
+        <c:majorTickMark val="out"/>
+        <c:minorTickMark val="none"/>
+        <c:tickLblPos val="low"/>
+        <c:spPr>
+          <a:ln w="12700" cap="flat">
+            <a:solidFill>
+              <a:srgbClr val="888888"/>
+            </a:solidFill>
+            <a:prstDash val="solid"/>
+            <a:round/>
+          </a:ln>
+        </c:spPr>
+        <c:txPr>
+          <a:bodyPr/>
+          <a:lstStyle/>
+          <a:p>
+            <a:pPr>
+              <a:defRPr sz="1100" b="0" i="0" u="none" strike="noStrike">
+                <a:solidFill>
+                  <a:srgbClr val="6B7D87"/>
+                </a:solidFill>
+                <a:latin typeface="Calibri"/>
+              </a:defRPr>
+            </a:pPr>
+            <a:endParaRPr lang="en-US"/>
+          </a:p>
+        </c:txPr>
+        <c:crossAx val="2094734552"/>
+        <c:crosses val="autoZero"/>
+        <c:auto val="1"/>
+        <c:lblAlgn val="ctr"/>
+        <c:noMultiLvlLbl val="1"/>
+      </c:catAx>
+      <c:valAx>
+        <c:axId val="2094734552"/>
+        <c:scaling>
+          <c:orientation val="minMax"/>
+          <c:max val="140"/>
+          <c:min val="0"/>
+        </c:scaling>
+        <c:delete val="0"/>
+        <c:axPos val="l"/>
+        <c:majorGridlines>
+          <c:spPr>
+            <a:ln w="9525" cap="flat">
+              <a:solidFill>
+                <a:srgbClr val="D8E1E7"/>
+              </a:solidFill>
+              <a:prstDash val="solid"/>
+              <a:round/>
+            </a:ln>
+          </c:spPr>
+        </c:majorGridlines>
+        <c:numFmt formatCode="General" sourceLinked="0"/>
+        <c:majorTickMark val="out"/>
+        <c:minorTickMark val="none"/>
+        <c:tickLblPos val="nextTo"/>
+        <c:spPr>
+          <a:ln w="12700" cap="flat">
+            <a:solidFill>
+              <a:srgbClr val="888888"/>
+            </a:solidFill>
+            <a:prstDash val="solid"/>
+            <a:round/>
+          </a:ln>
+        </c:spPr>
+        <c:txPr>
+          <a:bodyPr/>
+          <a:lstStyle/>
+          <a:p>
+            <a:pPr>
+              <a:defRPr sz="1100" b="0" i="0" u="none" strike="noStrike">
+                <a:solidFill>
+                  <a:srgbClr val="6B7D87"/>
+                </a:solidFill>
+                <a:latin typeface="Calibri"/>
+              </a:defRPr>
+            </a:pPr>
+            <a:endParaRPr lang="en-US"/>
+          </a:p>
+        </c:txPr>
+        <c:crossAx val="2094734554"/>
+        <c:crosses val="autoZero"/>
+        <c:crossBetween val="between"/>
+        <c:majorUnit val="20"/>
+      </c:valAx>
+      <c:spPr>
+        <a:noFill/>
+        <a:ln>
+          <a:noFill/>
+        </a:ln>
+        <a:effectLst/>
+      </c:spPr>
+    </c:plotArea>
+    <c:plotVisOnly val="1"/>
+    <c:dispBlanksAs val="span"/>
+  </c:chart>
+  <c:spPr>
+    <a:noFill/>
+    <a:ln>
+      <a:noFill/>
+    </a:ln>
+    <a:effectLst/>
+  </c:spPr>
+  <c:externalData r:id="rId1">
+    <c:autoUpdate val="0"/>
+  </c:externalData>
+</c:chartSpace>
+</file>
+
+<file path=ppt/charts/chart89.xml><?xml version="1.0" encoding="utf-8"?>
 <c:chartSpace xmlns:c="http://schemas.openxmlformats.org/drawingml/2006/chart" xmlns:a="http://schemas.openxmlformats.org/drawingml/2006/main" xmlns:r="http://schemas.openxmlformats.org/officeDocument/2006/relationships">
   <c:date1904 val="0"/>
   <c:roundedCorners val="1"/>
@@ -369,7 +629,7 @@
 </c:chartSpace>
 </file>
 
-<file path=ppt/charts/chart46.xml><?xml version="1.0" encoding="utf-8"?>
+<file path=ppt/charts/chart90.xml><?xml version="1.0" encoding="utf-8"?>
 <c:chartSpace xmlns:c="http://schemas.openxmlformats.org/drawingml/2006/chart" xmlns:a="http://schemas.openxmlformats.org/drawingml/2006/main" xmlns:r="http://schemas.openxmlformats.org/officeDocument/2006/relationships">
   <c:date1904 val="0"/>
   <c:roundedCorners val="1"/>
@@ -677,7 +937,7 @@
 </c:chartSpace>
 </file>
 
-<file path=ppt/charts/chart47.xml><?xml version="1.0" encoding="utf-8"?>
+<file path=ppt/charts/chart91.xml><?xml version="1.0" encoding="utf-8"?>
 <c:chartSpace xmlns:c="http://schemas.openxmlformats.org/drawingml/2006/chart" xmlns:a="http://schemas.openxmlformats.org/drawingml/2006/main" xmlns:r="http://schemas.openxmlformats.org/officeDocument/2006/relationships">
   <c:date1904 val="0"/>
   <c:roundedCorners val="1"/>
@@ -1042,7 +1302,7 @@
 </c:chartSpace>
 </file>
 
-<file path=ppt/charts/chart48.xml><?xml version="1.0" encoding="utf-8"?>
+<file path=ppt/charts/chart92.xml><?xml version="1.0" encoding="utf-8"?>
 <c:chartSpace xmlns:c="http://schemas.openxmlformats.org/drawingml/2006/chart" xmlns:a="http://schemas.openxmlformats.org/drawingml/2006/main" xmlns:r="http://schemas.openxmlformats.org/officeDocument/2006/relationships">
   <c:date1904 val="0"/>
   <c:roundedCorners val="1"/>
@@ -2606,6 +2866,94 @@
             <a:fld id="{F7021451-1387-4CA6-816F-3879F97B5CBC}" type="slidenum">
               <a:rPr lang="en-US"/>
               <a:t>18</a:t>
+            </a:fld>
+            <a:endParaRPr lang="en-US"/>
+          </a:p>
+        </p:txBody>
+      </p:sp>
+    </p:spTree>
+    <p:extLst>
+      <p:ext uri="{BB962C8B-B14F-4D97-AF65-F5344CB8AC3E}">
+        <p14:creationId xmlns:p14="http://schemas.microsoft.com/office/powerpoint/2010/main" val="1024086991"/>
+      </p:ext>
+    </p:extLst>
+  </p:cSld>
+  <p:clrMapOvr>
+    <a:masterClrMapping/>
+  </p:clrMapOvr>
+</p:notes>
+</file>
+
+<file path=ppt/notesSlides/notesSlide19.xml><?xml version="1.0" encoding="utf-8"?>
+<p:notes xmlns:a="http://schemas.openxmlformats.org/drawingml/2006/main" xmlns:r="http://schemas.openxmlformats.org/officeDocument/2006/relationships" xmlns:p="http://schemas.openxmlformats.org/presentationml/2006/main">
+  <p:cSld>
+    <p:spTree>
+      <p:nvGrpSpPr>
+        <p:cNvPr id="1" name=""/>
+        <p:cNvGrpSpPr/>
+        <p:nvPr/>
+      </p:nvGrpSpPr>
+      <p:grpSpPr>
+        <a:xfrm>
+          <a:off x="0" y="0"/>
+          <a:ext cx="0" cy="0"/>
+          <a:chOff x="0" y="0"/>
+          <a:chExt cx="0" cy="0"/>
+        </a:xfrm>
+      </p:grpSpPr>
+      <p:sp>
+        <p:nvSpPr>
+          <p:cNvPr id="2" name="Slide Image Placeholder 1"/>
+          <p:cNvSpPr>
+            <a:spLocks noGrp="1" noRot="1" noChangeAspect="1"/>
+          </p:cNvSpPr>
+          <p:nvPr>
+            <p:ph type="sldImg"/>
+          </p:nvPr>
+        </p:nvSpPr>
+        <p:spPr/>
+      </p:sp>
+      <p:sp>
+        <p:nvSpPr>
+          <p:cNvPr id="3" name="Notes Placeholder 2"/>
+          <p:cNvSpPr>
+            <a:spLocks noGrp="1"/>
+          </p:cNvSpPr>
+          <p:nvPr>
+            <p:ph type="body" idx="1"/>
+          </p:nvPr>
+        </p:nvSpPr>
+        <p:spPr/>
+        <p:txBody>
+          <a:bodyPr/>
+          <a:lstStyle/>
+          <a:p>
+            <a:r>
+              <a:rPr lang="en-US" dirty="0"/>
+              <a:t/>
+            </a:r>
+            <a:endParaRPr lang="en-US" dirty="0"/>
+          </a:p>
+        </p:txBody>
+      </p:sp>
+      <p:sp>
+        <p:nvSpPr>
+          <p:cNvPr id="4" name="Slide Number Placeholder 3"/>
+          <p:cNvSpPr>
+            <a:spLocks noGrp="1"/>
+          </p:cNvSpPr>
+          <p:nvPr>
+            <p:ph type="sldNum" sz="quarter" idx="10"/>
+          </p:nvPr>
+        </p:nvSpPr>
+        <p:spPr/>
+        <p:txBody>
+          <a:bodyPr/>
+          <a:lstStyle/>
+          <a:p>
+            <a:fld id="{F7021451-1387-4CA6-816F-3879F97B5CBC}" type="slidenum">
+              <a:rPr lang="en-US"/>
+              <a:t>19</a:t>
             </a:fld>
             <a:endParaRPr lang="en-US"/>
           </a:p>
@@ -3744,7 +4092,7 @@
       </p:sp>
       <p:pic>
         <p:nvPicPr>
-          <p:cNvPr id="5" name="Image 1" descr="C:\Users\Utilisateur\dev\green-solutions-web\public\images\logo-icon.png">    </p:cNvPr>
+          <p:cNvPr id="5" name="Image 1" descr="/workspace/scratch/50eb4f7d8e13/green-solutions-web/public/images/logo-icon.png">    </p:cNvPr>
           <p:cNvPicPr>
             <a:picLocks noChangeAspect="1"/>
           </p:cNvPicPr>
@@ -3768,7 +4116,7 @@
       </p:pic>
       <p:pic>
         <p:nvPicPr>
-          <p:cNvPr id="6" name="Image 2" descr="C:\Users\Utilisateur\dev\green-solutions-web\scripts\dossiers\drapeaux\usa.png">    </p:cNvPr>
+          <p:cNvPr id="6" name="Image 2" descr="/workspace/scratch/50eb4f7d8e13/green-solutions-web/scripts/dossiers/drapeaux/usa.png">    </p:cNvPr>
           <p:cNvPicPr>
             <a:picLocks noChangeAspect="1"/>
           </p:cNvPicPr>
@@ -4118,7 +4466,7 @@
                 <a:ea typeface="Calibri" pitchFamily="34" charset="-122"/>
                 <a:cs typeface="Calibri" pitchFamily="34" charset="-120"/>
               </a:rPr>
-              <a:t>OUR ANSWER</a:t>
+              <a:t>Yield potential</a:t>
             </a:r>
             <a:endParaRPr lang="en-US" sz="1150" dirty="0"/>
           </a:p>
@@ -4157,340 +4505,42 @@
                 <a:ea typeface="Cambria" pitchFamily="34" charset="-122"/>
                 <a:cs typeface="Cambria" pitchFamily="34" charset="-120"/>
               </a:rPr>
-              <a:t>Two technologies for two different constraints</a:t>
+              <a:t>Expected yield gain by crop</a:t>
             </a:r>
             <a:endParaRPr lang="en-US" sz="3000" dirty="0"/>
           </a:p>
         </p:txBody>
       </p:sp>
-      <p:sp>
-        <p:nvSpPr>
-          <p:cNvPr id="4" name="Text 2"/>
-          <p:cNvSpPr txBox="1"/>
-          <p:nvPr/>
-        </p:nvSpPr>
-        <p:spPr>
-          <a:xfrm>
-            <a:off x="594360" y="1783080"/>
-            <a:ext cx="5227168" cy="411480"/>
-          </a:xfrm>
-          <a:prstGeom prst="rect">
-            <a:avLst/>
-          </a:prstGeom>
-          <a:noFill/>
-          <a:ln/>
-        </p:spPr>
-        <p:txBody>
-          <a:bodyPr wrap="square" lIns="0" tIns="0" rIns="0" bIns="0" rtlCol="0" anchor="ctr"/>
-          <a:lstStyle/>
-          <a:p>
-            <a:pPr algn="l" indent="0" marL="0">
-              <a:buNone/>
-            </a:pPr>
-            <a:r>
-              <a:rPr lang="en-US" sz="1600" b="1" dirty="0">
-                <a:solidFill>
-                  <a:srgbClr val="1D4E6B"/>
-                </a:solidFill>
-                <a:latin typeface="Cambria" pitchFamily="34" charset="0"/>
-                <a:ea typeface="Cambria" pitchFamily="34" charset="-122"/>
-                <a:cs typeface="Cambria" pitchFamily="34" charset="-120"/>
-              </a:rPr>
-              <a:t>EVERGREEN® — hold the water</a:t>
-            </a:r>
-            <a:endParaRPr lang="en-US" sz="1600" dirty="0"/>
-          </a:p>
-        </p:txBody>
-      </p:sp>
-      <p:sp>
-        <p:nvSpPr>
-          <p:cNvPr id="5" name="Text 3"/>
-          <p:cNvSpPr txBox="1"/>
-          <p:nvPr/>
-        </p:nvSpPr>
-        <p:spPr>
-          <a:xfrm>
-            <a:off x="594360" y="2286000"/>
-            <a:ext cx="5227168" cy="2468880"/>
-          </a:xfrm>
-          <a:prstGeom prst="rect">
-            <a:avLst/>
-          </a:prstGeom>
-          <a:noFill/>
-          <a:ln/>
-        </p:spPr>
-        <p:txBody>
-          <a:bodyPr wrap="square" lIns="0" tIns="0" rIns="0" bIns="0" rtlCol="0" anchor="t"/>
-          <a:lstStyle/>
-          <a:p>
-            <a:pPr algn="l" marL="342900" indent="-342900">
-              <a:lnSpc>
-                <a:spcPct val="122000"/>
-              </a:lnSpc>
-              <a:spcAft>
-                <a:spcPts val="1000"/>
-              </a:spcAft>
-              <a:buSzPct val="100000"/>
-              <a:buChar char="•"/>
-            </a:pPr>
-            <a:r>
-              <a:rPr lang="en-US" sz="1350" dirty="0">
-                <a:solidFill>
-                  <a:srgbClr val="2F3E47"/>
-                </a:solidFill>
-                <a:latin typeface="Calibri" pitchFamily="34" charset="0"/>
-                <a:ea typeface="Calibri" pitchFamily="34" charset="-122"/>
-                <a:cs typeface="Calibri" pitchFamily="34" charset="-120"/>
-              </a:rPr>
-              <a:t>Potassium-based hydro-retainer, placed in the root zone at planting or at the first pass of the season.</a:t>
-            </a:r>
-            <a:endParaRPr lang="en-US" sz="1350" dirty="0"/>
-          </a:p>
-          <a:p>
-            <a:pPr algn="l" marL="342900" indent="-342900">
-              <a:lnSpc>
-                <a:spcPct val="122000"/>
-              </a:lnSpc>
-              <a:spcAft>
-                <a:spcPts val="1000"/>
-              </a:spcAft>
-              <a:buSzPct val="100000"/>
-              <a:buChar char="•"/>
-            </a:pPr>
-            <a:r>
-              <a:rPr lang="en-US" sz="1350" dirty="0">
-                <a:solidFill>
-                  <a:srgbClr val="2F3E47"/>
-                </a:solidFill>
-                <a:latin typeface="Calibri" pitchFamily="34" charset="0"/>
-                <a:ea typeface="Calibri" pitchFamily="34" charset="-122"/>
-                <a:cs typeface="Calibri" pitchFamily="34" charset="-120"/>
-              </a:rPr>
-              <a:t>Captures rain and irrigation water, then releases it back to the plant as demand arises, removing water stress during the critical growth stages.</a:t>
-            </a:r>
-            <a:endParaRPr lang="en-US" sz="1350" dirty="0"/>
-          </a:p>
-          <a:p>
-            <a:pPr algn="l" marL="342900" indent="-342900">
-              <a:lnSpc>
-                <a:spcPct val="122000"/>
-              </a:lnSpc>
-              <a:spcAft>
-                <a:spcPts val="1000"/>
-              </a:spcAft>
-              <a:buSzPct val="100000"/>
-              <a:buChar char="•"/>
-            </a:pPr>
-            <a:r>
-              <a:rPr lang="en-US" sz="1350" dirty="0">
-                <a:solidFill>
-                  <a:srgbClr val="2F3E47"/>
-                </a:solidFill>
-                <a:latin typeface="Calibri" pitchFamily="34" charset="0"/>
-                <a:ea typeface="Calibri" pitchFamily="34" charset="-122"/>
-                <a:cs typeface="Calibri" pitchFamily="34" charset="-120"/>
-              </a:rPr>
-              <a:t>Absorbs on the order of 300 times its own weight; useful life of 3 to 4 years in the soil.</a:t>
-            </a:r>
-            <a:endParaRPr lang="en-US" sz="1350" dirty="0"/>
-          </a:p>
-          <a:p>
-            <a:pPr algn="l" marL="342900" indent="-342900">
-              <a:lnSpc>
-                <a:spcPct val="122000"/>
-              </a:lnSpc>
-              <a:spcAft>
-                <a:spcPts val="1000"/>
-              </a:spcAft>
-              <a:buSzPct val="100000"/>
-              <a:buChar char="•"/>
-            </a:pPr>
-            <a:r>
-              <a:rPr lang="en-US" sz="1350" dirty="0">
-                <a:solidFill>
-                  <a:srgbClr val="2F3E47"/>
-                </a:solidFill>
-                <a:latin typeface="Calibri" pitchFamily="34" charset="0"/>
-                <a:ea typeface="Calibri" pitchFamily="34" charset="-122"/>
-                <a:cs typeface="Calibri" pitchFamily="34" charset="-120"/>
-              </a:rPr>
-              <a:t>Degrades by 20 to 25% per year, with no accumulation and no risk of overdose.</a:t>
-            </a:r>
-            <a:endParaRPr lang="en-US" sz="1350" dirty="0"/>
-          </a:p>
-        </p:txBody>
-      </p:sp>
-      <p:sp>
-        <p:nvSpPr>
-          <p:cNvPr id="6" name="Text 4"/>
-          <p:cNvSpPr txBox="1"/>
-          <p:nvPr/>
-        </p:nvSpPr>
-        <p:spPr>
-          <a:xfrm>
-            <a:off x="6370168" y="1783080"/>
-            <a:ext cx="5227168" cy="411480"/>
-          </a:xfrm>
-          <a:prstGeom prst="rect">
-            <a:avLst/>
-          </a:prstGeom>
-          <a:noFill/>
-          <a:ln/>
-        </p:spPr>
-        <p:txBody>
-          <a:bodyPr wrap="square" lIns="0" tIns="0" rIns="0" bIns="0" rtlCol="0" anchor="ctr"/>
-          <a:lstStyle/>
-          <a:p>
-            <a:pPr algn="l" indent="0" marL="0">
-              <a:buNone/>
-            </a:pPr>
-            <a:r>
-              <a:rPr lang="en-US" sz="1600" b="1" dirty="0">
-                <a:solidFill>
-                  <a:srgbClr val="1D4E6B"/>
-                </a:solidFill>
-                <a:latin typeface="Cambria" pitchFamily="34" charset="0"/>
-                <a:ea typeface="Cambria" pitchFamily="34" charset="-122"/>
-                <a:cs typeface="Cambria" pitchFamily="34" charset="-120"/>
-              </a:rPr>
-              <a:t>ECOFERT® — feed without depleting</a:t>
-            </a:r>
-            <a:endParaRPr lang="en-US" sz="1600" dirty="0"/>
-          </a:p>
-        </p:txBody>
-      </p:sp>
-      <p:sp>
-        <p:nvSpPr>
-          <p:cNvPr id="7" name="Text 5"/>
-          <p:cNvSpPr txBox="1"/>
-          <p:nvPr/>
-        </p:nvSpPr>
-        <p:spPr>
-          <a:xfrm>
-            <a:off x="6370168" y="2286000"/>
-            <a:ext cx="5227168" cy="2468880"/>
-          </a:xfrm>
-          <a:prstGeom prst="rect">
-            <a:avLst/>
-          </a:prstGeom>
-          <a:noFill/>
-          <a:ln/>
-        </p:spPr>
-        <p:txBody>
-          <a:bodyPr wrap="square" lIns="0" tIns="0" rIns="0" bIns="0" rtlCol="0" anchor="t"/>
-          <a:lstStyle/>
-          <a:p>
-            <a:pPr algn="l" marL="342900" indent="-342900">
-              <a:lnSpc>
-                <a:spcPct val="122000"/>
-              </a:lnSpc>
-              <a:spcAft>
-                <a:spcPts val="1000"/>
-              </a:spcAft>
-              <a:buSzPct val="100000"/>
-              <a:buChar char="•"/>
-            </a:pPr>
-            <a:r>
-              <a:rPr lang="en-US" sz="1350" dirty="0">
-                <a:solidFill>
-                  <a:srgbClr val="2F3E47"/>
-                </a:solidFill>
-                <a:latin typeface="Calibri" pitchFamily="34" charset="0"/>
-                <a:ea typeface="Calibri" pitchFamily="34" charset="-122"/>
-                <a:cs typeface="Calibri" pitchFamily="34" charset="-120"/>
-              </a:rPr>
-              <a:t>Microdose fertilizer built on amino acids, nitrogen, phosphorus and potassium, sourced from renewable inputs.</a:t>
-            </a:r>
-            <a:endParaRPr lang="en-US" sz="1350" dirty="0"/>
-          </a:p>
-          <a:p>
-            <a:pPr algn="l" marL="342900" indent="-342900">
-              <a:lnSpc>
-                <a:spcPct val="122000"/>
-              </a:lnSpc>
-              <a:spcAft>
-                <a:spcPts val="1000"/>
-              </a:spcAft>
-              <a:buSzPct val="100000"/>
-              <a:buChar char="•"/>
-            </a:pPr>
-            <a:r>
-              <a:rPr lang="en-US" sz="1350" dirty="0">
-                <a:solidFill>
-                  <a:srgbClr val="2F3E47"/>
-                </a:solidFill>
-                <a:latin typeface="Calibri" pitchFamily="34" charset="0"/>
-                <a:ea typeface="Calibri" pitchFamily="34" charset="-122"/>
-                <a:cs typeface="Calibri" pitchFamily="34" charset="-120"/>
-              </a:rPr>
-              <a:t>Non-chelating: it does not strip the clay-humus complex and does not raise soil salinity or nitrate load.</a:t>
-            </a:r>
-            <a:endParaRPr lang="en-US" sz="1350" dirty="0"/>
-          </a:p>
-          <a:p>
-            <a:pPr algn="l" marL="342900" indent="-342900">
-              <a:lnSpc>
-                <a:spcPct val="122000"/>
-              </a:lnSpc>
-              <a:spcAft>
-                <a:spcPts val="1000"/>
-              </a:spcAft>
-              <a:buSzPct val="100000"/>
-              <a:buChar char="•"/>
-            </a:pPr>
-            <a:r>
-              <a:rPr lang="en-US" sz="1350" dirty="0">
-                <a:solidFill>
-                  <a:srgbClr val="2F3E47"/>
-                </a:solidFill>
-                <a:latin typeface="Calibri" pitchFamily="34" charset="0"/>
-                <a:ea typeface="Calibri" pitchFamily="34" charset="-122"/>
-                <a:cs typeface="Calibri" pitchFamily="34" charset="-120"/>
-              </a:rPr>
-              <a:t>SOHISCERT and EU Organic certified — the condition of entry to organic and export buyer programs.</a:t>
-            </a:r>
-            <a:endParaRPr lang="en-US" sz="1350" dirty="0"/>
-          </a:p>
-          <a:p>
-            <a:pPr algn="l" marL="342900" indent="-342900">
-              <a:lnSpc>
-                <a:spcPct val="122000"/>
-              </a:lnSpc>
-              <a:spcAft>
-                <a:spcPts val="1000"/>
-              </a:spcAft>
-              <a:buSzPct val="100000"/>
-              <a:buChar char="•"/>
-            </a:pPr>
-            <a:r>
-              <a:rPr lang="en-US" sz="1350" dirty="0">
-                <a:solidFill>
-                  <a:srgbClr val="2F3E47"/>
-                </a:solidFill>
-                <a:latin typeface="Calibri" pitchFamily="34" charset="0"/>
-                <a:ea typeface="Calibri" pitchFamily="34" charset="-122"/>
-                <a:cs typeface="Calibri" pitchFamily="34" charset="-120"/>
-              </a:rPr>
-              <a:t>1 to 4 bottles of 140 ml per hectare, compatible with existing fertigation equipment.</a:t>
-            </a:r>
-            <a:endParaRPr lang="en-US" sz="1350" dirty="0"/>
-          </a:p>
-        </p:txBody>
-      </p:sp>
-      <p:sp>
-        <p:nvSpPr>
-          <p:cNvPr id="8" name="Shape 6"/>
+      <p:graphicFrame>
+        <p:nvGraphicFramePr>
+          <p:cNvPr id="4" name="Chart 0" descr=""/>
+          <p:cNvGraphicFramePr/>
+          <p:nvPr/>
+        </p:nvGraphicFramePr>
+        <p:xfrm>
+          <a:off x="594360" y="1783080"/>
+          <a:ext cx="7360920" cy="3977640"/>
+        </p:xfrm>
+        <a:graphic xmlns:a="http://schemas.openxmlformats.org/drawingml/2006/main">
+          <a:graphicData uri="http://schemas.openxmlformats.org/drawingml/2006/chart">
+            <c:chart xmlns:c="http://schemas.openxmlformats.org/drawingml/2006/chart" r:id="rId1"/>
+          </a:graphicData>
+        </a:graphic>
+      </p:graphicFrame>
+      <p:sp>
+        <p:nvSpPr>
+          <p:cNvPr id="5" name="Shape 2"/>
           <p:cNvSpPr/>
           <p:nvPr/>
         </p:nvSpPr>
         <p:spPr>
           <a:xfrm>
-            <a:off x="594360" y="4846320"/>
-            <a:ext cx="11002975" cy="960120"/>
+            <a:off x="8275320" y="1783080"/>
+            <a:ext cx="3291840" cy="3977640"/>
           </a:xfrm>
           <a:prstGeom prst="roundRect">
             <a:avLst>
-              <a:gd name="adj" fmla="val 7619"/>
+              <a:gd name="adj" fmla="val 2778"/>
             </a:avLst>
           </a:prstGeom>
           <a:solidFill>
@@ -4506,14 +4556,53 @@
       </p:sp>
       <p:sp>
         <p:nvSpPr>
-          <p:cNvPr id="9" name="Text 7"/>
-          <p:cNvSpPr txBox="1"/>
-          <p:nvPr/>
-        </p:nvSpPr>
-        <p:spPr>
-          <a:xfrm>
-            <a:off x="822960" y="4983480"/>
-            <a:ext cx="10545775" cy="713232"/>
+          <p:cNvPr id="6" name="Text 3"/>
+          <p:cNvSpPr txBox="1"/>
+          <p:nvPr/>
+        </p:nvSpPr>
+        <p:spPr>
+          <a:xfrm>
+            <a:off x="8503920" y="2011680"/>
+            <a:ext cx="2834640" cy="457200"/>
+          </a:xfrm>
+          <a:prstGeom prst="rect">
+            <a:avLst/>
+          </a:prstGeom>
+          <a:noFill/>
+          <a:ln/>
+        </p:spPr>
+        <p:txBody>
+          <a:bodyPr wrap="square" lIns="0" tIns="0" rIns="0" bIns="0" rtlCol="0" anchor="ctr"/>
+          <a:lstStyle/>
+          <a:p>
+            <a:pPr algn="l" indent="0" marL="0">
+              <a:buNone/>
+            </a:pPr>
+            <a:r>
+              <a:rPr lang="en-US" sz="1300" b="1" dirty="0">
+                <a:solidFill>
+                  <a:srgbClr val="1D4E6B"/>
+                </a:solidFill>
+                <a:latin typeface="Cambria" pitchFamily="34" charset="0"/>
+                <a:ea typeface="Cambria" pitchFamily="34" charset="-122"/>
+                <a:cs typeface="Cambria" pitchFamily="34" charset="-120"/>
+              </a:rPr>
+              <a:t>Read with care</a:t>
+            </a:r>
+            <a:endParaRPr lang="en-US" sz="1300" dirty="0"/>
+          </a:p>
+        </p:txBody>
+      </p:sp>
+      <p:sp>
+        <p:nvSpPr>
+          <p:cNvPr id="7" name="Text 4"/>
+          <p:cNvSpPr txBox="1"/>
+          <p:nvPr/>
+        </p:nvSpPr>
+        <p:spPr>
+          <a:xfrm>
+            <a:off x="8503920" y="2560320"/>
+            <a:ext cx="2834640" cy="3017520"/>
           </a:xfrm>
           <a:prstGeom prst="rect">
             <a:avLst/>
@@ -4527,28 +4616,57 @@
           <a:p>
             <a:pPr algn="l" indent="0" marL="0">
               <a:lnSpc>
-                <a:spcPct val="118000"/>
+                <a:spcPct val="125000"/>
               </a:lnSpc>
               <a:buNone/>
             </a:pPr>
             <a:r>
-              <a:rPr lang="en-US" sz="1100" dirty="0">
-                <a:solidFill>
-                  <a:srgbClr val="6B7D87"/>
-                </a:solidFill>
-                <a:latin typeface="Calibri" pitchFamily="34" charset="0"/>
-                <a:ea typeface="Calibri" pitchFamily="34" charset="-122"/>
-                <a:cs typeface="Calibri" pitchFamily="34" charset="-120"/>
-              </a:rPr>
-              <a:t>The two products are sold separately but were designed to reinforce one another: the hydro-retainer extends how long water stays available, the fertilizer converts that available water into growth without degrading the soil.</a:t>
-            </a:r>
-            <a:endParaRPr lang="en-US" sz="1100" dirty="0"/>
-          </a:p>
-        </p:txBody>
-      </p:sp>
-      <p:sp>
-        <p:nvSpPr>
-          <p:cNvPr id="10" name="Text 8"/>
+              <a:rPr lang="en-US" sz="1200" dirty="0">
+                <a:solidFill>
+                  <a:srgbClr val="2F3E47"/>
+                </a:solidFill>
+                <a:latin typeface="Calibri" pitchFamily="34" charset="0"/>
+                <a:ea typeface="Calibri" pitchFamily="34" charset="-122"/>
+                <a:cs typeface="Calibri" pitchFamily="34" charset="-120"/>
+              </a:rPr>
+              <a:t>Ranges used by our dose calculator, for a normally managed crop with EVERGREEN® applied at planting.</a:t>
+            </a:r>
+            <a:endParaRPr lang="en-US" sz="1200" dirty="0"/>
+          </a:p>
+          <a:p>
+            <a:pPr algn="l" indent="0" marL="0">
+              <a:lnSpc>
+                <a:spcPct val="125000"/>
+              </a:lnSpc>
+              <a:buNone/>
+            </a:pPr>
+            <a:endParaRPr lang="en-US" sz="1200" dirty="0"/>
+          </a:p>
+          <a:p>
+            <a:pPr algn="l" indent="0" marL="0">
+              <a:lnSpc>
+                <a:spcPct val="125000"/>
+              </a:lnSpc>
+              <a:buNone/>
+            </a:pPr>
+            <a:r>
+              <a:rPr lang="en-US" sz="1200" dirty="0">
+                <a:solidFill>
+                  <a:srgbClr val="2F3E47"/>
+                </a:solidFill>
+                <a:latin typeface="Calibri" pitchFamily="34" charset="0"/>
+                <a:ea typeface="Calibri" pitchFamily="34" charset="-122"/>
+                <a:cs typeface="Calibri" pitchFamily="34" charset="-120"/>
+              </a:rPr>
+              <a:t>Actual results depend on soil, climate and management. For cereals, no gain is claimed without a field trial.</a:t>
+            </a:r>
+            <a:endParaRPr lang="en-US" sz="1200" dirty="0"/>
+          </a:p>
+        </p:txBody>
+      </p:sp>
+      <p:sp>
+        <p:nvSpPr>
+          <p:cNvPr id="8" name="Text 5"/>
           <p:cNvSpPr txBox="1"/>
           <p:nvPr/>
         </p:nvSpPr>
@@ -4589,7 +4707,7 @@
       </p:sp>
       <p:sp>
         <p:nvSpPr>
-          <p:cNvPr id="11" name="Text 9"/>
+          <p:cNvPr id="9" name="Text 6"/>
           <p:cNvSpPr txBox="1"/>
           <p:nvPr/>
         </p:nvSpPr>
@@ -4693,7 +4811,7 @@
                 <a:ea typeface="Calibri" pitchFamily="34" charset="-122"/>
                 <a:cs typeface="Calibri" pitchFamily="34" charset="-120"/>
               </a:rPr>
-              <a:t>The rest of the range</a:t>
+              <a:t>OUR ANSWER</a:t>
             </a:r>
             <a:endParaRPr lang="en-US" sz="1150" dirty="0"/>
           </a:p>
@@ -4732,7 +4850,7 @@
                 <a:ea typeface="Cambria" pitchFamily="34" charset="-122"/>
                 <a:cs typeface="Cambria" pitchFamily="34" charset="-120"/>
               </a:rPr>
-              <a:t>Protecting crops, holding soils</a:t>
+              <a:t>Two technologies for two different constraints</a:t>
             </a:r>
             <a:endParaRPr lang="en-US" sz="3000" dirty="0"/>
           </a:p>
@@ -4771,7 +4889,7 @@
                 <a:ea typeface="Cambria" pitchFamily="34" charset="-122"/>
                 <a:cs typeface="Cambria" pitchFamily="34" charset="-120"/>
               </a:rPr>
-              <a:t>NAPEMA® — protection without residue</a:t>
+              <a:t>EVERGREEN® — hold the water</a:t>
             </a:r>
             <a:endParaRPr lang="en-US" sz="1600" dirty="0"/>
           </a:p>
@@ -4817,7 +4935,7 @@
                 <a:ea typeface="Calibri" pitchFamily="34" charset="-122"/>
                 <a:cs typeface="Calibri" pitchFamily="34" charset="-120"/>
               </a:rPr>
-              <a:t>Controls diseases, parasites, fungi and pests, with no synthetic molecule.</a:t>
+              <a:t>Potassium-based hydro-retainer, placed in the root zone at planting or at the first pass of the season.</a:t>
             </a:r>
             <a:endParaRPr lang="en-US" sz="1350" dirty="0"/>
           </a:p>
@@ -4841,7 +4959,7 @@
                 <a:ea typeface="Calibri" pitchFamily="34" charset="-122"/>
                 <a:cs typeface="Calibri" pitchFamily="34" charset="-120"/>
               </a:rPr>
-              <a:t>Foliar and root spraying, working both preventively and curatively.</a:t>
+              <a:t>Captures rain and irrigation water, then releases it back to the plant as demand arises, removing water stress during the critical growth stages.</a:t>
             </a:r>
             <a:endParaRPr lang="en-US" sz="1350" dirty="0"/>
           </a:p>
@@ -4865,7 +4983,7 @@
                 <a:ea typeface="Calibri" pitchFamily="34" charset="-122"/>
                 <a:cs typeface="Calibri" pitchFamily="34" charset="-120"/>
               </a:rPr>
-              <a:t>No residue in soil, plant or air: pollinators and beneficial insects are spared.</a:t>
+              <a:t>Absorbs on the order of 300 times its own weight; useful life of 3 to 4 years in the soil.</a:t>
             </a:r>
             <a:endParaRPr lang="en-US" sz="1350" dirty="0"/>
           </a:p>
@@ -4889,7 +5007,7 @@
                 <a:ea typeface="Calibri" pitchFamily="34" charset="-122"/>
                 <a:cs typeface="Calibri" pitchFamily="34" charset="-120"/>
               </a:rPr>
-              <a:t>Formulated for one precise problem: mealybug, citrus greening (HLB), nematodes.</a:t>
+              <a:t>Degrades by 20 to 25% per year, with no accumulation and no risk of overdose.</a:t>
             </a:r>
             <a:endParaRPr lang="en-US" sz="1350" dirty="0"/>
           </a:p>
@@ -4928,7 +5046,7 @@
                 <a:ea typeface="Cambria" pitchFamily="34" charset="-122"/>
                 <a:cs typeface="Cambria" pitchFamily="34" charset="-120"/>
               </a:rPr>
-              <a:t>Paulownia ALTIFOLIA® — the tree for hot regions</a:t>
+              <a:t>ECOFERT® — feed without depleting</a:t>
             </a:r>
             <a:endParaRPr lang="en-US" sz="1600" dirty="0"/>
           </a:p>
@@ -4974,7 +5092,7 @@
                 <a:ea typeface="Calibri" pitchFamily="34" charset="-122"/>
                 <a:cs typeface="Calibri" pitchFamily="34" charset="-120"/>
               </a:rPr>
-              <a:t>13 to 15 m in six to eight years, with a wide trunk.</a:t>
+              <a:t>Microdose fertilizer built on amino acids, nitrogen, phosphorus and potassium, sourced from renewable inputs.</a:t>
             </a:r>
             <a:endParaRPr lang="en-US" sz="1350" dirty="0"/>
           </a:p>
@@ -4998,7 +5116,7 @@
                 <a:ea typeface="Calibri" pitchFamily="34" charset="-122"/>
                 <a:cs typeface="Calibri" pitchFamily="34" charset="-120"/>
               </a:rPr>
-              <a:t>Combined with 100 g of EVERGREEN® per plant, irrigation needs drop by 50%.</a:t>
+              <a:t>Non-chelating: it does not strip the clay-humus complex and does not raise soil salinity or nitrate load.</a:t>
             </a:r>
             <a:endParaRPr lang="en-US" sz="1350" dirty="0"/>
           </a:p>
@@ -5022,7 +5140,7 @@
                 <a:ea typeface="Calibri" pitchFamily="34" charset="-122"/>
                 <a:cs typeface="Calibri" pitchFamily="34" charset="-120"/>
               </a:rPr>
-              <a:t>Withstands −25 °C to +45 °C; the wood only ignites above 426 °C.</a:t>
+              <a:t>SOHISCERT and EU Organic certified — the condition of entry to organic and export buyer programs.</a:t>
             </a:r>
             <a:endParaRPr lang="en-US" sz="1350" dirty="0"/>
           </a:p>
@@ -5046,7 +5164,7 @@
                 <a:ea typeface="Calibri" pitchFamily="34" charset="-122"/>
                 <a:cs typeface="Calibri" pitchFamily="34" charset="-120"/>
               </a:rPr>
-              <a:t>Windbreak, protection against soil erosion, 400 to 700 kg of honey per hectare.</a:t>
+              <a:t>1 to 4 bottles of 140 ml per hectare, compatible with existing fertigation equipment.</a:t>
             </a:r>
             <a:endParaRPr lang="en-US" sz="1350" dirty="0"/>
           </a:p>
@@ -5115,7 +5233,7 @@
                 <a:ea typeface="Calibri" pitchFamily="34" charset="-122"/>
                 <a:cs typeface="Calibri" pitchFamily="34" charset="-120"/>
               </a:rPr>
-              <a:t>Plants delivered potted (25 to 30 cm), certified disease-free and replaced under warranty in case of loss. First harvest at the end of year six, with wood valued at around €400 to €450 per m³.</a:t>
+              <a:t>The two products are sold separately but were designed to reinforce one another: the hydro-retainer extends how long water stays available, the fertilizer converts that available water into growth without degrading the soil.</a:t>
             </a:r>
             <a:endParaRPr lang="en-US" sz="1100" dirty="0"/>
           </a:p>
@@ -5268,7 +5386,7 @@
                 <a:ea typeface="Calibri" pitchFamily="34" charset="-122"/>
                 <a:cs typeface="Calibri" pitchFamily="34" charset="-120"/>
               </a:rPr>
-              <a:t>ORDERS OF MAGNITUDE</a:t>
+              <a:t>The rest of the range</a:t>
             </a:r>
             <a:endParaRPr lang="en-US" sz="1150" dirty="0"/>
           </a:p>
@@ -5307,42 +5425,340 @@
                 <a:ea typeface="Cambria" pitchFamily="34" charset="-122"/>
                 <a:cs typeface="Cambria" pitchFamily="34" charset="-120"/>
               </a:rPr>
-              <a:t>Expected water savings by irrigation method</a:t>
+              <a:t>Protecting crops, holding soils</a:t>
             </a:r>
             <a:endParaRPr lang="en-US" sz="3000" dirty="0"/>
           </a:p>
         </p:txBody>
       </p:sp>
-      <p:graphicFrame>
-        <p:nvGraphicFramePr>
-          <p:cNvPr id="4" name="Chart 0" descr=""/>
-          <p:cNvGraphicFramePr/>
-          <p:nvPr/>
-        </p:nvGraphicFramePr>
-        <p:xfrm>
-          <a:off x="594360" y="1783080"/>
-          <a:ext cx="7360920" cy="3977640"/>
-        </p:xfrm>
-        <a:graphic xmlns:a="http://schemas.openxmlformats.org/drawingml/2006/main">
-          <a:graphicData uri="http://schemas.openxmlformats.org/drawingml/2006/chart">
-            <c:chart xmlns:c="http://schemas.openxmlformats.org/drawingml/2006/chart" r:id="rId1"/>
-          </a:graphicData>
-        </a:graphic>
-      </p:graphicFrame>
-      <p:sp>
-        <p:nvSpPr>
-          <p:cNvPr id="5" name="Shape 2"/>
+      <p:sp>
+        <p:nvSpPr>
+          <p:cNvPr id="4" name="Text 2"/>
+          <p:cNvSpPr txBox="1"/>
+          <p:nvPr/>
+        </p:nvSpPr>
+        <p:spPr>
+          <a:xfrm>
+            <a:off x="594360" y="1783080"/>
+            <a:ext cx="5227168" cy="411480"/>
+          </a:xfrm>
+          <a:prstGeom prst="rect">
+            <a:avLst/>
+          </a:prstGeom>
+          <a:noFill/>
+          <a:ln/>
+        </p:spPr>
+        <p:txBody>
+          <a:bodyPr wrap="square" lIns="0" tIns="0" rIns="0" bIns="0" rtlCol="0" anchor="ctr"/>
+          <a:lstStyle/>
+          <a:p>
+            <a:pPr algn="l" indent="0" marL="0">
+              <a:buNone/>
+            </a:pPr>
+            <a:r>
+              <a:rPr lang="en-US" sz="1600" b="1" dirty="0">
+                <a:solidFill>
+                  <a:srgbClr val="1D4E6B"/>
+                </a:solidFill>
+                <a:latin typeface="Cambria" pitchFamily="34" charset="0"/>
+                <a:ea typeface="Cambria" pitchFamily="34" charset="-122"/>
+                <a:cs typeface="Cambria" pitchFamily="34" charset="-120"/>
+              </a:rPr>
+              <a:t>NAPEMA® — protection without residue</a:t>
+            </a:r>
+            <a:endParaRPr lang="en-US" sz="1600" dirty="0"/>
+          </a:p>
+        </p:txBody>
+      </p:sp>
+      <p:sp>
+        <p:nvSpPr>
+          <p:cNvPr id="5" name="Text 3"/>
+          <p:cNvSpPr txBox="1"/>
+          <p:nvPr/>
+        </p:nvSpPr>
+        <p:spPr>
+          <a:xfrm>
+            <a:off x="594360" y="2286000"/>
+            <a:ext cx="5227168" cy="2468880"/>
+          </a:xfrm>
+          <a:prstGeom prst="rect">
+            <a:avLst/>
+          </a:prstGeom>
+          <a:noFill/>
+          <a:ln/>
+        </p:spPr>
+        <p:txBody>
+          <a:bodyPr wrap="square" lIns="0" tIns="0" rIns="0" bIns="0" rtlCol="0" anchor="t"/>
+          <a:lstStyle/>
+          <a:p>
+            <a:pPr algn="l" marL="342900" indent="-342900">
+              <a:lnSpc>
+                <a:spcPct val="122000"/>
+              </a:lnSpc>
+              <a:spcAft>
+                <a:spcPts val="1000"/>
+              </a:spcAft>
+              <a:buSzPct val="100000"/>
+              <a:buChar char="•"/>
+            </a:pPr>
+            <a:r>
+              <a:rPr lang="en-US" sz="1350" dirty="0">
+                <a:solidFill>
+                  <a:srgbClr val="2F3E47"/>
+                </a:solidFill>
+                <a:latin typeface="Calibri" pitchFamily="34" charset="0"/>
+                <a:ea typeface="Calibri" pitchFamily="34" charset="-122"/>
+                <a:cs typeface="Calibri" pitchFamily="34" charset="-120"/>
+              </a:rPr>
+              <a:t>Controls diseases, parasites, fungi and pests, with no synthetic molecule.</a:t>
+            </a:r>
+            <a:endParaRPr lang="en-US" sz="1350" dirty="0"/>
+          </a:p>
+          <a:p>
+            <a:pPr algn="l" marL="342900" indent="-342900">
+              <a:lnSpc>
+                <a:spcPct val="122000"/>
+              </a:lnSpc>
+              <a:spcAft>
+                <a:spcPts val="1000"/>
+              </a:spcAft>
+              <a:buSzPct val="100000"/>
+              <a:buChar char="•"/>
+            </a:pPr>
+            <a:r>
+              <a:rPr lang="en-US" sz="1350" dirty="0">
+                <a:solidFill>
+                  <a:srgbClr val="2F3E47"/>
+                </a:solidFill>
+                <a:latin typeface="Calibri" pitchFamily="34" charset="0"/>
+                <a:ea typeface="Calibri" pitchFamily="34" charset="-122"/>
+                <a:cs typeface="Calibri" pitchFamily="34" charset="-120"/>
+              </a:rPr>
+              <a:t>Foliar and root spraying, working both preventively and curatively.</a:t>
+            </a:r>
+            <a:endParaRPr lang="en-US" sz="1350" dirty="0"/>
+          </a:p>
+          <a:p>
+            <a:pPr algn="l" marL="342900" indent="-342900">
+              <a:lnSpc>
+                <a:spcPct val="122000"/>
+              </a:lnSpc>
+              <a:spcAft>
+                <a:spcPts val="1000"/>
+              </a:spcAft>
+              <a:buSzPct val="100000"/>
+              <a:buChar char="•"/>
+            </a:pPr>
+            <a:r>
+              <a:rPr lang="en-US" sz="1350" dirty="0">
+                <a:solidFill>
+                  <a:srgbClr val="2F3E47"/>
+                </a:solidFill>
+                <a:latin typeface="Calibri" pitchFamily="34" charset="0"/>
+                <a:ea typeface="Calibri" pitchFamily="34" charset="-122"/>
+                <a:cs typeface="Calibri" pitchFamily="34" charset="-120"/>
+              </a:rPr>
+              <a:t>No residue in soil, plant or air: pollinators and beneficial insects are spared.</a:t>
+            </a:r>
+            <a:endParaRPr lang="en-US" sz="1350" dirty="0"/>
+          </a:p>
+          <a:p>
+            <a:pPr algn="l" marL="342900" indent="-342900">
+              <a:lnSpc>
+                <a:spcPct val="122000"/>
+              </a:lnSpc>
+              <a:spcAft>
+                <a:spcPts val="1000"/>
+              </a:spcAft>
+              <a:buSzPct val="100000"/>
+              <a:buChar char="•"/>
+            </a:pPr>
+            <a:r>
+              <a:rPr lang="en-US" sz="1350" dirty="0">
+                <a:solidFill>
+                  <a:srgbClr val="2F3E47"/>
+                </a:solidFill>
+                <a:latin typeface="Calibri" pitchFamily="34" charset="0"/>
+                <a:ea typeface="Calibri" pitchFamily="34" charset="-122"/>
+                <a:cs typeface="Calibri" pitchFamily="34" charset="-120"/>
+              </a:rPr>
+              <a:t>Formulated for one precise problem: mealybug, citrus greening (HLB), nematodes.</a:t>
+            </a:r>
+            <a:endParaRPr lang="en-US" sz="1350" dirty="0"/>
+          </a:p>
+        </p:txBody>
+      </p:sp>
+      <p:sp>
+        <p:nvSpPr>
+          <p:cNvPr id="6" name="Text 4"/>
+          <p:cNvSpPr txBox="1"/>
+          <p:nvPr/>
+        </p:nvSpPr>
+        <p:spPr>
+          <a:xfrm>
+            <a:off x="6370168" y="1783080"/>
+            <a:ext cx="5227168" cy="411480"/>
+          </a:xfrm>
+          <a:prstGeom prst="rect">
+            <a:avLst/>
+          </a:prstGeom>
+          <a:noFill/>
+          <a:ln/>
+        </p:spPr>
+        <p:txBody>
+          <a:bodyPr wrap="square" lIns="0" tIns="0" rIns="0" bIns="0" rtlCol="0" anchor="ctr"/>
+          <a:lstStyle/>
+          <a:p>
+            <a:pPr algn="l" indent="0" marL="0">
+              <a:buNone/>
+            </a:pPr>
+            <a:r>
+              <a:rPr lang="en-US" sz="1600" b="1" dirty="0">
+                <a:solidFill>
+                  <a:srgbClr val="1D4E6B"/>
+                </a:solidFill>
+                <a:latin typeface="Cambria" pitchFamily="34" charset="0"/>
+                <a:ea typeface="Cambria" pitchFamily="34" charset="-122"/>
+                <a:cs typeface="Cambria" pitchFamily="34" charset="-120"/>
+              </a:rPr>
+              <a:t>Paulownia ALTIFOLIA® — the tree for hot regions</a:t>
+            </a:r>
+            <a:endParaRPr lang="en-US" sz="1600" dirty="0"/>
+          </a:p>
+        </p:txBody>
+      </p:sp>
+      <p:sp>
+        <p:nvSpPr>
+          <p:cNvPr id="7" name="Text 5"/>
+          <p:cNvSpPr txBox="1"/>
+          <p:nvPr/>
+        </p:nvSpPr>
+        <p:spPr>
+          <a:xfrm>
+            <a:off x="6370168" y="2286000"/>
+            <a:ext cx="5227168" cy="2468880"/>
+          </a:xfrm>
+          <a:prstGeom prst="rect">
+            <a:avLst/>
+          </a:prstGeom>
+          <a:noFill/>
+          <a:ln/>
+        </p:spPr>
+        <p:txBody>
+          <a:bodyPr wrap="square" lIns="0" tIns="0" rIns="0" bIns="0" rtlCol="0" anchor="t"/>
+          <a:lstStyle/>
+          <a:p>
+            <a:pPr algn="l" marL="342900" indent="-342900">
+              <a:lnSpc>
+                <a:spcPct val="122000"/>
+              </a:lnSpc>
+              <a:spcAft>
+                <a:spcPts val="1000"/>
+              </a:spcAft>
+              <a:buSzPct val="100000"/>
+              <a:buChar char="•"/>
+            </a:pPr>
+            <a:r>
+              <a:rPr lang="en-US" sz="1350" dirty="0">
+                <a:solidFill>
+                  <a:srgbClr val="2F3E47"/>
+                </a:solidFill>
+                <a:latin typeface="Calibri" pitchFamily="34" charset="0"/>
+                <a:ea typeface="Calibri" pitchFamily="34" charset="-122"/>
+                <a:cs typeface="Calibri" pitchFamily="34" charset="-120"/>
+              </a:rPr>
+              <a:t>13 to 15 m in six to eight years, with a wide trunk.</a:t>
+            </a:r>
+            <a:endParaRPr lang="en-US" sz="1350" dirty="0"/>
+          </a:p>
+          <a:p>
+            <a:pPr algn="l" marL="342900" indent="-342900">
+              <a:lnSpc>
+                <a:spcPct val="122000"/>
+              </a:lnSpc>
+              <a:spcAft>
+                <a:spcPts val="1000"/>
+              </a:spcAft>
+              <a:buSzPct val="100000"/>
+              <a:buChar char="•"/>
+            </a:pPr>
+            <a:r>
+              <a:rPr lang="en-US" sz="1350" dirty="0">
+                <a:solidFill>
+                  <a:srgbClr val="2F3E47"/>
+                </a:solidFill>
+                <a:latin typeface="Calibri" pitchFamily="34" charset="0"/>
+                <a:ea typeface="Calibri" pitchFamily="34" charset="-122"/>
+                <a:cs typeface="Calibri" pitchFamily="34" charset="-120"/>
+              </a:rPr>
+              <a:t>Combined with 100 g of EVERGREEN® per plant, irrigation needs drop by 50%.</a:t>
+            </a:r>
+            <a:endParaRPr lang="en-US" sz="1350" dirty="0"/>
+          </a:p>
+          <a:p>
+            <a:pPr algn="l" marL="342900" indent="-342900">
+              <a:lnSpc>
+                <a:spcPct val="122000"/>
+              </a:lnSpc>
+              <a:spcAft>
+                <a:spcPts val="1000"/>
+              </a:spcAft>
+              <a:buSzPct val="100000"/>
+              <a:buChar char="•"/>
+            </a:pPr>
+            <a:r>
+              <a:rPr lang="en-US" sz="1350" dirty="0">
+                <a:solidFill>
+                  <a:srgbClr val="2F3E47"/>
+                </a:solidFill>
+                <a:latin typeface="Calibri" pitchFamily="34" charset="0"/>
+                <a:ea typeface="Calibri" pitchFamily="34" charset="-122"/>
+                <a:cs typeface="Calibri" pitchFamily="34" charset="-120"/>
+              </a:rPr>
+              <a:t>Withstands −25 °C to +45 °C; the wood only ignites above 426 °C.</a:t>
+            </a:r>
+            <a:endParaRPr lang="en-US" sz="1350" dirty="0"/>
+          </a:p>
+          <a:p>
+            <a:pPr algn="l" marL="342900" indent="-342900">
+              <a:lnSpc>
+                <a:spcPct val="122000"/>
+              </a:lnSpc>
+              <a:spcAft>
+                <a:spcPts val="1000"/>
+              </a:spcAft>
+              <a:buSzPct val="100000"/>
+              <a:buChar char="•"/>
+            </a:pPr>
+            <a:r>
+              <a:rPr lang="en-US" sz="1350" dirty="0">
+                <a:solidFill>
+                  <a:srgbClr val="2F3E47"/>
+                </a:solidFill>
+                <a:latin typeface="Calibri" pitchFamily="34" charset="0"/>
+                <a:ea typeface="Calibri" pitchFamily="34" charset="-122"/>
+                <a:cs typeface="Calibri" pitchFamily="34" charset="-120"/>
+              </a:rPr>
+              <a:t>Windbreak, protection against soil erosion, 400 to 700 kg of honey per hectare.</a:t>
+            </a:r>
+            <a:endParaRPr lang="en-US" sz="1350" dirty="0"/>
+          </a:p>
+        </p:txBody>
+      </p:sp>
+      <p:sp>
+        <p:nvSpPr>
+          <p:cNvPr id="8" name="Shape 6"/>
           <p:cNvSpPr/>
           <p:nvPr/>
         </p:nvSpPr>
         <p:spPr>
           <a:xfrm>
-            <a:off x="8275320" y="1783080"/>
-            <a:ext cx="3291840" cy="3977640"/>
+            <a:off x="594360" y="4846320"/>
+            <a:ext cx="11002975" cy="960120"/>
           </a:xfrm>
           <a:prstGeom prst="roundRect">
             <a:avLst>
-              <a:gd name="adj" fmla="val 2778"/>
+              <a:gd name="adj" fmla="val 7619"/>
             </a:avLst>
           </a:prstGeom>
           <a:solidFill>
@@ -5358,53 +5774,14 @@
       </p:sp>
       <p:sp>
         <p:nvSpPr>
-          <p:cNvPr id="6" name="Text 3"/>
-          <p:cNvSpPr txBox="1"/>
-          <p:nvPr/>
-        </p:nvSpPr>
-        <p:spPr>
-          <a:xfrm>
-            <a:off x="8503920" y="2011680"/>
-            <a:ext cx="2834640" cy="457200"/>
-          </a:xfrm>
-          <a:prstGeom prst="rect">
-            <a:avLst/>
-          </a:prstGeom>
-          <a:noFill/>
-          <a:ln/>
-        </p:spPr>
-        <p:txBody>
-          <a:bodyPr wrap="square" lIns="0" tIns="0" rIns="0" bIns="0" rtlCol="0" anchor="ctr"/>
-          <a:lstStyle/>
-          <a:p>
-            <a:pPr algn="l" indent="0" marL="0">
-              <a:buNone/>
-            </a:pPr>
-            <a:r>
-              <a:rPr lang="en-US" sz="1300" b="1" dirty="0">
-                <a:solidFill>
-                  <a:srgbClr val="1D4E6B"/>
-                </a:solidFill>
-                <a:latin typeface="Cambria" pitchFamily="34" charset="0"/>
-                <a:ea typeface="Cambria" pitchFamily="34" charset="-122"/>
-                <a:cs typeface="Cambria" pitchFamily="34" charset="-120"/>
-              </a:rPr>
-              <a:t>Read with care</a:t>
-            </a:r>
-            <a:endParaRPr lang="en-US" sz="1300" dirty="0"/>
-          </a:p>
-        </p:txBody>
-      </p:sp>
-      <p:sp>
-        <p:nvSpPr>
-          <p:cNvPr id="7" name="Text 4"/>
-          <p:cNvSpPr txBox="1"/>
-          <p:nvPr/>
-        </p:nvSpPr>
-        <p:spPr>
-          <a:xfrm>
-            <a:off x="8503920" y="2560320"/>
-            <a:ext cx="2834640" cy="3017520"/>
+          <p:cNvPr id="9" name="Text 7"/>
+          <p:cNvSpPr txBox="1"/>
+          <p:nvPr/>
+        </p:nvSpPr>
+        <p:spPr>
+          <a:xfrm>
+            <a:off x="822960" y="4983480"/>
+            <a:ext cx="10545775" cy="713232"/>
           </a:xfrm>
           <a:prstGeom prst="rect">
             <a:avLst/>
@@ -5418,57 +5795,28 @@
           <a:p>
             <a:pPr algn="l" indent="0" marL="0">
               <a:lnSpc>
-                <a:spcPct val="125000"/>
+                <a:spcPct val="118000"/>
               </a:lnSpc>
               <a:buNone/>
             </a:pPr>
             <a:r>
-              <a:rPr lang="en-US" sz="1200" dirty="0">
-                <a:solidFill>
-                  <a:srgbClr val="2F3E47"/>
-                </a:solidFill>
-                <a:latin typeface="Calibri" pitchFamily="34" charset="0"/>
-                <a:ea typeface="Calibri" pitchFamily="34" charset="-122"/>
-                <a:cs typeface="Calibri" pitchFamily="34" charset="-120"/>
-              </a:rPr>
-              <a:t>These ranges are indicative and rest on documented gains from our hydro-retainers.</a:t>
-            </a:r>
-            <a:endParaRPr lang="en-US" sz="1200" dirty="0"/>
-          </a:p>
-          <a:p>
-            <a:pPr algn="l" indent="0" marL="0">
-              <a:lnSpc>
-                <a:spcPct val="125000"/>
-              </a:lnSpc>
-              <a:buNone/>
-            </a:pPr>
-            <a:endParaRPr lang="en-US" sz="1200" dirty="0"/>
-          </a:p>
-          <a:p>
-            <a:pPr algn="l" indent="0" marL="0">
-              <a:lnSpc>
-                <a:spcPct val="125000"/>
-              </a:lnSpc>
-              <a:buNone/>
-            </a:pPr>
-            <a:r>
-              <a:rPr lang="en-US" sz="1200" dirty="0">
-                <a:solidFill>
-                  <a:srgbClr val="2F3E47"/>
-                </a:solidFill>
-                <a:latin typeface="Calibri" pitchFamily="34" charset="0"/>
-                <a:ea typeface="Calibri" pitchFamily="34" charset="-122"/>
-                <a:cs typeface="Calibri" pitchFamily="34" charset="-120"/>
-              </a:rPr>
-              <a:t>Actual results depend on the soil, the climate and the crop. The figures give an order of magnitude only: they are in no case a guaranteed, contractual or absolute value.</a:t>
-            </a:r>
-            <a:endParaRPr lang="en-US" sz="1200" dirty="0"/>
-          </a:p>
-        </p:txBody>
-      </p:sp>
-      <p:sp>
-        <p:nvSpPr>
-          <p:cNvPr id="8" name="Text 5"/>
+              <a:rPr lang="en-US" sz="1100" dirty="0">
+                <a:solidFill>
+                  <a:srgbClr val="6B7D87"/>
+                </a:solidFill>
+                <a:latin typeface="Calibri" pitchFamily="34" charset="0"/>
+                <a:ea typeface="Calibri" pitchFamily="34" charset="-122"/>
+                <a:cs typeface="Calibri" pitchFamily="34" charset="-120"/>
+              </a:rPr>
+              <a:t>Plants delivered potted (25 to 30 cm), certified disease-free and replaced under warranty in case of loss. First harvest at the end of year six, with wood valued at around €400 to €450 per m³.</a:t>
+            </a:r>
+            <a:endParaRPr lang="en-US" sz="1100" dirty="0"/>
+          </a:p>
+        </p:txBody>
+      </p:sp>
+      <p:sp>
+        <p:nvSpPr>
+          <p:cNvPr id="10" name="Text 8"/>
           <p:cNvSpPr txBox="1"/>
           <p:nvPr/>
         </p:nvSpPr>
@@ -5509,7 +5857,7 @@
       </p:sp>
       <p:sp>
         <p:nvSpPr>
-          <p:cNvPr id="9" name="Text 6"/>
+          <p:cNvPr id="11" name="Text 9"/>
           <p:cNvSpPr txBox="1"/>
           <p:nvPr/>
         </p:nvSpPr>
@@ -5613,7 +5961,7 @@
                 <a:ea typeface="Calibri" pitchFamily="34" charset="-122"/>
                 <a:cs typeface="Calibri" pitchFamily="34" charset="-120"/>
               </a:rPr>
-              <a:t>THREE PRIORITY AREAS</a:t>
+              <a:t>ORDERS OF MAGNITUDE</a:t>
             </a:r>
             <a:endParaRPr lang="en-US" sz="1150" dirty="0"/>
           </a:p>
@@ -5652,26 +6000,42 @@
                 <a:ea typeface="Cambria" pitchFamily="34" charset="-122"/>
                 <a:cs typeface="Cambria" pitchFamily="34" charset="-120"/>
               </a:rPr>
-              <a:t>Where to run the first trials</a:t>
+              <a:t>Expected water savings by irrigation method</a:t>
             </a:r>
             <a:endParaRPr lang="en-US" sz="3000" dirty="0"/>
           </a:p>
         </p:txBody>
       </p:sp>
-      <p:sp>
-        <p:nvSpPr>
-          <p:cNvPr id="4" name="Shape 2"/>
+      <p:graphicFrame>
+        <p:nvGraphicFramePr>
+          <p:cNvPr id="4" name="Chart 0" descr=""/>
+          <p:cNvGraphicFramePr/>
+          <p:nvPr/>
+        </p:nvGraphicFramePr>
+        <p:xfrm>
+          <a:off x="594360" y="1783080"/>
+          <a:ext cx="7360920" cy="3977640"/>
+        </p:xfrm>
+        <a:graphic xmlns:a="http://schemas.openxmlformats.org/drawingml/2006/main">
+          <a:graphicData uri="http://schemas.openxmlformats.org/drawingml/2006/chart">
+            <c:chart xmlns:c="http://schemas.openxmlformats.org/drawingml/2006/chart" r:id="rId1"/>
+          </a:graphicData>
+        </a:graphic>
+      </p:graphicFrame>
+      <p:sp>
+        <p:nvSpPr>
+          <p:cNvPr id="5" name="Shape 2"/>
           <p:cNvSpPr/>
           <p:nvPr/>
         </p:nvSpPr>
         <p:spPr>
           <a:xfrm>
-            <a:off x="594360" y="1783080"/>
-            <a:ext cx="3472586" cy="4069080"/>
+            <a:off x="8275320" y="1783080"/>
+            <a:ext cx="3291840" cy="3977640"/>
           </a:xfrm>
           <a:prstGeom prst="roundRect">
             <a:avLst>
-              <a:gd name="adj" fmla="val 2633"/>
+              <a:gd name="adj" fmla="val 2778"/>
             </a:avLst>
           </a:prstGeom>
           <a:solidFill>
@@ -5685,30 +6049,6 @@
           </a:ln>
         </p:spPr>
       </p:sp>
-      <p:pic>
-        <p:nvPicPr>
-          <p:cNvPr id="5" name="Image 0" descr="preencoded.png">    </p:cNvPr>
-          <p:cNvPicPr>
-            <a:picLocks noChangeAspect="1"/>
-          </p:cNvPicPr>
-          <p:nvPr/>
-        </p:nvPicPr>
-        <p:blipFill>
-          <a:blip r:embed="rId1"/>
-          <a:stretch>
-            <a:fillRect/>
-          </a:stretch>
-        </p:blipFill>
-        <p:spPr>
-          <a:xfrm>
-            <a:off x="594360" y="1783080"/>
-            <a:ext cx="3472586" cy="1691640"/>
-          </a:xfrm>
-          <a:prstGeom prst="rect">
-            <a:avLst/>
-          </a:prstGeom>
-        </p:spPr>
-      </p:pic>
       <p:sp>
         <p:nvSpPr>
           <p:cNvPr id="6" name="Text 3"/>
@@ -5717,8 +6057,8 @@
         </p:nvSpPr>
         <p:spPr>
           <a:xfrm>
-            <a:off x="795528" y="3639312"/>
-            <a:ext cx="3070250" cy="384048"/>
+            <a:off x="8503920" y="2011680"/>
+            <a:ext cx="2834640" cy="457200"/>
           </a:xfrm>
           <a:prstGeom prst="rect">
             <a:avLst/>
@@ -5734,7 +6074,7 @@
               <a:buNone/>
             </a:pPr>
             <a:r>
-              <a:rPr lang="en-US" sz="1500" b="1" dirty="0">
+              <a:rPr lang="en-US" sz="1300" b="1" dirty="0">
                 <a:solidFill>
                   <a:srgbClr val="1D4E6B"/>
                 </a:solidFill>
@@ -5742,9 +6082,9 @@
                 <a:ea typeface="Cambria" pitchFamily="34" charset="-122"/>
                 <a:cs typeface="Cambria" pitchFamily="34" charset="-120"/>
               </a:rPr>
-              <a:t>Central Valley, CA</a:t>
-            </a:r>
-            <a:endParaRPr lang="en-US" sz="1500" dirty="0"/>
+              <a:t>Read with care</a:t>
+            </a:r>
+            <a:endParaRPr lang="en-US" sz="1300" dirty="0"/>
           </a:p>
         </p:txBody>
       </p:sp>
@@ -5756,580 +6096,72 @@
         </p:nvSpPr>
         <p:spPr>
           <a:xfrm>
-            <a:off x="795528" y="4041648"/>
-            <a:ext cx="3070250" cy="329184"/>
-          </a:xfrm>
-          <a:prstGeom prst="rect">
-            <a:avLst/>
-          </a:prstGeom>
-          <a:noFill/>
-          <a:ln/>
-        </p:spPr>
-        <p:txBody>
-          <a:bodyPr wrap="square" lIns="0" tIns="0" rIns="0" bIns="0" rtlCol="0" anchor="ctr"/>
+            <a:off x="8503920" y="2560320"/>
+            <a:ext cx="2834640" cy="3017520"/>
+          </a:xfrm>
+          <a:prstGeom prst="rect">
+            <a:avLst/>
+          </a:prstGeom>
+          <a:noFill/>
+          <a:ln/>
+        </p:spPr>
+        <p:txBody>
+          <a:bodyPr wrap="square" lIns="0" tIns="0" rIns="0" bIns="0" rtlCol="0" anchor="t"/>
           <a:lstStyle/>
           <a:p>
             <a:pPr algn="l" indent="0" marL="0">
-              <a:buNone/>
-            </a:pPr>
-            <a:r>
-              <a:rPr lang="en-US" sz="1250" b="1" dirty="0">
-                <a:solidFill>
-                  <a:srgbClr val="9A5F12"/>
-                </a:solidFill>
-                <a:latin typeface="Calibri" pitchFamily="34" charset="0"/>
-                <a:ea typeface="Calibri" pitchFamily="34" charset="-122"/>
-                <a:cs typeface="Calibri" pitchFamily="34" charset="-120"/>
-              </a:rPr>
-              <a:t>≈ 5M irrigated acres</a:t>
-            </a:r>
-            <a:endParaRPr lang="en-US" sz="1250" dirty="0"/>
+              <a:lnSpc>
+                <a:spcPct val="125000"/>
+              </a:lnSpc>
+              <a:buNone/>
+            </a:pPr>
+            <a:r>
+              <a:rPr lang="en-US" sz="1200" dirty="0">
+                <a:solidFill>
+                  <a:srgbClr val="2F3E47"/>
+                </a:solidFill>
+                <a:latin typeface="Calibri" pitchFamily="34" charset="0"/>
+                <a:ea typeface="Calibri" pitchFamily="34" charset="-122"/>
+                <a:cs typeface="Calibri" pitchFamily="34" charset="-120"/>
+              </a:rPr>
+              <a:t>These ranges are indicative and rest on documented gains from our hydro-retainers.</a:t>
+            </a:r>
+            <a:endParaRPr lang="en-US" sz="1200" dirty="0"/>
+          </a:p>
+          <a:p>
+            <a:pPr algn="l" indent="0" marL="0">
+              <a:lnSpc>
+                <a:spcPct val="125000"/>
+              </a:lnSpc>
+              <a:buNone/>
+            </a:pPr>
+            <a:endParaRPr lang="en-US" sz="1200" dirty="0"/>
+          </a:p>
+          <a:p>
+            <a:pPr algn="l" indent="0" marL="0">
+              <a:lnSpc>
+                <a:spcPct val="125000"/>
+              </a:lnSpc>
+              <a:buNone/>
+            </a:pPr>
+            <a:r>
+              <a:rPr lang="en-US" sz="1200" dirty="0">
+                <a:solidFill>
+                  <a:srgbClr val="2F3E47"/>
+                </a:solidFill>
+                <a:latin typeface="Calibri" pitchFamily="34" charset="0"/>
+                <a:ea typeface="Calibri" pitchFamily="34" charset="-122"/>
+                <a:cs typeface="Calibri" pitchFamily="34" charset="-120"/>
+              </a:rPr>
+              <a:t>Actual results depend on the soil, the climate and the crop. The figures give an order of magnitude only: they are in no case a guaranteed, contractual or absolute value.</a:t>
+            </a:r>
+            <a:endParaRPr lang="en-US" sz="1200" dirty="0"/>
           </a:p>
         </p:txBody>
       </p:sp>
       <p:sp>
         <p:nvSpPr>
           <p:cNvPr id="8" name="Text 5"/>
-          <p:cNvSpPr txBox="1"/>
-          <p:nvPr/>
-        </p:nvSpPr>
-        <p:spPr>
-          <a:xfrm>
-            <a:off x="795528" y="4407408"/>
-            <a:ext cx="3070250" cy="1280160"/>
-          </a:xfrm>
-          <a:prstGeom prst="rect">
-            <a:avLst/>
-          </a:prstGeom>
-          <a:noFill/>
-          <a:ln/>
-        </p:spPr>
-        <p:txBody>
-          <a:bodyPr wrap="square" lIns="0" tIns="0" rIns="0" bIns="0" rtlCol="0" anchor="t"/>
-          <a:lstStyle/>
-          <a:p>
-            <a:pPr algn="l" marL="342900" indent="-342900">
-              <a:lnSpc>
-                <a:spcPct val="116000"/>
-              </a:lnSpc>
-              <a:spcAft>
-                <a:spcPts val="700"/>
-              </a:spcAft>
-              <a:buSzPct val="100000"/>
-              <a:buChar char="•"/>
-            </a:pPr>
-            <a:r>
-              <a:rPr lang="en-US" sz="1150" dirty="0">
-                <a:solidFill>
-                  <a:srgbClr val="2F3E47"/>
-                </a:solidFill>
-                <a:latin typeface="Calibri" pitchFamily="34" charset="0"/>
-                <a:ea typeface="Calibri" pitchFamily="34" charset="-122"/>
-                <a:cs typeface="Calibri" pitchFamily="34" charset="-120"/>
-              </a:rPr>
-              <a:t>More than 250 crops on one valley floor — almonds, pistachios, grapes, processing tomatoes. Permanent plantings cannot simply be fallowed in a dry year.</a:t>
-            </a:r>
-            <a:endParaRPr lang="en-US" sz="1150" dirty="0"/>
-          </a:p>
-          <a:p>
-            <a:pPr algn="l" marL="342900" indent="-342900">
-              <a:lnSpc>
-                <a:spcPct val="116000"/>
-              </a:lnSpc>
-              <a:spcAft>
-                <a:spcPts val="700"/>
-              </a:spcAft>
-              <a:buSzPct val="100000"/>
-              <a:buChar char="•"/>
-            </a:pPr>
-            <a:r>
-              <a:rPr lang="en-US" sz="1150" dirty="0">
-                <a:solidFill>
-                  <a:srgbClr val="2F3E47"/>
-                </a:solidFill>
-                <a:latin typeface="Calibri" pitchFamily="34" charset="0"/>
-                <a:ea typeface="Calibri" pitchFamily="34" charset="-122"/>
-                <a:cs typeface="Calibri" pitchFamily="34" charset="-120"/>
-              </a:rPr>
-              <a:t>State groundwater plans tighten pumping allowances through 2040: growers need savings per acre, not new supply.</a:t>
-            </a:r>
-            <a:endParaRPr lang="en-US" sz="1150" dirty="0"/>
-          </a:p>
-          <a:p>
-            <a:pPr algn="l" marL="342900" indent="-342900">
-              <a:lnSpc>
-                <a:spcPct val="116000"/>
-              </a:lnSpc>
-              <a:spcAft>
-                <a:spcPts val="700"/>
-              </a:spcAft>
-              <a:buSzPct val="100000"/>
-              <a:buChar char="•"/>
-            </a:pPr>
-            <a:r>
-              <a:rPr lang="en-US" sz="1150" dirty="0">
-                <a:solidFill>
-                  <a:srgbClr val="2F3E47"/>
-                </a:solidFill>
-                <a:latin typeface="Calibri" pitchFamily="34" charset="0"/>
-                <a:ea typeface="Calibri" pitchFamily="34" charset="-122"/>
-                <a:cs typeface="Calibri" pitchFamily="34" charset="-120"/>
-              </a:rPr>
-              <a:t>Drip and micro-sprinkler are already standard, so the remaining gain has to come from the soil itself.</a:t>
-            </a:r>
-            <a:endParaRPr lang="en-US" sz="1150" dirty="0"/>
-          </a:p>
-        </p:txBody>
-      </p:sp>
-      <p:sp>
-        <p:nvSpPr>
-          <p:cNvPr id="9" name="Shape 6"/>
-          <p:cNvSpPr/>
-          <p:nvPr/>
-        </p:nvSpPr>
-        <p:spPr>
-          <a:xfrm>
-            <a:off x="4359554" y="1783080"/>
-            <a:ext cx="3472586" cy="4069080"/>
-          </a:xfrm>
-          <a:prstGeom prst="roundRect">
-            <a:avLst>
-              <a:gd name="adj" fmla="val 2633"/>
-            </a:avLst>
-          </a:prstGeom>
-          <a:solidFill>
-            <a:srgbClr val="EEF2F5"/>
-          </a:solidFill>
-          <a:ln w="9525">
-            <a:solidFill>
-              <a:srgbClr val="D8E1E7"/>
-            </a:solidFill>
-            <a:prstDash val="solid"/>
-          </a:ln>
-        </p:spPr>
-      </p:sp>
-      <p:pic>
-        <p:nvPicPr>
-          <p:cNvPr id="10" name="Image 1" descr="preencoded.png">    </p:cNvPr>
-          <p:cNvPicPr>
-            <a:picLocks noChangeAspect="1"/>
-          </p:cNvPicPr>
-          <p:nvPr/>
-        </p:nvPicPr>
-        <p:blipFill>
-          <a:blip r:embed="rId2"/>
-          <a:stretch>
-            <a:fillRect/>
-          </a:stretch>
-        </p:blipFill>
-        <p:spPr>
-          <a:xfrm>
-            <a:off x="4359554" y="1783080"/>
-            <a:ext cx="3472586" cy="1691640"/>
-          </a:xfrm>
-          <a:prstGeom prst="rect">
-            <a:avLst/>
-          </a:prstGeom>
-        </p:spPr>
-      </p:pic>
-      <p:sp>
-        <p:nvSpPr>
-          <p:cNvPr id="11" name="Text 7"/>
-          <p:cNvSpPr txBox="1"/>
-          <p:nvPr/>
-        </p:nvSpPr>
-        <p:spPr>
-          <a:xfrm>
-            <a:off x="4560722" y="3639312"/>
-            <a:ext cx="3070250" cy="384048"/>
-          </a:xfrm>
-          <a:prstGeom prst="rect">
-            <a:avLst/>
-          </a:prstGeom>
-          <a:noFill/>
-          <a:ln/>
-        </p:spPr>
-        <p:txBody>
-          <a:bodyPr wrap="square" lIns="0" tIns="0" rIns="0" bIns="0" rtlCol="0" anchor="ctr"/>
-          <a:lstStyle/>
-          <a:p>
-            <a:pPr algn="l" indent="0" marL="0">
-              <a:buNone/>
-            </a:pPr>
-            <a:r>
-              <a:rPr lang="en-US" sz="1500" b="1" dirty="0">
-                <a:solidFill>
-                  <a:srgbClr val="1D4E6B"/>
-                </a:solidFill>
-                <a:latin typeface="Cambria" pitchFamily="34" charset="0"/>
-                <a:ea typeface="Cambria" pitchFamily="34" charset="-122"/>
-                <a:cs typeface="Cambria" pitchFamily="34" charset="-120"/>
-              </a:rPr>
-              <a:t>High Plains</a:t>
-            </a:r>
-            <a:endParaRPr lang="en-US" sz="1500" dirty="0"/>
-          </a:p>
-        </p:txBody>
-      </p:sp>
-      <p:sp>
-        <p:nvSpPr>
-          <p:cNvPr id="12" name="Text 8"/>
-          <p:cNvSpPr txBox="1"/>
-          <p:nvPr/>
-        </p:nvSpPr>
-        <p:spPr>
-          <a:xfrm>
-            <a:off x="4560722" y="4041648"/>
-            <a:ext cx="3070250" cy="329184"/>
-          </a:xfrm>
-          <a:prstGeom prst="rect">
-            <a:avLst/>
-          </a:prstGeom>
-          <a:noFill/>
-          <a:ln/>
-        </p:spPr>
-        <p:txBody>
-          <a:bodyPr wrap="square" lIns="0" tIns="0" rIns="0" bIns="0" rtlCol="0" anchor="ctr"/>
-          <a:lstStyle/>
-          <a:p>
-            <a:pPr algn="l" indent="0" marL="0">
-              <a:buNone/>
-            </a:pPr>
-            <a:r>
-              <a:rPr lang="en-US" sz="1250" b="1" dirty="0">
-                <a:solidFill>
-                  <a:srgbClr val="9A5F12"/>
-                </a:solidFill>
-                <a:latin typeface="Calibri" pitchFamily="34" charset="0"/>
-                <a:ea typeface="Calibri" pitchFamily="34" charset="-122"/>
-                <a:cs typeface="Calibri" pitchFamily="34" charset="-120"/>
-              </a:rPr>
-              <a:t>≈ 12M irrigated acres</a:t>
-            </a:r>
-            <a:endParaRPr lang="en-US" sz="1250" dirty="0"/>
-          </a:p>
-        </p:txBody>
-      </p:sp>
-      <p:sp>
-        <p:nvSpPr>
-          <p:cNvPr id="13" name="Text 9"/>
-          <p:cNvSpPr txBox="1"/>
-          <p:nvPr/>
-        </p:nvSpPr>
-        <p:spPr>
-          <a:xfrm>
-            <a:off x="4560722" y="4407408"/>
-            <a:ext cx="3070250" cy="1280160"/>
-          </a:xfrm>
-          <a:prstGeom prst="rect">
-            <a:avLst/>
-          </a:prstGeom>
-          <a:noFill/>
-          <a:ln/>
-        </p:spPr>
-        <p:txBody>
-          <a:bodyPr wrap="square" lIns="0" tIns="0" rIns="0" bIns="0" rtlCol="0" anchor="t"/>
-          <a:lstStyle/>
-          <a:p>
-            <a:pPr algn="l" marL="342900" indent="-342900">
-              <a:lnSpc>
-                <a:spcPct val="116000"/>
-              </a:lnSpc>
-              <a:spcAft>
-                <a:spcPts val="700"/>
-              </a:spcAft>
-              <a:buSzPct val="100000"/>
-              <a:buChar char="•"/>
-            </a:pPr>
-            <a:r>
-              <a:rPr lang="en-US" sz="1150" dirty="0">
-                <a:solidFill>
-                  <a:srgbClr val="2F3E47"/>
-                </a:solidFill>
-                <a:latin typeface="Calibri" pitchFamily="34" charset="0"/>
-                <a:ea typeface="Calibri" pitchFamily="34" charset="-122"/>
-                <a:cs typeface="Calibri" pitchFamily="34" charset="-120"/>
-              </a:rPr>
-              <a:t>Corn, sorghum, cotton and alfalfa across Nebraska, Kansas, Colorado and the Texas Panhandle, almost entirely on center pivot.</a:t>
-            </a:r>
-            <a:endParaRPr lang="en-US" sz="1150" dirty="0"/>
-          </a:p>
-          <a:p>
-            <a:pPr algn="l" marL="342900" indent="-342900">
-              <a:lnSpc>
-                <a:spcPct val="116000"/>
-              </a:lnSpc>
-              <a:spcAft>
-                <a:spcPts val="700"/>
-              </a:spcAft>
-              <a:buSzPct val="100000"/>
-              <a:buChar char="•"/>
-            </a:pPr>
-            <a:r>
-              <a:rPr lang="en-US" sz="1150" dirty="0">
-                <a:solidFill>
-                  <a:srgbClr val="2F3E47"/>
-                </a:solidFill>
-                <a:latin typeface="Calibri" pitchFamily="34" charset="0"/>
-                <a:ea typeface="Calibri" pitchFamily="34" charset="-122"/>
-                <a:cs typeface="Calibri" pitchFamily="34" charset="-120"/>
-              </a:rPr>
-              <a:t>Aquifer levels have declined for decades; well yields fall and pumping lift rises, pushing up energy cost per acre-inch applied.</a:t>
-            </a:r>
-            <a:endParaRPr lang="en-US" sz="1150" dirty="0"/>
-          </a:p>
-          <a:p>
-            <a:pPr algn="l" marL="342900" indent="-342900">
-              <a:lnSpc>
-                <a:spcPct val="116000"/>
-              </a:lnSpc>
-              <a:spcAft>
-                <a:spcPts val="700"/>
-              </a:spcAft>
-              <a:buSzPct val="100000"/>
-              <a:buChar char="•"/>
-            </a:pPr>
-            <a:r>
-              <a:rPr lang="en-US" sz="1150" dirty="0">
-                <a:solidFill>
-                  <a:srgbClr val="2F3E47"/>
-                </a:solidFill>
-                <a:latin typeface="Calibri" pitchFamily="34" charset="0"/>
-                <a:ea typeface="Calibri" pitchFamily="34" charset="-122"/>
-                <a:cs typeface="Calibri" pitchFamily="34" charset="-120"/>
-              </a:rPr>
-              <a:t>Sandy and sandy-loam soils hold little water — retention in the root zone has a direct, measurable effect.</a:t>
-            </a:r>
-            <a:endParaRPr lang="en-US" sz="1150" dirty="0"/>
-          </a:p>
-        </p:txBody>
-      </p:sp>
-      <p:sp>
-        <p:nvSpPr>
-          <p:cNvPr id="14" name="Shape 10"/>
-          <p:cNvSpPr/>
-          <p:nvPr/>
-        </p:nvSpPr>
-        <p:spPr>
-          <a:xfrm>
-            <a:off x="8124749" y="1783080"/>
-            <a:ext cx="3472586" cy="4069080"/>
-          </a:xfrm>
-          <a:prstGeom prst="roundRect">
-            <a:avLst>
-              <a:gd name="adj" fmla="val 2633"/>
-            </a:avLst>
-          </a:prstGeom>
-          <a:solidFill>
-            <a:srgbClr val="EEF2F5"/>
-          </a:solidFill>
-          <a:ln w="9525">
-            <a:solidFill>
-              <a:srgbClr val="D8E1E7"/>
-            </a:solidFill>
-            <a:prstDash val="solid"/>
-          </a:ln>
-        </p:spPr>
-      </p:sp>
-      <p:pic>
-        <p:nvPicPr>
-          <p:cNvPr id="15" name="Image 2" descr="preencoded.png">    </p:cNvPr>
-          <p:cNvPicPr>
-            <a:picLocks noChangeAspect="1"/>
-          </p:cNvPicPr>
-          <p:nvPr/>
-        </p:nvPicPr>
-        <p:blipFill>
-          <a:blip r:embed="rId3"/>
-          <a:stretch>
-            <a:fillRect/>
-          </a:stretch>
-        </p:blipFill>
-        <p:spPr>
-          <a:xfrm>
-            <a:off x="8124749" y="1783080"/>
-            <a:ext cx="3472586" cy="1691640"/>
-          </a:xfrm>
-          <a:prstGeom prst="rect">
-            <a:avLst/>
-          </a:prstGeom>
-        </p:spPr>
-      </p:pic>
-      <p:sp>
-        <p:nvSpPr>
-          <p:cNvPr id="16" name="Text 11"/>
-          <p:cNvSpPr txBox="1"/>
-          <p:nvPr/>
-        </p:nvSpPr>
-        <p:spPr>
-          <a:xfrm>
-            <a:off x="8325917" y="3639312"/>
-            <a:ext cx="3070250" cy="384048"/>
-          </a:xfrm>
-          <a:prstGeom prst="rect">
-            <a:avLst/>
-          </a:prstGeom>
-          <a:noFill/>
-          <a:ln/>
-        </p:spPr>
-        <p:txBody>
-          <a:bodyPr wrap="square" lIns="0" tIns="0" rIns="0" bIns="0" rtlCol="0" anchor="ctr"/>
-          <a:lstStyle/>
-          <a:p>
-            <a:pPr algn="l" indent="0" marL="0">
-              <a:buNone/>
-            </a:pPr>
-            <a:r>
-              <a:rPr lang="en-US" sz="1500" b="1" dirty="0">
-                <a:solidFill>
-                  <a:srgbClr val="1D4E6B"/>
-                </a:solidFill>
-                <a:latin typeface="Cambria" pitchFamily="34" charset="0"/>
-                <a:ea typeface="Cambria" pitchFamily="34" charset="-122"/>
-                <a:cs typeface="Cambria" pitchFamily="34" charset="-120"/>
-              </a:rPr>
-              <a:t>Columbia Basin</a:t>
-            </a:r>
-            <a:endParaRPr lang="en-US" sz="1500" dirty="0"/>
-          </a:p>
-        </p:txBody>
-      </p:sp>
-      <p:sp>
-        <p:nvSpPr>
-          <p:cNvPr id="17" name="Text 12"/>
-          <p:cNvSpPr txBox="1"/>
-          <p:nvPr/>
-        </p:nvSpPr>
-        <p:spPr>
-          <a:xfrm>
-            <a:off x="8325917" y="4041648"/>
-            <a:ext cx="3070250" cy="329184"/>
-          </a:xfrm>
-          <a:prstGeom prst="rect">
-            <a:avLst/>
-          </a:prstGeom>
-          <a:noFill/>
-          <a:ln/>
-        </p:spPr>
-        <p:txBody>
-          <a:bodyPr wrap="square" lIns="0" tIns="0" rIns="0" bIns="0" rtlCol="0" anchor="ctr"/>
-          <a:lstStyle/>
-          <a:p>
-            <a:pPr algn="l" indent="0" marL="0">
-              <a:buNone/>
-            </a:pPr>
-            <a:r>
-              <a:rPr lang="en-US" sz="1250" b="1" dirty="0">
-                <a:solidFill>
-                  <a:srgbClr val="9A5F12"/>
-                </a:solidFill>
-                <a:latin typeface="Calibri" pitchFamily="34" charset="0"/>
-                <a:ea typeface="Calibri" pitchFamily="34" charset="-122"/>
-                <a:cs typeface="Calibri" pitchFamily="34" charset="-120"/>
-              </a:rPr>
-              <a:t>≈ 700k irrigated acres</a:t>
-            </a:r>
-            <a:endParaRPr lang="en-US" sz="1250" dirty="0"/>
-          </a:p>
-        </p:txBody>
-      </p:sp>
-      <p:sp>
-        <p:nvSpPr>
-          <p:cNvPr id="18" name="Text 13"/>
-          <p:cNvSpPr txBox="1"/>
-          <p:nvPr/>
-        </p:nvSpPr>
-        <p:spPr>
-          <a:xfrm>
-            <a:off x="8325917" y="4407408"/>
-            <a:ext cx="3070250" cy="1280160"/>
-          </a:xfrm>
-          <a:prstGeom prst="rect">
-            <a:avLst/>
-          </a:prstGeom>
-          <a:noFill/>
-          <a:ln/>
-        </p:spPr>
-        <p:txBody>
-          <a:bodyPr wrap="square" lIns="0" tIns="0" rIns="0" bIns="0" rtlCol="0" anchor="t"/>
-          <a:lstStyle/>
-          <a:p>
-            <a:pPr algn="l" marL="342900" indent="-342900">
-              <a:lnSpc>
-                <a:spcPct val="116000"/>
-              </a:lnSpc>
-              <a:spcAft>
-                <a:spcPts val="700"/>
-              </a:spcAft>
-              <a:buSzPct val="100000"/>
-              <a:buChar char="•"/>
-            </a:pPr>
-            <a:r>
-              <a:rPr lang="en-US" sz="1150" dirty="0">
-                <a:solidFill>
-                  <a:srgbClr val="2F3E47"/>
-                </a:solidFill>
-                <a:latin typeface="Calibri" pitchFamily="34" charset="0"/>
-                <a:ea typeface="Calibri" pitchFamily="34" charset="-122"/>
-                <a:cs typeface="Calibri" pitchFamily="34" charset="-120"/>
-              </a:rPr>
-              <a:t>Potatoes, apples, hops, onions and wine grapes on sandy volcanic soils with very low water-holding capacity.</a:t>
-            </a:r>
-            <a:endParaRPr lang="en-US" sz="1150" dirty="0"/>
-          </a:p>
-          <a:p>
-            <a:pPr algn="l" marL="342900" indent="-342900">
-              <a:lnSpc>
-                <a:spcPct val="116000"/>
-              </a:lnSpc>
-              <a:spcAft>
-                <a:spcPts val="700"/>
-              </a:spcAft>
-              <a:buSzPct val="100000"/>
-              <a:buChar char="•"/>
-            </a:pPr>
-            <a:r>
-              <a:rPr lang="en-US" sz="1150" dirty="0">
-                <a:solidFill>
-                  <a:srgbClr val="2F3E47"/>
-                </a:solidFill>
-                <a:latin typeface="Calibri" pitchFamily="34" charset="0"/>
-                <a:ea typeface="Calibri" pitchFamily="34" charset="-122"/>
-                <a:cs typeface="Calibri" pitchFamily="34" charset="-120"/>
-              </a:rPr>
-              <a:t>Under 10 inches of rain a year: every acre depends on delivered water from the Columbia River system.</a:t>
-            </a:r>
-            <a:endParaRPr lang="en-US" sz="1150" dirty="0"/>
-          </a:p>
-          <a:p>
-            <a:pPr algn="l" marL="342900" indent="-342900">
-              <a:lnSpc>
-                <a:spcPct val="116000"/>
-              </a:lnSpc>
-              <a:spcAft>
-                <a:spcPts val="700"/>
-              </a:spcAft>
-              <a:buSzPct val="100000"/>
-              <a:buChar char="•"/>
-            </a:pPr>
-            <a:r>
-              <a:rPr lang="en-US" sz="1150" dirty="0">
-                <a:solidFill>
-                  <a:srgbClr val="2F3E47"/>
-                </a:solidFill>
-                <a:latin typeface="Calibri" pitchFamily="34" charset="0"/>
-                <a:ea typeface="Calibri" pitchFamily="34" charset="-122"/>
-                <a:cs typeface="Calibri" pitchFamily="34" charset="-120"/>
-              </a:rPr>
-              <a:t>High value per acre and strict packer quality specifications justify spending on per-acre inputs.</a:t>
-            </a:r>
-            <a:endParaRPr lang="en-US" sz="1150" dirty="0"/>
-          </a:p>
-        </p:txBody>
-      </p:sp>
-      <p:sp>
-        <p:nvSpPr>
-          <p:cNvPr id="19" name="Text 14"/>
           <p:cNvSpPr txBox="1"/>
           <p:nvPr/>
         </p:nvSpPr>
@@ -6370,7 +6202,7 @@
       </p:sp>
       <p:sp>
         <p:nvSpPr>
-          <p:cNvPr id="20" name="Text 15"/>
+          <p:cNvPr id="9" name="Text 6"/>
           <p:cNvSpPr txBox="1"/>
           <p:nvPr/>
         </p:nvSpPr>
@@ -6474,7 +6306,7 @@
                 <a:ea typeface="Calibri" pitchFamily="34" charset="-122"/>
                 <a:cs typeface="Calibri" pitchFamily="34" charset="-120"/>
               </a:rPr>
-              <a:t>HOW WE PROCEED</a:t>
+              <a:t>THREE PRIORITY AREAS</a:t>
             </a:r>
             <a:endParaRPr lang="en-US" sz="1150" dirty="0"/>
           </a:p>
@@ -6513,7 +6345,7 @@
                 <a:ea typeface="Cambria" pitchFamily="34" charset="-122"/>
                 <a:cs typeface="Cambria" pitchFamily="34" charset="-120"/>
               </a:rPr>
-              <a:t>A staged rollout, measured at every step</a:t>
+              <a:t>Where to run the first trials</a:t>
             </a:r>
             <a:endParaRPr lang="en-US" sz="3000" dirty="0"/>
           </a:p>
@@ -6527,12 +6359,12 @@
         </p:nvSpPr>
         <p:spPr>
           <a:xfrm>
-            <a:off x="594360" y="1874520"/>
-            <a:ext cx="2545004" cy="2834640"/>
+            <a:off x="594360" y="1783080"/>
+            <a:ext cx="3472586" cy="4069080"/>
           </a:xfrm>
           <a:prstGeom prst="roundRect">
             <a:avLst>
-              <a:gd name="adj" fmla="val 3593"/>
+              <a:gd name="adj" fmla="val 2633"/>
             </a:avLst>
           </a:prstGeom>
           <a:solidFill>
@@ -6546,36 +6378,40 @@
           </a:ln>
         </p:spPr>
       </p:sp>
-      <p:sp>
-        <p:nvSpPr>
-          <p:cNvPr id="5" name="Shape 3"/>
-          <p:cNvSpPr/>
-          <p:nvPr/>
-        </p:nvSpPr>
-        <p:spPr>
-          <a:xfrm>
-            <a:off x="822960" y="2103120"/>
-            <a:ext cx="566928" cy="566928"/>
-          </a:xfrm>
-          <a:prstGeom prst="ellipse">
-            <a:avLst/>
-          </a:prstGeom>
-          <a:solidFill>
-            <a:srgbClr val="1D4E6B"/>
-          </a:solidFill>
-          <a:ln/>
-        </p:spPr>
-      </p:sp>
-      <p:sp>
-        <p:nvSpPr>
-          <p:cNvPr id="6" name="Text 4"/>
-          <p:cNvSpPr txBox="1"/>
-          <p:nvPr/>
-        </p:nvSpPr>
-        <p:spPr>
-          <a:xfrm>
-            <a:off x="822960" y="2103120"/>
-            <a:ext cx="566928" cy="566928"/>
+      <p:pic>
+        <p:nvPicPr>
+          <p:cNvPr id="5" name="Image 0" descr="preencoded.png">    </p:cNvPr>
+          <p:cNvPicPr>
+            <a:picLocks noChangeAspect="1"/>
+          </p:cNvPicPr>
+          <p:nvPr/>
+        </p:nvPicPr>
+        <p:blipFill>
+          <a:blip r:embed="rId1"/>
+          <a:stretch>
+            <a:fillRect/>
+          </a:stretch>
+        </p:blipFill>
+        <p:spPr>
+          <a:xfrm>
+            <a:off x="594360" y="1783080"/>
+            <a:ext cx="3472586" cy="1691640"/>
+          </a:xfrm>
+          <a:prstGeom prst="rect">
+            <a:avLst/>
+          </a:prstGeom>
+        </p:spPr>
+      </p:pic>
+      <p:sp>
+        <p:nvSpPr>
+          <p:cNvPr id="6" name="Text 3"/>
+          <p:cNvSpPr txBox="1"/>
+          <p:nvPr/>
+        </p:nvSpPr>
+        <p:spPr>
+          <a:xfrm>
+            <a:off x="795528" y="3639312"/>
+            <a:ext cx="3070250" cy="384048"/>
           </a:xfrm>
           <a:prstGeom prst="rect">
             <a:avLst/>
@@ -6587,34 +6423,34 @@
           <a:bodyPr wrap="square" lIns="0" tIns="0" rIns="0" bIns="0" rtlCol="0" anchor="ctr"/>
           <a:lstStyle/>
           <a:p>
-            <a:pPr algn="ctr" indent="0" marL="0">
-              <a:buNone/>
-            </a:pPr>
-            <a:r>
-              <a:rPr lang="en-US" sz="1600" b="1" dirty="0">
-                <a:solidFill>
-                  <a:srgbClr val="FFFFFF"/>
+            <a:pPr algn="l" indent="0" marL="0">
+              <a:buNone/>
+            </a:pPr>
+            <a:r>
+              <a:rPr lang="en-US" sz="1500" b="1" dirty="0">
+                <a:solidFill>
+                  <a:srgbClr val="1D4E6B"/>
                 </a:solidFill>
                 <a:latin typeface="Cambria" pitchFamily="34" charset="0"/>
                 <a:ea typeface="Cambria" pitchFamily="34" charset="-122"/>
                 <a:cs typeface="Cambria" pitchFamily="34" charset="-120"/>
               </a:rPr>
-              <a:t>1</a:t>
-            </a:r>
-            <a:endParaRPr lang="en-US" sz="1600" dirty="0"/>
-          </a:p>
-        </p:txBody>
-      </p:sp>
-      <p:sp>
-        <p:nvSpPr>
-          <p:cNvPr id="7" name="Text 5"/>
-          <p:cNvSpPr txBox="1"/>
-          <p:nvPr/>
-        </p:nvSpPr>
-        <p:spPr>
-          <a:xfrm>
-            <a:off x="822960" y="2788920"/>
-            <a:ext cx="2087804" cy="457200"/>
+              <a:t>Central Valley, CA</a:t>
+            </a:r>
+            <a:endParaRPr lang="en-US" sz="1500" dirty="0"/>
+          </a:p>
+        </p:txBody>
+      </p:sp>
+      <p:sp>
+        <p:nvSpPr>
+          <p:cNvPr id="7" name="Text 4"/>
+          <p:cNvSpPr txBox="1"/>
+          <p:nvPr/>
+        </p:nvSpPr>
+        <p:spPr>
+          <a:xfrm>
+            <a:off x="795528" y="4041648"/>
+            <a:ext cx="3070250" cy="329184"/>
           </a:xfrm>
           <a:prstGeom prst="rect">
             <a:avLst/>
@@ -6630,30 +6466,30 @@
               <a:buNone/>
             </a:pPr>
             <a:r>
-              <a:rPr lang="en-US" sz="1400" b="1" dirty="0">
-                <a:solidFill>
-                  <a:srgbClr val="1D4E6B"/>
-                </a:solidFill>
-                <a:latin typeface="Cambria" pitchFamily="34" charset="0"/>
-                <a:ea typeface="Cambria" pitchFamily="34" charset="-122"/>
-                <a:cs typeface="Cambria" pitchFamily="34" charset="-120"/>
-              </a:rPr>
-              <a:t>Assessment</a:t>
-            </a:r>
-            <a:endParaRPr lang="en-US" sz="1400" dirty="0"/>
-          </a:p>
-        </p:txBody>
-      </p:sp>
-      <p:sp>
-        <p:nvSpPr>
-          <p:cNvPr id="8" name="Text 6"/>
-          <p:cNvSpPr txBox="1"/>
-          <p:nvPr/>
-        </p:nvSpPr>
-        <p:spPr>
-          <a:xfrm>
-            <a:off x="822960" y="3291840"/>
-            <a:ext cx="2087804" cy="1234440"/>
+              <a:rPr lang="en-US" sz="1250" b="1" dirty="0">
+                <a:solidFill>
+                  <a:srgbClr val="9A5F12"/>
+                </a:solidFill>
+                <a:latin typeface="Calibri" pitchFamily="34" charset="0"/>
+                <a:ea typeface="Calibri" pitchFamily="34" charset="-122"/>
+                <a:cs typeface="Calibri" pitchFamily="34" charset="-120"/>
+              </a:rPr>
+              <a:t>≈ 5M irrigated acres</a:t>
+            </a:r>
+            <a:endParaRPr lang="en-US" sz="1250" dirty="0"/>
+          </a:p>
+        </p:txBody>
+      </p:sp>
+      <p:sp>
+        <p:nvSpPr>
+          <p:cNvPr id="8" name="Text 5"/>
+          <p:cNvSpPr txBox="1"/>
+          <p:nvPr/>
+        </p:nvSpPr>
+        <p:spPr>
+          <a:xfrm>
+            <a:off x="795528" y="4407408"/>
+            <a:ext cx="3070250" cy="1280160"/>
           </a:xfrm>
           <a:prstGeom prst="rect">
             <a:avLst/>
@@ -6665,14 +6501,18 @@
           <a:bodyPr wrap="square" lIns="0" tIns="0" rIns="0" bIns="0" rtlCol="0" anchor="t"/>
           <a:lstStyle/>
           <a:p>
-            <a:pPr algn="l" indent="0" marL="0">
+            <a:pPr algn="l" marL="342900" indent="-342900">
               <a:lnSpc>
-                <a:spcPct val="120000"/>
+                <a:spcPct val="116000"/>
               </a:lnSpc>
-              <a:buNone/>
-            </a:pPr>
-            <a:r>
-              <a:rPr lang="en-US" sz="1200" dirty="0">
+              <a:spcAft>
+                <a:spcPts val="700"/>
+              </a:spcAft>
+              <a:buSzPct val="100000"/>
+              <a:buChar char="•"/>
+            </a:pPr>
+            <a:r>
+              <a:rPr lang="en-US" sz="1150" dirty="0">
                 <a:solidFill>
                   <a:srgbClr val="2F3E47"/>
                 </a:solidFill>
@@ -6680,26 +6520,74 @@
                 <a:ea typeface="Calibri" pitchFamily="34" charset="-122"/>
                 <a:cs typeface="Calibri" pitchFamily="34" charset="-120"/>
               </a:rPr>
-              <a:t>Review of the soil, the irrigation method and the crop. No commitment at this stage.</a:t>
-            </a:r>
-            <a:endParaRPr lang="en-US" sz="1200" dirty="0"/>
-          </a:p>
-        </p:txBody>
-      </p:sp>
-      <p:sp>
-        <p:nvSpPr>
-          <p:cNvPr id="9" name="Shape 7"/>
+              <a:t>More than 250 crops on one valley floor — almonds, pistachios, grapes, processing tomatoes. Permanent plantings cannot simply be fallowed in a dry year.</a:t>
+            </a:r>
+            <a:endParaRPr lang="en-US" sz="1150" dirty="0"/>
+          </a:p>
+          <a:p>
+            <a:pPr algn="l" marL="342900" indent="-342900">
+              <a:lnSpc>
+                <a:spcPct val="116000"/>
+              </a:lnSpc>
+              <a:spcAft>
+                <a:spcPts val="700"/>
+              </a:spcAft>
+              <a:buSzPct val="100000"/>
+              <a:buChar char="•"/>
+            </a:pPr>
+            <a:r>
+              <a:rPr lang="en-US" sz="1150" dirty="0">
+                <a:solidFill>
+                  <a:srgbClr val="2F3E47"/>
+                </a:solidFill>
+                <a:latin typeface="Calibri" pitchFamily="34" charset="0"/>
+                <a:ea typeface="Calibri" pitchFamily="34" charset="-122"/>
+                <a:cs typeface="Calibri" pitchFamily="34" charset="-120"/>
+              </a:rPr>
+              <a:t>State groundwater plans tighten pumping allowances through 2040: growers need savings per acre, not new supply.</a:t>
+            </a:r>
+            <a:endParaRPr lang="en-US" sz="1150" dirty="0"/>
+          </a:p>
+          <a:p>
+            <a:pPr algn="l" marL="342900" indent="-342900">
+              <a:lnSpc>
+                <a:spcPct val="116000"/>
+              </a:lnSpc>
+              <a:spcAft>
+                <a:spcPts val="700"/>
+              </a:spcAft>
+              <a:buSzPct val="100000"/>
+              <a:buChar char="•"/>
+            </a:pPr>
+            <a:r>
+              <a:rPr lang="en-US" sz="1150" dirty="0">
+                <a:solidFill>
+                  <a:srgbClr val="2F3E47"/>
+                </a:solidFill>
+                <a:latin typeface="Calibri" pitchFamily="34" charset="0"/>
+                <a:ea typeface="Calibri" pitchFamily="34" charset="-122"/>
+                <a:cs typeface="Calibri" pitchFamily="34" charset="-120"/>
+              </a:rPr>
+              <a:t>Drip and micro-sprinkler are already standard, so the remaining gain has to come from the soil itself.</a:t>
+            </a:r>
+            <a:endParaRPr lang="en-US" sz="1150" dirty="0"/>
+          </a:p>
+        </p:txBody>
+      </p:sp>
+      <p:sp>
+        <p:nvSpPr>
+          <p:cNvPr id="9" name="Shape 6"/>
           <p:cNvSpPr/>
           <p:nvPr/>
         </p:nvSpPr>
         <p:spPr>
           <a:xfrm>
-            <a:off x="3413684" y="1874520"/>
-            <a:ext cx="2545004" cy="2834640"/>
+            <a:off x="4359554" y="1783080"/>
+            <a:ext cx="3472586" cy="4069080"/>
           </a:xfrm>
           <a:prstGeom prst="roundRect">
             <a:avLst>
-              <a:gd name="adj" fmla="val 3593"/>
+              <a:gd name="adj" fmla="val 2633"/>
             </a:avLst>
           </a:prstGeom>
           <a:solidFill>
@@ -6713,36 +6601,40 @@
           </a:ln>
         </p:spPr>
       </p:sp>
-      <p:sp>
-        <p:nvSpPr>
-          <p:cNvPr id="10" name="Shape 8"/>
-          <p:cNvSpPr/>
-          <p:nvPr/>
-        </p:nvSpPr>
-        <p:spPr>
-          <a:xfrm>
-            <a:off x="3642284" y="2103120"/>
-            <a:ext cx="566928" cy="566928"/>
-          </a:xfrm>
-          <a:prstGeom prst="ellipse">
-            <a:avLst/>
-          </a:prstGeom>
-          <a:solidFill>
-            <a:srgbClr val="1D4E6B"/>
-          </a:solidFill>
-          <a:ln/>
-        </p:spPr>
-      </p:sp>
-      <p:sp>
-        <p:nvSpPr>
-          <p:cNvPr id="11" name="Text 9"/>
-          <p:cNvSpPr txBox="1"/>
-          <p:nvPr/>
-        </p:nvSpPr>
-        <p:spPr>
-          <a:xfrm>
-            <a:off x="3642284" y="2103120"/>
-            <a:ext cx="566928" cy="566928"/>
+      <p:pic>
+        <p:nvPicPr>
+          <p:cNvPr id="10" name="Image 1" descr="preencoded.png">    </p:cNvPr>
+          <p:cNvPicPr>
+            <a:picLocks noChangeAspect="1"/>
+          </p:cNvPicPr>
+          <p:nvPr/>
+        </p:nvPicPr>
+        <p:blipFill>
+          <a:blip r:embed="rId2"/>
+          <a:stretch>
+            <a:fillRect/>
+          </a:stretch>
+        </p:blipFill>
+        <p:spPr>
+          <a:xfrm>
+            <a:off x="4359554" y="1783080"/>
+            <a:ext cx="3472586" cy="1691640"/>
+          </a:xfrm>
+          <a:prstGeom prst="rect">
+            <a:avLst/>
+          </a:prstGeom>
+        </p:spPr>
+      </p:pic>
+      <p:sp>
+        <p:nvSpPr>
+          <p:cNvPr id="11" name="Text 7"/>
+          <p:cNvSpPr txBox="1"/>
+          <p:nvPr/>
+        </p:nvSpPr>
+        <p:spPr>
+          <a:xfrm>
+            <a:off x="4560722" y="3639312"/>
+            <a:ext cx="3070250" cy="384048"/>
           </a:xfrm>
           <a:prstGeom prst="rect">
             <a:avLst/>
@@ -6754,34 +6646,34 @@
           <a:bodyPr wrap="square" lIns="0" tIns="0" rIns="0" bIns="0" rtlCol="0" anchor="ctr"/>
           <a:lstStyle/>
           <a:p>
-            <a:pPr algn="ctr" indent="0" marL="0">
-              <a:buNone/>
-            </a:pPr>
-            <a:r>
-              <a:rPr lang="en-US" sz="1600" b="1" dirty="0">
-                <a:solidFill>
-                  <a:srgbClr val="FFFFFF"/>
+            <a:pPr algn="l" indent="0" marL="0">
+              <a:buNone/>
+            </a:pPr>
+            <a:r>
+              <a:rPr lang="en-US" sz="1500" b="1" dirty="0">
+                <a:solidFill>
+                  <a:srgbClr val="1D4E6B"/>
                 </a:solidFill>
                 <a:latin typeface="Cambria" pitchFamily="34" charset="0"/>
                 <a:ea typeface="Cambria" pitchFamily="34" charset="-122"/>
                 <a:cs typeface="Cambria" pitchFamily="34" charset="-120"/>
               </a:rPr>
-              <a:t>2</a:t>
-            </a:r>
-            <a:endParaRPr lang="en-US" sz="1600" dirty="0"/>
-          </a:p>
-        </p:txBody>
-      </p:sp>
-      <p:sp>
-        <p:nvSpPr>
-          <p:cNvPr id="12" name="Text 10"/>
-          <p:cNvSpPr txBox="1"/>
-          <p:nvPr/>
-        </p:nvSpPr>
-        <p:spPr>
-          <a:xfrm>
-            <a:off x="3642284" y="2788920"/>
-            <a:ext cx="2087804" cy="457200"/>
+              <a:t>High Plains</a:t>
+            </a:r>
+            <a:endParaRPr lang="en-US" sz="1500" dirty="0"/>
+          </a:p>
+        </p:txBody>
+      </p:sp>
+      <p:sp>
+        <p:nvSpPr>
+          <p:cNvPr id="12" name="Text 8"/>
+          <p:cNvSpPr txBox="1"/>
+          <p:nvPr/>
+        </p:nvSpPr>
+        <p:spPr>
+          <a:xfrm>
+            <a:off x="4560722" y="4041648"/>
+            <a:ext cx="3070250" cy="329184"/>
           </a:xfrm>
           <a:prstGeom prst="rect">
             <a:avLst/>
@@ -6797,30 +6689,30 @@
               <a:buNone/>
             </a:pPr>
             <a:r>
-              <a:rPr lang="en-US" sz="1400" b="1" dirty="0">
-                <a:solidFill>
-                  <a:srgbClr val="1D4E6B"/>
-                </a:solidFill>
-                <a:latin typeface="Cambria" pitchFamily="34" charset="0"/>
-                <a:ea typeface="Cambria" pitchFamily="34" charset="-122"/>
-                <a:cs typeface="Cambria" pitchFamily="34" charset="-120"/>
-              </a:rPr>
-              <a:t>Trial block</a:t>
-            </a:r>
-            <a:endParaRPr lang="en-US" sz="1400" dirty="0"/>
-          </a:p>
-        </p:txBody>
-      </p:sp>
-      <p:sp>
-        <p:nvSpPr>
-          <p:cNvPr id="13" name="Text 11"/>
-          <p:cNvSpPr txBox="1"/>
-          <p:nvPr/>
-        </p:nvSpPr>
-        <p:spPr>
-          <a:xfrm>
-            <a:off x="3642284" y="3291840"/>
-            <a:ext cx="2087804" cy="1234440"/>
+              <a:rPr lang="en-US" sz="1250" b="1" dirty="0">
+                <a:solidFill>
+                  <a:srgbClr val="9A5F12"/>
+                </a:solidFill>
+                <a:latin typeface="Calibri" pitchFamily="34" charset="0"/>
+                <a:ea typeface="Calibri" pitchFamily="34" charset="-122"/>
+                <a:cs typeface="Calibri" pitchFamily="34" charset="-120"/>
+              </a:rPr>
+              <a:t>≈ 12M irrigated acres</a:t>
+            </a:r>
+            <a:endParaRPr lang="en-US" sz="1250" dirty="0"/>
+          </a:p>
+        </p:txBody>
+      </p:sp>
+      <p:sp>
+        <p:nvSpPr>
+          <p:cNvPr id="13" name="Text 9"/>
+          <p:cNvSpPr txBox="1"/>
+          <p:nvPr/>
+        </p:nvSpPr>
+        <p:spPr>
+          <a:xfrm>
+            <a:off x="4560722" y="4407408"/>
+            <a:ext cx="3070250" cy="1280160"/>
           </a:xfrm>
           <a:prstGeom prst="rect">
             <a:avLst/>
@@ -6832,14 +6724,18 @@
           <a:bodyPr wrap="square" lIns="0" tIns="0" rIns="0" bIns="0" rtlCol="0" anchor="t"/>
           <a:lstStyle/>
           <a:p>
-            <a:pPr algn="l" indent="0" marL="0">
+            <a:pPr algn="l" marL="342900" indent="-342900">
               <a:lnSpc>
-                <a:spcPct val="120000"/>
+                <a:spcPct val="116000"/>
               </a:lnSpc>
-              <a:buNone/>
-            </a:pPr>
-            <a:r>
-              <a:rPr lang="en-US" sz="1200" dirty="0">
+              <a:spcAft>
+                <a:spcPts val="700"/>
+              </a:spcAft>
+              <a:buSzPct val="100000"/>
+              <a:buChar char="•"/>
+            </a:pPr>
+            <a:r>
+              <a:rPr lang="en-US" sz="1150" dirty="0">
                 <a:solidFill>
                   <a:srgbClr val="2F3E47"/>
                 </a:solidFill>
@@ -6847,26 +6743,74 @@
                 <a:ea typeface="Calibri" pitchFamily="34" charset="-122"/>
                 <a:cs typeface="Calibri" pitchFamily="34" charset="-120"/>
               </a:rPr>
-              <a:t>A comparative trial on one block, against a control block managed identically.</a:t>
-            </a:r>
-            <a:endParaRPr lang="en-US" sz="1200" dirty="0"/>
-          </a:p>
-        </p:txBody>
-      </p:sp>
-      <p:sp>
-        <p:nvSpPr>
-          <p:cNvPr id="14" name="Shape 12"/>
+              <a:t>Corn, sorghum, cotton and alfalfa across Nebraska, Kansas, Colorado and the Texas Panhandle, almost entirely on center pivot.</a:t>
+            </a:r>
+            <a:endParaRPr lang="en-US" sz="1150" dirty="0"/>
+          </a:p>
+          <a:p>
+            <a:pPr algn="l" marL="342900" indent="-342900">
+              <a:lnSpc>
+                <a:spcPct val="116000"/>
+              </a:lnSpc>
+              <a:spcAft>
+                <a:spcPts val="700"/>
+              </a:spcAft>
+              <a:buSzPct val="100000"/>
+              <a:buChar char="•"/>
+            </a:pPr>
+            <a:r>
+              <a:rPr lang="en-US" sz="1150" dirty="0">
+                <a:solidFill>
+                  <a:srgbClr val="2F3E47"/>
+                </a:solidFill>
+                <a:latin typeface="Calibri" pitchFamily="34" charset="0"/>
+                <a:ea typeface="Calibri" pitchFamily="34" charset="-122"/>
+                <a:cs typeface="Calibri" pitchFamily="34" charset="-120"/>
+              </a:rPr>
+              <a:t>Aquifer levels have declined for decades; well yields fall and pumping lift rises, pushing up energy cost per acre-inch applied.</a:t>
+            </a:r>
+            <a:endParaRPr lang="en-US" sz="1150" dirty="0"/>
+          </a:p>
+          <a:p>
+            <a:pPr algn="l" marL="342900" indent="-342900">
+              <a:lnSpc>
+                <a:spcPct val="116000"/>
+              </a:lnSpc>
+              <a:spcAft>
+                <a:spcPts val="700"/>
+              </a:spcAft>
+              <a:buSzPct val="100000"/>
+              <a:buChar char="•"/>
+            </a:pPr>
+            <a:r>
+              <a:rPr lang="en-US" sz="1150" dirty="0">
+                <a:solidFill>
+                  <a:srgbClr val="2F3E47"/>
+                </a:solidFill>
+                <a:latin typeface="Calibri" pitchFamily="34" charset="0"/>
+                <a:ea typeface="Calibri" pitchFamily="34" charset="-122"/>
+                <a:cs typeface="Calibri" pitchFamily="34" charset="-120"/>
+              </a:rPr>
+              <a:t>Sandy and sandy-loam soils hold little water — retention in the root zone has a direct, measurable effect.</a:t>
+            </a:r>
+            <a:endParaRPr lang="en-US" sz="1150" dirty="0"/>
+          </a:p>
+        </p:txBody>
+      </p:sp>
+      <p:sp>
+        <p:nvSpPr>
+          <p:cNvPr id="14" name="Shape 10"/>
           <p:cNvSpPr/>
           <p:nvPr/>
         </p:nvSpPr>
         <p:spPr>
           <a:xfrm>
-            <a:off x="6233008" y="1874520"/>
-            <a:ext cx="2545004" cy="2834640"/>
+            <a:off x="8124749" y="1783080"/>
+            <a:ext cx="3472586" cy="4069080"/>
           </a:xfrm>
           <a:prstGeom prst="roundRect">
             <a:avLst>
-              <a:gd name="adj" fmla="val 3593"/>
+              <a:gd name="adj" fmla="val 2633"/>
             </a:avLst>
           </a:prstGeom>
           <a:solidFill>
@@ -6880,36 +6824,40 @@
           </a:ln>
         </p:spPr>
       </p:sp>
-      <p:sp>
-        <p:nvSpPr>
-          <p:cNvPr id="15" name="Shape 13"/>
-          <p:cNvSpPr/>
-          <p:nvPr/>
-        </p:nvSpPr>
-        <p:spPr>
-          <a:xfrm>
-            <a:off x="6461608" y="2103120"/>
-            <a:ext cx="566928" cy="566928"/>
-          </a:xfrm>
-          <a:prstGeom prst="ellipse">
-            <a:avLst/>
-          </a:prstGeom>
-          <a:solidFill>
-            <a:srgbClr val="1D4E6B"/>
-          </a:solidFill>
-          <a:ln/>
-        </p:spPr>
-      </p:sp>
-      <p:sp>
-        <p:nvSpPr>
-          <p:cNvPr id="16" name="Text 14"/>
-          <p:cNvSpPr txBox="1"/>
-          <p:nvPr/>
-        </p:nvSpPr>
-        <p:spPr>
-          <a:xfrm>
-            <a:off x="6461608" y="2103120"/>
-            <a:ext cx="566928" cy="566928"/>
+      <p:pic>
+        <p:nvPicPr>
+          <p:cNvPr id="15" name="Image 2" descr="preencoded.png">    </p:cNvPr>
+          <p:cNvPicPr>
+            <a:picLocks noChangeAspect="1"/>
+          </p:cNvPicPr>
+          <p:nvPr/>
+        </p:nvPicPr>
+        <p:blipFill>
+          <a:blip r:embed="rId3"/>
+          <a:stretch>
+            <a:fillRect/>
+          </a:stretch>
+        </p:blipFill>
+        <p:spPr>
+          <a:xfrm>
+            <a:off x="8124749" y="1783080"/>
+            <a:ext cx="3472586" cy="1691640"/>
+          </a:xfrm>
+          <a:prstGeom prst="rect">
+            <a:avLst/>
+          </a:prstGeom>
+        </p:spPr>
+      </p:pic>
+      <p:sp>
+        <p:nvSpPr>
+          <p:cNvPr id="16" name="Text 11"/>
+          <p:cNvSpPr txBox="1"/>
+          <p:nvPr/>
+        </p:nvSpPr>
+        <p:spPr>
+          <a:xfrm>
+            <a:off x="8325917" y="3639312"/>
+            <a:ext cx="3070250" cy="384048"/>
           </a:xfrm>
           <a:prstGeom prst="rect">
             <a:avLst/>
@@ -6921,34 +6869,34 @@
           <a:bodyPr wrap="square" lIns="0" tIns="0" rIns="0" bIns="0" rtlCol="0" anchor="ctr"/>
           <a:lstStyle/>
           <a:p>
-            <a:pPr algn="ctr" indent="0" marL="0">
-              <a:buNone/>
-            </a:pPr>
-            <a:r>
-              <a:rPr lang="en-US" sz="1600" b="1" dirty="0">
-                <a:solidFill>
-                  <a:srgbClr val="FFFFFF"/>
+            <a:pPr algn="l" indent="0" marL="0">
+              <a:buNone/>
+            </a:pPr>
+            <a:r>
+              <a:rPr lang="en-US" sz="1500" b="1" dirty="0">
+                <a:solidFill>
+                  <a:srgbClr val="1D4E6B"/>
                 </a:solidFill>
                 <a:latin typeface="Cambria" pitchFamily="34" charset="0"/>
                 <a:ea typeface="Cambria" pitchFamily="34" charset="-122"/>
                 <a:cs typeface="Cambria" pitchFamily="34" charset="-120"/>
               </a:rPr>
-              <a:t>3</a:t>
-            </a:r>
-            <a:endParaRPr lang="en-US" sz="1600" dirty="0"/>
-          </a:p>
-        </p:txBody>
-      </p:sp>
-      <p:sp>
-        <p:nvSpPr>
-          <p:cNvPr id="17" name="Text 15"/>
-          <p:cNvSpPr txBox="1"/>
-          <p:nvPr/>
-        </p:nvSpPr>
-        <p:spPr>
-          <a:xfrm>
-            <a:off x="6461608" y="2788920"/>
-            <a:ext cx="2087804" cy="457200"/>
+              <a:t>Columbia Basin</a:t>
+            </a:r>
+            <a:endParaRPr lang="en-US" sz="1500" dirty="0"/>
+          </a:p>
+        </p:txBody>
+      </p:sp>
+      <p:sp>
+        <p:nvSpPr>
+          <p:cNvPr id="17" name="Text 12"/>
+          <p:cNvSpPr txBox="1"/>
+          <p:nvPr/>
+        </p:nvSpPr>
+        <p:spPr>
+          <a:xfrm>
+            <a:off x="8325917" y="4041648"/>
+            <a:ext cx="3070250" cy="329184"/>
           </a:xfrm>
           <a:prstGeom prst="rect">
             <a:avLst/>
@@ -6964,30 +6912,30 @@
               <a:buNone/>
             </a:pPr>
             <a:r>
-              <a:rPr lang="en-US" sz="1400" b="1" dirty="0">
-                <a:solidFill>
-                  <a:srgbClr val="1D4E6B"/>
-                </a:solidFill>
-                <a:latin typeface="Cambria" pitchFamily="34" charset="0"/>
-                <a:ea typeface="Cambria" pitchFamily="34" charset="-122"/>
-                <a:cs typeface="Cambria" pitchFamily="34" charset="-120"/>
-              </a:rPr>
-              <a:t>Measurement</a:t>
-            </a:r>
-            <a:endParaRPr lang="en-US" sz="1400" dirty="0"/>
-          </a:p>
-        </p:txBody>
-      </p:sp>
-      <p:sp>
-        <p:nvSpPr>
-          <p:cNvPr id="18" name="Text 16"/>
-          <p:cNvSpPr txBox="1"/>
-          <p:nvPr/>
-        </p:nvSpPr>
-        <p:spPr>
-          <a:xfrm>
-            <a:off x="6461608" y="3291840"/>
-            <a:ext cx="2087804" cy="1234440"/>
+              <a:rPr lang="en-US" sz="1250" b="1" dirty="0">
+                <a:solidFill>
+                  <a:srgbClr val="9A5F12"/>
+                </a:solidFill>
+                <a:latin typeface="Calibri" pitchFamily="34" charset="0"/>
+                <a:ea typeface="Calibri" pitchFamily="34" charset="-122"/>
+                <a:cs typeface="Calibri" pitchFamily="34" charset="-120"/>
+              </a:rPr>
+              <a:t>≈ 700k irrigated acres</a:t>
+            </a:r>
+            <a:endParaRPr lang="en-US" sz="1250" dirty="0"/>
+          </a:p>
+        </p:txBody>
+      </p:sp>
+      <p:sp>
+        <p:nvSpPr>
+          <p:cNvPr id="18" name="Text 13"/>
+          <p:cNvSpPr txBox="1"/>
+          <p:nvPr/>
+        </p:nvSpPr>
+        <p:spPr>
+          <a:xfrm>
+            <a:off x="8325917" y="4407408"/>
+            <a:ext cx="3070250" cy="1280160"/>
           </a:xfrm>
           <a:prstGeom prst="rect">
             <a:avLst/>
@@ -6999,14 +6947,18 @@
           <a:bodyPr wrap="square" lIns="0" tIns="0" rIns="0" bIns="0" rtlCol="0" anchor="t"/>
           <a:lstStyle/>
           <a:p>
-            <a:pPr algn="l" indent="0" marL="0">
+            <a:pPr algn="l" marL="342900" indent="-342900">
               <a:lnSpc>
-                <a:spcPct val="120000"/>
+                <a:spcPct val="116000"/>
               </a:lnSpc>
-              <a:buNone/>
-            </a:pPr>
-            <a:r>
-              <a:rPr lang="en-US" sz="1200" dirty="0">
+              <a:spcAft>
+                <a:spcPts val="700"/>
+              </a:spcAft>
+              <a:buSzPct val="100000"/>
+              <a:buChar char="•"/>
+            </a:pPr>
+            <a:r>
+              <a:rPr lang="en-US" sz="1150" dirty="0">
                 <a:solidFill>
                   <a:srgbClr val="2F3E47"/>
                 </a:solidFill>
@@ -7014,166 +6966,23 @@
                 <a:ea typeface="Calibri" pitchFamily="34" charset="-122"/>
                 <a:cs typeface="Calibri" pitchFamily="34" charset="-120"/>
               </a:rPr>
-              <a:t>Water use and yield recorded across a full production cycle.</a:t>
-            </a:r>
-            <a:endParaRPr lang="en-US" sz="1200" dirty="0"/>
-          </a:p>
-        </p:txBody>
-      </p:sp>
-      <p:sp>
-        <p:nvSpPr>
-          <p:cNvPr id="19" name="Shape 17"/>
-          <p:cNvSpPr/>
-          <p:nvPr/>
-        </p:nvSpPr>
-        <p:spPr>
-          <a:xfrm>
-            <a:off x="9052331" y="1874520"/>
-            <a:ext cx="2545004" cy="2834640"/>
-          </a:xfrm>
-          <a:prstGeom prst="roundRect">
-            <a:avLst>
-              <a:gd name="adj" fmla="val 3593"/>
-            </a:avLst>
-          </a:prstGeom>
-          <a:solidFill>
-            <a:srgbClr val="EEF2F5"/>
-          </a:solidFill>
-          <a:ln w="9525">
-            <a:solidFill>
-              <a:srgbClr val="D8E1E7"/>
-            </a:solidFill>
-            <a:prstDash val="solid"/>
-          </a:ln>
-        </p:spPr>
-      </p:sp>
-      <p:sp>
-        <p:nvSpPr>
-          <p:cNvPr id="20" name="Shape 18"/>
-          <p:cNvSpPr/>
-          <p:nvPr/>
-        </p:nvSpPr>
-        <p:spPr>
-          <a:xfrm>
-            <a:off x="9280931" y="2103120"/>
-            <a:ext cx="566928" cy="566928"/>
-          </a:xfrm>
-          <a:prstGeom prst="ellipse">
-            <a:avLst/>
-          </a:prstGeom>
-          <a:solidFill>
-            <a:srgbClr val="1D4E6B"/>
-          </a:solidFill>
-          <a:ln/>
-        </p:spPr>
-      </p:sp>
-      <p:sp>
-        <p:nvSpPr>
-          <p:cNvPr id="21" name="Text 19"/>
-          <p:cNvSpPr txBox="1"/>
-          <p:nvPr/>
-        </p:nvSpPr>
-        <p:spPr>
-          <a:xfrm>
-            <a:off x="9280931" y="2103120"/>
-            <a:ext cx="566928" cy="566928"/>
-          </a:xfrm>
-          <a:prstGeom prst="rect">
-            <a:avLst/>
-          </a:prstGeom>
-          <a:noFill/>
-          <a:ln/>
-        </p:spPr>
-        <p:txBody>
-          <a:bodyPr wrap="square" lIns="0" tIns="0" rIns="0" bIns="0" rtlCol="0" anchor="ctr"/>
-          <a:lstStyle/>
-          <a:p>
-            <a:pPr algn="ctr" indent="0" marL="0">
-              <a:buNone/>
-            </a:pPr>
-            <a:r>
-              <a:rPr lang="en-US" sz="1600" b="1" dirty="0">
-                <a:solidFill>
-                  <a:srgbClr val="FFFFFF"/>
-                </a:solidFill>
-                <a:latin typeface="Cambria" pitchFamily="34" charset="0"/>
-                <a:ea typeface="Cambria" pitchFamily="34" charset="-122"/>
-                <a:cs typeface="Cambria" pitchFamily="34" charset="-120"/>
-              </a:rPr>
-              <a:t>4</a:t>
-            </a:r>
-            <a:endParaRPr lang="en-US" sz="1600" dirty="0"/>
-          </a:p>
-        </p:txBody>
-      </p:sp>
-      <p:sp>
-        <p:nvSpPr>
-          <p:cNvPr id="22" name="Text 20"/>
-          <p:cNvSpPr txBox="1"/>
-          <p:nvPr/>
-        </p:nvSpPr>
-        <p:spPr>
-          <a:xfrm>
-            <a:off x="9280931" y="2788920"/>
-            <a:ext cx="2087804" cy="457200"/>
-          </a:xfrm>
-          <a:prstGeom prst="rect">
-            <a:avLst/>
-          </a:prstGeom>
-          <a:noFill/>
-          <a:ln/>
-        </p:spPr>
-        <p:txBody>
-          <a:bodyPr wrap="square" lIns="0" tIns="0" rIns="0" bIns="0" rtlCol="0" anchor="ctr"/>
-          <a:lstStyle/>
-          <a:p>
-            <a:pPr algn="l" indent="0" marL="0">
-              <a:buNone/>
-            </a:pPr>
-            <a:r>
-              <a:rPr lang="en-US" sz="1400" b="1" dirty="0">
-                <a:solidFill>
-                  <a:srgbClr val="1D4E6B"/>
-                </a:solidFill>
-                <a:latin typeface="Cambria" pitchFamily="34" charset="0"/>
-                <a:ea typeface="Cambria" pitchFamily="34" charset="-122"/>
-                <a:cs typeface="Cambria" pitchFamily="34" charset="-120"/>
-              </a:rPr>
-              <a:t>Rollout</a:t>
-            </a:r>
-            <a:endParaRPr lang="en-US" sz="1400" dirty="0"/>
-          </a:p>
-        </p:txBody>
-      </p:sp>
-      <p:sp>
-        <p:nvSpPr>
-          <p:cNvPr id="23" name="Text 21"/>
-          <p:cNvSpPr txBox="1"/>
-          <p:nvPr/>
-        </p:nvSpPr>
-        <p:spPr>
-          <a:xfrm>
-            <a:off x="9280931" y="3291840"/>
-            <a:ext cx="2087804" cy="1234440"/>
-          </a:xfrm>
-          <a:prstGeom prst="rect">
-            <a:avLst/>
-          </a:prstGeom>
-          <a:noFill/>
-          <a:ln/>
-        </p:spPr>
-        <p:txBody>
-          <a:bodyPr wrap="square" lIns="0" tIns="0" rIns="0" bIns="0" rtlCol="0" anchor="t"/>
-          <a:lstStyle/>
-          <a:p>
-            <a:pPr algn="l" indent="0" marL="0">
+              <a:t>Potatoes, apples, hops, onions and wine grapes on sandy volcanic soils with very low water-holding capacity.</a:t>
+            </a:r>
+            <a:endParaRPr lang="en-US" sz="1150" dirty="0"/>
+          </a:p>
+          <a:p>
+            <a:pPr algn="l" marL="342900" indent="-342900">
               <a:lnSpc>
-                <a:spcPct val="120000"/>
+                <a:spcPct val="116000"/>
               </a:lnSpc>
-              <a:buNone/>
-            </a:pPr>
-            <a:r>
-              <a:rPr lang="en-US" sz="1200" dirty="0">
+              <a:spcAft>
+                <a:spcPts val="700"/>
+              </a:spcAft>
+              <a:buSzPct val="100000"/>
+              <a:buChar char="•"/>
+            </a:pPr>
+            <a:r>
+              <a:rPr lang="en-US" sz="1150" dirty="0">
                 <a:solidFill>
                   <a:srgbClr val="2F3E47"/>
                 </a:solidFill>
@@ -7181,57 +6990,39 @@
                 <a:ea typeface="Calibri" pitchFamily="34" charset="-122"/>
                 <a:cs typeface="Calibri" pitchFamily="34" charset="-120"/>
               </a:rPr>
-              <a:t>Gradual extension to the remaining acres on the basis of the results observed.</a:t>
-            </a:r>
-            <a:endParaRPr lang="en-US" sz="1200" dirty="0"/>
-          </a:p>
-        </p:txBody>
-      </p:sp>
-      <p:sp>
-        <p:nvSpPr>
-          <p:cNvPr id="24" name="Text 22"/>
-          <p:cNvSpPr txBox="1"/>
-          <p:nvPr/>
-        </p:nvSpPr>
-        <p:spPr>
-          <a:xfrm>
-            <a:off x="594360" y="4983480"/>
-            <a:ext cx="11002975" cy="822960"/>
-          </a:xfrm>
-          <a:prstGeom prst="rect">
-            <a:avLst/>
-          </a:prstGeom>
-          <a:noFill/>
-          <a:ln/>
-        </p:spPr>
-        <p:txBody>
-          <a:bodyPr wrap="square" lIns="0" tIns="0" rIns="0" bIns="0" rtlCol="0" anchor="t"/>
-          <a:lstStyle/>
-          <a:p>
-            <a:pPr algn="l" indent="0" marL="0">
+              <a:t>Under 10 inches of rain a year: every acre depends on delivered water from the Columbia River system.</a:t>
+            </a:r>
+            <a:endParaRPr lang="en-US" sz="1150" dirty="0"/>
+          </a:p>
+          <a:p>
+            <a:pPr algn="l" marL="342900" indent="-342900">
               <a:lnSpc>
-                <a:spcPct val="125000"/>
+                <a:spcPct val="116000"/>
               </a:lnSpc>
-              <a:buNone/>
-            </a:pPr>
-            <a:r>
-              <a:rPr lang="en-US" sz="1250" i="1" dirty="0">
-                <a:solidFill>
-                  <a:srgbClr val="6B7D87"/>
-                </a:solidFill>
-                <a:latin typeface="Calibri" pitchFamily="34" charset="0"/>
-                <a:ea typeface="Calibri" pitchFamily="34" charset="-122"/>
-                <a:cs typeface="Calibri" pitchFamily="34" charset="-120"/>
-              </a:rPr>
-              <a:t>The dosing rule is the same everywhere: 3 grams per liter of usable soil. What changes from one field to the next is the volume of soil the roots actually explore.</a:t>
-            </a:r>
-            <a:endParaRPr lang="en-US" sz="1250" dirty="0"/>
-          </a:p>
-        </p:txBody>
-      </p:sp>
-      <p:sp>
-        <p:nvSpPr>
-          <p:cNvPr id="25" name="Text 23"/>
+              <a:spcAft>
+                <a:spcPts val="700"/>
+              </a:spcAft>
+              <a:buSzPct val="100000"/>
+              <a:buChar char="•"/>
+            </a:pPr>
+            <a:r>
+              <a:rPr lang="en-US" sz="1150" dirty="0">
+                <a:solidFill>
+                  <a:srgbClr val="2F3E47"/>
+                </a:solidFill>
+                <a:latin typeface="Calibri" pitchFamily="34" charset="0"/>
+                <a:ea typeface="Calibri" pitchFamily="34" charset="-122"/>
+                <a:cs typeface="Calibri" pitchFamily="34" charset="-120"/>
+              </a:rPr>
+              <a:t>High value per acre and strict packer quality specifications justify spending on per-acre inputs.</a:t>
+            </a:r>
+            <a:endParaRPr lang="en-US" sz="1150" dirty="0"/>
+          </a:p>
+        </p:txBody>
+      </p:sp>
+      <p:sp>
+        <p:nvSpPr>
+          <p:cNvPr id="19" name="Text 14"/>
           <p:cNvSpPr txBox="1"/>
           <p:nvPr/>
         </p:nvSpPr>
@@ -7272,7 +7063,7 @@
       </p:sp>
       <p:sp>
         <p:nvSpPr>
-          <p:cNvPr id="26" name="Text 24"/>
+          <p:cNvPr id="20" name="Text 15"/>
           <p:cNvSpPr txBox="1"/>
           <p:nvPr/>
         </p:nvSpPr>
@@ -7376,7 +7167,7 @@
                 <a:ea typeface="Calibri" pitchFamily="34" charset="-122"/>
                 <a:cs typeface="Calibri" pitchFamily="34" charset="-120"/>
               </a:rPr>
-              <a:t>Working together</a:t>
+              <a:t>HOW WE PROCEED</a:t>
             </a:r>
             <a:endParaRPr lang="en-US" sz="1150" dirty="0"/>
           </a:p>
@@ -7415,7 +7206,7 @@
                 <a:ea typeface="Cambria" pitchFamily="34" charset="-122"/>
                 <a:cs typeface="Cambria" pitchFamily="34" charset="-120"/>
               </a:rPr>
-              <a:t>A local partner for the United States</a:t>
+              <a:t>A staged rollout, measured at every step</a:t>
             </a:r>
             <a:endParaRPr lang="en-US" sz="3000" dirty="0"/>
           </a:p>
@@ -7540,7 +7331,7 @@
                 <a:ea typeface="Cambria" pitchFamily="34" charset="-122"/>
                 <a:cs typeface="Cambria" pitchFamily="34" charset="-120"/>
               </a:rPr>
-              <a:t>Distribution</a:t>
+              <a:t>Assessment</a:t>
             </a:r>
             <a:endParaRPr lang="en-US" sz="1400" dirty="0"/>
           </a:p>
@@ -7582,7 +7373,7 @@
                 <a:ea typeface="Calibri" pitchFamily="34" charset="-122"/>
                 <a:cs typeface="Calibri" pitchFamily="34" charset="-120"/>
               </a:rPr>
-              <a:t>Territorial exclusivity and launch stock for the first commercial season.</a:t>
+              <a:t>Review of the soil, the irrigation method and the crop. No commitment at this stage.</a:t>
             </a:r>
             <a:endParaRPr lang="en-US" sz="1200" dirty="0"/>
           </a:p>
@@ -7707,7 +7498,7 @@
                 <a:ea typeface="Cambria" pitchFamily="34" charset="-122"/>
                 <a:cs typeface="Cambria" pitchFamily="34" charset="-120"/>
               </a:rPr>
-              <a:t>Training</a:t>
+              <a:t>Trial block</a:t>
             </a:r>
             <a:endParaRPr lang="en-US" sz="1400" dirty="0"/>
           </a:p>
@@ -7749,7 +7540,7 @@
                 <a:ea typeface="Calibri" pitchFamily="34" charset="-122"/>
                 <a:cs typeface="Calibri" pitchFamily="34" charset="-120"/>
               </a:rPr>
-              <a:t>Technical training for field teams, dosing protocols and seasonal updates.</a:t>
+              <a:t>A comparative trial on one block, against a control block managed identically.</a:t>
             </a:r>
             <a:endParaRPr lang="en-US" sz="1200" dirty="0"/>
           </a:p>
@@ -7874,7 +7665,7 @@
                 <a:ea typeface="Cambria" pitchFamily="34" charset="-122"/>
                 <a:cs typeface="Cambria" pitchFamily="34" charset="-120"/>
               </a:rPr>
-              <a:t>Joint trials</a:t>
+              <a:t>Measurement</a:t>
             </a:r>
             <a:endParaRPr lang="en-US" sz="1400" dirty="0"/>
           </a:p>
@@ -7916,7 +7707,7 @@
                 <a:ea typeface="Calibri" pitchFamily="34" charset="-122"/>
                 <a:cs typeface="Calibri" pitchFamily="34" charset="-120"/>
               </a:rPr>
-              <a:t>Demonstration plots with a control, results shared with growers.</a:t>
+              <a:t>Water use and yield recorded across a full production cycle.</a:t>
             </a:r>
             <a:endParaRPr lang="en-US" sz="1200" dirty="0"/>
           </a:p>
@@ -8041,7 +7832,7 @@
                 <a:ea typeface="Cambria" pitchFamily="34" charset="-122"/>
                 <a:cs typeface="Cambria" pitchFamily="34" charset="-120"/>
               </a:rPr>
-              <a:t>Institutions</a:t>
+              <a:t>Rollout</a:t>
             </a:r>
             <a:endParaRPr lang="en-US" sz="1400" dirty="0"/>
           </a:p>
@@ -8083,7 +7874,7 @@
                 <a:ea typeface="Calibri" pitchFamily="34" charset="-122"/>
                 <a:cs typeface="Calibri" pitchFamily="34" charset="-120"/>
               </a:rPr>
-              <a:t>Dialogue with the Ministry of Agriculture and food-security programmes.</a:t>
+              <a:t>Gradual extension to the remaining acres on the basis of the results observed.</a:t>
             </a:r>
             <a:endParaRPr lang="en-US" sz="1200" dirty="0"/>
           </a:p>
@@ -8125,7 +7916,7 @@
                 <a:ea typeface="Calibri" pitchFamily="34" charset="-122"/>
                 <a:cs typeface="Calibri" pitchFamily="34" charset="-120"/>
               </a:rPr>
-              <a:t>The framework adapts to the territory: an importer, an input distributor or a growers' group can lead the partnership.</a:t>
+              <a:t>The dosing rule is the same everywhere: 3 grams per liter of usable soil. What changes from one field to the next is the volume of soil the roots actually explore.</a:t>
             </a:r>
             <a:endParaRPr lang="en-US" sz="1250" dirty="0"/>
           </a:p>
@@ -8278,7 +8069,7 @@
                 <a:ea typeface="Calibri" pitchFamily="34" charset="-122"/>
                 <a:cs typeface="Calibri" pitchFamily="34" charset="-120"/>
               </a:rPr>
-              <a:t>WHAT TO ANTICIPATE</a:t>
+              <a:t>Working together</a:t>
             </a:r>
             <a:endParaRPr lang="en-US" sz="1150" dirty="0"/>
           </a:p>
@@ -8317,7 +8108,7 @@
                 <a:ea typeface="Cambria" pitchFamily="34" charset="-122"/>
                 <a:cs typeface="Cambria" pitchFamily="34" charset="-120"/>
               </a:rPr>
-              <a:t>Identified risks and how we answer them</a:t>
+              <a:t>A local partner for the United States</a:t>
             </a:r>
             <a:endParaRPr lang="en-US" sz="3000" dirty="0"/>
           </a:p>
@@ -8325,332 +8116,18 @@
       </p:sp>
       <p:sp>
         <p:nvSpPr>
-          <p:cNvPr id="4" name="Text 2"/>
-          <p:cNvSpPr txBox="1"/>
-          <p:nvPr/>
-        </p:nvSpPr>
-        <p:spPr>
-          <a:xfrm>
-            <a:off x="594360" y="1783080"/>
-            <a:ext cx="5227168" cy="411480"/>
-          </a:xfrm>
-          <a:prstGeom prst="rect">
-            <a:avLst/>
-          </a:prstGeom>
-          <a:noFill/>
-          <a:ln/>
-        </p:spPr>
-        <p:txBody>
-          <a:bodyPr wrap="square" lIns="0" tIns="0" rIns="0" bIns="0" rtlCol="0" anchor="ctr"/>
-          <a:lstStyle/>
-          <a:p>
-            <a:pPr algn="l" indent="0" marL="0">
-              <a:buNone/>
-            </a:pPr>
-            <a:r>
-              <a:rPr lang="en-US" sz="1600" b="1" dirty="0">
-                <a:solidFill>
-                  <a:srgbClr val="1D4E6B"/>
-                </a:solidFill>
-                <a:latin typeface="Cambria" pitchFamily="34" charset="0"/>
-                <a:ea typeface="Cambria" pitchFamily="34" charset="-122"/>
-                <a:cs typeface="Cambria" pitchFamily="34" charset="-120"/>
-              </a:rPr>
-              <a:t>Risks</a:t>
-            </a:r>
-            <a:endParaRPr lang="en-US" sz="1600" dirty="0"/>
-          </a:p>
-        </p:txBody>
-      </p:sp>
-      <p:sp>
-        <p:nvSpPr>
-          <p:cNvPr id="5" name="Text 3"/>
-          <p:cNvSpPr txBox="1"/>
-          <p:nvPr/>
-        </p:nvSpPr>
-        <p:spPr>
-          <a:xfrm>
-            <a:off x="594360" y="2286000"/>
-            <a:ext cx="5227168" cy="2468880"/>
-          </a:xfrm>
-          <a:prstGeom prst="rect">
-            <a:avLst/>
-          </a:prstGeom>
-          <a:noFill/>
-          <a:ln/>
-        </p:spPr>
-        <p:txBody>
-          <a:bodyPr wrap="square" lIns="0" tIns="0" rIns="0" bIns="0" rtlCol="0" anchor="t"/>
-          <a:lstStyle/>
-          <a:p>
-            <a:pPr algn="l" marL="342900" indent="-342900">
-              <a:lnSpc>
-                <a:spcPct val="122000"/>
-              </a:lnSpc>
-              <a:spcAft>
-                <a:spcPts val="1000"/>
-              </a:spcAft>
-              <a:buSzPct val="100000"/>
-              <a:buChar char="•"/>
-            </a:pPr>
-            <a:r>
-              <a:rPr lang="en-US" sz="1350" dirty="0">
-                <a:solidFill>
-                  <a:srgbClr val="2F3E47"/>
-                </a:solidFill>
-                <a:latin typeface="Calibri" pitchFamily="34" charset="0"/>
-                <a:ea typeface="Calibri" pitchFamily="34" charset="-122"/>
-                <a:cs typeface="Calibri" pitchFamily="34" charset="-120"/>
-              </a:rPr>
-              <a:t>Year-to-year rainfall variability: a wet season masks the value of the product.</a:t>
-            </a:r>
-            <a:endParaRPr lang="en-US" sz="1350" dirty="0"/>
-          </a:p>
-          <a:p>
-            <a:pPr algn="l" marL="342900" indent="-342900">
-              <a:lnSpc>
-                <a:spcPct val="122000"/>
-              </a:lnSpc>
-              <a:spcAft>
-                <a:spcPts val="1000"/>
-              </a:spcAft>
-              <a:buSzPct val="100000"/>
-              <a:buChar char="•"/>
-            </a:pPr>
-            <a:r>
-              <a:rPr lang="en-US" sz="1350" dirty="0">
-                <a:solidFill>
-                  <a:srgbClr val="2F3E47"/>
-                </a:solidFill>
-                <a:latin typeface="Calibri" pitchFamily="34" charset="0"/>
-                <a:ea typeface="Calibri" pitchFamily="34" charset="-122"/>
-                <a:cs typeface="Calibri" pitchFamily="34" charset="-120"/>
-              </a:rPr>
-              <a:t>Long purchasing cycles and agronomist sign-off on large operations, plus dealer and co-op channels to qualify.</a:t>
-            </a:r>
-            <a:endParaRPr lang="en-US" sz="1350" dirty="0"/>
-          </a:p>
-          <a:p>
-            <a:pPr algn="l" marL="342900" indent="-342900">
-              <a:lnSpc>
-                <a:spcPct val="122000"/>
-              </a:lnSpc>
-              <a:spcAft>
-                <a:spcPts val="1000"/>
-              </a:spcAft>
-              <a:buSzPct val="100000"/>
-              <a:buChar char="•"/>
-            </a:pPr>
-            <a:r>
-              <a:rPr lang="en-US" sz="1350" dirty="0">
-                <a:solidFill>
-                  <a:srgbClr val="2F3E47"/>
-                </a:solidFill>
-                <a:latin typeface="Calibri" pitchFamily="34" charset="0"/>
-                <a:ea typeface="Calibri" pitchFamily="34" charset="-122"/>
-                <a:cs typeface="Calibri" pitchFamily="34" charset="-120"/>
-              </a:rPr>
-              <a:t>Memory of low-grade sodium-based polymers, which left a poor reputation among growers.</a:t>
-            </a:r>
-            <a:endParaRPr lang="en-US" sz="1350" dirty="0"/>
-          </a:p>
-          <a:p>
-            <a:pPr algn="l" marL="342900" indent="-342900">
-              <a:lnSpc>
-                <a:spcPct val="122000"/>
-              </a:lnSpc>
-              <a:spcAft>
-                <a:spcPts val="1000"/>
-              </a:spcAft>
-              <a:buSzPct val="100000"/>
-              <a:buChar char="•"/>
-            </a:pPr>
-            <a:r>
-              <a:rPr lang="en-US" sz="1350" dirty="0">
-                <a:solidFill>
-                  <a:srgbClr val="2F3E47"/>
-                </a:solidFill>
-                <a:latin typeface="Calibri" pitchFamily="34" charset="0"/>
-                <a:ea typeface="Calibri" pitchFamily="34" charset="-122"/>
-                <a:cs typeface="Calibri" pitchFamily="34" charset="-120"/>
-              </a:rPr>
-              <a:t>Tight margins on row crops when input costs rise faster than commodity prices.</a:t>
-            </a:r>
-            <a:endParaRPr lang="en-US" sz="1350" dirty="0"/>
-          </a:p>
-        </p:txBody>
-      </p:sp>
-      <p:sp>
-        <p:nvSpPr>
-          <p:cNvPr id="6" name="Text 4"/>
-          <p:cNvSpPr txBox="1"/>
-          <p:nvPr/>
-        </p:nvSpPr>
-        <p:spPr>
-          <a:xfrm>
-            <a:off x="6370168" y="1783080"/>
-            <a:ext cx="5227168" cy="411480"/>
-          </a:xfrm>
-          <a:prstGeom prst="rect">
-            <a:avLst/>
-          </a:prstGeom>
-          <a:noFill/>
-          <a:ln/>
-        </p:spPr>
-        <p:txBody>
-          <a:bodyPr wrap="square" lIns="0" tIns="0" rIns="0" bIns="0" rtlCol="0" anchor="ctr"/>
-          <a:lstStyle/>
-          <a:p>
-            <a:pPr algn="l" indent="0" marL="0">
-              <a:buNone/>
-            </a:pPr>
-            <a:r>
-              <a:rPr lang="en-US" sz="1600" b="1" dirty="0">
-                <a:solidFill>
-                  <a:srgbClr val="1D4E6B"/>
-                </a:solidFill>
-                <a:latin typeface="Cambria" pitchFamily="34" charset="0"/>
-                <a:ea typeface="Cambria" pitchFamily="34" charset="-122"/>
-                <a:cs typeface="Cambria" pitchFamily="34" charset="-120"/>
-              </a:rPr>
-              <a:t>Answers</a:t>
-            </a:r>
-            <a:endParaRPr lang="en-US" sz="1600" dirty="0"/>
-          </a:p>
-        </p:txBody>
-      </p:sp>
-      <p:sp>
-        <p:nvSpPr>
-          <p:cNvPr id="7" name="Text 5"/>
-          <p:cNvSpPr txBox="1"/>
-          <p:nvPr/>
-        </p:nvSpPr>
-        <p:spPr>
-          <a:xfrm>
-            <a:off x="6370168" y="2286000"/>
-            <a:ext cx="5227168" cy="2468880"/>
-          </a:xfrm>
-          <a:prstGeom prst="rect">
-            <a:avLst/>
-          </a:prstGeom>
-          <a:noFill/>
-          <a:ln/>
-        </p:spPr>
-        <p:txBody>
-          <a:bodyPr wrap="square" lIns="0" tIns="0" rIns="0" bIns="0" rtlCol="0" anchor="t"/>
-          <a:lstStyle/>
-          <a:p>
-            <a:pPr algn="l" marL="342900" indent="-342900">
-              <a:lnSpc>
-                <a:spcPct val="122000"/>
-              </a:lnSpc>
-              <a:spcAft>
-                <a:spcPts val="1000"/>
-              </a:spcAft>
-              <a:buSzPct val="100000"/>
-              <a:buChar char="•"/>
-            </a:pPr>
-            <a:r>
-              <a:rPr lang="en-US" sz="1350" dirty="0">
-                <a:solidFill>
-                  <a:srgbClr val="2F3E47"/>
-                </a:solidFill>
-                <a:latin typeface="Calibri" pitchFamily="34" charset="0"/>
-                <a:ea typeface="Calibri" pitchFamily="34" charset="-122"/>
-                <a:cs typeface="Calibri" pitchFamily="34" charset="-120"/>
-              </a:rPr>
-              <a:t>Run the trial over a full cycle with a control block, so the gain is documented even in a favorable season.</a:t>
-            </a:r>
-            <a:endParaRPr lang="en-US" sz="1350" dirty="0"/>
-          </a:p>
-          <a:p>
-            <a:pPr algn="l" marL="342900" indent="-342900">
-              <a:lnSpc>
-                <a:spcPct val="122000"/>
-              </a:lnSpc>
-              <a:spcAft>
-                <a:spcPts val="1000"/>
-              </a:spcAft>
-              <a:buSzPct val="100000"/>
-              <a:buChar char="•"/>
-            </a:pPr>
-            <a:r>
-              <a:rPr lang="en-US" sz="1350" dirty="0">
-                <a:solidFill>
-                  <a:srgbClr val="2F3E47"/>
-                </a:solidFill>
-                <a:latin typeface="Calibri" pitchFamily="34" charset="0"/>
-                <a:ea typeface="Calibri" pitchFamily="34" charset="-122"/>
-                <a:cs typeface="Calibri" pitchFamily="34" charset="-120"/>
-              </a:rPr>
-              <a:t>Work through dealers, co-ops and crop consultants rather than farm by farm, and supply the trial protocol in advance.</a:t>
-            </a:r>
-            <a:endParaRPr lang="en-US" sz="1350" dirty="0"/>
-          </a:p>
-          <a:p>
-            <a:pPr algn="l" marL="342900" indent="-342900">
-              <a:lnSpc>
-                <a:spcPct val="122000"/>
-              </a:lnSpc>
-              <a:spcAft>
-                <a:spcPts val="1000"/>
-              </a:spcAft>
-              <a:buSzPct val="100000"/>
-              <a:buChar char="•"/>
-            </a:pPr>
-            <a:r>
-              <a:rPr lang="en-US" sz="1350" dirty="0">
-                <a:solidFill>
-                  <a:srgbClr val="2F3E47"/>
-                </a:solidFill>
-                <a:latin typeface="Calibri" pitchFamily="34" charset="0"/>
-                <a:ea typeface="Calibri" pitchFamily="34" charset="-122"/>
-                <a:cs typeface="Calibri" pitchFamily="34" charset="-120"/>
-              </a:rPr>
-              <a:t>Document the formulation: potassium, never sodium, compatible with food crops and with soil health.</a:t>
-            </a:r>
-            <a:endParaRPr lang="en-US" sz="1350" dirty="0"/>
-          </a:p>
-          <a:p>
-            <a:pPr algn="l" marL="342900" indent="-342900">
-              <a:lnSpc>
-                <a:spcPct val="122000"/>
-              </a:lnSpc>
-              <a:spcAft>
-                <a:spcPts val="1000"/>
-              </a:spcAft>
-              <a:buSzPct val="100000"/>
-              <a:buChar char="•"/>
-            </a:pPr>
-            <a:r>
-              <a:rPr lang="en-US" sz="1350" dirty="0">
-                <a:solidFill>
-                  <a:srgbClr val="2F3E47"/>
-                </a:solidFill>
-                <a:latin typeface="Calibri" pitchFamily="34" charset="0"/>
-                <a:ea typeface="Calibri" pitchFamily="34" charset="-122"/>
-                <a:cs typeface="Calibri" pitchFamily="34" charset="-120"/>
-              </a:rPr>
-              <a:t>Spread the outlay: a 3 to 4 year useful life amortizes the cost across several seasons.</a:t>
-            </a:r>
-            <a:endParaRPr lang="en-US" sz="1350" dirty="0"/>
-          </a:p>
-        </p:txBody>
-      </p:sp>
-      <p:sp>
-        <p:nvSpPr>
-          <p:cNvPr id="8" name="Shape 6"/>
+          <p:cNvPr id="4" name="Shape 2"/>
           <p:cNvSpPr/>
           <p:nvPr/>
         </p:nvSpPr>
         <p:spPr>
           <a:xfrm>
-            <a:off x="594360" y="4846320"/>
-            <a:ext cx="11002975" cy="960120"/>
+            <a:off x="594360" y="1874520"/>
+            <a:ext cx="2545004" cy="2834640"/>
           </a:xfrm>
           <a:prstGeom prst="roundRect">
             <a:avLst>
-              <a:gd name="adj" fmla="val 7619"/>
+              <a:gd name="adj" fmla="val 3593"/>
             </a:avLst>
           </a:prstGeom>
           <a:solidFill>
@@ -8666,14 +8143,112 @@
       </p:sp>
       <p:sp>
         <p:nvSpPr>
-          <p:cNvPr id="9" name="Text 7"/>
-          <p:cNvSpPr txBox="1"/>
-          <p:nvPr/>
-        </p:nvSpPr>
-        <p:spPr>
-          <a:xfrm>
-            <a:off x="822960" y="4983480"/>
-            <a:ext cx="10545775" cy="713232"/>
+          <p:cNvPr id="5" name="Shape 3"/>
+          <p:cNvSpPr/>
+          <p:nvPr/>
+        </p:nvSpPr>
+        <p:spPr>
+          <a:xfrm>
+            <a:off x="822960" y="2103120"/>
+            <a:ext cx="566928" cy="566928"/>
+          </a:xfrm>
+          <a:prstGeom prst="ellipse">
+            <a:avLst/>
+          </a:prstGeom>
+          <a:solidFill>
+            <a:srgbClr val="1D4E6B"/>
+          </a:solidFill>
+          <a:ln/>
+        </p:spPr>
+      </p:sp>
+      <p:sp>
+        <p:nvSpPr>
+          <p:cNvPr id="6" name="Text 4"/>
+          <p:cNvSpPr txBox="1"/>
+          <p:nvPr/>
+        </p:nvSpPr>
+        <p:spPr>
+          <a:xfrm>
+            <a:off x="822960" y="2103120"/>
+            <a:ext cx="566928" cy="566928"/>
+          </a:xfrm>
+          <a:prstGeom prst="rect">
+            <a:avLst/>
+          </a:prstGeom>
+          <a:noFill/>
+          <a:ln/>
+        </p:spPr>
+        <p:txBody>
+          <a:bodyPr wrap="square" lIns="0" tIns="0" rIns="0" bIns="0" rtlCol="0" anchor="ctr"/>
+          <a:lstStyle/>
+          <a:p>
+            <a:pPr algn="ctr" indent="0" marL="0">
+              <a:buNone/>
+            </a:pPr>
+            <a:r>
+              <a:rPr lang="en-US" sz="1600" b="1" dirty="0">
+                <a:solidFill>
+                  <a:srgbClr val="FFFFFF"/>
+                </a:solidFill>
+                <a:latin typeface="Cambria" pitchFamily="34" charset="0"/>
+                <a:ea typeface="Cambria" pitchFamily="34" charset="-122"/>
+                <a:cs typeface="Cambria" pitchFamily="34" charset="-120"/>
+              </a:rPr>
+              <a:t>1</a:t>
+            </a:r>
+            <a:endParaRPr lang="en-US" sz="1600" dirty="0"/>
+          </a:p>
+        </p:txBody>
+      </p:sp>
+      <p:sp>
+        <p:nvSpPr>
+          <p:cNvPr id="7" name="Text 5"/>
+          <p:cNvSpPr txBox="1"/>
+          <p:nvPr/>
+        </p:nvSpPr>
+        <p:spPr>
+          <a:xfrm>
+            <a:off x="822960" y="2788920"/>
+            <a:ext cx="2087804" cy="457200"/>
+          </a:xfrm>
+          <a:prstGeom prst="rect">
+            <a:avLst/>
+          </a:prstGeom>
+          <a:noFill/>
+          <a:ln/>
+        </p:spPr>
+        <p:txBody>
+          <a:bodyPr wrap="square" lIns="0" tIns="0" rIns="0" bIns="0" rtlCol="0" anchor="ctr"/>
+          <a:lstStyle/>
+          <a:p>
+            <a:pPr algn="l" indent="0" marL="0">
+              <a:buNone/>
+            </a:pPr>
+            <a:r>
+              <a:rPr lang="en-US" sz="1400" b="1" dirty="0">
+                <a:solidFill>
+                  <a:srgbClr val="1D4E6B"/>
+                </a:solidFill>
+                <a:latin typeface="Cambria" pitchFamily="34" charset="0"/>
+                <a:ea typeface="Cambria" pitchFamily="34" charset="-122"/>
+                <a:cs typeface="Cambria" pitchFamily="34" charset="-120"/>
+              </a:rPr>
+              <a:t>Distribution</a:t>
+            </a:r>
+            <a:endParaRPr lang="en-US" sz="1400" dirty="0"/>
+          </a:p>
+        </p:txBody>
+      </p:sp>
+      <p:sp>
+        <p:nvSpPr>
+          <p:cNvPr id="8" name="Text 6"/>
+          <p:cNvSpPr txBox="1"/>
+          <p:nvPr/>
+        </p:nvSpPr>
+        <p:spPr>
+          <a:xfrm>
+            <a:off x="822960" y="3291840"/>
+            <a:ext cx="2087804" cy="1234440"/>
           </a:xfrm>
           <a:prstGeom prst="rect">
             <a:avLst/>
@@ -8687,12 +8262,555 @@
           <a:p>
             <a:pPr algn="l" indent="0" marL="0">
               <a:lnSpc>
-                <a:spcPct val="118000"/>
+                <a:spcPct val="120000"/>
               </a:lnSpc>
               <a:buNone/>
             </a:pPr>
             <a:r>
-              <a:rPr lang="en-US" sz="1100" dirty="0">
+              <a:rPr lang="en-US" sz="1200" dirty="0">
+                <a:solidFill>
+                  <a:srgbClr val="2F3E47"/>
+                </a:solidFill>
+                <a:latin typeface="Calibri" pitchFamily="34" charset="0"/>
+                <a:ea typeface="Calibri" pitchFamily="34" charset="-122"/>
+                <a:cs typeface="Calibri" pitchFamily="34" charset="-120"/>
+              </a:rPr>
+              <a:t>Territorial exclusivity and launch stock for the first commercial season.</a:t>
+            </a:r>
+            <a:endParaRPr lang="en-US" sz="1200" dirty="0"/>
+          </a:p>
+        </p:txBody>
+      </p:sp>
+      <p:sp>
+        <p:nvSpPr>
+          <p:cNvPr id="9" name="Shape 7"/>
+          <p:cNvSpPr/>
+          <p:nvPr/>
+        </p:nvSpPr>
+        <p:spPr>
+          <a:xfrm>
+            <a:off x="3413684" y="1874520"/>
+            <a:ext cx="2545004" cy="2834640"/>
+          </a:xfrm>
+          <a:prstGeom prst="roundRect">
+            <a:avLst>
+              <a:gd name="adj" fmla="val 3593"/>
+            </a:avLst>
+          </a:prstGeom>
+          <a:solidFill>
+            <a:srgbClr val="EEF2F5"/>
+          </a:solidFill>
+          <a:ln w="9525">
+            <a:solidFill>
+              <a:srgbClr val="D8E1E7"/>
+            </a:solidFill>
+            <a:prstDash val="solid"/>
+          </a:ln>
+        </p:spPr>
+      </p:sp>
+      <p:sp>
+        <p:nvSpPr>
+          <p:cNvPr id="10" name="Shape 8"/>
+          <p:cNvSpPr/>
+          <p:nvPr/>
+        </p:nvSpPr>
+        <p:spPr>
+          <a:xfrm>
+            <a:off x="3642284" y="2103120"/>
+            <a:ext cx="566928" cy="566928"/>
+          </a:xfrm>
+          <a:prstGeom prst="ellipse">
+            <a:avLst/>
+          </a:prstGeom>
+          <a:solidFill>
+            <a:srgbClr val="1D4E6B"/>
+          </a:solidFill>
+          <a:ln/>
+        </p:spPr>
+      </p:sp>
+      <p:sp>
+        <p:nvSpPr>
+          <p:cNvPr id="11" name="Text 9"/>
+          <p:cNvSpPr txBox="1"/>
+          <p:nvPr/>
+        </p:nvSpPr>
+        <p:spPr>
+          <a:xfrm>
+            <a:off x="3642284" y="2103120"/>
+            <a:ext cx="566928" cy="566928"/>
+          </a:xfrm>
+          <a:prstGeom prst="rect">
+            <a:avLst/>
+          </a:prstGeom>
+          <a:noFill/>
+          <a:ln/>
+        </p:spPr>
+        <p:txBody>
+          <a:bodyPr wrap="square" lIns="0" tIns="0" rIns="0" bIns="0" rtlCol="0" anchor="ctr"/>
+          <a:lstStyle/>
+          <a:p>
+            <a:pPr algn="ctr" indent="0" marL="0">
+              <a:buNone/>
+            </a:pPr>
+            <a:r>
+              <a:rPr lang="en-US" sz="1600" b="1" dirty="0">
+                <a:solidFill>
+                  <a:srgbClr val="FFFFFF"/>
+                </a:solidFill>
+                <a:latin typeface="Cambria" pitchFamily="34" charset="0"/>
+                <a:ea typeface="Cambria" pitchFamily="34" charset="-122"/>
+                <a:cs typeface="Cambria" pitchFamily="34" charset="-120"/>
+              </a:rPr>
+              <a:t>2</a:t>
+            </a:r>
+            <a:endParaRPr lang="en-US" sz="1600" dirty="0"/>
+          </a:p>
+        </p:txBody>
+      </p:sp>
+      <p:sp>
+        <p:nvSpPr>
+          <p:cNvPr id="12" name="Text 10"/>
+          <p:cNvSpPr txBox="1"/>
+          <p:nvPr/>
+        </p:nvSpPr>
+        <p:spPr>
+          <a:xfrm>
+            <a:off x="3642284" y="2788920"/>
+            <a:ext cx="2087804" cy="457200"/>
+          </a:xfrm>
+          <a:prstGeom prst="rect">
+            <a:avLst/>
+          </a:prstGeom>
+          <a:noFill/>
+          <a:ln/>
+        </p:spPr>
+        <p:txBody>
+          <a:bodyPr wrap="square" lIns="0" tIns="0" rIns="0" bIns="0" rtlCol="0" anchor="ctr"/>
+          <a:lstStyle/>
+          <a:p>
+            <a:pPr algn="l" indent="0" marL="0">
+              <a:buNone/>
+            </a:pPr>
+            <a:r>
+              <a:rPr lang="en-US" sz="1400" b="1" dirty="0">
+                <a:solidFill>
+                  <a:srgbClr val="1D4E6B"/>
+                </a:solidFill>
+                <a:latin typeface="Cambria" pitchFamily="34" charset="0"/>
+                <a:ea typeface="Cambria" pitchFamily="34" charset="-122"/>
+                <a:cs typeface="Cambria" pitchFamily="34" charset="-120"/>
+              </a:rPr>
+              <a:t>Training</a:t>
+            </a:r>
+            <a:endParaRPr lang="en-US" sz="1400" dirty="0"/>
+          </a:p>
+        </p:txBody>
+      </p:sp>
+      <p:sp>
+        <p:nvSpPr>
+          <p:cNvPr id="13" name="Text 11"/>
+          <p:cNvSpPr txBox="1"/>
+          <p:nvPr/>
+        </p:nvSpPr>
+        <p:spPr>
+          <a:xfrm>
+            <a:off x="3642284" y="3291840"/>
+            <a:ext cx="2087804" cy="1234440"/>
+          </a:xfrm>
+          <a:prstGeom prst="rect">
+            <a:avLst/>
+          </a:prstGeom>
+          <a:noFill/>
+          <a:ln/>
+        </p:spPr>
+        <p:txBody>
+          <a:bodyPr wrap="square" lIns="0" tIns="0" rIns="0" bIns="0" rtlCol="0" anchor="t"/>
+          <a:lstStyle/>
+          <a:p>
+            <a:pPr algn="l" indent="0" marL="0">
+              <a:lnSpc>
+                <a:spcPct val="120000"/>
+              </a:lnSpc>
+              <a:buNone/>
+            </a:pPr>
+            <a:r>
+              <a:rPr lang="en-US" sz="1200" dirty="0">
+                <a:solidFill>
+                  <a:srgbClr val="2F3E47"/>
+                </a:solidFill>
+                <a:latin typeface="Calibri" pitchFamily="34" charset="0"/>
+                <a:ea typeface="Calibri" pitchFamily="34" charset="-122"/>
+                <a:cs typeface="Calibri" pitchFamily="34" charset="-120"/>
+              </a:rPr>
+              <a:t>Technical training for field teams, dosing protocols and seasonal updates.</a:t>
+            </a:r>
+            <a:endParaRPr lang="en-US" sz="1200" dirty="0"/>
+          </a:p>
+        </p:txBody>
+      </p:sp>
+      <p:sp>
+        <p:nvSpPr>
+          <p:cNvPr id="14" name="Shape 12"/>
+          <p:cNvSpPr/>
+          <p:nvPr/>
+        </p:nvSpPr>
+        <p:spPr>
+          <a:xfrm>
+            <a:off x="6233008" y="1874520"/>
+            <a:ext cx="2545004" cy="2834640"/>
+          </a:xfrm>
+          <a:prstGeom prst="roundRect">
+            <a:avLst>
+              <a:gd name="adj" fmla="val 3593"/>
+            </a:avLst>
+          </a:prstGeom>
+          <a:solidFill>
+            <a:srgbClr val="EEF2F5"/>
+          </a:solidFill>
+          <a:ln w="9525">
+            <a:solidFill>
+              <a:srgbClr val="D8E1E7"/>
+            </a:solidFill>
+            <a:prstDash val="solid"/>
+          </a:ln>
+        </p:spPr>
+      </p:sp>
+      <p:sp>
+        <p:nvSpPr>
+          <p:cNvPr id="15" name="Shape 13"/>
+          <p:cNvSpPr/>
+          <p:nvPr/>
+        </p:nvSpPr>
+        <p:spPr>
+          <a:xfrm>
+            <a:off x="6461608" y="2103120"/>
+            <a:ext cx="566928" cy="566928"/>
+          </a:xfrm>
+          <a:prstGeom prst="ellipse">
+            <a:avLst/>
+          </a:prstGeom>
+          <a:solidFill>
+            <a:srgbClr val="1D4E6B"/>
+          </a:solidFill>
+          <a:ln/>
+        </p:spPr>
+      </p:sp>
+      <p:sp>
+        <p:nvSpPr>
+          <p:cNvPr id="16" name="Text 14"/>
+          <p:cNvSpPr txBox="1"/>
+          <p:nvPr/>
+        </p:nvSpPr>
+        <p:spPr>
+          <a:xfrm>
+            <a:off x="6461608" y="2103120"/>
+            <a:ext cx="566928" cy="566928"/>
+          </a:xfrm>
+          <a:prstGeom prst="rect">
+            <a:avLst/>
+          </a:prstGeom>
+          <a:noFill/>
+          <a:ln/>
+        </p:spPr>
+        <p:txBody>
+          <a:bodyPr wrap="square" lIns="0" tIns="0" rIns="0" bIns="0" rtlCol="0" anchor="ctr"/>
+          <a:lstStyle/>
+          <a:p>
+            <a:pPr algn="ctr" indent="0" marL="0">
+              <a:buNone/>
+            </a:pPr>
+            <a:r>
+              <a:rPr lang="en-US" sz="1600" b="1" dirty="0">
+                <a:solidFill>
+                  <a:srgbClr val="FFFFFF"/>
+                </a:solidFill>
+                <a:latin typeface="Cambria" pitchFamily="34" charset="0"/>
+                <a:ea typeface="Cambria" pitchFamily="34" charset="-122"/>
+                <a:cs typeface="Cambria" pitchFamily="34" charset="-120"/>
+              </a:rPr>
+              <a:t>3</a:t>
+            </a:r>
+            <a:endParaRPr lang="en-US" sz="1600" dirty="0"/>
+          </a:p>
+        </p:txBody>
+      </p:sp>
+      <p:sp>
+        <p:nvSpPr>
+          <p:cNvPr id="17" name="Text 15"/>
+          <p:cNvSpPr txBox="1"/>
+          <p:nvPr/>
+        </p:nvSpPr>
+        <p:spPr>
+          <a:xfrm>
+            <a:off x="6461608" y="2788920"/>
+            <a:ext cx="2087804" cy="457200"/>
+          </a:xfrm>
+          <a:prstGeom prst="rect">
+            <a:avLst/>
+          </a:prstGeom>
+          <a:noFill/>
+          <a:ln/>
+        </p:spPr>
+        <p:txBody>
+          <a:bodyPr wrap="square" lIns="0" tIns="0" rIns="0" bIns="0" rtlCol="0" anchor="ctr"/>
+          <a:lstStyle/>
+          <a:p>
+            <a:pPr algn="l" indent="0" marL="0">
+              <a:buNone/>
+            </a:pPr>
+            <a:r>
+              <a:rPr lang="en-US" sz="1400" b="1" dirty="0">
+                <a:solidFill>
+                  <a:srgbClr val="1D4E6B"/>
+                </a:solidFill>
+                <a:latin typeface="Cambria" pitchFamily="34" charset="0"/>
+                <a:ea typeface="Cambria" pitchFamily="34" charset="-122"/>
+                <a:cs typeface="Cambria" pitchFamily="34" charset="-120"/>
+              </a:rPr>
+              <a:t>Joint trials</a:t>
+            </a:r>
+            <a:endParaRPr lang="en-US" sz="1400" dirty="0"/>
+          </a:p>
+        </p:txBody>
+      </p:sp>
+      <p:sp>
+        <p:nvSpPr>
+          <p:cNvPr id="18" name="Text 16"/>
+          <p:cNvSpPr txBox="1"/>
+          <p:nvPr/>
+        </p:nvSpPr>
+        <p:spPr>
+          <a:xfrm>
+            <a:off x="6461608" y="3291840"/>
+            <a:ext cx="2087804" cy="1234440"/>
+          </a:xfrm>
+          <a:prstGeom prst="rect">
+            <a:avLst/>
+          </a:prstGeom>
+          <a:noFill/>
+          <a:ln/>
+        </p:spPr>
+        <p:txBody>
+          <a:bodyPr wrap="square" lIns="0" tIns="0" rIns="0" bIns="0" rtlCol="0" anchor="t"/>
+          <a:lstStyle/>
+          <a:p>
+            <a:pPr algn="l" indent="0" marL="0">
+              <a:lnSpc>
+                <a:spcPct val="120000"/>
+              </a:lnSpc>
+              <a:buNone/>
+            </a:pPr>
+            <a:r>
+              <a:rPr lang="en-US" sz="1200" dirty="0">
+                <a:solidFill>
+                  <a:srgbClr val="2F3E47"/>
+                </a:solidFill>
+                <a:latin typeface="Calibri" pitchFamily="34" charset="0"/>
+                <a:ea typeface="Calibri" pitchFamily="34" charset="-122"/>
+                <a:cs typeface="Calibri" pitchFamily="34" charset="-120"/>
+              </a:rPr>
+              <a:t>Demonstration plots with a control, results shared with growers.</a:t>
+            </a:r>
+            <a:endParaRPr lang="en-US" sz="1200" dirty="0"/>
+          </a:p>
+        </p:txBody>
+      </p:sp>
+      <p:sp>
+        <p:nvSpPr>
+          <p:cNvPr id="19" name="Shape 17"/>
+          <p:cNvSpPr/>
+          <p:nvPr/>
+        </p:nvSpPr>
+        <p:spPr>
+          <a:xfrm>
+            <a:off x="9052331" y="1874520"/>
+            <a:ext cx="2545004" cy="2834640"/>
+          </a:xfrm>
+          <a:prstGeom prst="roundRect">
+            <a:avLst>
+              <a:gd name="adj" fmla="val 3593"/>
+            </a:avLst>
+          </a:prstGeom>
+          <a:solidFill>
+            <a:srgbClr val="EEF2F5"/>
+          </a:solidFill>
+          <a:ln w="9525">
+            <a:solidFill>
+              <a:srgbClr val="D8E1E7"/>
+            </a:solidFill>
+            <a:prstDash val="solid"/>
+          </a:ln>
+        </p:spPr>
+      </p:sp>
+      <p:sp>
+        <p:nvSpPr>
+          <p:cNvPr id="20" name="Shape 18"/>
+          <p:cNvSpPr/>
+          <p:nvPr/>
+        </p:nvSpPr>
+        <p:spPr>
+          <a:xfrm>
+            <a:off x="9280931" y="2103120"/>
+            <a:ext cx="566928" cy="566928"/>
+          </a:xfrm>
+          <a:prstGeom prst="ellipse">
+            <a:avLst/>
+          </a:prstGeom>
+          <a:solidFill>
+            <a:srgbClr val="1D4E6B"/>
+          </a:solidFill>
+          <a:ln/>
+        </p:spPr>
+      </p:sp>
+      <p:sp>
+        <p:nvSpPr>
+          <p:cNvPr id="21" name="Text 19"/>
+          <p:cNvSpPr txBox="1"/>
+          <p:nvPr/>
+        </p:nvSpPr>
+        <p:spPr>
+          <a:xfrm>
+            <a:off x="9280931" y="2103120"/>
+            <a:ext cx="566928" cy="566928"/>
+          </a:xfrm>
+          <a:prstGeom prst="rect">
+            <a:avLst/>
+          </a:prstGeom>
+          <a:noFill/>
+          <a:ln/>
+        </p:spPr>
+        <p:txBody>
+          <a:bodyPr wrap="square" lIns="0" tIns="0" rIns="0" bIns="0" rtlCol="0" anchor="ctr"/>
+          <a:lstStyle/>
+          <a:p>
+            <a:pPr algn="ctr" indent="0" marL="0">
+              <a:buNone/>
+            </a:pPr>
+            <a:r>
+              <a:rPr lang="en-US" sz="1600" b="1" dirty="0">
+                <a:solidFill>
+                  <a:srgbClr val="FFFFFF"/>
+                </a:solidFill>
+                <a:latin typeface="Cambria" pitchFamily="34" charset="0"/>
+                <a:ea typeface="Cambria" pitchFamily="34" charset="-122"/>
+                <a:cs typeface="Cambria" pitchFamily="34" charset="-120"/>
+              </a:rPr>
+              <a:t>4</a:t>
+            </a:r>
+            <a:endParaRPr lang="en-US" sz="1600" dirty="0"/>
+          </a:p>
+        </p:txBody>
+      </p:sp>
+      <p:sp>
+        <p:nvSpPr>
+          <p:cNvPr id="22" name="Text 20"/>
+          <p:cNvSpPr txBox="1"/>
+          <p:nvPr/>
+        </p:nvSpPr>
+        <p:spPr>
+          <a:xfrm>
+            <a:off x="9280931" y="2788920"/>
+            <a:ext cx="2087804" cy="457200"/>
+          </a:xfrm>
+          <a:prstGeom prst="rect">
+            <a:avLst/>
+          </a:prstGeom>
+          <a:noFill/>
+          <a:ln/>
+        </p:spPr>
+        <p:txBody>
+          <a:bodyPr wrap="square" lIns="0" tIns="0" rIns="0" bIns="0" rtlCol="0" anchor="ctr"/>
+          <a:lstStyle/>
+          <a:p>
+            <a:pPr algn="l" indent="0" marL="0">
+              <a:buNone/>
+            </a:pPr>
+            <a:r>
+              <a:rPr lang="en-US" sz="1400" b="1" dirty="0">
+                <a:solidFill>
+                  <a:srgbClr val="1D4E6B"/>
+                </a:solidFill>
+                <a:latin typeface="Cambria" pitchFamily="34" charset="0"/>
+                <a:ea typeface="Cambria" pitchFamily="34" charset="-122"/>
+                <a:cs typeface="Cambria" pitchFamily="34" charset="-120"/>
+              </a:rPr>
+              <a:t>Institutions</a:t>
+            </a:r>
+            <a:endParaRPr lang="en-US" sz="1400" dirty="0"/>
+          </a:p>
+        </p:txBody>
+      </p:sp>
+      <p:sp>
+        <p:nvSpPr>
+          <p:cNvPr id="23" name="Text 21"/>
+          <p:cNvSpPr txBox="1"/>
+          <p:nvPr/>
+        </p:nvSpPr>
+        <p:spPr>
+          <a:xfrm>
+            <a:off x="9280931" y="3291840"/>
+            <a:ext cx="2087804" cy="1234440"/>
+          </a:xfrm>
+          <a:prstGeom prst="rect">
+            <a:avLst/>
+          </a:prstGeom>
+          <a:noFill/>
+          <a:ln/>
+        </p:spPr>
+        <p:txBody>
+          <a:bodyPr wrap="square" lIns="0" tIns="0" rIns="0" bIns="0" rtlCol="0" anchor="t"/>
+          <a:lstStyle/>
+          <a:p>
+            <a:pPr algn="l" indent="0" marL="0">
+              <a:lnSpc>
+                <a:spcPct val="120000"/>
+              </a:lnSpc>
+              <a:buNone/>
+            </a:pPr>
+            <a:r>
+              <a:rPr lang="en-US" sz="1200" dirty="0">
+                <a:solidFill>
+                  <a:srgbClr val="2F3E47"/>
+                </a:solidFill>
+                <a:latin typeface="Calibri" pitchFamily="34" charset="0"/>
+                <a:ea typeface="Calibri" pitchFamily="34" charset="-122"/>
+                <a:cs typeface="Calibri" pitchFamily="34" charset="-120"/>
+              </a:rPr>
+              <a:t>Dialogue with the Ministry of Agriculture and food-security programmes.</a:t>
+            </a:r>
+            <a:endParaRPr lang="en-US" sz="1200" dirty="0"/>
+          </a:p>
+        </p:txBody>
+      </p:sp>
+      <p:sp>
+        <p:nvSpPr>
+          <p:cNvPr id="24" name="Text 22"/>
+          <p:cNvSpPr txBox="1"/>
+          <p:nvPr/>
+        </p:nvSpPr>
+        <p:spPr>
+          <a:xfrm>
+            <a:off x="594360" y="4983480"/>
+            <a:ext cx="11002975" cy="822960"/>
+          </a:xfrm>
+          <a:prstGeom prst="rect">
+            <a:avLst/>
+          </a:prstGeom>
+          <a:noFill/>
+          <a:ln/>
+        </p:spPr>
+        <p:txBody>
+          <a:bodyPr wrap="square" lIns="0" tIns="0" rIns="0" bIns="0" rtlCol="0" anchor="t"/>
+          <a:lstStyle/>
+          <a:p>
+            <a:pPr algn="l" indent="0" marL="0">
+              <a:lnSpc>
+                <a:spcPct val="125000"/>
+              </a:lnSpc>
+              <a:buNone/>
+            </a:pPr>
+            <a:r>
+              <a:rPr lang="en-US" sz="1250" i="1" dirty="0">
                 <a:solidFill>
                   <a:srgbClr val="6B7D87"/>
                 </a:solidFill>
@@ -8700,15 +8818,15 @@
                 <a:ea typeface="Calibri" pitchFamily="34" charset="-122"/>
                 <a:cs typeface="Calibri" pitchFamily="34" charset="-120"/>
               </a:rPr>
-              <a:t>Acrylamide analysis (Polymex laboratory, ISO 9001, content below 3.0 µg/g), REACH / SVHC screening (SGS) and the SOHISCERT certificate valid to 4 September 2027 are all available on request.</a:t>
-            </a:r>
-            <a:endParaRPr lang="en-US" sz="1100" dirty="0"/>
-          </a:p>
-        </p:txBody>
-      </p:sp>
-      <p:sp>
-        <p:nvSpPr>
-          <p:cNvPr id="10" name="Text 8"/>
+              <a:t>The framework adapts to the territory: an importer, an input distributor or a growers' group can lead the partnership.</a:t>
+            </a:r>
+            <a:endParaRPr lang="en-US" sz="1250" dirty="0"/>
+          </a:p>
+        </p:txBody>
+      </p:sp>
+      <p:sp>
+        <p:nvSpPr>
+          <p:cNvPr id="25" name="Text 23"/>
           <p:cNvSpPr txBox="1"/>
           <p:nvPr/>
         </p:nvSpPr>
@@ -8749,7 +8867,7 @@
       </p:sp>
       <p:sp>
         <p:nvSpPr>
-          <p:cNvPr id="11" name="Text 9"/>
+          <p:cNvPr id="26" name="Text 24"/>
           <p:cNvSpPr txBox="1"/>
           <p:nvPr/>
         </p:nvSpPr>
@@ -8853,7 +8971,7 @@
                 <a:ea typeface="Calibri" pitchFamily="34" charset="-122"/>
                 <a:cs typeface="Calibri" pitchFamily="34" charset="-120"/>
               </a:rPr>
-              <a:t>Sources</a:t>
+              <a:t>WHAT TO ANTICIPATE</a:t>
             </a:r>
             <a:endParaRPr lang="en-US" sz="1150" dirty="0"/>
           </a:p>
@@ -8892,7 +9010,7 @@
                 <a:ea typeface="Cambria" pitchFamily="34" charset="-122"/>
                 <a:cs typeface="Cambria" pitchFamily="34" charset="-120"/>
               </a:rPr>
-              <a:t>Sources and working assumptions</a:t>
+              <a:t>Identified risks and how we answer them</a:t>
             </a:r>
             <a:endParaRPr lang="en-US" sz="3000" dirty="0"/>
           </a:p>
@@ -8931,7 +9049,7 @@
                 <a:ea typeface="Cambria" pitchFamily="34" charset="-122"/>
                 <a:cs typeface="Cambria" pitchFamily="34" charset="-120"/>
               </a:rPr>
-              <a:t>Main sources</a:t>
+              <a:t>Risks</a:t>
             </a:r>
             <a:endParaRPr lang="en-US" sz="1600" dirty="0"/>
           </a:p>
@@ -8977,7 +9095,7 @@
                 <a:ea typeface="Calibri" pitchFamily="34" charset="-122"/>
                 <a:cs typeface="Calibri" pitchFamily="34" charset="-120"/>
               </a:rPr>
-              <a:t>USDA NASS: 2022 Census of Agriculture, state farm cash receipts.</a:t>
+              <a:t>Year-to-year rainfall variability: a wet season masks the value of the product.</a:t>
             </a:r>
             <a:endParaRPr lang="en-US" sz="1350" dirty="0"/>
           </a:p>
@@ -9001,7 +9119,7 @@
                 <a:ea typeface="Calibri" pitchFamily="34" charset="-122"/>
                 <a:cs typeface="Calibri" pitchFamily="34" charset="-120"/>
               </a:rPr>
-              <a:t>USDA ERS: agriculture and food sectors in the economy, farm exports.</a:t>
+              <a:t>Long purchasing cycles and agronomist sign-off on large operations, plus dealer and co-op channels to qualify.</a:t>
             </a:r>
             <a:endParaRPr lang="en-US" sz="1350" dirty="0"/>
           </a:p>
@@ -9025,7 +9143,7 @@
                 <a:ea typeface="Calibri" pitchFamily="34" charset="-122"/>
                 <a:cs typeface="Calibri" pitchFamily="34" charset="-120"/>
               </a:rPr>
-              <a:t>USGS: estimated water use in the United States, High Plains aquifer monitoring.</a:t>
+              <a:t>Memory of low-grade sodium-based polymers, which left a poor reputation among growers.</a:t>
             </a:r>
             <a:endParaRPr lang="en-US" sz="1350" dirty="0"/>
           </a:p>
@@ -9049,10 +9167,71 @@
                 <a:ea typeface="Calibri" pitchFamily="34" charset="-122"/>
                 <a:cs typeface="Calibri" pitchFamily="34" charset="-120"/>
               </a:rPr>
-              <a:t>California Department of Water Resources (SGMA); Almond Board of California.</a:t>
+              <a:t>Tight margins on row crops when input costs rise faster than commodity prices.</a:t>
             </a:r>
             <a:endParaRPr lang="en-US" sz="1350" dirty="0"/>
           </a:p>
+        </p:txBody>
+      </p:sp>
+      <p:sp>
+        <p:nvSpPr>
+          <p:cNvPr id="6" name="Text 4"/>
+          <p:cNvSpPr txBox="1"/>
+          <p:nvPr/>
+        </p:nvSpPr>
+        <p:spPr>
+          <a:xfrm>
+            <a:off x="6370168" y="1783080"/>
+            <a:ext cx="5227168" cy="411480"/>
+          </a:xfrm>
+          <a:prstGeom prst="rect">
+            <a:avLst/>
+          </a:prstGeom>
+          <a:noFill/>
+          <a:ln/>
+        </p:spPr>
+        <p:txBody>
+          <a:bodyPr wrap="square" lIns="0" tIns="0" rIns="0" bIns="0" rtlCol="0" anchor="ctr"/>
+          <a:lstStyle/>
+          <a:p>
+            <a:pPr algn="l" indent="0" marL="0">
+              <a:buNone/>
+            </a:pPr>
+            <a:r>
+              <a:rPr lang="en-US" sz="1600" b="1" dirty="0">
+                <a:solidFill>
+                  <a:srgbClr val="1D4E6B"/>
+                </a:solidFill>
+                <a:latin typeface="Cambria" pitchFamily="34" charset="0"/>
+                <a:ea typeface="Cambria" pitchFamily="34" charset="-122"/>
+                <a:cs typeface="Cambria" pitchFamily="34" charset="-120"/>
+              </a:rPr>
+              <a:t>Answers</a:t>
+            </a:r>
+            <a:endParaRPr lang="en-US" sz="1600" dirty="0"/>
+          </a:p>
+        </p:txBody>
+      </p:sp>
+      <p:sp>
+        <p:nvSpPr>
+          <p:cNvPr id="7" name="Text 5"/>
+          <p:cNvSpPr txBox="1"/>
+          <p:nvPr/>
+        </p:nvSpPr>
+        <p:spPr>
+          <a:xfrm>
+            <a:off x="6370168" y="2286000"/>
+            <a:ext cx="5227168" cy="2468880"/>
+          </a:xfrm>
+          <a:prstGeom prst="rect">
+            <a:avLst/>
+          </a:prstGeom>
+          <a:noFill/>
+          <a:ln/>
+        </p:spPr>
+        <p:txBody>
+          <a:bodyPr wrap="square" lIns="0" tIns="0" rIns="0" bIns="0" rtlCol="0" anchor="t"/>
+          <a:lstStyle/>
           <a:p>
             <a:pPr algn="l" marL="342900" indent="-342900">
               <a:lnSpc>
@@ -9073,71 +9252,10 @@
                 <a:ea typeface="Calibri" pitchFamily="34" charset="-122"/>
                 <a:cs typeface="Calibri" pitchFamily="34" charset="-120"/>
               </a:rPr>
-              <a:t>Photographs: USDAgov (Public domain) — via Wikimedia Commons.</a:t>
+              <a:t>Run the trial over a full cycle with a control block, so the gain is documented even in a favorable season.</a:t>
             </a:r>
             <a:endParaRPr lang="en-US" sz="1350" dirty="0"/>
           </a:p>
-        </p:txBody>
-      </p:sp>
-      <p:sp>
-        <p:nvSpPr>
-          <p:cNvPr id="6" name="Text 4"/>
-          <p:cNvSpPr txBox="1"/>
-          <p:nvPr/>
-        </p:nvSpPr>
-        <p:spPr>
-          <a:xfrm>
-            <a:off x="6370168" y="1783080"/>
-            <a:ext cx="5227168" cy="411480"/>
-          </a:xfrm>
-          <a:prstGeom prst="rect">
-            <a:avLst/>
-          </a:prstGeom>
-          <a:noFill/>
-          <a:ln/>
-        </p:spPr>
-        <p:txBody>
-          <a:bodyPr wrap="square" lIns="0" tIns="0" rIns="0" bIns="0" rtlCol="0" anchor="ctr"/>
-          <a:lstStyle/>
-          <a:p>
-            <a:pPr algn="l" indent="0" marL="0">
-              <a:buNone/>
-            </a:pPr>
-            <a:r>
-              <a:rPr lang="en-US" sz="1600" b="1" dirty="0">
-                <a:solidFill>
-                  <a:srgbClr val="1D4E6B"/>
-                </a:solidFill>
-                <a:latin typeface="Cambria" pitchFamily="34" charset="0"/>
-                <a:ea typeface="Cambria" pitchFamily="34" charset="-122"/>
-                <a:cs typeface="Cambria" pitchFamily="34" charset="-120"/>
-              </a:rPr>
-              <a:t>Working assumptions</a:t>
-            </a:r>
-            <a:endParaRPr lang="en-US" sz="1600" dirty="0"/>
-          </a:p>
-        </p:txBody>
-      </p:sp>
-      <p:sp>
-        <p:nvSpPr>
-          <p:cNvPr id="7" name="Text 5"/>
-          <p:cNvSpPr txBox="1"/>
-          <p:nvPr/>
-        </p:nvSpPr>
-        <p:spPr>
-          <a:xfrm>
-            <a:off x="6370168" y="2286000"/>
-            <a:ext cx="5227168" cy="2468880"/>
-          </a:xfrm>
-          <a:prstGeom prst="rect">
-            <a:avLst/>
-          </a:prstGeom>
-          <a:noFill/>
-          <a:ln/>
-        </p:spPr>
-        <p:txBody>
-          <a:bodyPr wrap="square" lIns="0" tIns="0" rIns="0" bIns="0" rtlCol="0" anchor="t"/>
-          <a:lstStyle/>
           <a:p>
             <a:pPr algn="l" marL="342900" indent="-342900">
               <a:lnSpc>
@@ -9158,7 +9276,7 @@
                 <a:ea typeface="Calibri" pitchFamily="34" charset="-122"/>
                 <a:cs typeface="Calibri" pitchFamily="34" charset="-120"/>
               </a:rPr>
-              <a:t>Figures are rounded orders of magnitude, taken from the latest public data available.</a:t>
+              <a:t>Work through dealers, co-ops and crop consultants rather than farm by farm, and supply the trial protocol in advance.</a:t>
             </a:r>
             <a:endParaRPr lang="en-US" sz="1350" dirty="0"/>
           </a:p>
@@ -9182,7 +9300,7 @@
                 <a:ea typeface="Calibri" pitchFamily="34" charset="-122"/>
                 <a:cs typeface="Calibri" pitchFamily="34" charset="-120"/>
               </a:rPr>
-              <a:t>Water and yield gains are indicative and vary with soil, climate and crop.</a:t>
+              <a:t>Document the formulation: potassium, never sodium, compatible with food crops and with soil health.</a:t>
             </a:r>
             <a:endParaRPr lang="en-US" sz="1350" dirty="0"/>
           </a:p>
@@ -9206,7 +9324,7 @@
                 <a:ea typeface="Calibri" pitchFamily="34" charset="-122"/>
                 <a:cs typeface="Calibri" pitchFamily="34" charset="-120"/>
               </a:rPr>
-              <a:t>Commercial working document: figures to be refreshed before any official submission.</a:t>
+              <a:t>Spread the outlay: a 3 to 4 year useful life amortizes the cost across several seasons.</a:t>
             </a:r>
             <a:endParaRPr lang="en-US" sz="1350" dirty="0"/>
           </a:p>
@@ -9275,7 +9393,7 @@
                 <a:ea typeface="Calibri" pitchFamily="34" charset="-122"/>
                 <a:cs typeface="Calibri" pitchFamily="34" charset="-120"/>
               </a:rPr>
-              <a:t>Trial reports, certificates (SOHISCERT, Polymex and SGS analyses) and technical sheets: available on request.</a:t>
+              <a:t>Acrylamide analysis (Polymex laboratory, ISO 9001, content below 3.0 µg/g), REACH / SVHC screening (SGS) and the SOHISCERT certificate valid to 4 September 2027 are all available on request.</a:t>
             </a:r>
             <a:endParaRPr lang="en-US" sz="1100" dirty="0"/>
           </a:p>
@@ -9374,6 +9492,605 @@
 <file path=ppt/slides/slide18.xml><?xml version="1.0" encoding="utf-8"?>
 <p:sld xmlns:a="http://schemas.openxmlformats.org/drawingml/2006/main" xmlns:r="http://schemas.openxmlformats.org/officeDocument/2006/relationships" xmlns:p="http://schemas.openxmlformats.org/presentationml/2006/main">
   <p:cSld name="Slide 18">
+    <p:bg>
+      <p:bgPr>
+        <a:solidFill>
+          <a:srgbClr val="FAFBFC"/>
+        </a:solidFill>
+      </p:bgPr>
+    </p:bg>
+    <p:spTree>
+      <p:nvGrpSpPr>
+        <p:cNvPr id="1" name=""/>
+        <p:cNvGrpSpPr/>
+        <p:nvPr/>
+      </p:nvGrpSpPr>
+      <p:grpSpPr>
+        <a:xfrm>
+          <a:off x="0" y="0"/>
+          <a:ext cx="0" cy="0"/>
+          <a:chOff x="0" y="0"/>
+          <a:chExt cx="0" cy="0"/>
+        </a:xfrm>
+      </p:grpSpPr>
+      <p:sp>
+        <p:nvSpPr>
+          <p:cNvPr id="2" name="Text 0"/>
+          <p:cNvSpPr txBox="1"/>
+          <p:nvPr/>
+        </p:nvSpPr>
+        <p:spPr>
+          <a:xfrm>
+            <a:off x="594360" y="411480"/>
+            <a:ext cx="10515600" cy="274320"/>
+          </a:xfrm>
+          <a:prstGeom prst="rect">
+            <a:avLst/>
+          </a:prstGeom>
+          <a:noFill/>
+          <a:ln/>
+        </p:spPr>
+        <p:txBody>
+          <a:bodyPr wrap="square" lIns="0" tIns="0" rIns="0" bIns="0" rtlCol="0" anchor="ctr"/>
+          <a:lstStyle/>
+          <a:p>
+            <a:pPr algn="l" indent="0" marL="0">
+              <a:buNone/>
+            </a:pPr>
+            <a:r>
+              <a:rPr lang="en-US" sz="1150" b="1" spc="200" kern="0" dirty="0">
+                <a:solidFill>
+                  <a:srgbClr val="D98C2B"/>
+                </a:solidFill>
+                <a:latin typeface="Calibri" pitchFamily="34" charset="0"/>
+                <a:ea typeface="Calibri" pitchFamily="34" charset="-122"/>
+                <a:cs typeface="Calibri" pitchFamily="34" charset="-120"/>
+              </a:rPr>
+              <a:t>Sources</a:t>
+            </a:r>
+            <a:endParaRPr lang="en-US" sz="1150" dirty="0"/>
+          </a:p>
+        </p:txBody>
+      </p:sp>
+      <p:sp>
+        <p:nvSpPr>
+          <p:cNvPr id="3" name="Text 1"/>
+          <p:cNvSpPr txBox="1"/>
+          <p:nvPr/>
+        </p:nvSpPr>
+        <p:spPr>
+          <a:xfrm>
+            <a:off x="594360" y="731520"/>
+            <a:ext cx="10881360" cy="731520"/>
+          </a:xfrm>
+          <a:prstGeom prst="rect">
+            <a:avLst/>
+          </a:prstGeom>
+          <a:noFill/>
+          <a:ln/>
+        </p:spPr>
+        <p:txBody>
+          <a:bodyPr wrap="square" lIns="0" tIns="0" rIns="0" bIns="0" rtlCol="0" anchor="ctr"/>
+          <a:lstStyle/>
+          <a:p>
+            <a:pPr algn="l" indent="0" marL="0">
+              <a:buNone/>
+            </a:pPr>
+            <a:r>
+              <a:rPr lang="en-US" sz="3000" b="1" dirty="0">
+                <a:solidFill>
+                  <a:srgbClr val="0F2E40"/>
+                </a:solidFill>
+                <a:latin typeface="Cambria" pitchFamily="34" charset="0"/>
+                <a:ea typeface="Cambria" pitchFamily="34" charset="-122"/>
+                <a:cs typeface="Cambria" pitchFamily="34" charset="-120"/>
+              </a:rPr>
+              <a:t>Sources and working assumptions</a:t>
+            </a:r>
+            <a:endParaRPr lang="en-US" sz="3000" dirty="0"/>
+          </a:p>
+        </p:txBody>
+      </p:sp>
+      <p:sp>
+        <p:nvSpPr>
+          <p:cNvPr id="4" name="Text 2"/>
+          <p:cNvSpPr txBox="1"/>
+          <p:nvPr/>
+        </p:nvSpPr>
+        <p:spPr>
+          <a:xfrm>
+            <a:off x="594360" y="1783080"/>
+            <a:ext cx="5227168" cy="411480"/>
+          </a:xfrm>
+          <a:prstGeom prst="rect">
+            <a:avLst/>
+          </a:prstGeom>
+          <a:noFill/>
+          <a:ln/>
+        </p:spPr>
+        <p:txBody>
+          <a:bodyPr wrap="square" lIns="0" tIns="0" rIns="0" bIns="0" rtlCol="0" anchor="ctr"/>
+          <a:lstStyle/>
+          <a:p>
+            <a:pPr algn="l" indent="0" marL="0">
+              <a:buNone/>
+            </a:pPr>
+            <a:r>
+              <a:rPr lang="en-US" sz="1600" b="1" dirty="0">
+                <a:solidFill>
+                  <a:srgbClr val="1D4E6B"/>
+                </a:solidFill>
+                <a:latin typeface="Cambria" pitchFamily="34" charset="0"/>
+                <a:ea typeface="Cambria" pitchFamily="34" charset="-122"/>
+                <a:cs typeface="Cambria" pitchFamily="34" charset="-120"/>
+              </a:rPr>
+              <a:t>Main sources</a:t>
+            </a:r>
+            <a:endParaRPr lang="en-US" sz="1600" dirty="0"/>
+          </a:p>
+        </p:txBody>
+      </p:sp>
+      <p:sp>
+        <p:nvSpPr>
+          <p:cNvPr id="5" name="Text 3"/>
+          <p:cNvSpPr txBox="1"/>
+          <p:nvPr/>
+        </p:nvSpPr>
+        <p:spPr>
+          <a:xfrm>
+            <a:off x="594360" y="2286000"/>
+            <a:ext cx="5227168" cy="2468880"/>
+          </a:xfrm>
+          <a:prstGeom prst="rect">
+            <a:avLst/>
+          </a:prstGeom>
+          <a:noFill/>
+          <a:ln/>
+        </p:spPr>
+        <p:txBody>
+          <a:bodyPr wrap="square" lIns="0" tIns="0" rIns="0" bIns="0" rtlCol="0" anchor="t"/>
+          <a:lstStyle/>
+          <a:p>
+            <a:pPr algn="l" marL="342900" indent="-342900">
+              <a:lnSpc>
+                <a:spcPct val="122000"/>
+              </a:lnSpc>
+              <a:spcAft>
+                <a:spcPts val="1000"/>
+              </a:spcAft>
+              <a:buSzPct val="100000"/>
+              <a:buChar char="•"/>
+            </a:pPr>
+            <a:r>
+              <a:rPr lang="en-US" sz="1350" dirty="0">
+                <a:solidFill>
+                  <a:srgbClr val="2F3E47"/>
+                </a:solidFill>
+                <a:latin typeface="Calibri" pitchFamily="34" charset="0"/>
+                <a:ea typeface="Calibri" pitchFamily="34" charset="-122"/>
+                <a:cs typeface="Calibri" pitchFamily="34" charset="-120"/>
+              </a:rPr>
+              <a:t>USDA NASS: 2022 Census of Agriculture, state farm cash receipts.</a:t>
+            </a:r>
+            <a:endParaRPr lang="en-US" sz="1350" dirty="0"/>
+          </a:p>
+          <a:p>
+            <a:pPr algn="l" marL="342900" indent="-342900">
+              <a:lnSpc>
+                <a:spcPct val="122000"/>
+              </a:lnSpc>
+              <a:spcAft>
+                <a:spcPts val="1000"/>
+              </a:spcAft>
+              <a:buSzPct val="100000"/>
+              <a:buChar char="•"/>
+            </a:pPr>
+            <a:r>
+              <a:rPr lang="en-US" sz="1350" dirty="0">
+                <a:solidFill>
+                  <a:srgbClr val="2F3E47"/>
+                </a:solidFill>
+                <a:latin typeface="Calibri" pitchFamily="34" charset="0"/>
+                <a:ea typeface="Calibri" pitchFamily="34" charset="-122"/>
+                <a:cs typeface="Calibri" pitchFamily="34" charset="-120"/>
+              </a:rPr>
+              <a:t>USDA ERS: agriculture and food sectors in the economy, farm exports.</a:t>
+            </a:r>
+            <a:endParaRPr lang="en-US" sz="1350" dirty="0"/>
+          </a:p>
+          <a:p>
+            <a:pPr algn="l" marL="342900" indent="-342900">
+              <a:lnSpc>
+                <a:spcPct val="122000"/>
+              </a:lnSpc>
+              <a:spcAft>
+                <a:spcPts val="1000"/>
+              </a:spcAft>
+              <a:buSzPct val="100000"/>
+              <a:buChar char="•"/>
+            </a:pPr>
+            <a:r>
+              <a:rPr lang="en-US" sz="1350" dirty="0">
+                <a:solidFill>
+                  <a:srgbClr val="2F3E47"/>
+                </a:solidFill>
+                <a:latin typeface="Calibri" pitchFamily="34" charset="0"/>
+                <a:ea typeface="Calibri" pitchFamily="34" charset="-122"/>
+                <a:cs typeface="Calibri" pitchFamily="34" charset="-120"/>
+              </a:rPr>
+              <a:t>USGS: estimated water use in the United States, High Plains aquifer monitoring.</a:t>
+            </a:r>
+            <a:endParaRPr lang="en-US" sz="1350" dirty="0"/>
+          </a:p>
+          <a:p>
+            <a:pPr algn="l" marL="342900" indent="-342900">
+              <a:lnSpc>
+                <a:spcPct val="122000"/>
+              </a:lnSpc>
+              <a:spcAft>
+                <a:spcPts val="1000"/>
+              </a:spcAft>
+              <a:buSzPct val="100000"/>
+              <a:buChar char="•"/>
+            </a:pPr>
+            <a:r>
+              <a:rPr lang="en-US" sz="1350" dirty="0">
+                <a:solidFill>
+                  <a:srgbClr val="2F3E47"/>
+                </a:solidFill>
+                <a:latin typeface="Calibri" pitchFamily="34" charset="0"/>
+                <a:ea typeface="Calibri" pitchFamily="34" charset="-122"/>
+                <a:cs typeface="Calibri" pitchFamily="34" charset="-120"/>
+              </a:rPr>
+              <a:t>California Department of Water Resources (SGMA); Almond Board of California.</a:t>
+            </a:r>
+            <a:endParaRPr lang="en-US" sz="1350" dirty="0"/>
+          </a:p>
+          <a:p>
+            <a:pPr algn="l" marL="342900" indent="-342900">
+              <a:lnSpc>
+                <a:spcPct val="122000"/>
+              </a:lnSpc>
+              <a:spcAft>
+                <a:spcPts val="1000"/>
+              </a:spcAft>
+              <a:buSzPct val="100000"/>
+              <a:buChar char="•"/>
+            </a:pPr>
+            <a:r>
+              <a:rPr lang="en-US" sz="1350" dirty="0">
+                <a:solidFill>
+                  <a:srgbClr val="2F3E47"/>
+                </a:solidFill>
+                <a:latin typeface="Calibri" pitchFamily="34" charset="0"/>
+                <a:ea typeface="Calibri" pitchFamily="34" charset="-122"/>
+                <a:cs typeface="Calibri" pitchFamily="34" charset="-120"/>
+              </a:rPr>
+              <a:t>UNCCD, Drought in Numbers 2022: number and duration of droughts, +29% since 2000 versus 1980–1999.</a:t>
+            </a:r>
+            <a:endParaRPr lang="en-US" sz="1350" dirty="0"/>
+          </a:p>
+          <a:p>
+            <a:pPr algn="l" marL="342900" indent="-342900">
+              <a:lnSpc>
+                <a:spcPct val="122000"/>
+              </a:lnSpc>
+              <a:spcAft>
+                <a:spcPts val="1000"/>
+              </a:spcAft>
+              <a:buSzPct val="100000"/>
+              <a:buChar char="•"/>
+            </a:pPr>
+            <a:r>
+              <a:rPr lang="en-US" sz="1350" dirty="0">
+                <a:solidFill>
+                  <a:srgbClr val="2F3E47"/>
+                </a:solidFill>
+                <a:latin typeface="Calibri" pitchFamily="34" charset="0"/>
+                <a:ea typeface="Calibri" pitchFamily="34" charset="-122"/>
+                <a:cs typeface="Calibri" pitchFamily="34" charset="-120"/>
+              </a:rPr>
+              <a:t>UN-Water / FAO AQUASTAT, SDG indicator 6.4.2: definition and thresholds of water stress.</a:t>
+            </a:r>
+            <a:endParaRPr lang="en-US" sz="1350" dirty="0"/>
+          </a:p>
+        </p:txBody>
+      </p:sp>
+      <p:sp>
+        <p:nvSpPr>
+          <p:cNvPr id="6" name="Text 4"/>
+          <p:cNvSpPr txBox="1"/>
+          <p:nvPr/>
+        </p:nvSpPr>
+        <p:spPr>
+          <a:xfrm>
+            <a:off x="6370168" y="1783080"/>
+            <a:ext cx="5227168" cy="411480"/>
+          </a:xfrm>
+          <a:prstGeom prst="rect">
+            <a:avLst/>
+          </a:prstGeom>
+          <a:noFill/>
+          <a:ln/>
+        </p:spPr>
+        <p:txBody>
+          <a:bodyPr wrap="square" lIns="0" tIns="0" rIns="0" bIns="0" rtlCol="0" anchor="ctr"/>
+          <a:lstStyle/>
+          <a:p>
+            <a:pPr algn="l" indent="0" marL="0">
+              <a:buNone/>
+            </a:pPr>
+            <a:r>
+              <a:rPr lang="en-US" sz="1600" b="1" dirty="0">
+                <a:solidFill>
+                  <a:srgbClr val="1D4E6B"/>
+                </a:solidFill>
+                <a:latin typeface="Cambria" pitchFamily="34" charset="0"/>
+                <a:ea typeface="Cambria" pitchFamily="34" charset="-122"/>
+                <a:cs typeface="Cambria" pitchFamily="34" charset="-120"/>
+              </a:rPr>
+              <a:t>Working assumptions</a:t>
+            </a:r>
+            <a:endParaRPr lang="en-US" sz="1600" dirty="0"/>
+          </a:p>
+        </p:txBody>
+      </p:sp>
+      <p:sp>
+        <p:nvSpPr>
+          <p:cNvPr id="7" name="Text 5"/>
+          <p:cNvSpPr txBox="1"/>
+          <p:nvPr/>
+        </p:nvSpPr>
+        <p:spPr>
+          <a:xfrm>
+            <a:off x="6370168" y="2286000"/>
+            <a:ext cx="5227168" cy="2468880"/>
+          </a:xfrm>
+          <a:prstGeom prst="rect">
+            <a:avLst/>
+          </a:prstGeom>
+          <a:noFill/>
+          <a:ln/>
+        </p:spPr>
+        <p:txBody>
+          <a:bodyPr wrap="square" lIns="0" tIns="0" rIns="0" bIns="0" rtlCol="0" anchor="t"/>
+          <a:lstStyle/>
+          <a:p>
+            <a:pPr algn="l" marL="342900" indent="-342900">
+              <a:lnSpc>
+                <a:spcPct val="122000"/>
+              </a:lnSpc>
+              <a:spcAft>
+                <a:spcPts val="1000"/>
+              </a:spcAft>
+              <a:buSzPct val="100000"/>
+              <a:buChar char="•"/>
+            </a:pPr>
+            <a:r>
+              <a:rPr lang="en-US" sz="1350" dirty="0">
+                <a:solidFill>
+                  <a:srgbClr val="2F3E47"/>
+                </a:solidFill>
+                <a:latin typeface="Calibri" pitchFamily="34" charset="0"/>
+                <a:ea typeface="Calibri" pitchFamily="34" charset="-122"/>
+                <a:cs typeface="Calibri" pitchFamily="34" charset="-120"/>
+              </a:rPr>
+              <a:t>Figures are rounded orders of magnitude, taken from the latest public data available.</a:t>
+            </a:r>
+            <a:endParaRPr lang="en-US" sz="1350" dirty="0"/>
+          </a:p>
+          <a:p>
+            <a:pPr algn="l" marL="342900" indent="-342900">
+              <a:lnSpc>
+                <a:spcPct val="122000"/>
+              </a:lnSpc>
+              <a:spcAft>
+                <a:spcPts val="1000"/>
+              </a:spcAft>
+              <a:buSzPct val="100000"/>
+              <a:buChar char="•"/>
+            </a:pPr>
+            <a:r>
+              <a:rPr lang="en-US" sz="1350" dirty="0">
+                <a:solidFill>
+                  <a:srgbClr val="2F3E47"/>
+                </a:solidFill>
+                <a:latin typeface="Calibri" pitchFamily="34" charset="0"/>
+                <a:ea typeface="Calibri" pitchFamily="34" charset="-122"/>
+                <a:cs typeface="Calibri" pitchFamily="34" charset="-120"/>
+              </a:rPr>
+              <a:t>Water and yield gains are indicative and vary with soil, climate and crop.</a:t>
+            </a:r>
+            <a:endParaRPr lang="en-US" sz="1350" dirty="0"/>
+          </a:p>
+          <a:p>
+            <a:pPr algn="l" marL="342900" indent="-342900">
+              <a:lnSpc>
+                <a:spcPct val="122000"/>
+              </a:lnSpc>
+              <a:spcAft>
+                <a:spcPts val="1000"/>
+              </a:spcAft>
+              <a:buSzPct val="100000"/>
+              <a:buChar char="•"/>
+            </a:pPr>
+            <a:r>
+              <a:rPr lang="en-US" sz="1350" dirty="0">
+                <a:solidFill>
+                  <a:srgbClr val="2F3E47"/>
+                </a:solidFill>
+                <a:latin typeface="Calibri" pitchFamily="34" charset="0"/>
+                <a:ea typeface="Calibri" pitchFamily="34" charset="-122"/>
+                <a:cs typeface="Calibri" pitchFamily="34" charset="-120"/>
+              </a:rPr>
+              <a:t>Commercial working document: figures to be refreshed before any official submission.</a:t>
+            </a:r>
+            <a:endParaRPr lang="en-US" sz="1350" dirty="0"/>
+          </a:p>
+        </p:txBody>
+      </p:sp>
+      <p:sp>
+        <p:nvSpPr>
+          <p:cNvPr id="8" name="Shape 6"/>
+          <p:cNvSpPr/>
+          <p:nvPr/>
+        </p:nvSpPr>
+        <p:spPr>
+          <a:xfrm>
+            <a:off x="594360" y="4846320"/>
+            <a:ext cx="11002975" cy="960120"/>
+          </a:xfrm>
+          <a:prstGeom prst="roundRect">
+            <a:avLst>
+              <a:gd name="adj" fmla="val 7619"/>
+            </a:avLst>
+          </a:prstGeom>
+          <a:solidFill>
+            <a:srgbClr val="EEF2F5"/>
+          </a:solidFill>
+          <a:ln w="9525">
+            <a:solidFill>
+              <a:srgbClr val="D8E1E7"/>
+            </a:solidFill>
+            <a:prstDash val="solid"/>
+          </a:ln>
+        </p:spPr>
+      </p:sp>
+      <p:sp>
+        <p:nvSpPr>
+          <p:cNvPr id="9" name="Text 7"/>
+          <p:cNvSpPr txBox="1"/>
+          <p:nvPr/>
+        </p:nvSpPr>
+        <p:spPr>
+          <a:xfrm>
+            <a:off x="822960" y="4983480"/>
+            <a:ext cx="10545775" cy="713232"/>
+          </a:xfrm>
+          <a:prstGeom prst="rect">
+            <a:avLst/>
+          </a:prstGeom>
+          <a:noFill/>
+          <a:ln/>
+        </p:spPr>
+        <p:txBody>
+          <a:bodyPr wrap="square" lIns="0" tIns="0" rIns="0" bIns="0" rtlCol="0" anchor="t"/>
+          <a:lstStyle/>
+          <a:p>
+            <a:pPr algn="l" indent="0" marL="0">
+              <a:lnSpc>
+                <a:spcPct val="118000"/>
+              </a:lnSpc>
+              <a:buNone/>
+            </a:pPr>
+            <a:r>
+              <a:rPr lang="en-US" sz="1100" dirty="0">
+                <a:solidFill>
+                  <a:srgbClr val="6B7D87"/>
+                </a:solidFill>
+                <a:latin typeface="Calibri" pitchFamily="34" charset="0"/>
+                <a:ea typeface="Calibri" pitchFamily="34" charset="-122"/>
+                <a:cs typeface="Calibri" pitchFamily="34" charset="-120"/>
+              </a:rPr>
+              <a:t>Trial reports, certificates (SOHISCERT, Polymex and SGS analyses) and technical sheets: available on request.</a:t>
+            </a:r>
+            <a:endParaRPr lang="en-US" sz="1100" dirty="0"/>
+          </a:p>
+        </p:txBody>
+      </p:sp>
+      <p:sp>
+        <p:nvSpPr>
+          <p:cNvPr id="10" name="Text 8"/>
+          <p:cNvSpPr txBox="1"/>
+          <p:nvPr/>
+        </p:nvSpPr>
+        <p:spPr>
+          <a:xfrm>
+            <a:off x="502920" y="6382512"/>
+            <a:ext cx="8229600" cy="274320"/>
+          </a:xfrm>
+          <a:prstGeom prst="rect">
+            <a:avLst/>
+          </a:prstGeom>
+          <a:noFill/>
+          <a:ln/>
+        </p:spPr>
+        <p:txBody>
+          <a:bodyPr wrap="square" lIns="0" tIns="0" rIns="0" bIns="0" rtlCol="0" anchor="ctr"/>
+          <a:lstStyle/>
+          <a:p>
+            <a:pPr algn="l" indent="0" marL="0">
+              <a:buNone/>
+            </a:pPr>
+            <a:r>
+              <a:rPr lang="en-US" sz="950" dirty="0">
+                <a:solidFill>
+                  <a:srgbClr val="6B7D87">
+                    <a:alpha val="80000"/>
+                  </a:srgbClr>
+                </a:solidFill>
+                <a:latin typeface="Calibri" pitchFamily="34" charset="0"/>
+                <a:ea typeface="Calibri" pitchFamily="34" charset="-122"/>
+                <a:cs typeface="Calibri" pitchFamily="34" charset="-120"/>
+              </a:rPr>
+              <a:t>Green Solutions · United States Market Dossier</a:t>
+            </a:r>
+            <a:endParaRPr lang="en-US" sz="950" dirty="0"/>
+          </a:p>
+        </p:txBody>
+      </p:sp>
+      <p:sp>
+        <p:nvSpPr>
+          <p:cNvPr id="11" name="Text 9"/>
+          <p:cNvSpPr txBox="1"/>
+          <p:nvPr/>
+        </p:nvSpPr>
+        <p:spPr>
+          <a:xfrm>
+            <a:off x="11140135" y="6382512"/>
+            <a:ext cx="548640" cy="274320"/>
+          </a:xfrm>
+          <a:prstGeom prst="rect">
+            <a:avLst/>
+          </a:prstGeom>
+          <a:noFill/>
+          <a:ln/>
+        </p:spPr>
+        <p:txBody>
+          <a:bodyPr wrap="square" lIns="0" tIns="0" rIns="0" bIns="0" rtlCol="0" anchor="ctr"/>
+          <a:lstStyle/>
+          <a:p>
+            <a:pPr algn="r" indent="0" marL="0">
+              <a:buNone/>
+            </a:pPr>
+            <a:r>
+              <a:rPr lang="en-US" sz="950" dirty="0">
+                <a:solidFill>
+                  <a:srgbClr val="6B7D87">
+                    <a:alpha val="80000"/>
+                  </a:srgbClr>
+                </a:solidFill>
+                <a:latin typeface="Calibri" pitchFamily="34" charset="0"/>
+                <a:ea typeface="Calibri" pitchFamily="34" charset="-122"/>
+                <a:cs typeface="Calibri" pitchFamily="34" charset="-120"/>
+              </a:rPr>
+              <a:t>17</a:t>
+            </a:r>
+            <a:endParaRPr lang="en-US" sz="950" dirty="0"/>
+          </a:p>
+        </p:txBody>
+      </p:sp>
+    </p:spTree>
+  </p:cSld>
+  <p:clrMapOvr>
+    <a:masterClrMapping/>
+  </p:clrMapOvr>
+</p:sld>
+</file>
+
+<file path=ppt/slides/slide19.xml><?xml version="1.0" encoding="utf-8"?>
+<p:sld xmlns:a="http://schemas.openxmlformats.org/drawingml/2006/main" xmlns:r="http://schemas.openxmlformats.org/officeDocument/2006/relationships" xmlns:p="http://schemas.openxmlformats.org/presentationml/2006/main">
+  <p:cSld name="Slide 19">
     <p:spTree>
       <p:nvGrpSpPr>
         <p:cNvPr id="1" name=""/>
@@ -9567,7 +10284,7 @@
       </p:sp>
       <p:pic>
         <p:nvPicPr>
-          <p:cNvPr id="6" name="Image 1" descr="C:\Users\Utilisateur\dev\green-solutions-web\scripts\dossiers\sceau-aim-clair.png">    </p:cNvPr>
+          <p:cNvPr id="6" name="Image 1" descr="/workspace/scratch/50eb4f7d8e13/green-solutions-web/scripts/dossiers/sceau-aim-clair.png">    </p:cNvPr>
           <p:cNvPicPr>
             <a:picLocks noChangeAspect="1"/>
           </p:cNvPicPr>
@@ -9667,7 +10384,7 @@
                 <a:ea typeface="Calibri" pitchFamily="34" charset="-122"/>
                 <a:cs typeface="Calibri" pitchFamily="34" charset="-120"/>
               </a:rPr>
-              <a:t>17</a:t>
+              <a:t>18</a:t>
             </a:r>
             <a:endParaRPr lang="en-US" sz="950" dirty="0"/>
           </a:p>
@@ -10801,7 +11518,7 @@
                 <a:ea typeface="Calibri" pitchFamily="34" charset="-122"/>
                 <a:cs typeface="Calibri" pitchFamily="34" charset="-120"/>
               </a:rPr>
-              <a:t>WHERE THE WATER GOES</a:t>
+              <a:t>DROUGHT AND WATER STRESS</a:t>
             </a:r>
             <a:endParaRPr lang="en-US" sz="1150" dirty="0"/>
           </a:p>
@@ -10840,7 +11557,7 @@
                 <a:ea typeface="Cambria" pitchFamily="34" charset="-122"/>
                 <a:cs typeface="Cambria" pitchFamily="34" charset="-120"/>
               </a:rPr>
-              <a:t>Irrigation and power cooling dominate withdrawals</a:t>
+              <a:t>Pressure is rising, but risk remains local</a:t>
             </a:r>
             <a:endParaRPr lang="en-US" sz="3000" dirty="0"/>
           </a:p>
@@ -10922,7 +11639,7 @@
                 <a:ea typeface="Cambria" pitchFamily="34" charset="-122"/>
                 <a:cs typeface="Cambria" pitchFamily="34" charset="-120"/>
               </a:rPr>
-              <a:t>What this means</a:t>
+              <a:t>Two indicators, not a shortcut</a:t>
             </a:r>
             <a:endParaRPr lang="en-US" sz="1300" dirty="0"/>
           </a:p>
@@ -10964,7 +11681,7 @@
                 <a:ea typeface="Calibri" pitchFamily="34" charset="-122"/>
                 <a:cs typeface="Calibri" pitchFamily="34" charset="-120"/>
               </a:rPr>
-              <a:t>The industrial share is inflated by once-through cooling at power plants, which returns most of its water to the river.</a:t>
+              <a:t>Worldwide, the number and duration of droughts have risen by 29% since 2000 compared with the two previous decades.</a:t>
             </a:r>
             <a:endParaRPr lang="en-US" sz="1200" dirty="0"/>
           </a:p>
@@ -10993,7 +11710,7 @@
                 <a:ea typeface="Calibri" pitchFamily="34" charset="-122"/>
                 <a:cs typeface="Calibri" pitchFamily="34" charset="-120"/>
               </a:rPr>
-              <a:t>Irrigation is different: most of what is applied is consumed. In consumptive terms, farming accounts for the large majority of U.S. freshwater use.</a:t>
+              <a:t>Water stress measures something different: withdrawals as a share of renewable resources available after environmental needs. This global signal is therefore not a country forecast; it must be read alongside local rainfall, aquifers, seasons and uses.</a:t>
             </a:r>
             <a:endParaRPr lang="en-US" sz="1200" dirty="0"/>
           </a:p>
@@ -11146,7 +11863,7 @@
                 <a:ea typeface="Calibri" pitchFamily="34" charset="-122"/>
                 <a:cs typeface="Calibri" pitchFamily="34" charset="-120"/>
               </a:rPr>
-              <a:t>ECONOMY AND FOOD SYSTEM</a:t>
+              <a:t>WHERE THE WATER GOES</a:t>
             </a:r>
             <a:endParaRPr lang="en-US" sz="1150" dirty="0"/>
           </a:p>
@@ -11185,26 +11902,42 @@
                 <a:ea typeface="Cambria" pitchFamily="34" charset="-122"/>
                 <a:cs typeface="Cambria" pitchFamily="34" charset="-120"/>
               </a:rPr>
-              <a:t>The largest farm exporter, on a tightening water ledger</a:t>
+              <a:t>Irrigation and power cooling dominate withdrawals</a:t>
             </a:r>
             <a:endParaRPr lang="en-US" sz="3000" dirty="0"/>
           </a:p>
         </p:txBody>
       </p:sp>
-      <p:sp>
-        <p:nvSpPr>
-          <p:cNvPr id="4" name="Shape 2"/>
+      <p:graphicFrame>
+        <p:nvGraphicFramePr>
+          <p:cNvPr id="4" name="Chart 0" descr=""/>
+          <p:cNvGraphicFramePr/>
+          <p:nvPr/>
+        </p:nvGraphicFramePr>
+        <p:xfrm>
+          <a:off x="594360" y="1783080"/>
+          <a:ext cx="7360920" cy="3977640"/>
+        </p:xfrm>
+        <a:graphic xmlns:a="http://schemas.openxmlformats.org/drawingml/2006/main">
+          <a:graphicData uri="http://schemas.openxmlformats.org/drawingml/2006/chart">
+            <c:chart xmlns:c="http://schemas.openxmlformats.org/drawingml/2006/chart" r:id="rId1"/>
+          </a:graphicData>
+        </a:graphic>
+      </p:graphicFrame>
+      <p:sp>
+        <p:nvSpPr>
+          <p:cNvPr id="5" name="Shape 2"/>
           <p:cNvSpPr/>
           <p:nvPr/>
         </p:nvSpPr>
         <p:spPr>
           <a:xfrm>
-            <a:off x="594360" y="1874520"/>
-            <a:ext cx="2545004" cy="2514600"/>
+            <a:off x="8275320" y="1783080"/>
+            <a:ext cx="3291840" cy="3977640"/>
           </a:xfrm>
           <a:prstGeom prst="roundRect">
             <a:avLst>
-              <a:gd name="adj" fmla="val 3636"/>
+              <a:gd name="adj" fmla="val 2778"/>
             </a:avLst>
           </a:prstGeom>
           <a:solidFill>
@@ -11220,14 +11953,14 @@
       </p:sp>
       <p:sp>
         <p:nvSpPr>
-          <p:cNvPr id="5" name="Text 3"/>
-          <p:cNvSpPr txBox="1"/>
-          <p:nvPr/>
-        </p:nvSpPr>
-        <p:spPr>
-          <a:xfrm>
-            <a:off x="777240" y="2148840"/>
-            <a:ext cx="2179244" cy="960120"/>
+          <p:cNvPr id="6" name="Text 3"/>
+          <p:cNvSpPr txBox="1"/>
+          <p:nvPr/>
+        </p:nvSpPr>
+        <p:spPr>
+          <a:xfrm>
+            <a:off x="8503920" y="2011680"/>
+            <a:ext cx="2834640" cy="457200"/>
           </a:xfrm>
           <a:prstGeom prst="rect">
             <a:avLst/>
@@ -11239,11 +11972,11 @@
           <a:bodyPr wrap="square" lIns="0" tIns="0" rIns="0" bIns="0" rtlCol="0" anchor="ctr"/>
           <a:lstStyle/>
           <a:p>
-            <a:pPr algn="ctr" indent="0" marL="0">
-              <a:buNone/>
-            </a:pPr>
-            <a:r>
-              <a:rPr lang="en-US" sz="3800" b="1" dirty="0">
+            <a:pPr algn="l" indent="0" marL="0">
+              <a:buNone/>
+            </a:pPr>
+            <a:r>
+              <a:rPr lang="en-US" sz="1300" b="1" dirty="0">
                 <a:solidFill>
                   <a:srgbClr val="1D4E6B"/>
                 </a:solidFill>
@@ -11251,388 +11984,22 @@
                 <a:ea typeface="Cambria" pitchFamily="34" charset="-122"/>
                 <a:cs typeface="Cambria" pitchFamily="34" charset="-120"/>
               </a:rPr>
-              <a:t>≈ 1.9 M</a:t>
-            </a:r>
-            <a:endParaRPr lang="en-US" sz="3800" dirty="0"/>
-          </a:p>
-        </p:txBody>
-      </p:sp>
-      <p:sp>
-        <p:nvSpPr>
-          <p:cNvPr id="6" name="Text 4"/>
-          <p:cNvSpPr txBox="1"/>
-          <p:nvPr/>
-        </p:nvSpPr>
-        <p:spPr>
-          <a:xfrm>
-            <a:off x="795528" y="3154680"/>
-            <a:ext cx="2142668" cy="1051560"/>
-          </a:xfrm>
-          <a:prstGeom prst="rect">
-            <a:avLst/>
-          </a:prstGeom>
-          <a:noFill/>
-          <a:ln/>
-        </p:spPr>
-        <p:txBody>
-          <a:bodyPr wrap="square" lIns="0" tIns="0" rIns="0" bIns="0" rtlCol="0" anchor="t"/>
-          <a:lstStyle/>
-          <a:p>
-            <a:pPr algn="ctr" indent="0" marL="0">
-              <a:lnSpc>
-                <a:spcPct val="118000"/>
-              </a:lnSpc>
-              <a:buNone/>
-            </a:pPr>
-            <a:r>
-              <a:rPr lang="en-US" sz="1250" dirty="0">
-                <a:solidFill>
-                  <a:srgbClr val="2F3E47"/>
-                </a:solidFill>
-                <a:latin typeface="Calibri" pitchFamily="34" charset="0"/>
-                <a:ea typeface="Calibri" pitchFamily="34" charset="-122"/>
-                <a:cs typeface="Calibri" pitchFamily="34" charset="-120"/>
-              </a:rPr>
-              <a:t>farms, averaging about 460 acres each</a:t>
-            </a:r>
-            <a:endParaRPr lang="en-US" sz="1250" dirty="0"/>
-          </a:p>
-        </p:txBody>
-      </p:sp>
-      <p:sp>
-        <p:nvSpPr>
-          <p:cNvPr id="7" name="Shape 5"/>
-          <p:cNvSpPr/>
-          <p:nvPr/>
-        </p:nvSpPr>
-        <p:spPr>
-          <a:xfrm>
-            <a:off x="3413684" y="1874520"/>
-            <a:ext cx="2545004" cy="2514600"/>
-          </a:xfrm>
-          <a:prstGeom prst="roundRect">
-            <a:avLst>
-              <a:gd name="adj" fmla="val 3636"/>
-            </a:avLst>
-          </a:prstGeom>
-          <a:solidFill>
-            <a:srgbClr val="EEF2F5"/>
-          </a:solidFill>
-          <a:ln w="9525">
-            <a:solidFill>
-              <a:srgbClr val="D8E1E7"/>
-            </a:solidFill>
-            <a:prstDash val="solid"/>
-          </a:ln>
-        </p:spPr>
-      </p:sp>
-      <p:sp>
-        <p:nvSpPr>
-          <p:cNvPr id="8" name="Text 6"/>
-          <p:cNvSpPr txBox="1"/>
-          <p:nvPr/>
-        </p:nvSpPr>
-        <p:spPr>
-          <a:xfrm>
-            <a:off x="3596564" y="2148840"/>
-            <a:ext cx="2179244" cy="960120"/>
-          </a:xfrm>
-          <a:prstGeom prst="rect">
-            <a:avLst/>
-          </a:prstGeom>
-          <a:noFill/>
-          <a:ln/>
-        </p:spPr>
-        <p:txBody>
-          <a:bodyPr wrap="square" lIns="0" tIns="0" rIns="0" bIns="0" rtlCol="0" anchor="ctr"/>
-          <a:lstStyle/>
-          <a:p>
-            <a:pPr algn="ctr" indent="0" marL="0">
-              <a:buNone/>
-            </a:pPr>
-            <a:r>
-              <a:rPr lang="en-US" sz="3800" b="1" dirty="0">
-                <a:solidFill>
-                  <a:srgbClr val="1D4E6B"/>
-                </a:solidFill>
-                <a:latin typeface="Cambria" pitchFamily="34" charset="0"/>
-                <a:ea typeface="Cambria" pitchFamily="34" charset="-122"/>
-                <a:cs typeface="Cambria" pitchFamily="34" charset="-120"/>
-              </a:rPr>
-              <a:t>≈ 0.7 %</a:t>
-            </a:r>
-            <a:endParaRPr lang="en-US" sz="3800" dirty="0"/>
-          </a:p>
-        </p:txBody>
-      </p:sp>
-      <p:sp>
-        <p:nvSpPr>
-          <p:cNvPr id="9" name="Text 7"/>
-          <p:cNvSpPr txBox="1"/>
-          <p:nvPr/>
-        </p:nvSpPr>
-        <p:spPr>
-          <a:xfrm>
-            <a:off x="3614852" y="3154680"/>
-            <a:ext cx="2142668" cy="1051560"/>
-          </a:xfrm>
-          <a:prstGeom prst="rect">
-            <a:avLst/>
-          </a:prstGeom>
-          <a:noFill/>
-          <a:ln/>
-        </p:spPr>
-        <p:txBody>
-          <a:bodyPr wrap="square" lIns="0" tIns="0" rIns="0" bIns="0" rtlCol="0" anchor="t"/>
-          <a:lstStyle/>
-          <a:p>
-            <a:pPr algn="ctr" indent="0" marL="0">
-              <a:lnSpc>
-                <a:spcPct val="118000"/>
-              </a:lnSpc>
-              <a:buNone/>
-            </a:pPr>
-            <a:r>
-              <a:rPr lang="en-US" sz="1250" dirty="0">
-                <a:solidFill>
-                  <a:srgbClr val="2F3E47"/>
-                </a:solidFill>
-                <a:latin typeface="Calibri" pitchFamily="34" charset="0"/>
-                <a:ea typeface="Calibri" pitchFamily="34" charset="-122"/>
-                <a:cs typeface="Calibri" pitchFamily="34" charset="-120"/>
-              </a:rPr>
-              <a:t>of GDP from farms alone, over 5 % with food industries</a:t>
-            </a:r>
-            <a:endParaRPr lang="en-US" sz="1250" dirty="0"/>
-          </a:p>
-        </p:txBody>
-      </p:sp>
-      <p:sp>
-        <p:nvSpPr>
-          <p:cNvPr id="10" name="Shape 8"/>
-          <p:cNvSpPr/>
-          <p:nvPr/>
-        </p:nvSpPr>
-        <p:spPr>
-          <a:xfrm>
-            <a:off x="6233008" y="1874520"/>
-            <a:ext cx="2545004" cy="2514600"/>
-          </a:xfrm>
-          <a:prstGeom prst="roundRect">
-            <a:avLst>
-              <a:gd name="adj" fmla="val 3636"/>
-            </a:avLst>
-          </a:prstGeom>
-          <a:solidFill>
-            <a:srgbClr val="EEF2F5"/>
-          </a:solidFill>
-          <a:ln w="9525">
-            <a:solidFill>
-              <a:srgbClr val="D8E1E7"/>
-            </a:solidFill>
-            <a:prstDash val="solid"/>
-          </a:ln>
-        </p:spPr>
-      </p:sp>
-      <p:sp>
-        <p:nvSpPr>
-          <p:cNvPr id="11" name="Text 9"/>
-          <p:cNvSpPr txBox="1"/>
-          <p:nvPr/>
-        </p:nvSpPr>
-        <p:spPr>
-          <a:xfrm>
-            <a:off x="6415888" y="2148840"/>
-            <a:ext cx="2179244" cy="960120"/>
-          </a:xfrm>
-          <a:prstGeom prst="rect">
-            <a:avLst/>
-          </a:prstGeom>
-          <a:noFill/>
-          <a:ln/>
-        </p:spPr>
-        <p:txBody>
-          <a:bodyPr wrap="square" lIns="0" tIns="0" rIns="0" bIns="0" rtlCol="0" anchor="ctr"/>
-          <a:lstStyle/>
-          <a:p>
-            <a:pPr algn="ctr" indent="0" marL="0">
-              <a:buNone/>
-            </a:pPr>
-            <a:r>
-              <a:rPr lang="en-US" sz="3800" b="1" dirty="0">
-                <a:solidFill>
-                  <a:srgbClr val="1D4E6B"/>
-                </a:solidFill>
-                <a:latin typeface="Cambria" pitchFamily="34" charset="0"/>
-                <a:ea typeface="Cambria" pitchFamily="34" charset="-122"/>
-                <a:cs typeface="Cambria" pitchFamily="34" charset="-120"/>
-              </a:rPr>
-              <a:t>≈ $59 B</a:t>
-            </a:r>
-            <a:endParaRPr lang="en-US" sz="3800" dirty="0"/>
-          </a:p>
-        </p:txBody>
-      </p:sp>
-      <p:sp>
-        <p:nvSpPr>
-          <p:cNvPr id="12" name="Text 10"/>
-          <p:cNvSpPr txBox="1"/>
-          <p:nvPr/>
-        </p:nvSpPr>
-        <p:spPr>
-          <a:xfrm>
-            <a:off x="6434176" y="3154680"/>
-            <a:ext cx="2142668" cy="1051560"/>
-          </a:xfrm>
-          <a:prstGeom prst="rect">
-            <a:avLst/>
-          </a:prstGeom>
-          <a:noFill/>
-          <a:ln/>
-        </p:spPr>
-        <p:txBody>
-          <a:bodyPr wrap="square" lIns="0" tIns="0" rIns="0" bIns="0" rtlCol="0" anchor="t"/>
-          <a:lstStyle/>
-          <a:p>
-            <a:pPr algn="ctr" indent="0" marL="0">
-              <a:lnSpc>
-                <a:spcPct val="118000"/>
-              </a:lnSpc>
-              <a:buNone/>
-            </a:pPr>
-            <a:r>
-              <a:rPr lang="en-US" sz="1250" dirty="0">
-                <a:solidFill>
-                  <a:srgbClr val="2F3E47"/>
-                </a:solidFill>
-                <a:latin typeface="Calibri" pitchFamily="34" charset="0"/>
-                <a:ea typeface="Calibri" pitchFamily="34" charset="-122"/>
-                <a:cs typeface="Calibri" pitchFamily="34" charset="-120"/>
-              </a:rPr>
-              <a:t>in 2023 farm cash receipts for California, the top state</a:t>
-            </a:r>
-            <a:endParaRPr lang="en-US" sz="1250" dirty="0"/>
-          </a:p>
-        </p:txBody>
-      </p:sp>
-      <p:sp>
-        <p:nvSpPr>
-          <p:cNvPr id="13" name="Shape 11"/>
-          <p:cNvSpPr/>
-          <p:nvPr/>
-        </p:nvSpPr>
-        <p:spPr>
-          <a:xfrm>
-            <a:off x="9052331" y="1874520"/>
-            <a:ext cx="2545004" cy="2514600"/>
-          </a:xfrm>
-          <a:prstGeom prst="roundRect">
-            <a:avLst>
-              <a:gd name="adj" fmla="val 3636"/>
-            </a:avLst>
-          </a:prstGeom>
-          <a:solidFill>
-            <a:srgbClr val="EEF2F5"/>
-          </a:solidFill>
-          <a:ln w="9525">
-            <a:solidFill>
-              <a:srgbClr val="D8E1E7"/>
-            </a:solidFill>
-            <a:prstDash val="solid"/>
-          </a:ln>
-        </p:spPr>
-      </p:sp>
-      <p:sp>
-        <p:nvSpPr>
-          <p:cNvPr id="14" name="Text 12"/>
-          <p:cNvSpPr txBox="1"/>
-          <p:nvPr/>
-        </p:nvSpPr>
-        <p:spPr>
-          <a:xfrm>
-            <a:off x="9235211" y="2148840"/>
-            <a:ext cx="2179244" cy="960120"/>
-          </a:xfrm>
-          <a:prstGeom prst="rect">
-            <a:avLst/>
-          </a:prstGeom>
-          <a:noFill/>
-          <a:ln/>
-        </p:spPr>
-        <p:txBody>
-          <a:bodyPr wrap="square" lIns="0" tIns="0" rIns="0" bIns="0" rtlCol="0" anchor="ctr"/>
-          <a:lstStyle/>
-          <a:p>
-            <a:pPr algn="ctr" indent="0" marL="0">
-              <a:buNone/>
-            </a:pPr>
-            <a:r>
-              <a:rPr lang="en-US" sz="3800" b="1" dirty="0">
-                <a:solidFill>
-                  <a:srgbClr val="1D4E6B"/>
-                </a:solidFill>
-                <a:latin typeface="Cambria" pitchFamily="34" charset="0"/>
-                <a:ea typeface="Cambria" pitchFamily="34" charset="-122"/>
-                <a:cs typeface="Cambria" pitchFamily="34" charset="-120"/>
-              </a:rPr>
-              <a:t>≈ 80 %</a:t>
-            </a:r>
-            <a:endParaRPr lang="en-US" sz="3800" dirty="0"/>
-          </a:p>
-        </p:txBody>
-      </p:sp>
-      <p:sp>
-        <p:nvSpPr>
-          <p:cNvPr id="15" name="Text 13"/>
-          <p:cNvSpPr txBox="1"/>
-          <p:nvPr/>
-        </p:nvSpPr>
-        <p:spPr>
-          <a:xfrm>
-            <a:off x="9253499" y="3154680"/>
-            <a:ext cx="2142668" cy="1051560"/>
-          </a:xfrm>
-          <a:prstGeom prst="rect">
-            <a:avLst/>
-          </a:prstGeom>
-          <a:noFill/>
-          <a:ln/>
-        </p:spPr>
-        <p:txBody>
-          <a:bodyPr wrap="square" lIns="0" tIns="0" rIns="0" bIns="0" rtlCol="0" anchor="t"/>
-          <a:lstStyle/>
-          <a:p>
-            <a:pPr algn="ctr" indent="0" marL="0">
-              <a:lnSpc>
-                <a:spcPct val="118000"/>
-              </a:lnSpc>
-              <a:buNone/>
-            </a:pPr>
-            <a:r>
-              <a:rPr lang="en-US" sz="1250" dirty="0">
-                <a:solidFill>
-                  <a:srgbClr val="2F3E47"/>
-                </a:solidFill>
-                <a:latin typeface="Calibri" pitchFamily="34" charset="0"/>
-                <a:ea typeface="Calibri" pitchFamily="34" charset="-122"/>
-                <a:cs typeface="Calibri" pitchFamily="34" charset="-120"/>
-              </a:rPr>
-              <a:t>of the world's almonds grown in California</a:t>
-            </a:r>
-            <a:endParaRPr lang="en-US" sz="1250" dirty="0"/>
-          </a:p>
-        </p:txBody>
-      </p:sp>
-      <p:sp>
-        <p:nvSpPr>
-          <p:cNvPr id="16" name="Text 14"/>
-          <p:cNvSpPr txBox="1"/>
-          <p:nvPr/>
-        </p:nvSpPr>
-        <p:spPr>
-          <a:xfrm>
-            <a:off x="594360" y="4709160"/>
-            <a:ext cx="11002975" cy="1097280"/>
+              <a:t>What this means</a:t>
+            </a:r>
+            <a:endParaRPr lang="en-US" sz="1300" dirty="0"/>
+          </a:p>
+        </p:txBody>
+      </p:sp>
+      <p:sp>
+        <p:nvSpPr>
+          <p:cNvPr id="7" name="Text 4"/>
+          <p:cNvSpPr txBox="1"/>
+          <p:nvPr/>
+        </p:nvSpPr>
+        <p:spPr>
+          <a:xfrm>
+            <a:off x="8503920" y="2560320"/>
+            <a:ext cx="2834640" cy="3017520"/>
           </a:xfrm>
           <a:prstGeom prst="rect">
             <a:avLst/>
@@ -11646,12 +12013,12 @@
           <a:p>
             <a:pPr algn="l" indent="0" marL="0">
               <a:lnSpc>
-                <a:spcPct val="130000"/>
+                <a:spcPct val="125000"/>
               </a:lnSpc>
               <a:buNone/>
             </a:pPr>
             <a:r>
-              <a:rPr lang="en-US" sz="1350" dirty="0">
+              <a:rPr lang="en-US" sz="1200" dirty="0">
                 <a:solidFill>
                   <a:srgbClr val="2F3E47"/>
                 </a:solidFill>
@@ -11659,15 +12026,44 @@
                 <a:ea typeface="Calibri" pitchFamily="34" charset="-122"/>
                 <a:cs typeface="Calibri" pitchFamily="34" charset="-120"/>
               </a:rPr>
-              <a:t>Fruit, nuts and vegetables cover a small share of cropland but a large share of farm value, and most of them are irrigated in the West. California's Sustainable Groundwater Management Act and falling water tables on the High Plains now cap how much water those acres can draw.</a:t>
-            </a:r>
-            <a:endParaRPr lang="en-US" sz="1350" dirty="0"/>
-          </a:p>
-        </p:txBody>
-      </p:sp>
-      <p:sp>
-        <p:nvSpPr>
-          <p:cNvPr id="17" name="Text 15"/>
+              <a:t>The industrial share is inflated by once-through cooling at power plants, which returns most of its water to the river.</a:t>
+            </a:r>
+            <a:endParaRPr lang="en-US" sz="1200" dirty="0"/>
+          </a:p>
+          <a:p>
+            <a:pPr algn="l" indent="0" marL="0">
+              <a:lnSpc>
+                <a:spcPct val="125000"/>
+              </a:lnSpc>
+              <a:buNone/>
+            </a:pPr>
+            <a:endParaRPr lang="en-US" sz="1200" dirty="0"/>
+          </a:p>
+          <a:p>
+            <a:pPr algn="l" indent="0" marL="0">
+              <a:lnSpc>
+                <a:spcPct val="125000"/>
+              </a:lnSpc>
+              <a:buNone/>
+            </a:pPr>
+            <a:r>
+              <a:rPr lang="en-US" sz="1200" dirty="0">
+                <a:solidFill>
+                  <a:srgbClr val="2F3E47"/>
+                </a:solidFill>
+                <a:latin typeface="Calibri" pitchFamily="34" charset="0"/>
+                <a:ea typeface="Calibri" pitchFamily="34" charset="-122"/>
+                <a:cs typeface="Calibri" pitchFamily="34" charset="-120"/>
+              </a:rPr>
+              <a:t>Irrigation is different: most of what is applied is consumed. In consumptive terms, farming accounts for the large majority of U.S. freshwater use.</a:t>
+            </a:r>
+            <a:endParaRPr lang="en-US" sz="1200" dirty="0"/>
+          </a:p>
+        </p:txBody>
+      </p:sp>
+      <p:sp>
+        <p:nvSpPr>
+          <p:cNvPr id="8" name="Text 5"/>
           <p:cNvSpPr txBox="1"/>
           <p:nvPr/>
         </p:nvSpPr>
@@ -11708,7 +12104,7 @@
       </p:sp>
       <p:sp>
         <p:nvSpPr>
-          <p:cNvPr id="18" name="Text 16"/>
+          <p:cNvPr id="9" name="Text 6"/>
           <p:cNvSpPr txBox="1"/>
           <p:nvPr/>
         </p:nvSpPr>
@@ -11812,7 +12208,7 @@
                 <a:ea typeface="Calibri" pitchFamily="34" charset="-122"/>
                 <a:cs typeface="Calibri" pitchFamily="34" charset="-120"/>
               </a:rPr>
-              <a:t>THE MAJOR CROPS</a:t>
+              <a:t>ECONOMY AND FOOD SYSTEM</a:t>
             </a:r>
             <a:endParaRPr lang="en-US" sz="1150" dirty="0"/>
           </a:p>
@@ -11851,42 +12247,26 @@
                 <a:ea typeface="Cambria" pitchFamily="34" charset="-122"/>
                 <a:cs typeface="Cambria" pitchFamily="34" charset="-120"/>
               </a:rPr>
-              <a:t>Five outputs carry the bulk of farm volume</a:t>
+              <a:t>The largest farm exporter, on a tightening water ledger</a:t>
             </a:r>
             <a:endParaRPr lang="en-US" sz="3000" dirty="0"/>
           </a:p>
         </p:txBody>
       </p:sp>
-      <p:graphicFrame>
-        <p:nvGraphicFramePr>
-          <p:cNvPr id="4" name="Chart 0" descr=""/>
-          <p:cNvGraphicFramePr/>
-          <p:nvPr/>
-        </p:nvGraphicFramePr>
-        <p:xfrm>
-          <a:off x="594360" y="1783080"/>
-          <a:ext cx="7360920" cy="3977640"/>
-        </p:xfrm>
-        <a:graphic xmlns:a="http://schemas.openxmlformats.org/drawingml/2006/main">
-          <a:graphicData uri="http://schemas.openxmlformats.org/drawingml/2006/chart">
-            <c:chart xmlns:c="http://schemas.openxmlformats.org/drawingml/2006/chart" r:id="rId1"/>
-          </a:graphicData>
-        </a:graphic>
-      </p:graphicFrame>
-      <p:sp>
-        <p:nvSpPr>
-          <p:cNvPr id="5" name="Shape 2"/>
+      <p:sp>
+        <p:nvSpPr>
+          <p:cNvPr id="4" name="Shape 2"/>
           <p:cNvSpPr/>
           <p:nvPr/>
         </p:nvSpPr>
         <p:spPr>
           <a:xfrm>
-            <a:off x="8275320" y="1783080"/>
-            <a:ext cx="3291840" cy="3977640"/>
+            <a:off x="594360" y="1874520"/>
+            <a:ext cx="2545004" cy="2514600"/>
           </a:xfrm>
           <a:prstGeom prst="roundRect">
             <a:avLst>
-              <a:gd name="adj" fmla="val 2778"/>
+              <a:gd name="adj" fmla="val 3636"/>
             </a:avLst>
           </a:prstGeom>
           <a:solidFill>
@@ -11902,14 +12282,14 @@
       </p:sp>
       <p:sp>
         <p:nvSpPr>
-          <p:cNvPr id="6" name="Text 3"/>
-          <p:cNvSpPr txBox="1"/>
-          <p:nvPr/>
-        </p:nvSpPr>
-        <p:spPr>
-          <a:xfrm>
-            <a:off x="8503920" y="2011680"/>
-            <a:ext cx="2834640" cy="457200"/>
+          <p:cNvPr id="5" name="Text 3"/>
+          <p:cNvSpPr txBox="1"/>
+          <p:nvPr/>
+        </p:nvSpPr>
+        <p:spPr>
+          <a:xfrm>
+            <a:off x="777240" y="2148840"/>
+            <a:ext cx="2179244" cy="960120"/>
           </a:xfrm>
           <a:prstGeom prst="rect">
             <a:avLst/>
@@ -11921,11 +12301,11 @@
           <a:bodyPr wrap="square" lIns="0" tIns="0" rIns="0" bIns="0" rtlCol="0" anchor="ctr"/>
           <a:lstStyle/>
           <a:p>
-            <a:pPr algn="l" indent="0" marL="0">
-              <a:buNone/>
-            </a:pPr>
-            <a:r>
-              <a:rPr lang="en-US" sz="1300" b="1" dirty="0">
+            <a:pPr algn="ctr" indent="0" marL="0">
+              <a:buNone/>
+            </a:pPr>
+            <a:r>
+              <a:rPr lang="en-US" sz="3800" b="1" dirty="0">
                 <a:solidFill>
                   <a:srgbClr val="1D4E6B"/>
                 </a:solidFill>
@@ -11933,22 +12313,388 @@
                 <a:ea typeface="Cambria" pitchFamily="34" charset="-122"/>
                 <a:cs typeface="Cambria" pitchFamily="34" charset="-120"/>
               </a:rPr>
-              <a:t>Reading</a:t>
-            </a:r>
-            <a:endParaRPr lang="en-US" sz="1300" dirty="0"/>
-          </a:p>
-        </p:txBody>
-      </p:sp>
-      <p:sp>
-        <p:nvSpPr>
-          <p:cNvPr id="7" name="Text 4"/>
-          <p:cNvSpPr txBox="1"/>
-          <p:nvPr/>
-        </p:nvSpPr>
-        <p:spPr>
-          <a:xfrm>
-            <a:off x="8503920" y="2560320"/>
-            <a:ext cx="2834640" cy="3017520"/>
+              <a:t>≈ 1.9 M</a:t>
+            </a:r>
+            <a:endParaRPr lang="en-US" sz="3800" dirty="0"/>
+          </a:p>
+        </p:txBody>
+      </p:sp>
+      <p:sp>
+        <p:nvSpPr>
+          <p:cNvPr id="6" name="Text 4"/>
+          <p:cNvSpPr txBox="1"/>
+          <p:nvPr/>
+        </p:nvSpPr>
+        <p:spPr>
+          <a:xfrm>
+            <a:off x="795528" y="3154680"/>
+            <a:ext cx="2142668" cy="1051560"/>
+          </a:xfrm>
+          <a:prstGeom prst="rect">
+            <a:avLst/>
+          </a:prstGeom>
+          <a:noFill/>
+          <a:ln/>
+        </p:spPr>
+        <p:txBody>
+          <a:bodyPr wrap="square" lIns="0" tIns="0" rIns="0" bIns="0" rtlCol="0" anchor="t"/>
+          <a:lstStyle/>
+          <a:p>
+            <a:pPr algn="ctr" indent="0" marL="0">
+              <a:lnSpc>
+                <a:spcPct val="118000"/>
+              </a:lnSpc>
+              <a:buNone/>
+            </a:pPr>
+            <a:r>
+              <a:rPr lang="en-US" sz="1250" dirty="0">
+                <a:solidFill>
+                  <a:srgbClr val="2F3E47"/>
+                </a:solidFill>
+                <a:latin typeface="Calibri" pitchFamily="34" charset="0"/>
+                <a:ea typeface="Calibri" pitchFamily="34" charset="-122"/>
+                <a:cs typeface="Calibri" pitchFamily="34" charset="-120"/>
+              </a:rPr>
+              <a:t>farms, averaging about 460 acres each</a:t>
+            </a:r>
+            <a:endParaRPr lang="en-US" sz="1250" dirty="0"/>
+          </a:p>
+        </p:txBody>
+      </p:sp>
+      <p:sp>
+        <p:nvSpPr>
+          <p:cNvPr id="7" name="Shape 5"/>
+          <p:cNvSpPr/>
+          <p:nvPr/>
+        </p:nvSpPr>
+        <p:spPr>
+          <a:xfrm>
+            <a:off x="3413684" y="1874520"/>
+            <a:ext cx="2545004" cy="2514600"/>
+          </a:xfrm>
+          <a:prstGeom prst="roundRect">
+            <a:avLst>
+              <a:gd name="adj" fmla="val 3636"/>
+            </a:avLst>
+          </a:prstGeom>
+          <a:solidFill>
+            <a:srgbClr val="EEF2F5"/>
+          </a:solidFill>
+          <a:ln w="9525">
+            <a:solidFill>
+              <a:srgbClr val="D8E1E7"/>
+            </a:solidFill>
+            <a:prstDash val="solid"/>
+          </a:ln>
+        </p:spPr>
+      </p:sp>
+      <p:sp>
+        <p:nvSpPr>
+          <p:cNvPr id="8" name="Text 6"/>
+          <p:cNvSpPr txBox="1"/>
+          <p:nvPr/>
+        </p:nvSpPr>
+        <p:spPr>
+          <a:xfrm>
+            <a:off x="3596564" y="2148840"/>
+            <a:ext cx="2179244" cy="960120"/>
+          </a:xfrm>
+          <a:prstGeom prst="rect">
+            <a:avLst/>
+          </a:prstGeom>
+          <a:noFill/>
+          <a:ln/>
+        </p:spPr>
+        <p:txBody>
+          <a:bodyPr wrap="square" lIns="0" tIns="0" rIns="0" bIns="0" rtlCol="0" anchor="ctr"/>
+          <a:lstStyle/>
+          <a:p>
+            <a:pPr algn="ctr" indent="0" marL="0">
+              <a:buNone/>
+            </a:pPr>
+            <a:r>
+              <a:rPr lang="en-US" sz="3800" b="1" dirty="0">
+                <a:solidFill>
+                  <a:srgbClr val="1D4E6B"/>
+                </a:solidFill>
+                <a:latin typeface="Cambria" pitchFamily="34" charset="0"/>
+                <a:ea typeface="Cambria" pitchFamily="34" charset="-122"/>
+                <a:cs typeface="Cambria" pitchFamily="34" charset="-120"/>
+              </a:rPr>
+              <a:t>≈ 0.7 %</a:t>
+            </a:r>
+            <a:endParaRPr lang="en-US" sz="3800" dirty="0"/>
+          </a:p>
+        </p:txBody>
+      </p:sp>
+      <p:sp>
+        <p:nvSpPr>
+          <p:cNvPr id="9" name="Text 7"/>
+          <p:cNvSpPr txBox="1"/>
+          <p:nvPr/>
+        </p:nvSpPr>
+        <p:spPr>
+          <a:xfrm>
+            <a:off x="3614852" y="3154680"/>
+            <a:ext cx="2142668" cy="1051560"/>
+          </a:xfrm>
+          <a:prstGeom prst="rect">
+            <a:avLst/>
+          </a:prstGeom>
+          <a:noFill/>
+          <a:ln/>
+        </p:spPr>
+        <p:txBody>
+          <a:bodyPr wrap="square" lIns="0" tIns="0" rIns="0" bIns="0" rtlCol="0" anchor="t"/>
+          <a:lstStyle/>
+          <a:p>
+            <a:pPr algn="ctr" indent="0" marL="0">
+              <a:lnSpc>
+                <a:spcPct val="118000"/>
+              </a:lnSpc>
+              <a:buNone/>
+            </a:pPr>
+            <a:r>
+              <a:rPr lang="en-US" sz="1250" dirty="0">
+                <a:solidFill>
+                  <a:srgbClr val="2F3E47"/>
+                </a:solidFill>
+                <a:latin typeface="Calibri" pitchFamily="34" charset="0"/>
+                <a:ea typeface="Calibri" pitchFamily="34" charset="-122"/>
+                <a:cs typeface="Calibri" pitchFamily="34" charset="-120"/>
+              </a:rPr>
+              <a:t>of GDP from farms alone, over 5 % with food industries</a:t>
+            </a:r>
+            <a:endParaRPr lang="en-US" sz="1250" dirty="0"/>
+          </a:p>
+        </p:txBody>
+      </p:sp>
+      <p:sp>
+        <p:nvSpPr>
+          <p:cNvPr id="10" name="Shape 8"/>
+          <p:cNvSpPr/>
+          <p:nvPr/>
+        </p:nvSpPr>
+        <p:spPr>
+          <a:xfrm>
+            <a:off x="6233008" y="1874520"/>
+            <a:ext cx="2545004" cy="2514600"/>
+          </a:xfrm>
+          <a:prstGeom prst="roundRect">
+            <a:avLst>
+              <a:gd name="adj" fmla="val 3636"/>
+            </a:avLst>
+          </a:prstGeom>
+          <a:solidFill>
+            <a:srgbClr val="EEF2F5"/>
+          </a:solidFill>
+          <a:ln w="9525">
+            <a:solidFill>
+              <a:srgbClr val="D8E1E7"/>
+            </a:solidFill>
+            <a:prstDash val="solid"/>
+          </a:ln>
+        </p:spPr>
+      </p:sp>
+      <p:sp>
+        <p:nvSpPr>
+          <p:cNvPr id="11" name="Text 9"/>
+          <p:cNvSpPr txBox="1"/>
+          <p:nvPr/>
+        </p:nvSpPr>
+        <p:spPr>
+          <a:xfrm>
+            <a:off x="6415888" y="2148840"/>
+            <a:ext cx="2179244" cy="960120"/>
+          </a:xfrm>
+          <a:prstGeom prst="rect">
+            <a:avLst/>
+          </a:prstGeom>
+          <a:noFill/>
+          <a:ln/>
+        </p:spPr>
+        <p:txBody>
+          <a:bodyPr wrap="square" lIns="0" tIns="0" rIns="0" bIns="0" rtlCol="0" anchor="ctr"/>
+          <a:lstStyle/>
+          <a:p>
+            <a:pPr algn="ctr" indent="0" marL="0">
+              <a:buNone/>
+            </a:pPr>
+            <a:r>
+              <a:rPr lang="en-US" sz="3800" b="1" dirty="0">
+                <a:solidFill>
+                  <a:srgbClr val="1D4E6B"/>
+                </a:solidFill>
+                <a:latin typeface="Cambria" pitchFamily="34" charset="0"/>
+                <a:ea typeface="Cambria" pitchFamily="34" charset="-122"/>
+                <a:cs typeface="Cambria" pitchFamily="34" charset="-120"/>
+              </a:rPr>
+              <a:t>≈ $59 B</a:t>
+            </a:r>
+            <a:endParaRPr lang="en-US" sz="3800" dirty="0"/>
+          </a:p>
+        </p:txBody>
+      </p:sp>
+      <p:sp>
+        <p:nvSpPr>
+          <p:cNvPr id="12" name="Text 10"/>
+          <p:cNvSpPr txBox="1"/>
+          <p:nvPr/>
+        </p:nvSpPr>
+        <p:spPr>
+          <a:xfrm>
+            <a:off x="6434176" y="3154680"/>
+            <a:ext cx="2142668" cy="1051560"/>
+          </a:xfrm>
+          <a:prstGeom prst="rect">
+            <a:avLst/>
+          </a:prstGeom>
+          <a:noFill/>
+          <a:ln/>
+        </p:spPr>
+        <p:txBody>
+          <a:bodyPr wrap="square" lIns="0" tIns="0" rIns="0" bIns="0" rtlCol="0" anchor="t"/>
+          <a:lstStyle/>
+          <a:p>
+            <a:pPr algn="ctr" indent="0" marL="0">
+              <a:lnSpc>
+                <a:spcPct val="118000"/>
+              </a:lnSpc>
+              <a:buNone/>
+            </a:pPr>
+            <a:r>
+              <a:rPr lang="en-US" sz="1250" dirty="0">
+                <a:solidFill>
+                  <a:srgbClr val="2F3E47"/>
+                </a:solidFill>
+                <a:latin typeface="Calibri" pitchFamily="34" charset="0"/>
+                <a:ea typeface="Calibri" pitchFamily="34" charset="-122"/>
+                <a:cs typeface="Calibri" pitchFamily="34" charset="-120"/>
+              </a:rPr>
+              <a:t>in 2023 farm cash receipts for California, the top state</a:t>
+            </a:r>
+            <a:endParaRPr lang="en-US" sz="1250" dirty="0"/>
+          </a:p>
+        </p:txBody>
+      </p:sp>
+      <p:sp>
+        <p:nvSpPr>
+          <p:cNvPr id="13" name="Shape 11"/>
+          <p:cNvSpPr/>
+          <p:nvPr/>
+        </p:nvSpPr>
+        <p:spPr>
+          <a:xfrm>
+            <a:off x="9052331" y="1874520"/>
+            <a:ext cx="2545004" cy="2514600"/>
+          </a:xfrm>
+          <a:prstGeom prst="roundRect">
+            <a:avLst>
+              <a:gd name="adj" fmla="val 3636"/>
+            </a:avLst>
+          </a:prstGeom>
+          <a:solidFill>
+            <a:srgbClr val="EEF2F5"/>
+          </a:solidFill>
+          <a:ln w="9525">
+            <a:solidFill>
+              <a:srgbClr val="D8E1E7"/>
+            </a:solidFill>
+            <a:prstDash val="solid"/>
+          </a:ln>
+        </p:spPr>
+      </p:sp>
+      <p:sp>
+        <p:nvSpPr>
+          <p:cNvPr id="14" name="Text 12"/>
+          <p:cNvSpPr txBox="1"/>
+          <p:nvPr/>
+        </p:nvSpPr>
+        <p:spPr>
+          <a:xfrm>
+            <a:off x="9235211" y="2148840"/>
+            <a:ext cx="2179244" cy="960120"/>
+          </a:xfrm>
+          <a:prstGeom prst="rect">
+            <a:avLst/>
+          </a:prstGeom>
+          <a:noFill/>
+          <a:ln/>
+        </p:spPr>
+        <p:txBody>
+          <a:bodyPr wrap="square" lIns="0" tIns="0" rIns="0" bIns="0" rtlCol="0" anchor="ctr"/>
+          <a:lstStyle/>
+          <a:p>
+            <a:pPr algn="ctr" indent="0" marL="0">
+              <a:buNone/>
+            </a:pPr>
+            <a:r>
+              <a:rPr lang="en-US" sz="3800" b="1" dirty="0">
+                <a:solidFill>
+                  <a:srgbClr val="1D4E6B"/>
+                </a:solidFill>
+                <a:latin typeface="Cambria" pitchFamily="34" charset="0"/>
+                <a:ea typeface="Cambria" pitchFamily="34" charset="-122"/>
+                <a:cs typeface="Cambria" pitchFamily="34" charset="-120"/>
+              </a:rPr>
+              <a:t>≈ 80 %</a:t>
+            </a:r>
+            <a:endParaRPr lang="en-US" sz="3800" dirty="0"/>
+          </a:p>
+        </p:txBody>
+      </p:sp>
+      <p:sp>
+        <p:nvSpPr>
+          <p:cNvPr id="15" name="Text 13"/>
+          <p:cNvSpPr txBox="1"/>
+          <p:nvPr/>
+        </p:nvSpPr>
+        <p:spPr>
+          <a:xfrm>
+            <a:off x="9253499" y="3154680"/>
+            <a:ext cx="2142668" cy="1051560"/>
+          </a:xfrm>
+          <a:prstGeom prst="rect">
+            <a:avLst/>
+          </a:prstGeom>
+          <a:noFill/>
+          <a:ln/>
+        </p:spPr>
+        <p:txBody>
+          <a:bodyPr wrap="square" lIns="0" tIns="0" rIns="0" bIns="0" rtlCol="0" anchor="t"/>
+          <a:lstStyle/>
+          <a:p>
+            <a:pPr algn="ctr" indent="0" marL="0">
+              <a:lnSpc>
+                <a:spcPct val="118000"/>
+              </a:lnSpc>
+              <a:buNone/>
+            </a:pPr>
+            <a:r>
+              <a:rPr lang="en-US" sz="1250" dirty="0">
+                <a:solidFill>
+                  <a:srgbClr val="2F3E47"/>
+                </a:solidFill>
+                <a:latin typeface="Calibri" pitchFamily="34" charset="0"/>
+                <a:ea typeface="Calibri" pitchFamily="34" charset="-122"/>
+                <a:cs typeface="Calibri" pitchFamily="34" charset="-120"/>
+              </a:rPr>
+              <a:t>of the world's almonds grown in California</a:t>
+            </a:r>
+            <a:endParaRPr lang="en-US" sz="1250" dirty="0"/>
+          </a:p>
+        </p:txBody>
+      </p:sp>
+      <p:sp>
+        <p:nvSpPr>
+          <p:cNvPr id="16" name="Text 14"/>
+          <p:cNvSpPr txBox="1"/>
+          <p:nvPr/>
+        </p:nvSpPr>
+        <p:spPr>
+          <a:xfrm>
+            <a:off x="594360" y="4709160"/>
+            <a:ext cx="11002975" cy="1097280"/>
           </a:xfrm>
           <a:prstGeom prst="rect">
             <a:avLst/>
@@ -11962,12 +12708,12 @@
           <a:p>
             <a:pPr algn="l" indent="0" marL="0">
               <a:lnSpc>
-                <a:spcPct val="125000"/>
+                <a:spcPct val="130000"/>
               </a:lnSpc>
               <a:buNone/>
             </a:pPr>
             <a:r>
-              <a:rPr lang="en-US" sz="1200" dirty="0">
+              <a:rPr lang="en-US" sz="1350" dirty="0">
                 <a:solidFill>
                   <a:srgbClr val="2F3E47"/>
                 </a:solidFill>
@@ -11975,44 +12721,15 @@
                 <a:ea typeface="Calibri" pitchFamily="34" charset="-122"/>
                 <a:cs typeface="Calibri" pitchFamily="34" charset="-120"/>
               </a:rPr>
-              <a:t>Corn and soybeans carry the volume, largely rain-fed across the Midwest.</a:t>
-            </a:r>
-            <a:endParaRPr lang="en-US" sz="1200" dirty="0"/>
-          </a:p>
-          <a:p>
-            <a:pPr algn="l" indent="0" marL="0">
-              <a:lnSpc>
-                <a:spcPct val="125000"/>
-              </a:lnSpc>
-              <a:buNone/>
-            </a:pPr>
-            <a:endParaRPr lang="en-US" sz="1200" dirty="0"/>
-          </a:p>
-          <a:p>
-            <a:pPr algn="l" indent="0" marL="0">
-              <a:lnSpc>
-                <a:spcPct val="125000"/>
-              </a:lnSpc>
-              <a:buNone/>
-            </a:pPr>
-            <a:r>
-              <a:rPr lang="en-US" sz="1200" dirty="0">
-                <a:solidFill>
-                  <a:srgbClr val="2F3E47"/>
-                </a:solidFill>
-                <a:latin typeface="Calibri" pitchFamily="34" charset="0"/>
-                <a:ea typeface="Calibri" pitchFamily="34" charset="-122"/>
-                <a:cs typeface="Calibri" pitchFamily="34" charset="-120"/>
-              </a:rPr>
-              <a:t>Hay and forage are the single largest consumer of irrigation water in the West; alfalfa alone takes a significant share of Colorado River deliveries. Potatoes and specialty crops carry the highest value per acre.</a:t>
-            </a:r>
-            <a:endParaRPr lang="en-US" sz="1200" dirty="0"/>
-          </a:p>
-        </p:txBody>
-      </p:sp>
-      <p:sp>
-        <p:nvSpPr>
-          <p:cNvPr id="8" name="Text 5"/>
+              <a:t>Fruit, nuts and vegetables cover a small share of cropland but a large share of farm value, and most of them are irrigated in the West. California's Sustainable Groundwater Management Act and falling water tables on the High Plains now cap how much water those acres can draw.</a:t>
+            </a:r>
+            <a:endParaRPr lang="en-US" sz="1350" dirty="0"/>
+          </a:p>
+        </p:txBody>
+      </p:sp>
+      <p:sp>
+        <p:nvSpPr>
+          <p:cNvPr id="17" name="Text 15"/>
           <p:cNvSpPr txBox="1"/>
           <p:nvPr/>
         </p:nvSpPr>
@@ -12053,7 +12770,7 @@
       </p:sp>
       <p:sp>
         <p:nvSpPr>
-          <p:cNvPr id="9" name="Text 6"/>
+          <p:cNvPr id="18" name="Text 16"/>
           <p:cNvSpPr txBox="1"/>
           <p:nvPr/>
         </p:nvSpPr>
@@ -12157,7 +12874,7 @@
                 <a:ea typeface="Calibri" pitchFamily="34" charset="-122"/>
                 <a:cs typeface="Calibri" pitchFamily="34" charset="-120"/>
               </a:rPr>
-              <a:t>FIRST SECTOR</a:t>
+              <a:t>THE MAJOR CROPS</a:t>
             </a:r>
             <a:endParaRPr lang="en-US" sz="1150" dirty="0"/>
           </a:p>
@@ -12196,46 +12913,104 @@
                 <a:ea typeface="Cambria" pitchFamily="34" charset="-122"/>
                 <a:cs typeface="Cambria" pitchFamily="34" charset="-120"/>
               </a:rPr>
-              <a:t>California specialty crops: every acre-foot is margin</a:t>
+              <a:t>Five outputs carry the bulk of farm volume</a:t>
             </a:r>
             <a:endParaRPr lang="en-US" sz="3000" dirty="0"/>
           </a:p>
         </p:txBody>
       </p:sp>
-      <p:pic>
-        <p:nvPicPr>
-          <p:cNvPr id="4" name="Image 0" descr="preencoded.png">    </p:cNvPr>
-          <p:cNvPicPr>
-            <a:picLocks noChangeAspect="1"/>
-          </p:cNvPicPr>
-          <p:nvPr/>
-        </p:nvPicPr>
-        <p:blipFill>
-          <a:blip r:embed="rId1"/>
-          <a:stretch>
-            <a:fillRect/>
-          </a:stretch>
-        </p:blipFill>
-        <p:spPr>
-          <a:xfrm>
-            <a:off x="6522415" y="1783080"/>
-            <a:ext cx="5074920" cy="3794760"/>
-          </a:xfrm>
-          <a:prstGeom prst="rect">
-            <a:avLst/>
-          </a:prstGeom>
-        </p:spPr>
-      </p:pic>
-      <p:sp>
-        <p:nvSpPr>
-          <p:cNvPr id="5" name="Text 2"/>
-          <p:cNvSpPr txBox="1"/>
-          <p:nvPr/>
-        </p:nvSpPr>
-        <p:spPr>
-          <a:xfrm>
-            <a:off x="594360" y="1783080"/>
-            <a:ext cx="5379415" cy="4251960"/>
+      <p:graphicFrame>
+        <p:nvGraphicFramePr>
+          <p:cNvPr id="4" name="Chart 0" descr=""/>
+          <p:cNvGraphicFramePr/>
+          <p:nvPr/>
+        </p:nvGraphicFramePr>
+        <p:xfrm>
+          <a:off x="594360" y="1783080"/>
+          <a:ext cx="7360920" cy="3977640"/>
+        </p:xfrm>
+        <a:graphic xmlns:a="http://schemas.openxmlformats.org/drawingml/2006/main">
+          <a:graphicData uri="http://schemas.openxmlformats.org/drawingml/2006/chart">
+            <c:chart xmlns:c="http://schemas.openxmlformats.org/drawingml/2006/chart" r:id="rId1"/>
+          </a:graphicData>
+        </a:graphic>
+      </p:graphicFrame>
+      <p:sp>
+        <p:nvSpPr>
+          <p:cNvPr id="5" name="Shape 2"/>
+          <p:cNvSpPr/>
+          <p:nvPr/>
+        </p:nvSpPr>
+        <p:spPr>
+          <a:xfrm>
+            <a:off x="8275320" y="1783080"/>
+            <a:ext cx="3291840" cy="3977640"/>
+          </a:xfrm>
+          <a:prstGeom prst="roundRect">
+            <a:avLst>
+              <a:gd name="adj" fmla="val 2778"/>
+            </a:avLst>
+          </a:prstGeom>
+          <a:solidFill>
+            <a:srgbClr val="EEF2F5"/>
+          </a:solidFill>
+          <a:ln w="9525">
+            <a:solidFill>
+              <a:srgbClr val="D8E1E7"/>
+            </a:solidFill>
+            <a:prstDash val="solid"/>
+          </a:ln>
+        </p:spPr>
+      </p:sp>
+      <p:sp>
+        <p:nvSpPr>
+          <p:cNvPr id="6" name="Text 3"/>
+          <p:cNvSpPr txBox="1"/>
+          <p:nvPr/>
+        </p:nvSpPr>
+        <p:spPr>
+          <a:xfrm>
+            <a:off x="8503920" y="2011680"/>
+            <a:ext cx="2834640" cy="457200"/>
+          </a:xfrm>
+          <a:prstGeom prst="rect">
+            <a:avLst/>
+          </a:prstGeom>
+          <a:noFill/>
+          <a:ln/>
+        </p:spPr>
+        <p:txBody>
+          <a:bodyPr wrap="square" lIns="0" tIns="0" rIns="0" bIns="0" rtlCol="0" anchor="ctr"/>
+          <a:lstStyle/>
+          <a:p>
+            <a:pPr algn="l" indent="0" marL="0">
+              <a:buNone/>
+            </a:pPr>
+            <a:r>
+              <a:rPr lang="en-US" sz="1300" b="1" dirty="0">
+                <a:solidFill>
+                  <a:srgbClr val="1D4E6B"/>
+                </a:solidFill>
+                <a:latin typeface="Cambria" pitchFamily="34" charset="0"/>
+                <a:ea typeface="Cambria" pitchFamily="34" charset="-122"/>
+                <a:cs typeface="Cambria" pitchFamily="34" charset="-120"/>
+              </a:rPr>
+              <a:t>Reading</a:t>
+            </a:r>
+            <a:endParaRPr lang="en-US" sz="1300" dirty="0"/>
+          </a:p>
+        </p:txBody>
+      </p:sp>
+      <p:sp>
+        <p:nvSpPr>
+          <p:cNvPr id="7" name="Text 4"/>
+          <p:cNvSpPr txBox="1"/>
+          <p:nvPr/>
+        </p:nvSpPr>
+        <p:spPr>
+          <a:xfrm>
+            <a:off x="8503920" y="2560320"/>
+            <a:ext cx="2834640" cy="3017520"/>
           </a:xfrm>
           <a:prstGeom prst="rect">
             <a:avLst/>
@@ -12247,18 +13022,14 @@
           <a:bodyPr wrap="square" lIns="0" tIns="0" rIns="0" bIns="0" rtlCol="0" anchor="t"/>
           <a:lstStyle/>
           <a:p>
-            <a:pPr algn="l" marL="342900" indent="-342900">
+            <a:pPr algn="l" indent="0" marL="0">
               <a:lnSpc>
-                <a:spcPct val="122000"/>
+                <a:spcPct val="125000"/>
               </a:lnSpc>
-              <a:spcAft>
-                <a:spcPts val="1100"/>
-              </a:spcAft>
-              <a:buSzPct val="100000"/>
-              <a:buChar char="•"/>
-            </a:pPr>
-            <a:r>
-              <a:rPr lang="en-US" sz="1400" dirty="0">
+              <a:buNone/>
+            </a:pPr>
+            <a:r>
+              <a:rPr lang="en-US" sz="1200" dirty="0">
                 <a:solidFill>
                   <a:srgbClr val="2F3E47"/>
                 </a:solidFill>
@@ -12266,23 +13037,28 @@
                 <a:ea typeface="Calibri" pitchFamily="34" charset="-122"/>
                 <a:cs typeface="Calibri" pitchFamily="34" charset="-120"/>
               </a:rPr>
-              <a:t>California grows most U.S. almonds, pistachios, table grapes, strawberries and processing tomatoes, all under irrigation.</a:t>
-            </a:r>
-            <a:endParaRPr lang="en-US" sz="1400" dirty="0"/>
-          </a:p>
-          <a:p>
-            <a:pPr algn="l" marL="342900" indent="-342900">
+              <a:t>Corn and soybeans carry the volume, largely rain-fed across the Midwest.</a:t>
+            </a:r>
+            <a:endParaRPr lang="en-US" sz="1200" dirty="0"/>
+          </a:p>
+          <a:p>
+            <a:pPr algn="l" indent="0" marL="0">
               <a:lnSpc>
-                <a:spcPct val="122000"/>
+                <a:spcPct val="125000"/>
               </a:lnSpc>
-              <a:spcAft>
-                <a:spcPts val="1100"/>
-              </a:spcAft>
-              <a:buSzPct val="100000"/>
-              <a:buChar char="•"/>
-            </a:pPr>
-            <a:r>
-              <a:rPr lang="en-US" sz="1400" dirty="0">
+              <a:buNone/>
+            </a:pPr>
+            <a:endParaRPr lang="en-US" sz="1200" dirty="0"/>
+          </a:p>
+          <a:p>
+            <a:pPr algn="l" indent="0" marL="0">
+              <a:lnSpc>
+                <a:spcPct val="125000"/>
+              </a:lnSpc>
+              <a:buNone/>
+            </a:pPr>
+            <a:r>
+              <a:rPr lang="en-US" sz="1200" dirty="0">
                 <a:solidFill>
                   <a:srgbClr val="2F3E47"/>
                 </a:solidFill>
@@ -12290,87 +13066,15 @@
                 <a:ea typeface="Calibri" pitchFamily="34" charset="-122"/>
                 <a:cs typeface="Calibri" pitchFamily="34" charset="-120"/>
               </a:rPr>
-              <a:t>In drought years surface-water allocations have fallen close to zero, pushing growers onto groundwater.</a:t>
-            </a:r>
-            <a:endParaRPr lang="en-US" sz="1400" dirty="0"/>
-          </a:p>
-          <a:p>
-            <a:pPr algn="l" marL="342900" indent="-342900">
-              <a:lnSpc>
-                <a:spcPct val="122000"/>
-              </a:lnSpc>
-              <a:spcAft>
-                <a:spcPts val="1100"/>
-              </a:spcAft>
-              <a:buSzPct val="100000"/>
-              <a:buChar char="•"/>
-            </a:pPr>
-            <a:r>
-              <a:rPr lang="en-US" sz="1400" dirty="0">
-                <a:solidFill>
-                  <a:srgbClr val="2F3E47"/>
-                </a:solidFill>
-                <a:latin typeface="Calibri" pitchFamily="34" charset="0"/>
-                <a:ea typeface="Calibri" pitchFamily="34" charset="-122"/>
-                <a:cs typeface="Calibri" pitchFamily="34" charset="-120"/>
-              </a:rPr>
-              <a:t>SGMA requires groundwater basins to reach sustainable pumping by the early 2040s: less water per acre, or fewer acres.</a:t>
-            </a:r>
-            <a:endParaRPr lang="en-US" sz="1400" dirty="0"/>
-          </a:p>
-          <a:p>
-            <a:pPr algn="l" marL="342900" indent="-342900">
-              <a:lnSpc>
-                <a:spcPct val="122000"/>
-              </a:lnSpc>
-              <a:spcAft>
-                <a:spcPts val="1100"/>
-              </a:spcAft>
-              <a:buSzPct val="100000"/>
-              <a:buChar char="•"/>
-            </a:pPr>
-            <a:r>
-              <a:rPr lang="en-US" sz="1400" dirty="0">
-                <a:solidFill>
-                  <a:srgbClr val="2F3E47"/>
-                </a:solidFill>
-                <a:latin typeface="Calibri" pitchFamily="34" charset="0"/>
-                <a:ea typeface="Calibri" pitchFamily="34" charset="-122"/>
-                <a:cs typeface="Calibri" pitchFamily="34" charset="-120"/>
-              </a:rPr>
-              <a:t>Orchards cannot be rotated out in a dry year; keeping the root zone moist protects a multi-decade investment.</a:t>
-            </a:r>
-            <a:endParaRPr lang="en-US" sz="1400" dirty="0"/>
-          </a:p>
-          <a:p>
-            <a:pPr algn="l" marL="342900" indent="-342900">
-              <a:lnSpc>
-                <a:spcPct val="122000"/>
-              </a:lnSpc>
-              <a:spcAft>
-                <a:spcPts val="1100"/>
-              </a:spcAft>
-              <a:buSzPct val="100000"/>
-              <a:buChar char="•"/>
-            </a:pPr>
-            <a:r>
-              <a:rPr lang="en-US" sz="1400" dirty="0">
-                <a:solidFill>
-                  <a:srgbClr val="2F3E47"/>
-                </a:solidFill>
-                <a:latin typeface="Calibri" pitchFamily="34" charset="0"/>
-                <a:ea typeface="Calibri" pitchFamily="34" charset="-122"/>
-                <a:cs typeface="Calibri" pitchFamily="34" charset="-120"/>
-              </a:rPr>
-              <a:t>A water retainer placed at planting, or when an orchard is renewed, lengthens the interval between irrigations.</a:t>
-            </a:r>
-            <a:endParaRPr lang="en-US" sz="1400" dirty="0"/>
-          </a:p>
-        </p:txBody>
-      </p:sp>
-      <p:sp>
-        <p:nvSpPr>
-          <p:cNvPr id="6" name="Text 3"/>
+              <a:t>Hay and forage are the single largest consumer of irrigation water in the West; alfalfa alone takes a significant share of Colorado River deliveries. Potatoes and specialty crops carry the highest value per acre.</a:t>
+            </a:r>
+            <a:endParaRPr lang="en-US" sz="1200" dirty="0"/>
+          </a:p>
+        </p:txBody>
+      </p:sp>
+      <p:sp>
+        <p:nvSpPr>
+          <p:cNvPr id="8" name="Text 5"/>
           <p:cNvSpPr txBox="1"/>
           <p:nvPr/>
         </p:nvSpPr>
@@ -12411,7 +13115,7 @@
       </p:sp>
       <p:sp>
         <p:nvSpPr>
-          <p:cNvPr id="7" name="Text 4"/>
+          <p:cNvPr id="9" name="Text 6"/>
           <p:cNvSpPr txBox="1"/>
           <p:nvPr/>
         </p:nvSpPr>
@@ -12515,7 +13219,7 @@
                 <a:ea typeface="Calibri" pitchFamily="34" charset="-122"/>
                 <a:cs typeface="Calibri" pitchFamily="34" charset="-120"/>
               </a:rPr>
-              <a:t>SECOND SECTOR</a:t>
+              <a:t>FIRST SECTOR</a:t>
             </a:r>
             <a:endParaRPr lang="en-US" sz="1150" dirty="0"/>
           </a:p>
@@ -12554,7 +13258,7 @@
                 <a:ea typeface="Cambria" pitchFamily="34" charset="-122"/>
                 <a:cs typeface="Cambria" pitchFamily="34" charset="-120"/>
               </a:rPr>
-              <a:t>High Plains corn above a shrinking Ogallala</a:t>
+              <a:t>California specialty crops: every acre-foot is margin</a:t>
             </a:r>
             <a:endParaRPr lang="en-US" sz="3000" dirty="0"/>
           </a:p>
@@ -12576,23 +13280,23 @@
         </p:blipFill>
         <p:spPr>
           <a:xfrm>
+            <a:off x="6522415" y="1783080"/>
+            <a:ext cx="5074920" cy="3794760"/>
+          </a:xfrm>
+          <a:prstGeom prst="rect">
+            <a:avLst/>
+          </a:prstGeom>
+        </p:spPr>
+      </p:pic>
+      <p:sp>
+        <p:nvSpPr>
+          <p:cNvPr id="5" name="Text 2"/>
+          <p:cNvSpPr txBox="1"/>
+          <p:nvPr/>
+        </p:nvSpPr>
+        <p:spPr>
+          <a:xfrm>
             <a:off x="594360" y="1783080"/>
-            <a:ext cx="5074920" cy="3794760"/>
-          </a:xfrm>
-          <a:prstGeom prst="rect">
-            <a:avLst/>
-          </a:prstGeom>
-        </p:spPr>
-      </p:pic>
-      <p:sp>
-        <p:nvSpPr>
-          <p:cNvPr id="5" name="Text 2"/>
-          <p:cNvSpPr txBox="1"/>
-          <p:nvPr/>
-        </p:nvSpPr>
-        <p:spPr>
-          <a:xfrm>
-            <a:off x="6217920" y="1783080"/>
             <a:ext cx="5379415" cy="4251960"/>
           </a:xfrm>
           <a:prstGeom prst="rect">
@@ -12624,7 +13328,7 @@
                 <a:ea typeface="Calibri" pitchFamily="34" charset="-122"/>
                 <a:cs typeface="Calibri" pitchFamily="34" charset="-120"/>
               </a:rPr>
-              <a:t>The Ogallala aquifer underlies parts of eight states and carries much of the irrigated corn, sorghum and cotton of the High Plains.</a:t>
+              <a:t>California grows most U.S. almonds, pistachios, table grapes, strawberries and processing tomatoes, all under irrigation.</a:t>
             </a:r>
             <a:endParaRPr lang="en-US" sz="1400" dirty="0"/>
           </a:p>
@@ -12648,7 +13352,7 @@
                 <a:ea typeface="Calibri" pitchFamily="34" charset="-122"/>
                 <a:cs typeface="Calibri" pitchFamily="34" charset="-120"/>
               </a:rPr>
-              <a:t>In southwest Kansas and the Texas Panhandle, some wells no longer yield enough for full irrigation.</a:t>
+              <a:t>In drought years surface-water allocations have fallen close to zero, pushing growers onto groundwater.</a:t>
             </a:r>
             <a:endParaRPr lang="en-US" sz="1400" dirty="0"/>
           </a:p>
@@ -12672,7 +13376,7 @@
                 <a:ea typeface="Calibri" pitchFamily="34" charset="-122"/>
                 <a:cs typeface="Calibri" pitchFamily="34" charset="-120"/>
               </a:rPr>
-              <a:t>Local districts now set pumping limits, and growers are shifting to fewer pivot acres or limited irrigation.</a:t>
+              <a:t>SGMA requires groundwater basins to reach sustainable pumping by the early 2040s: less water per acre, or fewer acres.</a:t>
             </a:r>
             <a:endParaRPr lang="en-US" sz="1400" dirty="0"/>
           </a:p>
@@ -12696,7 +13400,7 @@
                 <a:ea typeface="Calibri" pitchFamily="34" charset="-122"/>
                 <a:cs typeface="Calibri" pitchFamily="34" charset="-120"/>
               </a:rPr>
-              <a:t>For grain crops we claim no yield gain without a field trial: the case rests on the water saved per acre.</a:t>
+              <a:t>Orchards cannot be rotated out in a dry year; keeping the root zone moist protects a multi-decade investment.</a:t>
             </a:r>
             <a:endParaRPr lang="en-US" sz="1400" dirty="0"/>
           </a:p>
@@ -12720,7 +13424,7 @@
                 <a:ea typeface="Calibri" pitchFamily="34" charset="-122"/>
                 <a:cs typeface="Calibri" pitchFamily="34" charset="-120"/>
               </a:rPr>
-              <a:t>Trials pair a treated pivot sector with an untreated one, measured over a full season with soil-moisture probes.</a:t>
+              <a:t>A water retainer placed at planting, or when an orchard is renewed, lengthens the interval between irrigations.</a:t>
             </a:r>
             <a:endParaRPr lang="en-US" sz="1400" dirty="0"/>
           </a:p>
@@ -12873,7 +13577,7 @@
                 <a:ea typeface="Calibri" pitchFamily="34" charset="-122"/>
                 <a:cs typeface="Calibri" pitchFamily="34" charset="-120"/>
               </a:rPr>
-              <a:t>Yield potential</a:t>
+              <a:t>SECOND SECTOR</a:t>
             </a:r>
             <a:endParaRPr lang="en-US" sz="1150" dirty="0"/>
           </a:p>
@@ -12912,168 +13616,181 @@
                 <a:ea typeface="Cambria" pitchFamily="34" charset="-122"/>
                 <a:cs typeface="Cambria" pitchFamily="34" charset="-120"/>
               </a:rPr>
-              <a:t>Expected yield gain by crop</a:t>
+              <a:t>High Plains corn above a shrinking Ogallala</a:t>
             </a:r>
             <a:endParaRPr lang="en-US" sz="3000" dirty="0"/>
           </a:p>
         </p:txBody>
       </p:sp>
-      <p:graphicFrame>
-        <p:nvGraphicFramePr>
-          <p:cNvPr id="4" name="Chart 0" descr=""/>
-          <p:cNvGraphicFramePr/>
-          <p:nvPr/>
-        </p:nvGraphicFramePr>
-        <p:xfrm>
-          <a:off x="594360" y="1783080"/>
-          <a:ext cx="7360920" cy="3977640"/>
-        </p:xfrm>
-        <a:graphic xmlns:a="http://schemas.openxmlformats.org/drawingml/2006/main">
-          <a:graphicData uri="http://schemas.openxmlformats.org/drawingml/2006/chart">
-            <c:chart xmlns:c="http://schemas.openxmlformats.org/drawingml/2006/chart" r:id="rId1"/>
-          </a:graphicData>
-        </a:graphic>
-      </p:graphicFrame>
-      <p:sp>
-        <p:nvSpPr>
-          <p:cNvPr id="5" name="Shape 2"/>
-          <p:cNvSpPr/>
-          <p:nvPr/>
-        </p:nvSpPr>
-        <p:spPr>
-          <a:xfrm>
-            <a:off x="8275320" y="1783080"/>
-            <a:ext cx="3291840" cy="3977640"/>
-          </a:xfrm>
-          <a:prstGeom prst="roundRect">
-            <a:avLst>
-              <a:gd name="adj" fmla="val 2778"/>
-            </a:avLst>
-          </a:prstGeom>
-          <a:solidFill>
-            <a:srgbClr val="EEF2F5"/>
-          </a:solidFill>
-          <a:ln w="9525">
-            <a:solidFill>
-              <a:srgbClr val="D8E1E7"/>
-            </a:solidFill>
-            <a:prstDash val="solid"/>
-          </a:ln>
-        </p:spPr>
+      <p:pic>
+        <p:nvPicPr>
+          <p:cNvPr id="4" name="Image 0" descr="preencoded.png">    </p:cNvPr>
+          <p:cNvPicPr>
+            <a:picLocks noChangeAspect="1"/>
+          </p:cNvPicPr>
+          <p:nvPr/>
+        </p:nvPicPr>
+        <p:blipFill>
+          <a:blip r:embed="rId1"/>
+          <a:stretch>
+            <a:fillRect/>
+          </a:stretch>
+        </p:blipFill>
+        <p:spPr>
+          <a:xfrm>
+            <a:off x="594360" y="1783080"/>
+            <a:ext cx="5074920" cy="3794760"/>
+          </a:xfrm>
+          <a:prstGeom prst="rect">
+            <a:avLst/>
+          </a:prstGeom>
+        </p:spPr>
+      </p:pic>
+      <p:sp>
+        <p:nvSpPr>
+          <p:cNvPr id="5" name="Text 2"/>
+          <p:cNvSpPr txBox="1"/>
+          <p:nvPr/>
+        </p:nvSpPr>
+        <p:spPr>
+          <a:xfrm>
+            <a:off x="6217920" y="1783080"/>
+            <a:ext cx="5379415" cy="4251960"/>
+          </a:xfrm>
+          <a:prstGeom prst="rect">
+            <a:avLst/>
+          </a:prstGeom>
+          <a:noFill/>
+          <a:ln/>
+        </p:spPr>
+        <p:txBody>
+          <a:bodyPr wrap="square" lIns="0" tIns="0" rIns="0" bIns="0" rtlCol="0" anchor="t"/>
+          <a:lstStyle/>
+          <a:p>
+            <a:pPr algn="l" marL="342900" indent="-342900">
+              <a:lnSpc>
+                <a:spcPct val="122000"/>
+              </a:lnSpc>
+              <a:spcAft>
+                <a:spcPts val="1100"/>
+              </a:spcAft>
+              <a:buSzPct val="100000"/>
+              <a:buChar char="•"/>
+            </a:pPr>
+            <a:r>
+              <a:rPr lang="en-US" sz="1400" dirty="0">
+                <a:solidFill>
+                  <a:srgbClr val="2F3E47"/>
+                </a:solidFill>
+                <a:latin typeface="Calibri" pitchFamily="34" charset="0"/>
+                <a:ea typeface="Calibri" pitchFamily="34" charset="-122"/>
+                <a:cs typeface="Calibri" pitchFamily="34" charset="-120"/>
+              </a:rPr>
+              <a:t>The Ogallala aquifer underlies parts of eight states and carries much of the irrigated corn, sorghum and cotton of the High Plains.</a:t>
+            </a:r>
+            <a:endParaRPr lang="en-US" sz="1400" dirty="0"/>
+          </a:p>
+          <a:p>
+            <a:pPr algn="l" marL="342900" indent="-342900">
+              <a:lnSpc>
+                <a:spcPct val="122000"/>
+              </a:lnSpc>
+              <a:spcAft>
+                <a:spcPts val="1100"/>
+              </a:spcAft>
+              <a:buSzPct val="100000"/>
+              <a:buChar char="•"/>
+            </a:pPr>
+            <a:r>
+              <a:rPr lang="en-US" sz="1400" dirty="0">
+                <a:solidFill>
+                  <a:srgbClr val="2F3E47"/>
+                </a:solidFill>
+                <a:latin typeface="Calibri" pitchFamily="34" charset="0"/>
+                <a:ea typeface="Calibri" pitchFamily="34" charset="-122"/>
+                <a:cs typeface="Calibri" pitchFamily="34" charset="-120"/>
+              </a:rPr>
+              <a:t>In southwest Kansas and the Texas Panhandle, some wells no longer yield enough for full irrigation.</a:t>
+            </a:r>
+            <a:endParaRPr lang="en-US" sz="1400" dirty="0"/>
+          </a:p>
+          <a:p>
+            <a:pPr algn="l" marL="342900" indent="-342900">
+              <a:lnSpc>
+                <a:spcPct val="122000"/>
+              </a:lnSpc>
+              <a:spcAft>
+                <a:spcPts val="1100"/>
+              </a:spcAft>
+              <a:buSzPct val="100000"/>
+              <a:buChar char="•"/>
+            </a:pPr>
+            <a:r>
+              <a:rPr lang="en-US" sz="1400" dirty="0">
+                <a:solidFill>
+                  <a:srgbClr val="2F3E47"/>
+                </a:solidFill>
+                <a:latin typeface="Calibri" pitchFamily="34" charset="0"/>
+                <a:ea typeface="Calibri" pitchFamily="34" charset="-122"/>
+                <a:cs typeface="Calibri" pitchFamily="34" charset="-120"/>
+              </a:rPr>
+              <a:t>Local districts now set pumping limits, and growers are shifting to fewer pivot acres or limited irrigation.</a:t>
+            </a:r>
+            <a:endParaRPr lang="en-US" sz="1400" dirty="0"/>
+          </a:p>
+          <a:p>
+            <a:pPr algn="l" marL="342900" indent="-342900">
+              <a:lnSpc>
+                <a:spcPct val="122000"/>
+              </a:lnSpc>
+              <a:spcAft>
+                <a:spcPts val="1100"/>
+              </a:spcAft>
+              <a:buSzPct val="100000"/>
+              <a:buChar char="•"/>
+            </a:pPr>
+            <a:r>
+              <a:rPr lang="en-US" sz="1400" dirty="0">
+                <a:solidFill>
+                  <a:srgbClr val="2F3E47"/>
+                </a:solidFill>
+                <a:latin typeface="Calibri" pitchFamily="34" charset="0"/>
+                <a:ea typeface="Calibri" pitchFamily="34" charset="-122"/>
+                <a:cs typeface="Calibri" pitchFamily="34" charset="-120"/>
+              </a:rPr>
+              <a:t>For grain crops we claim no yield gain without a field trial: the case rests on the water saved per acre.</a:t>
+            </a:r>
+            <a:endParaRPr lang="en-US" sz="1400" dirty="0"/>
+          </a:p>
+          <a:p>
+            <a:pPr algn="l" marL="342900" indent="-342900">
+              <a:lnSpc>
+                <a:spcPct val="122000"/>
+              </a:lnSpc>
+              <a:spcAft>
+                <a:spcPts val="1100"/>
+              </a:spcAft>
+              <a:buSzPct val="100000"/>
+              <a:buChar char="•"/>
+            </a:pPr>
+            <a:r>
+              <a:rPr lang="en-US" sz="1400" dirty="0">
+                <a:solidFill>
+                  <a:srgbClr val="2F3E47"/>
+                </a:solidFill>
+                <a:latin typeface="Calibri" pitchFamily="34" charset="0"/>
+                <a:ea typeface="Calibri" pitchFamily="34" charset="-122"/>
+                <a:cs typeface="Calibri" pitchFamily="34" charset="-120"/>
+              </a:rPr>
+              <a:t>Trials pair a treated pivot sector with an untreated one, measured over a full season with soil-moisture probes.</a:t>
+            </a:r>
+            <a:endParaRPr lang="en-US" sz="1400" dirty="0"/>
+          </a:p>
+        </p:txBody>
       </p:sp>
       <p:sp>
         <p:nvSpPr>
           <p:cNvPr id="6" name="Text 3"/>
-          <p:cNvSpPr txBox="1"/>
-          <p:nvPr/>
-        </p:nvSpPr>
-        <p:spPr>
-          <a:xfrm>
-            <a:off x="8503920" y="2011680"/>
-            <a:ext cx="2834640" cy="457200"/>
-          </a:xfrm>
-          <a:prstGeom prst="rect">
-            <a:avLst/>
-          </a:prstGeom>
-          <a:noFill/>
-          <a:ln/>
-        </p:spPr>
-        <p:txBody>
-          <a:bodyPr wrap="square" lIns="0" tIns="0" rIns="0" bIns="0" rtlCol="0" anchor="ctr"/>
-          <a:lstStyle/>
-          <a:p>
-            <a:pPr algn="l" indent="0" marL="0">
-              <a:buNone/>
-            </a:pPr>
-            <a:r>
-              <a:rPr lang="en-US" sz="1300" b="1" dirty="0">
-                <a:solidFill>
-                  <a:srgbClr val="1D4E6B"/>
-                </a:solidFill>
-                <a:latin typeface="Cambria" pitchFamily="34" charset="0"/>
-                <a:ea typeface="Cambria" pitchFamily="34" charset="-122"/>
-                <a:cs typeface="Cambria" pitchFamily="34" charset="-120"/>
-              </a:rPr>
-              <a:t>Read with care</a:t>
-            </a:r>
-            <a:endParaRPr lang="en-US" sz="1300" dirty="0"/>
-          </a:p>
-        </p:txBody>
-      </p:sp>
-      <p:sp>
-        <p:nvSpPr>
-          <p:cNvPr id="7" name="Text 4"/>
-          <p:cNvSpPr txBox="1"/>
-          <p:nvPr/>
-        </p:nvSpPr>
-        <p:spPr>
-          <a:xfrm>
-            <a:off x="8503920" y="2560320"/>
-            <a:ext cx="2834640" cy="3017520"/>
-          </a:xfrm>
-          <a:prstGeom prst="rect">
-            <a:avLst/>
-          </a:prstGeom>
-          <a:noFill/>
-          <a:ln/>
-        </p:spPr>
-        <p:txBody>
-          <a:bodyPr wrap="square" lIns="0" tIns="0" rIns="0" bIns="0" rtlCol="0" anchor="t"/>
-          <a:lstStyle/>
-          <a:p>
-            <a:pPr algn="l" indent="0" marL="0">
-              <a:lnSpc>
-                <a:spcPct val="125000"/>
-              </a:lnSpc>
-              <a:buNone/>
-            </a:pPr>
-            <a:r>
-              <a:rPr lang="en-US" sz="1200" dirty="0">
-                <a:solidFill>
-                  <a:srgbClr val="2F3E47"/>
-                </a:solidFill>
-                <a:latin typeface="Calibri" pitchFamily="34" charset="0"/>
-                <a:ea typeface="Calibri" pitchFamily="34" charset="-122"/>
-                <a:cs typeface="Calibri" pitchFamily="34" charset="-120"/>
-              </a:rPr>
-              <a:t>Ranges used by our dose calculator, for a normally managed crop with EVERGREEN® applied at planting.</a:t>
-            </a:r>
-            <a:endParaRPr lang="en-US" sz="1200" dirty="0"/>
-          </a:p>
-          <a:p>
-            <a:pPr algn="l" indent="0" marL="0">
-              <a:lnSpc>
-                <a:spcPct val="125000"/>
-              </a:lnSpc>
-              <a:buNone/>
-            </a:pPr>
-            <a:endParaRPr lang="en-US" sz="1200" dirty="0"/>
-          </a:p>
-          <a:p>
-            <a:pPr algn="l" indent="0" marL="0">
-              <a:lnSpc>
-                <a:spcPct val="125000"/>
-              </a:lnSpc>
-              <a:buNone/>
-            </a:pPr>
-            <a:r>
-              <a:rPr lang="en-US" sz="1200" dirty="0">
-                <a:solidFill>
-                  <a:srgbClr val="2F3E47"/>
-                </a:solidFill>
-                <a:latin typeface="Calibri" pitchFamily="34" charset="0"/>
-                <a:ea typeface="Calibri" pitchFamily="34" charset="-122"/>
-                <a:cs typeface="Calibri" pitchFamily="34" charset="-120"/>
-              </a:rPr>
-              <a:t>Actual results depend on soil, climate and management. For cereals, no gain is claimed without a field trial.</a:t>
-            </a:r>
-            <a:endParaRPr lang="en-US" sz="1200" dirty="0"/>
-          </a:p>
-        </p:txBody>
-      </p:sp>
-      <p:sp>
-        <p:nvSpPr>
-          <p:cNvPr id="8" name="Text 5"/>
           <p:cNvSpPr txBox="1"/>
           <p:nvPr/>
         </p:nvSpPr>
@@ -13114,7 +13831,7 @@
       </p:sp>
       <p:sp>
         <p:nvSpPr>
-          <p:cNvPr id="9" name="Text 6"/>
+          <p:cNvPr id="7" name="Text 4"/>
           <p:cNvSpPr txBox="1"/>
           <p:nvPr/>
         </p:nvSpPr>

--- a/public/documents/countries/usa.pptx
+++ b/public/documents/countries/usa.pptx
@@ -125,7 +125,7 @@
 </p:presentation>
 </file>
 
-<file path=ppt/charts/chart88.xml><?xml version="1.0" encoding="utf-8"?>
+<file path=ppt/charts/chart92.xml><?xml version="1.0" encoding="utf-8"?>
 <c:chartSpace xmlns:c="http://schemas.openxmlformats.org/drawingml/2006/chart" xmlns:a="http://schemas.openxmlformats.org/drawingml/2006/main" xmlns:r="http://schemas.openxmlformats.org/officeDocument/2006/relationships">
   <c:date1904 val="0"/>
   <c:roundedCorners val="1"/>
@@ -384,7 +384,7 @@
 </c:chartSpace>
 </file>
 
-<file path=ppt/charts/chart89.xml><?xml version="1.0" encoding="utf-8"?>
+<file path=ppt/charts/chart93.xml><?xml version="1.0" encoding="utf-8"?>
 <c:chartSpace xmlns:c="http://schemas.openxmlformats.org/drawingml/2006/chart" xmlns:a="http://schemas.openxmlformats.org/drawingml/2006/main" xmlns:r="http://schemas.openxmlformats.org/officeDocument/2006/relationships">
   <c:date1904 val="0"/>
   <c:roundedCorners val="1"/>
@@ -629,7 +629,7 @@
 </c:chartSpace>
 </file>
 
-<file path=ppt/charts/chart90.xml><?xml version="1.0" encoding="utf-8"?>
+<file path=ppt/charts/chart94.xml><?xml version="1.0" encoding="utf-8"?>
 <c:chartSpace xmlns:c="http://schemas.openxmlformats.org/drawingml/2006/chart" xmlns:a="http://schemas.openxmlformats.org/drawingml/2006/main" xmlns:r="http://schemas.openxmlformats.org/officeDocument/2006/relationships">
   <c:date1904 val="0"/>
   <c:roundedCorners val="1"/>
@@ -937,7 +937,7 @@
 </c:chartSpace>
 </file>
 
-<file path=ppt/charts/chart91.xml><?xml version="1.0" encoding="utf-8"?>
+<file path=ppt/charts/chart95.xml><?xml version="1.0" encoding="utf-8"?>
 <c:chartSpace xmlns:c="http://schemas.openxmlformats.org/drawingml/2006/chart" xmlns:a="http://schemas.openxmlformats.org/drawingml/2006/main" xmlns:r="http://schemas.openxmlformats.org/officeDocument/2006/relationships">
   <c:date1904 val="0"/>
   <c:roundedCorners val="1"/>
@@ -1302,7 +1302,7 @@
 </c:chartSpace>
 </file>
 
-<file path=ppt/charts/chart92.xml><?xml version="1.0" encoding="utf-8"?>
+<file path=ppt/charts/chart96.xml><?xml version="1.0" encoding="utf-8"?>
 <c:chartSpace xmlns:c="http://schemas.openxmlformats.org/drawingml/2006/chart" xmlns:a="http://schemas.openxmlformats.org/drawingml/2006/main" xmlns:r="http://schemas.openxmlformats.org/officeDocument/2006/relationships">
   <c:date1904 val="0"/>
   <c:roundedCorners val="1"/>
@@ -4092,7 +4092,7 @@
       </p:sp>
       <p:pic>
         <p:nvPicPr>
-          <p:cNvPr id="5" name="Image 1" descr="/workspace/scratch/50eb4f7d8e13/green-solutions-web/public/images/logo-icon.png">    </p:cNvPr>
+          <p:cNvPr id="5" name="Image 1" descr="/home/claude/green-solutions-web/public/images/logo-icon.png">    </p:cNvPr>
           <p:cNvPicPr>
             <a:picLocks noChangeAspect="1"/>
           </p:cNvPicPr>
@@ -4116,7 +4116,7 @@
       </p:pic>
       <p:pic>
         <p:nvPicPr>
-          <p:cNvPr id="6" name="Image 2" descr="/workspace/scratch/50eb4f7d8e13/green-solutions-web/scripts/dossiers/drapeaux/usa.png">    </p:cNvPr>
+          <p:cNvPr id="6" name="Image 2" descr="/home/claude/green-solutions-web/scripts/dossiers/drapeaux/usa.png">    </p:cNvPr>
           <p:cNvPicPr>
             <a:picLocks noChangeAspect="1"/>
           </p:cNvPicPr>
@@ -10276,7 +10276,7 @@
                 <a:ea typeface="Calibri" pitchFamily="34" charset="-122"/>
                 <a:cs typeface="Calibri" pitchFamily="34" charset="-120"/>
               </a:rPr>
-              <a:t>contact@evergreen-ecosorb.com · Green Solutions Groupe AIM SA, 46, route de la Condémine, 1475 Forel, Switzerland</a:t>
+              <a:t>contact@green-solutions-group.com · Green Solutions Groupe AIM SA, 46, route de la Condémine, 1475 Forel, Switzerland</a:t>
             </a:r>
             <a:endParaRPr lang="en-US" sz="1400" dirty="0"/>
           </a:p>
@@ -10284,7 +10284,7 @@
       </p:sp>
       <p:pic>
         <p:nvPicPr>
-          <p:cNvPr id="6" name="Image 1" descr="/workspace/scratch/50eb4f7d8e13/green-solutions-web/scripts/dossiers/sceau-aim-clair.png">    </p:cNvPr>
+          <p:cNvPr id="6" name="Image 1" descr="/home/claude/green-solutions-web/scripts/dossiers/sceau-aim-clair.png">    </p:cNvPr>
           <p:cNvPicPr>
             <a:picLocks noChangeAspect="1"/>
           </p:cNvPicPr>
